--- a/docs/ativo/material_reuniao_orientador_2026-07-13.pptx
+++ b/docs/ativo/material_reuniao_orientador_2026-07-13.pptx
@@ -21,11 +21,6 @@
     <p:sldId id="269" r:id="rId20"/>
     <p:sldId id="270" r:id="rId21"/>
     <p:sldId id="271" r:id="rId22"/>
-    <p:sldId id="272" r:id="rId23"/>
-    <p:sldId id="273" r:id="rId24"/>
-    <p:sldId id="274" r:id="rId25"/>
-    <p:sldId id="275" r:id="rId26"/>
-    <p:sldId id="276" r:id="rId27"/>
   </p:sldIdLst>
   <p:sldSz cx="12188952" cy="6858000" type="screen4x3"/>
   <p:notesSz cx="6858000" cy="9144000"/>
@@ -3174,14 +3169,14 @@
           <a:lstStyle/>
           <a:p>
             <a:pPr>
-              <a:defRPr sz="3400" b="1">
+              <a:defRPr sz="3800" b="1">
                 <a:solidFill>
                   <a:srgbClr val="1F2A4E"/>
                 </a:solidFill>
               </a:defRPr>
             </a:pPr>
             <a:r>
-              <a:t>Qualificação no Overleaf — pronta para primeira revisão</a:t>
+              <a:t>Acompanhamento Semana</a:t>
             </a:r>
           </a:p>
           <a:p>
@@ -3193,7 +3188,7 @@
               </a:defRPr>
             </a:pPr>
             <a:r>
-              <a:t>Migração LaTeX concluída, decisões éticas e ajuste de cronograma</a:t>
+              <a:t>Escrita LaTeX em andamento, decisões éticas e ajuste de cronograma</a:t>
             </a:r>
           </a:p>
           <a:p>
@@ -3329,7 +3324,7 @@
               </a:defRPr>
             </a:pPr>
             <a:r>
-              <a:t>Pipeline proposto — seis etapas encadeadas</a:t>
+              <a:t>Quatro configurações do estudo comparativo (Etapa 3)</a:t>
             </a:r>
           </a:p>
         </p:txBody>
@@ -3387,7 +3382,7 @@
         </p:nvGraphicFramePr>
         <p:xfrm>
           <a:off x="457200" y="1371600"/>
-          <a:ext cx="11430000" cy="4754880"/>
+          <a:ext cx="12161520" cy="4754880"/>
         </p:xfrm>
         <a:graphic>
           <a:graphicData uri="http://schemas.openxmlformats.org/drawingml/2006/table">
@@ -3396,11 +3391,12 @@
                 <a:tableStyleId>{5C22544A-7EE6-4342-B048-85BDC9FD1C3A}</a:tableStyleId>
               </a:tblPr>
               <a:tblGrid>
-                <a:gridCol w="2560320"/>
-                <a:gridCol w="5029200"/>
-                <a:gridCol w="3840480"/>
+                <a:gridCol w="914400"/>
+                <a:gridCol w="3474720"/>
+                <a:gridCol w="3200400"/>
+                <a:gridCol w="4572000"/>
               </a:tblGrid>
-              <a:tr h="679268">
+              <a:tr h="950976">
                 <a:tc>
                   <a:txBody>
                     <a:bodyPr/>
@@ -3412,7 +3408,7 @@
                             <a:srgbClr val="FFFFFF"/>
                           </a:solidFill>
                         </a:rPr>
-                        <a:t>Etapa</a:t>
+                        <a:t>Config</a:t>
                       </a:r>
                     </a:p>
                   </a:txBody>
@@ -3433,7 +3429,7 @@
                             <a:srgbClr val="FFFFFF"/>
                           </a:solidFill>
                         </a:rPr>
-                        <a:t>O que faz</a:t>
+                        <a:t>Backbone + conditioning</a:t>
                       </a:r>
                     </a:p>
                   </a:txBody>
@@ -3454,7 +3450,7 @@
                             <a:srgbClr val="FFFFFF"/>
                           </a:solidFill>
                         </a:rPr>
-                        <a:t>Entrega / contribuição</a:t>
+                        <a:t>Sinal</a:t>
                       </a:r>
                     </a:p>
                   </a:txBody>
@@ -3464,126 +3460,111 @@
                     </a:solidFill>
                   </a:tcPr>
                 </a:tc>
+                <a:tc>
+                  <a:txBody>
+                    <a:bodyPr/>
+                    <a:lstStyle/>
+                    <a:p>
+                      <a:r>
+                        <a:rPr sz="1300" b="1">
+                          <a:solidFill>
+                            <a:srgbClr val="FFFFFF"/>
+                          </a:solidFill>
+                        </a:rPr>
+                        <a:t>Papel no estudo</a:t>
+                      </a:r>
+                    </a:p>
+                  </a:txBody>
+                  <a:tcPr>
+                    <a:solidFill>
+                      <a:srgbClr val="1F2A4E"/>
+                    </a:solidFill>
+                  </a:tcPr>
+                </a:tc>
               </a:tr>
-              <a:tr h="679268">
-                <a:tc>
-                  <a:txBody>
-                    <a:bodyPr/>
-                    <a:lstStyle/>
-                    <a:p>
-                      <a:r>
-                        <a:rPr sz="1100">
-                          <a:solidFill>
-                            <a:srgbClr val="3D424E"/>
-                          </a:solidFill>
-                        </a:rPr>
-                        <a:t>1. Classificador MST</a:t>
-                      </a:r>
-                    </a:p>
-                  </a:txBody>
-                  <a:tcPr/>
-                </a:tc>
-                <a:tc>
-                  <a:txBody>
-                    <a:bodyPr/>
-                    <a:lstStyle/>
-                    <a:p>
-                      <a:r>
-                        <a:rPr sz="1100">
-                          <a:solidFill>
-                            <a:srgbClr val="3D424E"/>
-                          </a:solidFill>
-                        </a:rPr>
-                        <a:t>SkinToneNet pré-treinado + validação interna em subset FairFace estratificado</a:t>
-                      </a:r>
-                    </a:p>
-                  </a:txBody>
-                  <a:tcPr/>
-                </a:tc>
-                <a:tc>
-                  <a:txBody>
-                    <a:bodyPr/>
-                    <a:lstStyle/>
-                    <a:p>
-                      <a:r>
-                        <a:rPr sz="1100">
-                          <a:solidFill>
-                            <a:srgbClr val="3D424E"/>
-                          </a:solidFill>
-                        </a:rPr>
-                        <a:t>Insumo do pipeline (não é contribuição)</a:t>
+              <a:tr h="950976">
+                <a:tc>
+                  <a:txBody>
+                    <a:bodyPr/>
+                    <a:lstStyle/>
+                    <a:p>
+                      <a:r>
+                        <a:rPr sz="1100">
+                          <a:solidFill>
+                            <a:srgbClr val="3D424E"/>
+                          </a:solidFill>
+                        </a:rPr>
+                        <a:t>A</a:t>
+                      </a:r>
+                    </a:p>
+                  </a:txBody>
+                  <a:tcPr/>
+                </a:tc>
+                <a:tc>
+                  <a:txBody>
+                    <a:bodyPr/>
+                    <a:lstStyle/>
+                    <a:p>
+                      <a:r>
+                        <a:rPr sz="1100">
+                          <a:solidFill>
+                            <a:srgbClr val="3D424E"/>
+                          </a:solidFill>
+                        </a:rPr>
+                        <a:t>ConvNeXt-T sem conditioning</a:t>
+                      </a:r>
+                    </a:p>
+                  </a:txBody>
+                  <a:tcPr/>
+                </a:tc>
+                <a:tc>
+                  <a:txBody>
+                    <a:bodyPr/>
+                    <a:lstStyle/>
+                    <a:p>
+                      <a:r>
+                        <a:rPr sz="1100">
+                          <a:solidFill>
+                            <a:srgbClr val="3D424E"/>
+                          </a:solidFill>
+                        </a:rPr>
+                        <a:t>—</a:t>
+                      </a:r>
+                    </a:p>
+                  </a:txBody>
+                  <a:tcPr/>
+                </a:tc>
+                <a:tc>
+                  <a:txBody>
+                    <a:bodyPr/>
+                    <a:lstStyle/>
+                    <a:p>
+                      <a:r>
+                        <a:rPr sz="1100">
+                          <a:solidFill>
+                            <a:srgbClr val="3D424E"/>
+                          </a:solidFill>
+                        </a:rPr>
+                        <a:t>Baseline de controle</a:t>
                       </a:r>
                     </a:p>
                   </a:txBody>
                   <a:tcPr/>
                 </a:tc>
               </a:tr>
-              <a:tr h="679268">
-                <a:tc>
-                  <a:txBody>
-                    <a:bodyPr/>
-                    <a:lstStyle/>
-                    <a:p>
-                      <a:r>
-                        <a:rPr sz="1100">
-                          <a:solidFill>
-                            <a:srgbClr val="3D424E"/>
-                          </a:solidFill>
-                        </a:rPr>
-                        <a:t>2. Auditoria FairFace</a:t>
-                      </a:r>
-                    </a:p>
-                  </a:txBody>
-                  <a:tcPr/>
-                </a:tc>
-                <a:tc>
-                  <a:txBody>
-                    <a:bodyPr/>
-                    <a:lstStyle/>
-                    <a:p>
-                      <a:r>
-                        <a:rPr sz="1100">
-                          <a:solidFill>
-                            <a:srgbClr val="3D424E"/>
-                          </a:solidFill>
-                        </a:rPr>
-                        <a:t>Aplicar SkinToneNet sobre todo FairFace validation set</a:t>
-                      </a:r>
-                    </a:p>
-                  </a:txBody>
-                  <a:tcPr/>
-                </a:tc>
-                <a:tc>
-                  <a:txBody>
-                    <a:bodyPr/>
-                    <a:lstStyle/>
-                    <a:p>
-                      <a:r>
-                        <a:rPr sz="1100">
-                          <a:solidFill>
-                            <a:srgbClr val="3D424E"/>
-                          </a:solidFill>
-                        </a:rPr>
-                        <a:t>Matriz pública MST × race classes — Contribuição C2</a:t>
-                      </a:r>
-                    </a:p>
-                  </a:txBody>
-                  <a:tcPr/>
-                </a:tc>
-              </a:tr>
-              <a:tr h="679268">
-                <a:tc>
-                  <a:txBody>
-                    <a:bodyPr/>
-                    <a:lstStyle/>
-                    <a:p>
-                      <a:r>
-                        <a:rPr sz="1100">
-                          <a:solidFill>
-                            <a:srgbClr val="3D424E"/>
-                          </a:solidFill>
-                        </a:rPr>
-                        <a:t>3. Race classifier com conditioning</a:t>
+              <a:tr h="950976">
+                <a:tc>
+                  <a:txBody>
+                    <a:bodyPr/>
+                    <a:lstStyle/>
+                    <a:p>
+                      <a:r>
+                        <a:rPr sz="1100">
+                          <a:solidFill>
+                            <a:srgbClr val="3D424E"/>
+                          </a:solidFill>
+                        </a:rPr>
+                        <a:t>B</a:t>
                       </a:r>
                     </a:p>
                   </a:txBody>
@@ -3604,7 +3585,7 @@
                             <a:srgbClr val="3D424E"/>
                           </a:solidFill>
                         </a:rPr>
-                        <a:t>ConvNeXt-T fine-tuned em FairFace, camadas FiLM por estágio recebendo vetor MST</a:t>
+                        <a:t>ConvNeXt-T + FiLM linear</a:t>
                       </a:r>
                     </a:p>
                   </a:txBody>
@@ -3625,7 +3606,7 @@
                             <a:srgbClr val="3D424E"/>
                           </a:solidFill>
                         </a:rPr>
-                        <a:t>Configurações A/B/C/D — Contribuição C3</a:t>
+                        <a:t>MST 10-dim</a:t>
                       </a:r>
                     </a:p>
                   </a:txBody>
@@ -3635,126 +3616,18 @@
                     </a:solidFill>
                   </a:tcPr>
                 </a:tc>
-              </a:tr>
-              <a:tr h="679268">
-                <a:tc>
-                  <a:txBody>
-                    <a:bodyPr/>
-                    <a:lstStyle/>
-                    <a:p>
-                      <a:r>
-                        <a:rPr sz="1100">
-                          <a:solidFill>
-                            <a:srgbClr val="3D424E"/>
-                          </a:solidFill>
-                        </a:rPr>
-                        <a:t>4. Comparação contra baselines</a:t>
-                      </a:r>
-                    </a:p>
-                  </a:txBody>
-                  <a:tcPr/>
-                </a:tc>
-                <a:tc>
-                  <a:txBody>
-                    <a:bodyPr/>
-                    <a:lstStyle/>
-                    <a:p>
-                      <a:r>
-                        <a:rPr sz="1100">
-                          <a:solidFill>
-                            <a:srgbClr val="3D424E"/>
-                          </a:solidFill>
-                        </a:rPr>
-                        <a:t>6 baselines: ResNet-34, ConvNeXt-T puro, FSCL+, Group DRO, FineFACE, Adversarial</a:t>
-                      </a:r>
-                    </a:p>
-                  </a:txBody>
-                  <a:tcPr/>
-                </a:tc>
-                <a:tc>
-                  <a:txBody>
-                    <a:bodyPr/>
-                    <a:lstStyle/>
-                    <a:p>
-                      <a:r>
-                        <a:rPr sz="1100">
-                          <a:solidFill>
-                            <a:srgbClr val="3D424E"/>
-                          </a:solidFill>
-                        </a:rPr>
-                        <a:t>Triangulação DR + worst-class F1 + EO_h — Contribuição C4</a:t>
-                      </a:r>
-                    </a:p>
-                  </a:txBody>
-                  <a:tcPr/>
-                </a:tc>
-              </a:tr>
-              <a:tr h="679268">
-                <a:tc>
-                  <a:txBody>
-                    <a:bodyPr/>
-                    <a:lstStyle/>
-                    <a:p>
-                      <a:r>
-                        <a:rPr sz="1100">
-                          <a:solidFill>
-                            <a:srgbClr val="3D424E"/>
-                          </a:solidFill>
-                        </a:rPr>
-                        <a:t>5. Fair transferência</a:t>
-                      </a:r>
-                    </a:p>
-                  </a:txBody>
-                  <a:tcPr/>
-                </a:tc>
-                <a:tc>
-                  <a:txBody>
-                    <a:bodyPr/>
-                    <a:lstStyle/>
-                    <a:p>
-                      <a:r>
-                        <a:rPr sz="1100">
-                          <a:solidFill>
-                            <a:srgbClr val="3D424E"/>
-                          </a:solidFill>
-                        </a:rPr>
-                        <a:t>Aplicar backbone fair em face recognition downstream (RFW ou BFW)</a:t>
-                      </a:r>
-                    </a:p>
-                  </a:txBody>
-                  <a:tcPr/>
-                </a:tc>
-                <a:tc>
-                  <a:txBody>
-                    <a:bodyPr/>
-                    <a:lstStyle/>
-                    <a:p>
-                      <a:r>
-                        <a:rPr sz="1100">
-                          <a:solidFill>
-                            <a:srgbClr val="3D424E"/>
-                          </a:solidFill>
-                        </a:rPr>
-                        <a:t>Demonstração de fair transfer — Contribuição C5</a:t>
-                      </a:r>
-                    </a:p>
-                  </a:txBody>
-                  <a:tcPr/>
-                </a:tc>
-              </a:tr>
-              <a:tr h="679272">
-                <a:tc>
-                  <a:txBody>
-                    <a:bodyPr/>
-                    <a:lstStyle/>
-                    <a:p>
-                      <a:r>
-                        <a:rPr sz="1100">
-                          <a:solidFill>
-                            <a:srgbClr val="3D424E"/>
-                          </a:solidFill>
-                        </a:rPr>
-                        <a:t>6. Síntese decompositiva</a:t>
+                <a:tc>
+                  <a:txBody>
+                    <a:bodyPr/>
+                    <a:lstStyle/>
+                    <a:p>
+                      <a:r>
+                        <a:rPr sz="1100">
+                          <a:solidFill>
+                            <a:srgbClr val="3D424E"/>
+                          </a:solidFill>
+                        </a:rPr>
+                        <a:t>Proposta principal — hipótese central</a:t>
                       </a:r>
                     </a:p>
                   </a:txBody>
@@ -3764,47 +3637,145 @@
                     </a:solidFill>
                   </a:tcPr>
                 </a:tc>
-                <a:tc>
-                  <a:txBody>
-                    <a:bodyPr/>
-                    <a:lstStyle/>
-                    <a:p>
-                      <a:r>
-                        <a:rPr sz="1100">
-                          <a:solidFill>
-                            <a:srgbClr val="3D424E"/>
-                          </a:solidFill>
-                        </a:rPr>
-                        <a:t>Combinar C2 + C5 para separar componente fenotípico do algorítmico do erro Latinx</a:t>
-                      </a:r>
-                    </a:p>
-                  </a:txBody>
-                  <a:tcPr>
-                    <a:solidFill>
-                      <a:srgbClr val="E8EAED"/>
-                    </a:solidFill>
-                  </a:tcPr>
-                </a:tc>
-                <a:tc>
-                  <a:txBody>
-                    <a:bodyPr/>
-                    <a:lstStyle/>
-                    <a:p>
-                      <a:r>
-                        <a:rPr sz="1100">
-                          <a:solidFill>
-                            <a:srgbClr val="3D424E"/>
-                          </a:solidFill>
-                        </a:rPr>
-                        <a:t>Decomposição pixel info × skin tone — Contribuição C6/OE-6</a:t>
-                      </a:r>
-                    </a:p>
-                  </a:txBody>
-                  <a:tcPr>
-                    <a:solidFill>
-                      <a:srgbClr val="E8EAED"/>
-                    </a:solidFill>
-                  </a:tcPr>
+              </a:tr>
+              <a:tr h="950976">
+                <a:tc>
+                  <a:txBody>
+                    <a:bodyPr/>
+                    <a:lstStyle/>
+                    <a:p>
+                      <a:r>
+                        <a:rPr sz="1100">
+                          <a:solidFill>
+                            <a:srgbClr val="3D424E"/>
+                          </a:solidFill>
+                        </a:rPr>
+                        <a:t>C</a:t>
+                      </a:r>
+                    </a:p>
+                  </a:txBody>
+                  <a:tcPr/>
+                </a:tc>
+                <a:tc>
+                  <a:txBody>
+                    <a:bodyPr/>
+                    <a:lstStyle/>
+                    <a:p>
+                      <a:r>
+                        <a:rPr sz="1100">
+                          <a:solidFill>
+                            <a:srgbClr val="3D424E"/>
+                          </a:solidFill>
+                        </a:rPr>
+                        <a:t>ConvNeXt-T + Gated FiLM</a:t>
+                      </a:r>
+                    </a:p>
+                  </a:txBody>
+                  <a:tcPr/>
+                </a:tc>
+                <a:tc>
+                  <a:txBody>
+                    <a:bodyPr/>
+                    <a:lstStyle/>
+                    <a:p>
+                      <a:r>
+                        <a:rPr sz="1100">
+                          <a:solidFill>
+                            <a:srgbClr val="3D424E"/>
+                          </a:solidFill>
+                        </a:rPr>
+                        <a:t>MST 10-dim (não-linear)</a:t>
+                      </a:r>
+                    </a:p>
+                  </a:txBody>
+                  <a:tcPr/>
+                </a:tc>
+                <a:tc>
+                  <a:txBody>
+                    <a:bodyPr/>
+                    <a:lstStyle/>
+                    <a:p>
+                      <a:r>
+                        <a:rPr sz="1100">
+                          <a:solidFill>
+                            <a:srgbClr val="3D424E"/>
+                          </a:solidFill>
+                        </a:rPr>
+                        <a:t>Ablação: linear vs não-linear importa?</a:t>
+                      </a:r>
+                    </a:p>
+                  </a:txBody>
+                  <a:tcPr/>
+                </a:tc>
+              </a:tr>
+              <a:tr h="950976">
+                <a:tc>
+                  <a:txBody>
+                    <a:bodyPr/>
+                    <a:lstStyle/>
+                    <a:p>
+                      <a:r>
+                        <a:rPr sz="1100">
+                          <a:solidFill>
+                            <a:srgbClr val="3D424E"/>
+                          </a:solidFill>
+                        </a:rPr>
+                        <a:t>D</a:t>
+                      </a:r>
+                    </a:p>
+                  </a:txBody>
+                  <a:tcPr/>
+                </a:tc>
+                <a:tc>
+                  <a:txBody>
+                    <a:bodyPr/>
+                    <a:lstStyle/>
+                    <a:p>
+                      <a:r>
+                        <a:rPr sz="1100">
+                          <a:solidFill>
+                            <a:srgbClr val="3D424E"/>
+                          </a:solidFill>
+                        </a:rPr>
+                        <a:t>ConvNeXt-T + FiLM</a:t>
+                      </a:r>
+                    </a:p>
+                  </a:txBody>
+                  <a:tcPr/>
+                </a:tc>
+                <a:tc>
+                  <a:txBody>
+                    <a:bodyPr/>
+                    <a:lstStyle/>
+                    <a:p>
+                      <a:r>
+                        <a:rPr sz="1100">
+                          <a:solidFill>
+                            <a:srgbClr val="3D424E"/>
+                          </a:solidFill>
+                        </a:rPr>
+                        <a:t>Embedding CLIP-text 512-dim</a:t>
+                      </a:r>
+                    </a:p>
+                  </a:txBody>
+                  <a:tcPr/>
+                </a:tc>
+                <a:tc>
+                  <a:txBody>
+                    <a:bodyPr/>
+                    <a:lstStyle/>
+                    <a:p>
+                      <a:r>
+                        <a:rPr sz="1100">
+                          <a:solidFill>
+                            <a:srgbClr val="3D424E"/>
+                          </a:solidFill>
+                        </a:rPr>
+                        <a:t>Recomendação da reunião 15/jun — CLIP como alternativa moderna</a:t>
+                      </a:r>
+                    </a:p>
+                  </a:txBody>
+                  <a:tcPr/>
                 </a:tc>
               </a:tr>
             </a:tbl>
@@ -3841,7 +3812,7 @@
               </a:defRPr>
             </a:pPr>
             <a:r>
-              <a:t>Etapa 3 é onde o mecanismo FiLM entra. Etapa 6 é o diagnóstico central da tese.</a:t>
+              <a:t>B é a proposta central. C isola a não-linearidade. D compara com sinal semântico rico via CLIP.</a:t>
             </a:r>
           </a:p>
         </p:txBody>
@@ -3894,7 +3865,7 @@
               </a:defRPr>
             </a:pPr>
             <a:r>
-              <a:t>Quatro configurações do estudo comparativo (Etapa 3)</a:t>
+              <a:t>O achado que ancora a tese (Rodada 8, junho)</a:t>
             </a:r>
           </a:p>
         </p:txBody>
@@ -3942,416 +3913,205 @@
           </a:p>
         </p:txBody>
       </p:sp>
-      <p:graphicFrame>
-        <p:nvGraphicFramePr>
-          <p:cNvPr id="4" name="Table 3"/>
-          <p:cNvGraphicFramePr>
-            <a:graphicFrameLocks noGrp="1"/>
-          </p:cNvGraphicFramePr>
+      <p:sp>
+        <p:nvSpPr>
+          <p:cNvPr id="4" name="TextBox 3"/>
+          <p:cNvSpPr txBox="1"/>
           <p:nvPr/>
-        </p:nvGraphicFramePr>
-        <p:xfrm>
-          <a:off x="457200" y="1371600"/>
-          <a:ext cx="12161520" cy="4754880"/>
-        </p:xfrm>
-        <a:graphic>
-          <a:graphicData uri="http://schemas.openxmlformats.org/drawingml/2006/table">
-            <a:tbl>
-              <a:tblPr firstRow="1" bandRow="1">
-                <a:tableStyleId>{5C22544A-7EE6-4342-B048-85BDC9FD1C3A}</a:tableStyleId>
-              </a:tblPr>
-              <a:tblGrid>
-                <a:gridCol w="914400"/>
-                <a:gridCol w="3474720"/>
-                <a:gridCol w="3200400"/>
-                <a:gridCol w="4572000"/>
-              </a:tblGrid>
-              <a:tr h="950976">
-                <a:tc>
-                  <a:txBody>
-                    <a:bodyPr/>
-                    <a:lstStyle/>
-                    <a:p>
-                      <a:r>
-                        <a:rPr sz="1300" b="1">
-                          <a:solidFill>
-                            <a:srgbClr val="FFFFFF"/>
-                          </a:solidFill>
-                        </a:rPr>
-                        <a:t>Config</a:t>
-                      </a:r>
-                    </a:p>
-                  </a:txBody>
-                  <a:tcPr>
-                    <a:solidFill>
-                      <a:srgbClr val="1F2A4E"/>
-                    </a:solidFill>
-                  </a:tcPr>
-                </a:tc>
-                <a:tc>
-                  <a:txBody>
-                    <a:bodyPr/>
-                    <a:lstStyle/>
-                    <a:p>
-                      <a:r>
-                        <a:rPr sz="1300" b="1">
-                          <a:solidFill>
-                            <a:srgbClr val="FFFFFF"/>
-                          </a:solidFill>
-                        </a:rPr>
-                        <a:t>Backbone + conditioning</a:t>
-                      </a:r>
-                    </a:p>
-                  </a:txBody>
-                  <a:tcPr>
-                    <a:solidFill>
-                      <a:srgbClr val="1F2A4E"/>
-                    </a:solidFill>
-                  </a:tcPr>
-                </a:tc>
-                <a:tc>
-                  <a:txBody>
-                    <a:bodyPr/>
-                    <a:lstStyle/>
-                    <a:p>
-                      <a:r>
-                        <a:rPr sz="1300" b="1">
-                          <a:solidFill>
-                            <a:srgbClr val="FFFFFF"/>
-                          </a:solidFill>
-                        </a:rPr>
-                        <a:t>Sinal</a:t>
-                      </a:r>
-                    </a:p>
-                  </a:txBody>
-                  <a:tcPr>
-                    <a:solidFill>
-                      <a:srgbClr val="1F2A4E"/>
-                    </a:solidFill>
-                  </a:tcPr>
-                </a:tc>
-                <a:tc>
-                  <a:txBody>
-                    <a:bodyPr/>
-                    <a:lstStyle/>
-                    <a:p>
-                      <a:r>
-                        <a:rPr sz="1300" b="1">
-                          <a:solidFill>
-                            <a:srgbClr val="FFFFFF"/>
-                          </a:solidFill>
-                        </a:rPr>
-                        <a:t>Papel no estudo</a:t>
-                      </a:r>
-                    </a:p>
-                  </a:txBody>
-                  <a:tcPr>
-                    <a:solidFill>
-                      <a:srgbClr val="1F2A4E"/>
-                    </a:solidFill>
-                  </a:tcPr>
-                </a:tc>
-              </a:tr>
-              <a:tr h="950976">
-                <a:tc>
-                  <a:txBody>
-                    <a:bodyPr/>
-                    <a:lstStyle/>
-                    <a:p>
-                      <a:r>
-                        <a:rPr sz="1100">
-                          <a:solidFill>
-                            <a:srgbClr val="3D424E"/>
-                          </a:solidFill>
-                        </a:rPr>
-                        <a:t>A</a:t>
-                      </a:r>
-                    </a:p>
-                  </a:txBody>
-                  <a:tcPr/>
-                </a:tc>
-                <a:tc>
-                  <a:txBody>
-                    <a:bodyPr/>
-                    <a:lstStyle/>
-                    <a:p>
-                      <a:r>
-                        <a:rPr sz="1100">
-                          <a:solidFill>
-                            <a:srgbClr val="3D424E"/>
-                          </a:solidFill>
-                        </a:rPr>
-                        <a:t>ConvNeXt-T sem conditioning</a:t>
-                      </a:r>
-                    </a:p>
-                  </a:txBody>
-                  <a:tcPr/>
-                </a:tc>
-                <a:tc>
-                  <a:txBody>
-                    <a:bodyPr/>
-                    <a:lstStyle/>
-                    <a:p>
-                      <a:r>
-                        <a:rPr sz="1100">
-                          <a:solidFill>
-                            <a:srgbClr val="3D424E"/>
-                          </a:solidFill>
-                        </a:rPr>
-                        <a:t>—</a:t>
-                      </a:r>
-                    </a:p>
-                  </a:txBody>
-                  <a:tcPr/>
-                </a:tc>
-                <a:tc>
-                  <a:txBody>
-                    <a:bodyPr/>
-                    <a:lstStyle/>
-                    <a:p>
-                      <a:r>
-                        <a:rPr sz="1100">
-                          <a:solidFill>
-                            <a:srgbClr val="3D424E"/>
-                          </a:solidFill>
-                        </a:rPr>
-                        <a:t>Baseline de controle</a:t>
-                      </a:r>
-                    </a:p>
-                  </a:txBody>
-                  <a:tcPr/>
-                </a:tc>
-              </a:tr>
-              <a:tr h="950976">
-                <a:tc>
-                  <a:txBody>
-                    <a:bodyPr/>
-                    <a:lstStyle/>
-                    <a:p>
-                      <a:r>
-                        <a:rPr sz="1100">
-                          <a:solidFill>
-                            <a:srgbClr val="3D424E"/>
-                          </a:solidFill>
-                        </a:rPr>
-                        <a:t>B</a:t>
-                      </a:r>
-                    </a:p>
-                  </a:txBody>
-                  <a:tcPr>
-                    <a:solidFill>
-                      <a:srgbClr val="E8EAED"/>
-                    </a:solidFill>
-                  </a:tcPr>
-                </a:tc>
-                <a:tc>
-                  <a:txBody>
-                    <a:bodyPr/>
-                    <a:lstStyle/>
-                    <a:p>
-                      <a:r>
-                        <a:rPr sz="1100">
-                          <a:solidFill>
-                            <a:srgbClr val="3D424E"/>
-                          </a:solidFill>
-                        </a:rPr>
-                        <a:t>ConvNeXt-T + FiLM linear</a:t>
-                      </a:r>
-                    </a:p>
-                  </a:txBody>
-                  <a:tcPr>
-                    <a:solidFill>
-                      <a:srgbClr val="E8EAED"/>
-                    </a:solidFill>
-                  </a:tcPr>
-                </a:tc>
-                <a:tc>
-                  <a:txBody>
-                    <a:bodyPr/>
-                    <a:lstStyle/>
-                    <a:p>
-                      <a:r>
-                        <a:rPr sz="1100">
-                          <a:solidFill>
-                            <a:srgbClr val="3D424E"/>
-                          </a:solidFill>
-                        </a:rPr>
-                        <a:t>MST 10-dim</a:t>
-                      </a:r>
-                    </a:p>
-                  </a:txBody>
-                  <a:tcPr>
-                    <a:solidFill>
-                      <a:srgbClr val="E8EAED"/>
-                    </a:solidFill>
-                  </a:tcPr>
-                </a:tc>
-                <a:tc>
-                  <a:txBody>
-                    <a:bodyPr/>
-                    <a:lstStyle/>
-                    <a:p>
-                      <a:r>
-                        <a:rPr sz="1100">
-                          <a:solidFill>
-                            <a:srgbClr val="3D424E"/>
-                          </a:solidFill>
-                        </a:rPr>
-                        <a:t>Proposta principal — hipótese central</a:t>
-                      </a:r>
-                    </a:p>
-                  </a:txBody>
-                  <a:tcPr>
-                    <a:solidFill>
-                      <a:srgbClr val="E8EAED"/>
-                    </a:solidFill>
-                  </a:tcPr>
-                </a:tc>
-              </a:tr>
-              <a:tr h="950976">
-                <a:tc>
-                  <a:txBody>
-                    <a:bodyPr/>
-                    <a:lstStyle/>
-                    <a:p>
-                      <a:r>
-                        <a:rPr sz="1100">
-                          <a:solidFill>
-                            <a:srgbClr val="3D424E"/>
-                          </a:solidFill>
-                        </a:rPr>
-                        <a:t>C</a:t>
-                      </a:r>
-                    </a:p>
-                  </a:txBody>
-                  <a:tcPr/>
-                </a:tc>
-                <a:tc>
-                  <a:txBody>
-                    <a:bodyPr/>
-                    <a:lstStyle/>
-                    <a:p>
-                      <a:r>
-                        <a:rPr sz="1100">
-                          <a:solidFill>
-                            <a:srgbClr val="3D424E"/>
-                          </a:solidFill>
-                        </a:rPr>
-                        <a:t>ConvNeXt-T + Gated FiLM</a:t>
-                      </a:r>
-                    </a:p>
-                  </a:txBody>
-                  <a:tcPr/>
-                </a:tc>
-                <a:tc>
-                  <a:txBody>
-                    <a:bodyPr/>
-                    <a:lstStyle/>
-                    <a:p>
-                      <a:r>
-                        <a:rPr sz="1100">
-                          <a:solidFill>
-                            <a:srgbClr val="3D424E"/>
-                          </a:solidFill>
-                        </a:rPr>
-                        <a:t>MST 10-dim (não-linear)</a:t>
-                      </a:r>
-                    </a:p>
-                  </a:txBody>
-                  <a:tcPr/>
-                </a:tc>
-                <a:tc>
-                  <a:txBody>
-                    <a:bodyPr/>
-                    <a:lstStyle/>
-                    <a:p>
-                      <a:r>
-                        <a:rPr sz="1100">
-                          <a:solidFill>
-                            <a:srgbClr val="3D424E"/>
-                          </a:solidFill>
-                        </a:rPr>
-                        <a:t>Ablação: linear vs não-linear importa?</a:t>
-                      </a:r>
-                    </a:p>
-                  </a:txBody>
-                  <a:tcPr/>
-                </a:tc>
-              </a:tr>
-              <a:tr h="950976">
-                <a:tc>
-                  <a:txBody>
-                    <a:bodyPr/>
-                    <a:lstStyle/>
-                    <a:p>
-                      <a:r>
-                        <a:rPr sz="1100">
-                          <a:solidFill>
-                            <a:srgbClr val="3D424E"/>
-                          </a:solidFill>
-                        </a:rPr>
-                        <a:t>D</a:t>
-                      </a:r>
-                    </a:p>
-                  </a:txBody>
-                  <a:tcPr/>
-                </a:tc>
-                <a:tc>
-                  <a:txBody>
-                    <a:bodyPr/>
-                    <a:lstStyle/>
-                    <a:p>
-                      <a:r>
-                        <a:rPr sz="1100">
-                          <a:solidFill>
-                            <a:srgbClr val="3D424E"/>
-                          </a:solidFill>
-                        </a:rPr>
-                        <a:t>ConvNeXt-T + FiLM</a:t>
-                      </a:r>
-                    </a:p>
-                  </a:txBody>
-                  <a:tcPr/>
-                </a:tc>
-                <a:tc>
-                  <a:txBody>
-                    <a:bodyPr/>
-                    <a:lstStyle/>
-                    <a:p>
-                      <a:r>
-                        <a:rPr sz="1100">
-                          <a:solidFill>
-                            <a:srgbClr val="3D424E"/>
-                          </a:solidFill>
-                        </a:rPr>
-                        <a:t>Embedding CLIP-text 512-dim</a:t>
-                      </a:r>
-                    </a:p>
-                  </a:txBody>
-                  <a:tcPr/>
-                </a:tc>
-                <a:tc>
-                  <a:txBody>
-                    <a:bodyPr/>
-                    <a:lstStyle/>
-                    <a:p>
-                      <a:r>
-                        <a:rPr sz="1100">
-                          <a:solidFill>
-                            <a:srgbClr val="3D424E"/>
-                          </a:solidFill>
-                        </a:rPr>
-                        <a:t>Recomendação da reunião 15/jun — CLIP como alternativa moderna</a:t>
-                      </a:r>
-                    </a:p>
-                  </a:txBody>
-                  <a:tcPr/>
-                </a:tc>
-              </a:tr>
-            </a:tbl>
-          </a:graphicData>
-        </a:graphic>
-      </p:graphicFrame>
+        </p:nvSpPr>
+        <p:spPr>
+          <a:xfrm>
+            <a:off x="457200" y="1371600"/>
+            <a:ext cx="11430000" cy="4937760"/>
+          </a:xfrm>
+          <a:prstGeom prst="rect">
+            <a:avLst/>
+          </a:prstGeom>
+          <a:noFill/>
+        </p:spPr>
+        <p:txBody>
+          <a:bodyPr wrap="square">
+            <a:spAutoFit/>
+          </a:bodyPr>
+          <a:lstStyle/>
+          <a:p>
+            <a:pPr>
+              <a:spcAft>
+                <a:spcPts val="800"/>
+              </a:spcAft>
+            </a:pPr>
+            <a:r>
+              <a:rPr sz="1600" b="1">
+                <a:solidFill>
+                  <a:srgbClr val="1F2A4E"/>
+                </a:solidFill>
+              </a:rPr>
+              <a:t>Problema conhecido:  </a:t>
+            </a:r>
+            <a:r>
+              <a:rPr sz="1600">
+                <a:solidFill>
+                  <a:srgbClr val="3D424E"/>
+                </a:solidFill>
+              </a:rPr>
+              <a:t>modelos SOTA reportam F1 Latinx próximo de 60 % há três anos — persiste mesmo em modelos multimodais recentes (AlDahoul 2024)</a:t>
+            </a:r>
+          </a:p>
+          <a:p>
+            <a:pPr>
+              <a:spcAft>
+                <a:spcPts val="800"/>
+              </a:spcAft>
+            </a:pPr>
+            <a:r>
+              <a:rPr sz="1600" b="1">
+                <a:solidFill>
+                  <a:srgbClr val="1F2A4E"/>
+                </a:solidFill>
+              </a:rPr>
+              <a:t>  </a:t>
+            </a:r>
+            <a:r>
+              <a:rPr sz="1600">
+                <a:solidFill>
+                  <a:srgbClr val="3D424E"/>
+                </a:solidFill>
+              </a:rPr>
+              <a:t/>
+            </a:r>
+          </a:p>
+          <a:p>
+            <a:pPr>
+              <a:spcAft>
+                <a:spcPts val="800"/>
+              </a:spcAft>
+            </a:pPr>
+            <a:r>
+              <a:rPr sz="1600" b="1">
+                <a:solidFill>
+                  <a:srgbClr val="1F2A4E"/>
+                </a:solidFill>
+              </a:rPr>
+              <a:t>Diagnóstico novo:  </a:t>
+            </a:r>
+            <a:r>
+              <a:rPr sz="1600">
+                <a:solidFill>
+                  <a:srgbClr val="3D424E"/>
+                </a:solidFill>
+              </a:rPr>
+              <a:t>não é só bias algorítmico. É heterogeneidade fenotípica intra-categoria que a rotulagem monolítica de FairFace apaga.</a:t>
+            </a:r>
+          </a:p>
+          <a:p>
+            <a:pPr>
+              <a:spcAft>
+                <a:spcPts val="800"/>
+              </a:spcAft>
+            </a:pPr>
+            <a:r>
+              <a:rPr sz="1600" b="1">
+                <a:solidFill>
+                  <a:srgbClr val="1F2A4E"/>
+                </a:solidFill>
+              </a:rPr>
+              <a:t>  </a:t>
+            </a:r>
+            <a:r>
+              <a:rPr sz="1600">
+                <a:solidFill>
+                  <a:srgbClr val="3D424E"/>
+                </a:solidFill>
+              </a:rPr>
+              <a:t/>
+            </a:r>
+          </a:p>
+          <a:p>
+            <a:pPr>
+              <a:spcAft>
+                <a:spcPts val="800"/>
+              </a:spcAft>
+              <a:defRPr sz="1600">
+                <a:solidFill>
+                  <a:srgbClr val="3D424E"/>
+                </a:solidFill>
+              </a:defRPr>
+            </a:pPr>
+            <a:r>
+              <a:t>— Fundamentação empírica agora tripla:</a:t>
+            </a:r>
+          </a:p>
+          <a:p>
+            <a:pPr>
+              <a:spcAft>
+                <a:spcPts val="800"/>
+              </a:spcAft>
+            </a:pPr>
+            <a:r>
+              <a:rPr sz="1600" b="1">
+                <a:solidFill>
+                  <a:srgbClr val="1F2A4E"/>
+                </a:solidFill>
+              </a:rPr>
+              <a:t>Antropologia:  </a:t>
+            </a:r>
+            <a:r>
+              <a:rPr sz="1600">
+                <a:solidFill>
+                  <a:srgbClr val="3D424E"/>
+                </a:solidFill>
+              </a:rPr>
+              <a:t>Telles 2014 (PERLA, 4 países latino-americanos) documenta pigmentocracia — tom de pele varia mais dentro da categoria do que entre elas</a:t>
+            </a:r>
+          </a:p>
+          <a:p>
+            <a:pPr>
+              <a:spcAft>
+                <a:spcPts val="800"/>
+              </a:spcAft>
+            </a:pPr>
+            <a:r>
+              <a:rPr sz="1600" b="1">
+                <a:solidFill>
+                  <a:srgbClr val="1F2A4E"/>
+                </a:solidFill>
+              </a:rPr>
+              <a:t>Genética:  </a:t>
+            </a:r>
+            <a:r>
+              <a:rPr sz="1600">
+                <a:solidFill>
+                  <a:srgbClr val="3D424E"/>
+                </a:solidFill>
+              </a:rPr>
+              <a:t>Bryc 2015 (AJHG, 162 mil indivíduos) — ancestralidade Native + European + African altamente variável em Latinos</a:t>
+            </a:r>
+          </a:p>
+          <a:p>
+            <a:pPr>
+              <a:spcAft>
+                <a:spcPts val="800"/>
+              </a:spcAft>
+            </a:pPr>
+            <a:r>
+              <a:rPr sz="1600" b="1">
+                <a:solidFill>
+                  <a:srgbClr val="1F2A4E"/>
+                </a:solidFill>
+              </a:rPr>
+              <a:t>Sociologia:  </a:t>
+            </a:r>
+            <a:r>
+              <a:rPr sz="1600">
+                <a:solidFill>
+                  <a:srgbClr val="3D424E"/>
+                </a:solidFill>
+              </a:rPr>
+              <a:t>Pew 2017 — identidade Hispanic cai de 97 % para 50 % em quatro gerações nos EUA. Categoria é sociopolítica, não fenotípica.</a:t>
+            </a:r>
+          </a:p>
+        </p:txBody>
+      </p:sp>
       <p:sp>
         <p:nvSpPr>
           <p:cNvPr id="5" name="TextBox 4"/>
@@ -4382,7 +4142,7 @@
               </a:defRPr>
             </a:pPr>
             <a:r>
-              <a:t>B é a proposta central. C isola a não-linearidade. D compara com sinal semântico rico via CLIP.</a:t>
+              <a:t>Esse é o argumento pelo qual C6 (decomposição fenotípico × algorítmico) vira contribuição central.</a:t>
             </a:r>
           </a:p>
         </p:txBody>
@@ -4435,7 +4195,7 @@
               </a:defRPr>
             </a:pPr>
             <a:r>
-              <a:t>O achado que ancora a tese (Rodada 8, junho)</a:t>
+              <a:t>Validação externa via NotebookLM — 7 perguntas de defesa antecipadas</a:t>
             </a:r>
           </a:p>
         </p:txBody>
@@ -4483,205 +4243,469 @@
           </a:p>
         </p:txBody>
       </p:sp>
-      <p:sp>
-        <p:nvSpPr>
-          <p:cNvPr id="4" name="TextBox 3"/>
-          <p:cNvSpPr txBox="1"/>
+      <p:graphicFrame>
+        <p:nvGraphicFramePr>
+          <p:cNvPr id="4" name="Table 3"/>
+          <p:cNvGraphicFramePr>
+            <a:graphicFrameLocks noGrp="1"/>
+          </p:cNvGraphicFramePr>
           <p:nvPr/>
-        </p:nvSpPr>
-        <p:spPr>
-          <a:xfrm>
-            <a:off x="457200" y="1371600"/>
-            <a:ext cx="11430000" cy="4937760"/>
-          </a:xfrm>
-          <a:prstGeom prst="rect">
-            <a:avLst/>
-          </a:prstGeom>
-          <a:noFill/>
-        </p:spPr>
-        <p:txBody>
-          <a:bodyPr wrap="square">
-            <a:spAutoFit/>
-          </a:bodyPr>
-          <a:lstStyle/>
-          <a:p>
-            <a:pPr>
-              <a:spcAft>
-                <a:spcPts val="800"/>
-              </a:spcAft>
-            </a:pPr>
-            <a:r>
-              <a:rPr sz="1600" b="1">
-                <a:solidFill>
-                  <a:srgbClr val="1F2A4E"/>
-                </a:solidFill>
-              </a:rPr>
-              <a:t>Problema conhecido:  </a:t>
-            </a:r>
-            <a:r>
-              <a:rPr sz="1600">
-                <a:solidFill>
-                  <a:srgbClr val="3D424E"/>
-                </a:solidFill>
-              </a:rPr>
-              <a:t>modelos SOTA reportam F1 Latinx próximo de 60 % há três anos — persiste mesmo em modelos multimodais recentes (AlDahoul 2024)</a:t>
-            </a:r>
-          </a:p>
-          <a:p>
-            <a:pPr>
-              <a:spcAft>
-                <a:spcPts val="800"/>
-              </a:spcAft>
-            </a:pPr>
-            <a:r>
-              <a:rPr sz="1600" b="1">
-                <a:solidFill>
-                  <a:srgbClr val="1F2A4E"/>
-                </a:solidFill>
-              </a:rPr>
-              <a:t>  </a:t>
-            </a:r>
-            <a:r>
-              <a:rPr sz="1600">
-                <a:solidFill>
-                  <a:srgbClr val="3D424E"/>
-                </a:solidFill>
-              </a:rPr>
-              <a:t/>
-            </a:r>
-          </a:p>
-          <a:p>
-            <a:pPr>
-              <a:spcAft>
-                <a:spcPts val="800"/>
-              </a:spcAft>
-            </a:pPr>
-            <a:r>
-              <a:rPr sz="1600" b="1">
-                <a:solidFill>
-                  <a:srgbClr val="1F2A4E"/>
-                </a:solidFill>
-              </a:rPr>
-              <a:t>Diagnóstico novo:  </a:t>
-            </a:r>
-            <a:r>
-              <a:rPr sz="1600">
-                <a:solidFill>
-                  <a:srgbClr val="3D424E"/>
-                </a:solidFill>
-              </a:rPr>
-              <a:t>não é só bias algorítmico. É heterogeneidade fenotípica intra-categoria que a rotulagem monolítica de FairFace apaga.</a:t>
-            </a:r>
-          </a:p>
-          <a:p>
-            <a:pPr>
-              <a:spcAft>
-                <a:spcPts val="800"/>
-              </a:spcAft>
-            </a:pPr>
-            <a:r>
-              <a:rPr sz="1600" b="1">
-                <a:solidFill>
-                  <a:srgbClr val="1F2A4E"/>
-                </a:solidFill>
-              </a:rPr>
-              <a:t>  </a:t>
-            </a:r>
-            <a:r>
-              <a:rPr sz="1600">
-                <a:solidFill>
-                  <a:srgbClr val="3D424E"/>
-                </a:solidFill>
-              </a:rPr>
-              <a:t/>
-            </a:r>
-          </a:p>
-          <a:p>
-            <a:pPr>
-              <a:spcAft>
-                <a:spcPts val="800"/>
-              </a:spcAft>
-              <a:defRPr sz="1600">
-                <a:solidFill>
-                  <a:srgbClr val="3D424E"/>
-                </a:solidFill>
-              </a:defRPr>
-            </a:pPr>
-            <a:r>
-              <a:t>— Fundamentação empírica agora tripla:</a:t>
-            </a:r>
-          </a:p>
-          <a:p>
-            <a:pPr>
-              <a:spcAft>
-                <a:spcPts val="800"/>
-              </a:spcAft>
-            </a:pPr>
-            <a:r>
-              <a:rPr sz="1600" b="1">
-                <a:solidFill>
-                  <a:srgbClr val="1F2A4E"/>
-                </a:solidFill>
-              </a:rPr>
-              <a:t>Antropologia:  </a:t>
-            </a:r>
-            <a:r>
-              <a:rPr sz="1600">
-                <a:solidFill>
-                  <a:srgbClr val="3D424E"/>
-                </a:solidFill>
-              </a:rPr>
-              <a:t>Telles 2014 (PERLA, 4 países latino-americanos) documenta pigmentocracia — tom de pele varia mais dentro da categoria do que entre elas</a:t>
-            </a:r>
-          </a:p>
-          <a:p>
-            <a:pPr>
-              <a:spcAft>
-                <a:spcPts val="800"/>
-              </a:spcAft>
-            </a:pPr>
-            <a:r>
-              <a:rPr sz="1600" b="1">
-                <a:solidFill>
-                  <a:srgbClr val="1F2A4E"/>
-                </a:solidFill>
-              </a:rPr>
-              <a:t>Genética:  </a:t>
-            </a:r>
-            <a:r>
-              <a:rPr sz="1600">
-                <a:solidFill>
-                  <a:srgbClr val="3D424E"/>
-                </a:solidFill>
-              </a:rPr>
-              <a:t>Bryc 2015 (AJHG, 162 mil indivíduos) — ancestralidade Native + European + African altamente variável em Latinos</a:t>
-            </a:r>
-          </a:p>
-          <a:p>
-            <a:pPr>
-              <a:spcAft>
-                <a:spcPts val="800"/>
-              </a:spcAft>
-            </a:pPr>
-            <a:r>
-              <a:rPr sz="1600" b="1">
-                <a:solidFill>
-                  <a:srgbClr val="1F2A4E"/>
-                </a:solidFill>
-              </a:rPr>
-              <a:t>Sociologia:  </a:t>
-            </a:r>
-            <a:r>
-              <a:rPr sz="1600">
-                <a:solidFill>
-                  <a:srgbClr val="3D424E"/>
-                </a:solidFill>
-              </a:rPr>
-              <a:t>Pew 2017 — identidade Hispanic cai de 97 % para 50 % em quatro gerações nos EUA. Categoria é sociopolítica, não fenotípica.</a:t>
-            </a:r>
-          </a:p>
-        </p:txBody>
-      </p:sp>
+        </p:nvGraphicFramePr>
+        <p:xfrm>
+          <a:off x="457200" y="1371600"/>
+          <a:ext cx="11430000" cy="4754880"/>
+        </p:xfrm>
+        <a:graphic>
+          <a:graphicData uri="http://schemas.openxmlformats.org/drawingml/2006/table">
+            <a:tbl>
+              <a:tblPr firstRow="1" bandRow="1">
+                <a:tableStyleId>{5C22544A-7EE6-4342-B048-85BDC9FD1C3A}</a:tableStyleId>
+              </a:tblPr>
+              <a:tblGrid>
+                <a:gridCol w="3200400"/>
+                <a:gridCol w="1645920"/>
+                <a:gridCol w="6583680"/>
+              </a:tblGrid>
+              <a:tr h="594360">
+                <a:tc>
+                  <a:txBody>
+                    <a:bodyPr/>
+                    <a:lstStyle/>
+                    <a:p>
+                      <a:r>
+                        <a:rPr sz="1300" b="1">
+                          <a:solidFill>
+                            <a:srgbClr val="FFFFFF"/>
+                          </a:solidFill>
+                        </a:rPr>
+                        <a:t>Pergunta submetida</a:t>
+                      </a:r>
+                    </a:p>
+                  </a:txBody>
+                  <a:tcPr>
+                    <a:solidFill>
+                      <a:srgbClr val="1F2A4E"/>
+                    </a:solidFill>
+                  </a:tcPr>
+                </a:tc>
+                <a:tc>
+                  <a:txBody>
+                    <a:bodyPr/>
+                    <a:lstStyle/>
+                    <a:p>
+                      <a:r>
+                        <a:rPr sz="1300" b="1">
+                          <a:solidFill>
+                            <a:srgbClr val="FFFFFF"/>
+                          </a:solidFill>
+                        </a:rPr>
+                        <a:t>Veredito</a:t>
+                      </a:r>
+                    </a:p>
+                  </a:txBody>
+                  <a:tcPr>
+                    <a:solidFill>
+                      <a:srgbClr val="1F2A4E"/>
+                    </a:solidFill>
+                  </a:tcPr>
+                </a:tc>
+                <a:tc>
+                  <a:txBody>
+                    <a:bodyPr/>
+                    <a:lstStyle/>
+                    <a:p>
+                      <a:r>
+                        <a:rPr sz="1300" b="1">
+                          <a:solidFill>
+                            <a:srgbClr val="FFFFFF"/>
+                          </a:solidFill>
+                        </a:rPr>
+                        <a:t>Ponto-chave</a:t>
+                      </a:r>
+                    </a:p>
+                  </a:txBody>
+                  <a:tcPr>
+                    <a:solidFill>
+                      <a:srgbClr val="1F2A4E"/>
+                    </a:solidFill>
+                  </a:tcPr>
+                </a:tc>
+              </a:tr>
+              <a:tr h="594360">
+                <a:tc>
+                  <a:txBody>
+                    <a:bodyPr/>
+                    <a:lstStyle/>
+                    <a:p>
+                      <a:r>
+                        <a:rPr sz="1100">
+                          <a:solidFill>
+                            <a:srgbClr val="3D424E"/>
+                          </a:solidFill>
+                        </a:rPr>
+                        <a:t>Tese é nova?</a:t>
+                      </a:r>
+                    </a:p>
+                  </a:txBody>
+                  <a:tcPr/>
+                </a:tc>
+                <a:tc>
+                  <a:txBody>
+                    <a:bodyPr/>
+                    <a:lstStyle/>
+                    <a:p>
+                      <a:r>
+                        <a:rPr sz="1100">
+                          <a:solidFill>
+                            <a:srgbClr val="3D424E"/>
+                          </a:solidFill>
+                        </a:rPr>
+                        <a:t>Sim</a:t>
+                      </a:r>
+                    </a:p>
+                  </a:txBody>
+                  <a:tcPr/>
+                </a:tc>
+                <a:tc>
+                  <a:txBody>
+                    <a:bodyPr/>
+                    <a:lstStyle/>
+                    <a:p>
+                      <a:r>
+                        <a:rPr sz="1100">
+                          <a:solidFill>
+                            <a:srgbClr val="3D424E"/>
+                          </a:solidFill>
+                        </a:rPr>
+                        <a:t>FiLM em fairness facial é inédito; matriz MST × FairFace preenche gap de Pereira 2026</a:t>
+                      </a:r>
+                    </a:p>
+                  </a:txBody>
+                  <a:tcPr/>
+                </a:tc>
+              </a:tr>
+              <a:tr h="594360">
+                <a:tc>
+                  <a:txBody>
+                    <a:bodyPr/>
+                    <a:lstStyle/>
+                    <a:p>
+                      <a:r>
+                        <a:rPr sz="1100">
+                          <a:solidFill>
+                            <a:srgbClr val="3D424E"/>
+                          </a:solidFill>
+                        </a:rPr>
+                        <a:t>Valor científico?</a:t>
+                      </a:r>
+                    </a:p>
+                  </a:txBody>
+                  <a:tcPr/>
+                </a:tc>
+                <a:tc>
+                  <a:txBody>
+                    <a:bodyPr/>
+                    <a:lstStyle/>
+                    <a:p>
+                      <a:r>
+                        <a:rPr sz="1100">
+                          <a:solidFill>
+                            <a:srgbClr val="3D424E"/>
+                          </a:solidFill>
+                        </a:rPr>
+                        <a:t>Elevado</a:t>
+                      </a:r>
+                    </a:p>
+                  </a:txBody>
+                  <a:tcPr/>
+                </a:tc>
+                <a:tc>
+                  <a:txBody>
+                    <a:bodyPr/>
+                    <a:lstStyle/>
+                    <a:p>
+                      <a:r>
+                        <a:rPr sz="1100">
+                          <a:solidFill>
+                            <a:srgbClr val="3D424E"/>
+                          </a:solidFill>
+                        </a:rPr>
+                        <a:t>Diagnóstico estrutural fenotípico × algorítmico + European AI Act 2024</a:t>
+                      </a:r>
+                    </a:p>
+                  </a:txBody>
+                  <a:tcPr/>
+                </a:tc>
+              </a:tr>
+              <a:tr h="594360">
+                <a:tc>
+                  <a:txBody>
+                    <a:bodyPr/>
+                    <a:lstStyle/>
+                    <a:p>
+                      <a:r>
+                        <a:rPr sz="1100">
+                          <a:solidFill>
+                            <a:srgbClr val="3D424E"/>
+                          </a:solidFill>
+                        </a:rPr>
+                        <a:t>Divergências / SOTA?</a:t>
+                      </a:r>
+                    </a:p>
+                  </a:txBody>
+                  <a:tcPr/>
+                </a:tc>
+                <a:tc>
+                  <a:txBody>
+                    <a:bodyPr/>
+                    <a:lstStyle/>
+                    <a:p>
+                      <a:r>
+                        <a:rPr sz="1100">
+                          <a:solidFill>
+                            <a:srgbClr val="3D424E"/>
+                          </a:solidFill>
+                        </a:rPr>
+                        <a:t>Sim</a:t>
+                      </a:r>
+                    </a:p>
+                  </a:txBody>
+                  <a:tcPr/>
+                </a:tc>
+                <a:tc>
+                  <a:txBody>
+                    <a:bodyPr/>
+                    <a:lstStyle/>
+                    <a:p>
+                      <a:r>
+                        <a:rPr sz="1100">
+                          <a:solidFill>
+                            <a:srgbClr val="3D424E"/>
+                          </a:solidFill>
+                        </a:rPr>
+                        <a:t>FaceScanPaliGemma 75,7 % acc; Pangelinan 2023 refuta via 'pixel info' (endereçado por H6)</a:t>
+                      </a:r>
+                    </a:p>
+                  </a:txBody>
+                  <a:tcPr/>
+                </a:tc>
+              </a:tr>
+              <a:tr h="594360">
+                <a:tc>
+                  <a:txBody>
+                    <a:bodyPr/>
+                    <a:lstStyle/>
+                    <a:p>
+                      <a:r>
+                        <a:rPr sz="1100">
+                          <a:solidFill>
+                            <a:srgbClr val="3D424E"/>
+                          </a:solidFill>
+                        </a:rPr>
+                        <a:t>Faltam artigos?</a:t>
+                      </a:r>
+                    </a:p>
+                  </a:txBody>
+                  <a:tcPr/>
+                </a:tc>
+                <a:tc>
+                  <a:txBody>
+                    <a:bodyPr/>
+                    <a:lstStyle/>
+                    <a:p>
+                      <a:r>
+                        <a:rPr sz="1100">
+                          <a:solidFill>
+                            <a:srgbClr val="3D424E"/>
+                          </a:solidFill>
+                        </a:rPr>
+                        <a:t>Latinx</a:t>
+                      </a:r>
+                    </a:p>
+                  </a:txBody>
+                  <a:tcPr/>
+                </a:tc>
+                <a:tc>
+                  <a:txBody>
+                    <a:bodyPr/>
+                    <a:lstStyle/>
+                    <a:p>
+                      <a:r>
+                        <a:rPr sz="1100">
+                          <a:solidFill>
+                            <a:srgbClr val="3D424E"/>
+                          </a:solidFill>
+                        </a:rPr>
+                        <a:t>Diversidade intra-Latinx monolítica — respondido pela Rodada 8 (Telles/Bryc/Pew)</a:t>
+                      </a:r>
+                    </a:p>
+                  </a:txBody>
+                  <a:tcPr/>
+                </a:tc>
+              </a:tr>
+              <a:tr h="594360">
+                <a:tc>
+                  <a:txBody>
+                    <a:bodyPr/>
+                    <a:lstStyle/>
+                    <a:p>
+                      <a:r>
+                        <a:rPr sz="1100">
+                          <a:solidFill>
+                            <a:srgbClr val="3D424E"/>
+                          </a:solidFill>
+                        </a:rPr>
+                        <a:t>Furos e gaps?</a:t>
+                      </a:r>
+                    </a:p>
+                  </a:txBody>
+                  <a:tcPr/>
+                </a:tc>
+                <a:tc>
+                  <a:txBody>
+                    <a:bodyPr/>
+                    <a:lstStyle/>
+                    <a:p>
+                      <a:r>
+                        <a:rPr sz="1100">
+                          <a:solidFill>
+                            <a:srgbClr val="3D424E"/>
+                          </a:solidFill>
+                        </a:rPr>
+                        <a:t>2 pontos</a:t>
+                      </a:r>
+                    </a:p>
+                  </a:txBody>
+                  <a:tcPr/>
+                </a:tc>
+                <a:tc>
+                  <a:txBody>
+                    <a:bodyPr/>
+                    <a:lstStyle/>
+                    <a:p>
+                      <a:r>
+                        <a:rPr sz="1100">
+                          <a:solidFill>
+                            <a:srgbClr val="3D424E"/>
+                          </a:solidFill>
+                        </a:rPr>
+                        <a:t>Dependência SkinToneNet (mitigado por sensitivity analysis); escalabilidade além FairFace</a:t>
+                      </a:r>
+                    </a:p>
+                  </a:txBody>
+                  <a:tcPr/>
+                </a:tc>
+              </a:tr>
+              <a:tr h="594360">
+                <a:tc>
+                  <a:txBody>
+                    <a:bodyPr/>
+                    <a:lstStyle/>
+                    <a:p>
+                      <a:r>
+                        <a:rPr sz="1100">
+                          <a:solidFill>
+                            <a:srgbClr val="3D424E"/>
+                          </a:solidFill>
+                        </a:rPr>
+                        <a:t>Corpus atualizado?</a:t>
+                      </a:r>
+                    </a:p>
+                  </a:txBody>
+                  <a:tcPr/>
+                </a:tc>
+                <a:tc>
+                  <a:txBody>
+                    <a:bodyPr/>
+                    <a:lstStyle/>
+                    <a:p>
+                      <a:r>
+                        <a:rPr sz="1100">
+                          <a:solidFill>
+                            <a:srgbClr val="3D424E"/>
+                          </a:solidFill>
+                        </a:rPr>
+                        <a:t>Fronteira</a:t>
+                      </a:r>
+                    </a:p>
+                  </a:txBody>
+                  <a:tcPr/>
+                </a:tc>
+                <a:tc>
+                  <a:txBody>
+                    <a:bodyPr/>
+                    <a:lstStyle/>
+                    <a:p>
+                      <a:r>
+                        <a:rPr sz="1100">
+                          <a:solidFill>
+                            <a:srgbClr val="3D424E"/>
+                          </a:solidFill>
+                        </a:rPr>
+                        <a:t>Papers 2026 já cobertos (Pereira, AlDahoul, Lian)</a:t>
+                      </a:r>
+                    </a:p>
+                  </a:txBody>
+                  <a:tcPr/>
+                </a:tc>
+              </a:tr>
+              <a:tr h="594360">
+                <a:tc>
+                  <a:txBody>
+                    <a:bodyPr/>
+                    <a:lstStyle/>
+                    <a:p>
+                      <a:r>
+                        <a:rPr sz="1100">
+                          <a:solidFill>
+                            <a:srgbClr val="3D424E"/>
+                          </a:solidFill>
+                        </a:rPr>
+                        <a:t>Pipeline defensável?</a:t>
+                      </a:r>
+                    </a:p>
+                  </a:txBody>
+                  <a:tcPr/>
+                </a:tc>
+                <a:tc>
+                  <a:txBody>
+                    <a:bodyPr/>
+                    <a:lstStyle/>
+                    <a:p>
+                      <a:r>
+                        <a:rPr sz="1100">
+                          <a:solidFill>
+                            <a:srgbClr val="3D424E"/>
+                          </a:solidFill>
+                        </a:rPr>
+                        <a:t>Sim</a:t>
+                      </a:r>
+                    </a:p>
+                  </a:txBody>
+                  <a:tcPr/>
+                </a:tc>
+                <a:tc>
+                  <a:txBody>
+                    <a:bodyPr/>
+                    <a:lstStyle/>
+                    <a:p>
+                      <a:r>
+                        <a:rPr sz="1100">
+                          <a:solidFill>
+                            <a:srgbClr val="3D424E"/>
+                          </a:solidFill>
+                        </a:rPr>
+                        <a:t>Sequenciamento + controle de confounders + ablação + rigor estatístico</a:t>
+                      </a:r>
+                    </a:p>
+                  </a:txBody>
+                  <a:tcPr/>
+                </a:tc>
+              </a:tr>
+            </a:tbl>
+          </a:graphicData>
+        </a:graphic>
+      </p:graphicFrame>
       <p:sp>
         <p:nvSpPr>
           <p:cNvPr id="5" name="TextBox 4"/>
@@ -4712,7 +4736,7 @@
               </a:defRPr>
             </a:pPr>
             <a:r>
-              <a:t>Esse é o argumento pelo qual C6 (decomposição fenotípico × algorítmico) vira contribuição central.</a:t>
+              <a:t>Veredito NotebookLM: "trabalho bem estruturado, contribuições claras, fundamentado em literatura de ponta. Ponto crítico da defesa: decomposição do erro Latinx".</a:t>
             </a:r>
           </a:p>
         </p:txBody>
@@ -4765,7 +4789,7 @@
               </a:defRPr>
             </a:pPr>
             <a:r>
-              <a:t>Validação externa via NotebookLM — 7 perguntas de defesa antecipadas</a:t>
+              <a:t>Cinco caminhos possíveis para mitigar viés — por que escolhi FiLM + MST + Decomposição</a:t>
             </a:r>
           </a:p>
         </p:txBody>
@@ -4823,7 +4847,7 @@
         </p:nvGraphicFramePr>
         <p:xfrm>
           <a:off x="457200" y="1371600"/>
-          <a:ext cx="11430000" cy="4754880"/>
+          <a:ext cx="11887200" cy="4754880"/>
         </p:xfrm>
         <a:graphic>
           <a:graphicData uri="http://schemas.openxmlformats.org/drawingml/2006/table">
@@ -4833,10 +4857,10 @@
               </a:tblPr>
               <a:tblGrid>
                 <a:gridCol w="3200400"/>
-                <a:gridCol w="1645920"/>
-                <a:gridCol w="6583680"/>
+                <a:gridCol w="4114800"/>
+                <a:gridCol w="4572000"/>
               </a:tblGrid>
-              <a:tr h="594360">
+              <a:tr h="792480">
                 <a:tc>
                   <a:txBody>
                     <a:bodyPr/>
@@ -4848,7 +4872,7 @@
                             <a:srgbClr val="FFFFFF"/>
                           </a:solidFill>
                         </a:rPr>
-                        <a:t>Pergunta submetida</a:t>
+                        <a:t>Caminho</a:t>
                       </a:r>
                     </a:p>
                   </a:txBody>
@@ -4869,7 +4893,7 @@
                             <a:srgbClr val="FFFFFF"/>
                           </a:solidFill>
                         </a:rPr>
-                        <a:t>Veredito</a:t>
+                        <a:t>Ideia central</a:t>
                       </a:r>
                     </a:p>
                   </a:txBody>
@@ -4890,7 +4914,7 @@
                             <a:srgbClr val="FFFFFF"/>
                           </a:solidFill>
                         </a:rPr>
-                        <a:t>Ponto-chave</a:t>
+                        <a:t>Posição relativa à minha proposta</a:t>
                       </a:r>
                     </a:p>
                   </a:txBody>
@@ -4901,371 +4925,289 @@
                   </a:tcPr>
                 </a:tc>
               </a:tr>
-              <a:tr h="594360">
-                <a:tc>
-                  <a:txBody>
-                    <a:bodyPr/>
-                    <a:lstStyle/>
-                    <a:p>
-                      <a:r>
-                        <a:rPr sz="1100">
-                          <a:solidFill>
-                            <a:srgbClr val="3D424E"/>
-                          </a:solidFill>
-                        </a:rPr>
-                        <a:t>Tese é nova?</a:t>
-                      </a:r>
-                    </a:p>
-                  </a:txBody>
-                  <a:tcPr/>
-                </a:tc>
-                <a:tc>
-                  <a:txBody>
-                    <a:bodyPr/>
-                    <a:lstStyle/>
-                    <a:p>
-                      <a:r>
-                        <a:rPr sz="1100">
-                          <a:solidFill>
-                            <a:srgbClr val="3D424E"/>
-                          </a:solidFill>
-                        </a:rPr>
-                        <a:t>Sim</a:t>
-                      </a:r>
-                    </a:p>
-                  </a:txBody>
-                  <a:tcPr/>
-                </a:tc>
-                <a:tc>
-                  <a:txBody>
-                    <a:bodyPr/>
-                    <a:lstStyle/>
-                    <a:p>
-                      <a:r>
-                        <a:rPr sz="1100">
-                          <a:solidFill>
-                            <a:srgbClr val="3D424E"/>
-                          </a:solidFill>
-                        </a:rPr>
-                        <a:t>FiLM em fairness facial é inédito; matriz MST × FairFace preenche gap de Pereira 2026</a:t>
-                      </a:r>
-                    </a:p>
-                  </a:txBody>
-                  <a:tcPr/>
+              <a:tr h="792480">
+                <a:tc>
+                  <a:txBody>
+                    <a:bodyPr/>
+                    <a:lstStyle/>
+                    <a:p>
+                      <a:r>
+                        <a:rPr sz="1100">
+                          <a:solidFill>
+                            <a:srgbClr val="3D424E"/>
+                          </a:solidFill>
+                        </a:rPr>
+                        <a:t>1. Condicionamento arquitetural (FiLM)</a:t>
+                      </a:r>
+                    </a:p>
+                  </a:txBody>
+                  <a:tcPr>
+                    <a:solidFill>
+                      <a:srgbClr val="E8EAED"/>
+                    </a:solidFill>
+                  </a:tcPr>
+                </a:tc>
+                <a:tc>
+                  <a:txBody>
+                    <a:bodyPr/>
+                    <a:lstStyle/>
+                    <a:p>
+                      <a:r>
+                        <a:rPr sz="1100">
+                          <a:solidFill>
+                            <a:srgbClr val="3D424E"/>
+                          </a:solidFill>
+                        </a:rPr>
+                        <a:t>Modular features do backbone com tom de pele como sinal auxiliar</a:t>
+                      </a:r>
+                    </a:p>
+                  </a:txBody>
+                  <a:tcPr>
+                    <a:solidFill>
+                      <a:srgbClr val="E8EAED"/>
+                    </a:solidFill>
+                  </a:tcPr>
+                </a:tc>
+                <a:tc>
+                  <a:txBody>
+                    <a:bodyPr/>
+                    <a:lstStyle/>
+                    <a:p>
+                      <a:r>
+                        <a:rPr sz="1100">
+                          <a:solidFill>
+                            <a:srgbClr val="3D424E"/>
+                          </a:solidFill>
+                        </a:rPr>
+                        <a:t>Caminho que adotei — inédito em fairness facial</a:t>
+                      </a:r>
+                    </a:p>
+                  </a:txBody>
+                  <a:tcPr>
+                    <a:solidFill>
+                      <a:srgbClr val="E8EAED"/>
+                    </a:solidFill>
+                  </a:tcPr>
                 </a:tc>
               </a:tr>
-              <a:tr h="594360">
-                <a:tc>
-                  <a:txBody>
-                    <a:bodyPr/>
-                    <a:lstStyle/>
-                    <a:p>
-                      <a:r>
-                        <a:rPr sz="1100">
-                          <a:solidFill>
-                            <a:srgbClr val="3D424E"/>
-                          </a:solidFill>
-                        </a:rPr>
-                        <a:t>Valor científico?</a:t>
-                      </a:r>
-                    </a:p>
-                  </a:txBody>
-                  <a:tcPr/>
-                </a:tc>
-                <a:tc>
-                  <a:txBody>
-                    <a:bodyPr/>
-                    <a:lstStyle/>
-                    <a:p>
-                      <a:r>
-                        <a:rPr sz="1100">
-                          <a:solidFill>
-                            <a:srgbClr val="3D424E"/>
-                          </a:solidFill>
-                        </a:rPr>
-                        <a:t>Elevado</a:t>
-                      </a:r>
-                    </a:p>
-                  </a:txBody>
-                  <a:tcPr/>
-                </a:tc>
-                <a:tc>
-                  <a:txBody>
-                    <a:bodyPr/>
-                    <a:lstStyle/>
-                    <a:p>
-                      <a:r>
-                        <a:rPr sz="1100">
-                          <a:solidFill>
-                            <a:srgbClr val="3D424E"/>
-                          </a:solidFill>
-                        </a:rPr>
-                        <a:t>Diagnóstico estrutural fenotípico × algorítmico + European AI Act 2024</a:t>
-                      </a:r>
-                    </a:p>
-                  </a:txBody>
-                  <a:tcPr/>
+              <a:tr h="792480">
+                <a:tc>
+                  <a:txBody>
+                    <a:bodyPr/>
+                    <a:lstStyle/>
+                    <a:p>
+                      <a:r>
+                        <a:rPr sz="1100">
+                          <a:solidFill>
+                            <a:srgbClr val="3D424E"/>
+                          </a:solidFill>
+                        </a:rPr>
+                        <a:t>2. Decomposição fenotípico × algorítmico</a:t>
+                      </a:r>
+                    </a:p>
+                  </a:txBody>
+                  <a:tcPr>
+                    <a:solidFill>
+                      <a:srgbClr val="E8EAED"/>
+                    </a:solidFill>
+                  </a:tcPr>
+                </a:tc>
+                <a:tc>
+                  <a:txBody>
+                    <a:bodyPr/>
+                    <a:lstStyle/>
+                    <a:p>
+                      <a:r>
+                        <a:rPr sz="1100">
+                          <a:solidFill>
+                            <a:srgbClr val="3D424E"/>
+                          </a:solidFill>
+                        </a:rPr>
+                        <a:t>Separar erro irredutível de erro mitigável</a:t>
+                      </a:r>
+                    </a:p>
+                  </a:txBody>
+                  <a:tcPr>
+                    <a:solidFill>
+                      <a:srgbClr val="E8EAED"/>
+                    </a:solidFill>
+                  </a:tcPr>
+                </a:tc>
+                <a:tc>
+                  <a:txBody>
+                    <a:bodyPr/>
+                    <a:lstStyle/>
+                    <a:p>
+                      <a:r>
+                        <a:rPr sz="1100">
+                          <a:solidFill>
+                            <a:srgbClr val="3D424E"/>
+                          </a:solidFill>
+                        </a:rPr>
+                        <a:t>Adotei — OE-6 na v3.6 formaliza isso</a:t>
+                      </a:r>
+                    </a:p>
+                  </a:txBody>
+                  <a:tcPr>
+                    <a:solidFill>
+                      <a:srgbClr val="E8EAED"/>
+                    </a:solidFill>
+                  </a:tcPr>
                 </a:tc>
               </a:tr>
-              <a:tr h="594360">
-                <a:tc>
-                  <a:txBody>
-                    <a:bodyPr/>
-                    <a:lstStyle/>
-                    <a:p>
-                      <a:r>
-                        <a:rPr sz="1100">
-                          <a:solidFill>
-                            <a:srgbClr val="3D424E"/>
-                          </a:solidFill>
-                        </a:rPr>
-                        <a:t>Divergências / SOTA?</a:t>
-                      </a:r>
-                    </a:p>
-                  </a:txBody>
-                  <a:tcPr/>
-                </a:tc>
-                <a:tc>
-                  <a:txBody>
-                    <a:bodyPr/>
-                    <a:lstStyle/>
-                    <a:p>
-                      <a:r>
-                        <a:rPr sz="1100">
-                          <a:solidFill>
-                            <a:srgbClr val="3D424E"/>
-                          </a:solidFill>
-                        </a:rPr>
-                        <a:t>Sim</a:t>
-                      </a:r>
-                    </a:p>
-                  </a:txBody>
-                  <a:tcPr/>
-                </a:tc>
-                <a:tc>
-                  <a:txBody>
-                    <a:bodyPr/>
-                    <a:lstStyle/>
-                    <a:p>
-                      <a:r>
-                        <a:rPr sz="1100">
-                          <a:solidFill>
-                            <a:srgbClr val="3D424E"/>
-                          </a:solidFill>
-                        </a:rPr>
-                        <a:t>FaceScanPaliGemma 75,7 % acc; Pangelinan 2023 refuta via 'pixel info' (endereçado por H6)</a:t>
+              <a:tr h="792480">
+                <a:tc>
+                  <a:txBody>
+                    <a:bodyPr/>
+                    <a:lstStyle/>
+                    <a:p>
+                      <a:r>
+                        <a:rPr sz="1100">
+                          <a:solidFill>
+                            <a:srgbClr val="3D424E"/>
+                          </a:solidFill>
+                        </a:rPr>
+                        <a:t>3. Destilação de conhecimento (MST-KD)</a:t>
+                      </a:r>
+                    </a:p>
+                  </a:txBody>
+                  <a:tcPr/>
+                </a:tc>
+                <a:tc>
+                  <a:txBody>
+                    <a:bodyPr/>
+                    <a:lstStyle/>
+                    <a:p>
+                      <a:r>
+                        <a:rPr sz="1100">
+                          <a:solidFill>
+                            <a:srgbClr val="3D424E"/>
+                          </a:solidFill>
+                        </a:rPr>
+                        <a:t>Múltiplos professores enviesados por etnia → estudante</a:t>
+                      </a:r>
+                    </a:p>
+                  </a:txBody>
+                  <a:tcPr/>
+                </a:tc>
+                <a:tc>
+                  <a:txBody>
+                    <a:bodyPr/>
+                    <a:lstStyle/>
+                    <a:p>
+                      <a:r>
+                        <a:rPr sz="1100">
+                          <a:solidFill>
+                            <a:srgbClr val="3D424E"/>
+                          </a:solidFill>
+                        </a:rPr>
+                        <a:t>Alternativa avaliada — abandonada por custo computacional</a:t>
                       </a:r>
                     </a:p>
                   </a:txBody>
                   <a:tcPr/>
                 </a:tc>
               </a:tr>
-              <a:tr h="594360">
-                <a:tc>
-                  <a:txBody>
-                    <a:bodyPr/>
-                    <a:lstStyle/>
-                    <a:p>
-                      <a:r>
-                        <a:rPr sz="1100">
-                          <a:solidFill>
-                            <a:srgbClr val="3D424E"/>
-                          </a:solidFill>
-                        </a:rPr>
-                        <a:t>Faltam artigos?</a:t>
-                      </a:r>
-                    </a:p>
-                  </a:txBody>
-                  <a:tcPr/>
-                </a:tc>
-                <a:tc>
-                  <a:txBody>
-                    <a:bodyPr/>
-                    <a:lstStyle/>
-                    <a:p>
-                      <a:r>
-                        <a:rPr sz="1100">
-                          <a:solidFill>
-                            <a:srgbClr val="3D424E"/>
-                          </a:solidFill>
-                        </a:rPr>
-                        <a:t>Latinx</a:t>
-                      </a:r>
-                    </a:p>
-                  </a:txBody>
-                  <a:tcPr/>
-                </a:tc>
-                <a:tc>
-                  <a:txBody>
-                    <a:bodyPr/>
-                    <a:lstStyle/>
-                    <a:p>
-                      <a:r>
-                        <a:rPr sz="1100">
-                          <a:solidFill>
-                            <a:srgbClr val="3D424E"/>
-                          </a:solidFill>
-                        </a:rPr>
-                        <a:t>Diversidade intra-Latinx monolítica — respondido pela Rodada 8 (Telles/Bryc/Pew)</a:t>
+              <a:tr h="792480">
+                <a:tc>
+                  <a:txBody>
+                    <a:bodyPr/>
+                    <a:lstStyle/>
+                    <a:p>
+                      <a:r>
+                        <a:rPr sz="1100">
+                          <a:solidFill>
+                            <a:srgbClr val="3D424E"/>
+                          </a:solidFill>
+                        </a:rPr>
+                        <a:t>4. Intervenção geométrica em embeddings (SPD/SFID)</a:t>
+                      </a:r>
+                    </a:p>
+                  </a:txBody>
+                  <a:tcPr/>
+                </a:tc>
+                <a:tc>
+                  <a:txBody>
+                    <a:bodyPr/>
+                    <a:lstStyle/>
+                    <a:p>
+                      <a:r>
+                        <a:rPr sz="1100">
+                          <a:solidFill>
+                            <a:srgbClr val="3D424E"/>
+                          </a:solidFill>
+                        </a:rPr>
+                        <a:t>Projeção ortogonal ao subespaço do viés em VLMs — training-free</a:t>
+                      </a:r>
+                    </a:p>
+                  </a:txBody>
+                  <a:tcPr/>
+                </a:tc>
+                <a:tc>
+                  <a:txBody>
+                    <a:bodyPr/>
+                    <a:lstStyle/>
+                    <a:p>
+                      <a:r>
+                        <a:rPr sz="1100">
+                          <a:solidFill>
+                            <a:srgbClr val="3D424E"/>
+                          </a:solidFill>
+                        </a:rPr>
+                        <a:t>Complementar — cobrimos parcialmente via configuração D (FiLM-CLIP)</a:t>
                       </a:r>
                     </a:p>
                   </a:txBody>
                   <a:tcPr/>
                 </a:tc>
               </a:tr>
-              <a:tr h="594360">
-                <a:tc>
-                  <a:txBody>
-                    <a:bodyPr/>
-                    <a:lstStyle/>
-                    <a:p>
-                      <a:r>
-                        <a:rPr sz="1100">
-                          <a:solidFill>
-                            <a:srgbClr val="3D424E"/>
-                          </a:solidFill>
-                        </a:rPr>
-                        <a:t>Furos e gaps?</a:t>
-                      </a:r>
-                    </a:p>
-                  </a:txBody>
-                  <a:tcPr/>
-                </a:tc>
-                <a:tc>
-                  <a:txBody>
-                    <a:bodyPr/>
-                    <a:lstStyle/>
-                    <a:p>
-                      <a:r>
-                        <a:rPr sz="1100">
-                          <a:solidFill>
-                            <a:srgbClr val="3D424E"/>
-                          </a:solidFill>
-                        </a:rPr>
-                        <a:t>2 pontos</a:t>
-                      </a:r>
-                    </a:p>
-                  </a:txBody>
-                  <a:tcPr/>
-                </a:tc>
-                <a:tc>
-                  <a:txBody>
-                    <a:bodyPr/>
-                    <a:lstStyle/>
-                    <a:p>
-                      <a:r>
-                        <a:rPr sz="1100">
-                          <a:solidFill>
-                            <a:srgbClr val="3D424E"/>
-                          </a:solidFill>
-                        </a:rPr>
-                        <a:t>Dependência SkinToneNet (mitigado por sensitivity analysis); escalabilidade além FairFace</a:t>
-                      </a:r>
-                    </a:p>
-                  </a:txBody>
-                  <a:tcPr/>
-                </a:tc>
-              </a:tr>
-              <a:tr h="594360">
-                <a:tc>
-                  <a:txBody>
-                    <a:bodyPr/>
-                    <a:lstStyle/>
-                    <a:p>
-                      <a:r>
-                        <a:rPr sz="1100">
-                          <a:solidFill>
-                            <a:srgbClr val="3D424E"/>
-                          </a:solidFill>
-                        </a:rPr>
-                        <a:t>Corpus atualizado?</a:t>
-                      </a:r>
-                    </a:p>
-                  </a:txBody>
-                  <a:tcPr/>
-                </a:tc>
-                <a:tc>
-                  <a:txBody>
-                    <a:bodyPr/>
-                    <a:lstStyle/>
-                    <a:p>
-                      <a:r>
-                        <a:rPr sz="1100">
-                          <a:solidFill>
-                            <a:srgbClr val="3D424E"/>
-                          </a:solidFill>
-                        </a:rPr>
-                        <a:t>Fronteira</a:t>
-                      </a:r>
-                    </a:p>
-                  </a:txBody>
-                  <a:tcPr/>
-                </a:tc>
-                <a:tc>
-                  <a:txBody>
-                    <a:bodyPr/>
-                    <a:lstStyle/>
-                    <a:p>
-                      <a:r>
-                        <a:rPr sz="1100">
-                          <a:solidFill>
-                            <a:srgbClr val="3D424E"/>
-                          </a:solidFill>
-                        </a:rPr>
-                        <a:t>Papers 2026 já cobertos (Pereira, AlDahoul, Lian)</a:t>
-                      </a:r>
-                    </a:p>
-                  </a:txBody>
-                  <a:tcPr/>
-                </a:tc>
-              </a:tr>
-              <a:tr h="594360">
-                <a:tc>
-                  <a:txBody>
-                    <a:bodyPr/>
-                    <a:lstStyle/>
-                    <a:p>
-                      <a:r>
-                        <a:rPr sz="1100">
-                          <a:solidFill>
-                            <a:srgbClr val="3D424E"/>
-                          </a:solidFill>
-                        </a:rPr>
-                        <a:t>Pipeline defensável?</a:t>
-                      </a:r>
-                    </a:p>
-                  </a:txBody>
-                  <a:tcPr/>
-                </a:tc>
-                <a:tc>
-                  <a:txBody>
-                    <a:bodyPr/>
-                    <a:lstStyle/>
-                    <a:p>
-                      <a:r>
-                        <a:rPr sz="1100">
-                          <a:solidFill>
-                            <a:srgbClr val="3D424E"/>
-                          </a:solidFill>
-                        </a:rPr>
-                        <a:t>Sim</a:t>
-                      </a:r>
-                    </a:p>
-                  </a:txBody>
-                  <a:tcPr/>
-                </a:tc>
-                <a:tc>
-                  <a:txBody>
-                    <a:bodyPr/>
-                    <a:lstStyle/>
-                    <a:p>
-                      <a:r>
-                        <a:rPr sz="1100">
-                          <a:solidFill>
-                            <a:srgbClr val="3D424E"/>
-                          </a:solidFill>
-                        </a:rPr>
-                        <a:t>Sequenciamento + controle de confounders + ablação + rigor estatístico</a:t>
+              <a:tr h="792480">
+                <a:tc>
+                  <a:txBody>
+                    <a:bodyPr/>
+                    <a:lstStyle/>
+                    <a:p>
+                      <a:r>
+                        <a:rPr sz="1100">
+                          <a:solidFill>
+                            <a:srgbClr val="3D424E"/>
+                          </a:solidFill>
+                        </a:rPr>
+                        <a:t>5. Rótulos demográficos contínuos (Ethnicity Shift)</a:t>
+                      </a:r>
+                    </a:p>
+                  </a:txBody>
+                  <a:tcPr/>
+                </a:tc>
+                <a:tc>
+                  <a:txBody>
+                    <a:bodyPr/>
+                    <a:lstStyle/>
+                    <a:p>
+                      <a:r>
+                        <a:rPr sz="1100">
+                          <a:solidFill>
+                            <a:srgbClr val="3D424E"/>
+                          </a:solidFill>
+                        </a:rPr>
+                        <a:t>Etnia como espectro contínuo, não categoria discreta</a:t>
+                      </a:r>
+                    </a:p>
+                  </a:txBody>
+                  <a:tcPr/>
+                </a:tc>
+                <a:tc>
+                  <a:txBody>
+                    <a:bodyPr/>
+                    <a:lstStyle/>
+                    <a:p>
+                      <a:r>
+                        <a:rPr sz="1100">
+                          <a:solidFill>
+                            <a:srgbClr val="3D424E"/>
+                          </a:solidFill>
+                        </a:rPr>
+                        <a:t>Interseciona com MST — MST é já uma discretização de espectro</a:t>
                       </a:r>
                     </a:p>
                   </a:txBody>
@@ -5306,7 +5248,7 @@
               </a:defRPr>
             </a:pPr>
             <a:r>
-              <a:t>Veredito NotebookLM: "trabalho bem estruturado, contribuições claras, fundamentado em literatura de ponta. Ponto crítico da defesa: decomposição do erro Latinx".</a:t>
+              <a:t>Adotei os caminhos 1 + 2 combinados. Deixo 3-5 declarados em Cap 4 como alternativas ponderadas e não adotadas.</a:t>
             </a:r>
           </a:p>
         </p:txBody>
@@ -5359,7 +5301,7 @@
               </a:defRPr>
             </a:pPr>
             <a:r>
-              <a:t>Cinco caminhos possíveis para mitigar viés — por que escolhi FiLM + MST + Decomposição</a:t>
+              <a:t>Complemento — solicitação pessoal de extensão de 2 meses</a:t>
             </a:r>
           </a:p>
         </p:txBody>
@@ -5407,387 +5349,167 @@
           </a:p>
         </p:txBody>
       </p:sp>
-      <p:graphicFrame>
-        <p:nvGraphicFramePr>
-          <p:cNvPr id="4" name="Table 3"/>
-          <p:cNvGraphicFramePr>
-            <a:graphicFrameLocks noGrp="1"/>
-          </p:cNvGraphicFramePr>
+      <p:sp>
+        <p:nvSpPr>
+          <p:cNvPr id="4" name="TextBox 3"/>
+          <p:cNvSpPr txBox="1"/>
           <p:nvPr/>
-        </p:nvGraphicFramePr>
-        <p:xfrm>
-          <a:off x="457200" y="1371600"/>
-          <a:ext cx="11887200" cy="4754880"/>
-        </p:xfrm>
-        <a:graphic>
-          <a:graphicData uri="http://schemas.openxmlformats.org/drawingml/2006/table">
-            <a:tbl>
-              <a:tblPr firstRow="1" bandRow="1">
-                <a:tableStyleId>{5C22544A-7EE6-4342-B048-85BDC9FD1C3A}</a:tableStyleId>
-              </a:tblPr>
-              <a:tblGrid>
-                <a:gridCol w="3200400"/>
-                <a:gridCol w="4114800"/>
-                <a:gridCol w="4572000"/>
-              </a:tblGrid>
-              <a:tr h="792480">
-                <a:tc>
-                  <a:txBody>
-                    <a:bodyPr/>
-                    <a:lstStyle/>
-                    <a:p>
-                      <a:r>
-                        <a:rPr sz="1300" b="1">
-                          <a:solidFill>
-                            <a:srgbClr val="FFFFFF"/>
-                          </a:solidFill>
-                        </a:rPr>
-                        <a:t>Caminho</a:t>
-                      </a:r>
-                    </a:p>
-                  </a:txBody>
-                  <a:tcPr>
-                    <a:solidFill>
-                      <a:srgbClr val="1F2A4E"/>
-                    </a:solidFill>
-                  </a:tcPr>
-                </a:tc>
-                <a:tc>
-                  <a:txBody>
-                    <a:bodyPr/>
-                    <a:lstStyle/>
-                    <a:p>
-                      <a:r>
-                        <a:rPr sz="1300" b="1">
-                          <a:solidFill>
-                            <a:srgbClr val="FFFFFF"/>
-                          </a:solidFill>
-                        </a:rPr>
-                        <a:t>Ideia central</a:t>
-                      </a:r>
-                    </a:p>
-                  </a:txBody>
-                  <a:tcPr>
-                    <a:solidFill>
-                      <a:srgbClr val="1F2A4E"/>
-                    </a:solidFill>
-                  </a:tcPr>
-                </a:tc>
-                <a:tc>
-                  <a:txBody>
-                    <a:bodyPr/>
-                    <a:lstStyle/>
-                    <a:p>
-                      <a:r>
-                        <a:rPr sz="1300" b="1">
-                          <a:solidFill>
-                            <a:srgbClr val="FFFFFF"/>
-                          </a:solidFill>
-                        </a:rPr>
-                        <a:t>Posição relativa à minha proposta</a:t>
-                      </a:r>
-                    </a:p>
-                  </a:txBody>
-                  <a:tcPr>
-                    <a:solidFill>
-                      <a:srgbClr val="1F2A4E"/>
-                    </a:solidFill>
-                  </a:tcPr>
-                </a:tc>
-              </a:tr>
-              <a:tr h="792480">
-                <a:tc>
-                  <a:txBody>
-                    <a:bodyPr/>
-                    <a:lstStyle/>
-                    <a:p>
-                      <a:r>
-                        <a:rPr sz="1100">
-                          <a:solidFill>
-                            <a:srgbClr val="3D424E"/>
-                          </a:solidFill>
-                        </a:rPr>
-                        <a:t>1. Condicionamento arquitetural (FiLM)</a:t>
-                      </a:r>
-                    </a:p>
-                  </a:txBody>
-                  <a:tcPr>
-                    <a:solidFill>
-                      <a:srgbClr val="E8EAED"/>
-                    </a:solidFill>
-                  </a:tcPr>
-                </a:tc>
-                <a:tc>
-                  <a:txBody>
-                    <a:bodyPr/>
-                    <a:lstStyle/>
-                    <a:p>
-                      <a:r>
-                        <a:rPr sz="1100">
-                          <a:solidFill>
-                            <a:srgbClr val="3D424E"/>
-                          </a:solidFill>
-                        </a:rPr>
-                        <a:t>Modular features do backbone com tom de pele como sinal auxiliar</a:t>
-                      </a:r>
-                    </a:p>
-                  </a:txBody>
-                  <a:tcPr>
-                    <a:solidFill>
-                      <a:srgbClr val="E8EAED"/>
-                    </a:solidFill>
-                  </a:tcPr>
-                </a:tc>
-                <a:tc>
-                  <a:txBody>
-                    <a:bodyPr/>
-                    <a:lstStyle/>
-                    <a:p>
-                      <a:r>
-                        <a:rPr sz="1100">
-                          <a:solidFill>
-                            <a:srgbClr val="3D424E"/>
-                          </a:solidFill>
-                        </a:rPr>
-                        <a:t>Caminho que adotei — inédito em fairness facial</a:t>
-                      </a:r>
-                    </a:p>
-                  </a:txBody>
-                  <a:tcPr>
-                    <a:solidFill>
-                      <a:srgbClr val="E8EAED"/>
-                    </a:solidFill>
-                  </a:tcPr>
-                </a:tc>
-              </a:tr>
-              <a:tr h="792480">
-                <a:tc>
-                  <a:txBody>
-                    <a:bodyPr/>
-                    <a:lstStyle/>
-                    <a:p>
-                      <a:r>
-                        <a:rPr sz="1100">
-                          <a:solidFill>
-                            <a:srgbClr val="3D424E"/>
-                          </a:solidFill>
-                        </a:rPr>
-                        <a:t>2. Decomposição fenotípico × algorítmico</a:t>
-                      </a:r>
-                    </a:p>
-                  </a:txBody>
-                  <a:tcPr>
-                    <a:solidFill>
-                      <a:srgbClr val="E8EAED"/>
-                    </a:solidFill>
-                  </a:tcPr>
-                </a:tc>
-                <a:tc>
-                  <a:txBody>
-                    <a:bodyPr/>
-                    <a:lstStyle/>
-                    <a:p>
-                      <a:r>
-                        <a:rPr sz="1100">
-                          <a:solidFill>
-                            <a:srgbClr val="3D424E"/>
-                          </a:solidFill>
-                        </a:rPr>
-                        <a:t>Separar erro irredutível de erro mitigável</a:t>
-                      </a:r>
-                    </a:p>
-                  </a:txBody>
-                  <a:tcPr>
-                    <a:solidFill>
-                      <a:srgbClr val="E8EAED"/>
-                    </a:solidFill>
-                  </a:tcPr>
-                </a:tc>
-                <a:tc>
-                  <a:txBody>
-                    <a:bodyPr/>
-                    <a:lstStyle/>
-                    <a:p>
-                      <a:r>
-                        <a:rPr sz="1100">
-                          <a:solidFill>
-                            <a:srgbClr val="3D424E"/>
-                          </a:solidFill>
-                        </a:rPr>
-                        <a:t>Adotei — OE-6 na v3.6 formaliza isso</a:t>
-                      </a:r>
-                    </a:p>
-                  </a:txBody>
-                  <a:tcPr>
-                    <a:solidFill>
-                      <a:srgbClr val="E8EAED"/>
-                    </a:solidFill>
-                  </a:tcPr>
-                </a:tc>
-              </a:tr>
-              <a:tr h="792480">
-                <a:tc>
-                  <a:txBody>
-                    <a:bodyPr/>
-                    <a:lstStyle/>
-                    <a:p>
-                      <a:r>
-                        <a:rPr sz="1100">
-                          <a:solidFill>
-                            <a:srgbClr val="3D424E"/>
-                          </a:solidFill>
-                        </a:rPr>
-                        <a:t>3. Destilação de conhecimento (MST-KD)</a:t>
-                      </a:r>
-                    </a:p>
-                  </a:txBody>
-                  <a:tcPr/>
-                </a:tc>
-                <a:tc>
-                  <a:txBody>
-                    <a:bodyPr/>
-                    <a:lstStyle/>
-                    <a:p>
-                      <a:r>
-                        <a:rPr sz="1100">
-                          <a:solidFill>
-                            <a:srgbClr val="3D424E"/>
-                          </a:solidFill>
-                        </a:rPr>
-                        <a:t>Múltiplos professores enviesados por etnia → estudante</a:t>
-                      </a:r>
-                    </a:p>
-                  </a:txBody>
-                  <a:tcPr/>
-                </a:tc>
-                <a:tc>
-                  <a:txBody>
-                    <a:bodyPr/>
-                    <a:lstStyle/>
-                    <a:p>
-                      <a:r>
-                        <a:rPr sz="1100">
-                          <a:solidFill>
-                            <a:srgbClr val="3D424E"/>
-                          </a:solidFill>
-                        </a:rPr>
-                        <a:t>Alternativa avaliada — abandonada por custo computacional</a:t>
-                      </a:r>
-                    </a:p>
-                  </a:txBody>
-                  <a:tcPr/>
-                </a:tc>
-              </a:tr>
-              <a:tr h="792480">
-                <a:tc>
-                  <a:txBody>
-                    <a:bodyPr/>
-                    <a:lstStyle/>
-                    <a:p>
-                      <a:r>
-                        <a:rPr sz="1100">
-                          <a:solidFill>
-                            <a:srgbClr val="3D424E"/>
-                          </a:solidFill>
-                        </a:rPr>
-                        <a:t>4. Intervenção geométrica em embeddings (SPD/SFID)</a:t>
-                      </a:r>
-                    </a:p>
-                  </a:txBody>
-                  <a:tcPr/>
-                </a:tc>
-                <a:tc>
-                  <a:txBody>
-                    <a:bodyPr/>
-                    <a:lstStyle/>
-                    <a:p>
-                      <a:r>
-                        <a:rPr sz="1100">
-                          <a:solidFill>
-                            <a:srgbClr val="3D424E"/>
-                          </a:solidFill>
-                        </a:rPr>
-                        <a:t>Projeção ortogonal ao subespaço do viés em VLMs — training-free</a:t>
-                      </a:r>
-                    </a:p>
-                  </a:txBody>
-                  <a:tcPr/>
-                </a:tc>
-                <a:tc>
-                  <a:txBody>
-                    <a:bodyPr/>
-                    <a:lstStyle/>
-                    <a:p>
-                      <a:r>
-                        <a:rPr sz="1100">
-                          <a:solidFill>
-                            <a:srgbClr val="3D424E"/>
-                          </a:solidFill>
-                        </a:rPr>
-                        <a:t>Complementar — cobrimos parcialmente via configuração D (FiLM-CLIP)</a:t>
-                      </a:r>
-                    </a:p>
-                  </a:txBody>
-                  <a:tcPr/>
-                </a:tc>
-              </a:tr>
-              <a:tr h="792480">
-                <a:tc>
-                  <a:txBody>
-                    <a:bodyPr/>
-                    <a:lstStyle/>
-                    <a:p>
-                      <a:r>
-                        <a:rPr sz="1100">
-                          <a:solidFill>
-                            <a:srgbClr val="3D424E"/>
-                          </a:solidFill>
-                        </a:rPr>
-                        <a:t>5. Rótulos demográficos contínuos (Ethnicity Shift)</a:t>
-                      </a:r>
-                    </a:p>
-                  </a:txBody>
-                  <a:tcPr/>
-                </a:tc>
-                <a:tc>
-                  <a:txBody>
-                    <a:bodyPr/>
-                    <a:lstStyle/>
-                    <a:p>
-                      <a:r>
-                        <a:rPr sz="1100">
-                          <a:solidFill>
-                            <a:srgbClr val="3D424E"/>
-                          </a:solidFill>
-                        </a:rPr>
-                        <a:t>Etnia como espectro contínuo, não categoria discreta</a:t>
-                      </a:r>
-                    </a:p>
-                  </a:txBody>
-                  <a:tcPr/>
-                </a:tc>
-                <a:tc>
-                  <a:txBody>
-                    <a:bodyPr/>
-                    <a:lstStyle/>
-                    <a:p>
-                      <a:r>
-                        <a:rPr sz="1100">
-                          <a:solidFill>
-                            <a:srgbClr val="3D424E"/>
-                          </a:solidFill>
-                        </a:rPr>
-                        <a:t>Interseciona com MST — MST é já uma discretização de espectro</a:t>
-                      </a:r>
-                    </a:p>
-                  </a:txBody>
-                  <a:tcPr/>
-                </a:tc>
-              </a:tr>
-            </a:tbl>
-          </a:graphicData>
-        </a:graphic>
-      </p:graphicFrame>
+        </p:nvSpPr>
+        <p:spPr>
+          <a:xfrm>
+            <a:off x="457200" y="1371600"/>
+            <a:ext cx="11430000" cy="4937760"/>
+          </a:xfrm>
+          <a:prstGeom prst="rect">
+            <a:avLst/>
+          </a:prstGeom>
+          <a:noFill/>
+        </p:spPr>
+        <p:txBody>
+          <a:bodyPr wrap="square">
+            <a:spAutoFit/>
+          </a:bodyPr>
+          <a:lstStyle/>
+          <a:p>
+            <a:pPr>
+              <a:spcAft>
+                <a:spcPts val="800"/>
+              </a:spcAft>
+            </a:pPr>
+            <a:r>
+              <a:rPr sz="1600" b="1">
+                <a:solidFill>
+                  <a:srgbClr val="1F2A4E"/>
+                </a:solidFill>
+              </a:rPr>
+              <a:t>O que aconteceu:  </a:t>
+            </a:r>
+            <a:r>
+              <a:rPr sz="1600">
+                <a:solidFill>
+                  <a:srgbClr val="3D424E"/>
+                </a:solidFill>
+              </a:rPr>
+              <a:t>minha filha nasceu em 28/março. Fiquei afastado nas semanas seguintes para o cuidado que ela e a mãe precisaram</a:t>
+            </a:r>
+          </a:p>
+          <a:p>
+            <a:pPr>
+              <a:spcAft>
+                <a:spcPts val="800"/>
+              </a:spcAft>
+            </a:pPr>
+            <a:r>
+              <a:rPr sz="1600" b="1">
+                <a:solidFill>
+                  <a:srgbClr val="1F2A4E"/>
+                </a:solidFill>
+              </a:rPr>
+              <a:t>  </a:t>
+            </a:r>
+            <a:r>
+              <a:rPr sz="1600">
+                <a:solidFill>
+                  <a:srgbClr val="3D424E"/>
+                </a:solidFill>
+              </a:rPr>
+              <a:t/>
+            </a:r>
+          </a:p>
+          <a:p>
+            <a:pPr>
+              <a:spcAft>
+                <a:spcPts val="800"/>
+              </a:spcAft>
+            </a:pPr>
+            <a:r>
+              <a:rPr sz="1600" b="1">
+                <a:solidFill>
+                  <a:srgbClr val="1F2A4E"/>
+                </a:solidFill>
+              </a:rPr>
+              <a:t>O que preservei:  </a:t>
+            </a:r>
+            <a:r>
+              <a:rPr sz="1600">
+                <a:solidFill>
+                  <a:srgbClr val="3D424E"/>
+                </a:solidFill>
+              </a:rPr>
+              <a:t>marcos de 15/jul (1ª revisão) e 30/jul (pedido formal) continuam de pé</a:t>
+            </a:r>
+          </a:p>
+          <a:p>
+            <a:pPr>
+              <a:spcAft>
+                <a:spcPts val="800"/>
+              </a:spcAft>
+            </a:pPr>
+            <a:r>
+              <a:rPr sz="1600" b="1">
+                <a:solidFill>
+                  <a:srgbClr val="1F2A4E"/>
+                </a:solidFill>
+              </a:rPr>
+              <a:t>O que estou pedindo:  </a:t>
+            </a:r>
+            <a:r>
+              <a:rPr sz="1600">
+                <a:solidFill>
+                  <a:srgbClr val="3D424E"/>
+                </a:solidFill>
+              </a:rPr>
+              <a:t>extensão de 2 meses no prazo da defesa — de agosto para outubro</a:t>
+            </a:r>
+          </a:p>
+          <a:p>
+            <a:pPr>
+              <a:spcAft>
+                <a:spcPts val="800"/>
+              </a:spcAft>
+            </a:pPr>
+            <a:r>
+              <a:rPr sz="1600" b="1">
+                <a:solidFill>
+                  <a:srgbClr val="1F2A4E"/>
+                </a:solidFill>
+              </a:rPr>
+              <a:t>  </a:t>
+            </a:r>
+            <a:r>
+              <a:rPr sz="1600">
+                <a:solidFill>
+                  <a:srgbClr val="3D424E"/>
+                </a:solidFill>
+              </a:rPr>
+              <a:t/>
+            </a:r>
+          </a:p>
+          <a:p>
+            <a:pPr>
+              <a:spcAft>
+                <a:spcPts val="800"/>
+              </a:spcAft>
+            </a:pPr>
+            <a:r>
+              <a:rPr sz="1600" b="1">
+                <a:solidFill>
+                  <a:srgbClr val="1F2A4E"/>
+                </a:solidFill>
+              </a:rPr>
+              <a:t>Documento:  </a:t>
+            </a:r>
+            <a:r>
+              <a:rPr sz="1600">
+                <a:solidFill>
+                  <a:srgbClr val="3D424E"/>
+                </a:solidFill>
+              </a:rPr>
+              <a:t>carta em 2 parágrafos redigida, pronta para envio via SEI ou trâmite indicado pelo Programa</a:t>
+            </a:r>
+          </a:p>
+        </p:txBody>
+      </p:sp>
       <p:sp>
         <p:nvSpPr>
           <p:cNvPr id="5" name="TextBox 4"/>
@@ -5818,7 +5540,7 @@
               </a:defRPr>
             </a:pPr>
             <a:r>
-              <a:t>Adotei os caminhos 1 + 2 combinados. Deixo 3-5 declarados em Cap 4 como alternativas ponderadas e não adotadas.</a:t>
+              <a:t>Complemento à agenda, mas precisa de encaminhamento hoje.</a:t>
             </a:r>
           </a:p>
         </p:txBody>
@@ -5871,7 +5593,7 @@
               </a:defRPr>
             </a:pPr>
             <a:r>
-              <a:t>Postura sobre uso de LLM — como quero deixar explícito na defesa</a:t>
+              <a:t>Perguntas em aberto — técnicas + administrativas</a:t>
             </a:r>
           </a:p>
         </p:txBody>
@@ -5921,57 +5643,14 @@
       </p:sp>
       <p:sp>
         <p:nvSpPr>
-          <p:cNvPr id="4" name="Rectangle 3"/>
-          <p:cNvSpPr/>
+          <p:cNvPr id="4" name="TextBox 3"/>
+          <p:cNvSpPr txBox="1"/>
           <p:nvPr/>
         </p:nvSpPr>
         <p:spPr>
           <a:xfrm>
-            <a:off x="1371600" y="2011680"/>
-            <a:ext cx="73152" cy="3200400"/>
-          </a:xfrm>
-          <a:prstGeom prst="rect">
-            <a:avLst/>
-          </a:prstGeom>
-          <a:solidFill>
-            <a:srgbClr val="1F2A4E"/>
-          </a:solidFill>
-          <a:ln>
-            <a:noFill/>
-          </a:ln>
-        </p:spPr>
-        <p:style>
-          <a:lnRef idx="1">
-            <a:schemeClr val="accent1"/>
-          </a:lnRef>
-          <a:fillRef idx="3">
-            <a:schemeClr val="accent1"/>
-          </a:fillRef>
-          <a:effectRef idx="2">
-            <a:schemeClr val="accent1"/>
-          </a:effectRef>
-          <a:fontRef idx="minor">
-            <a:schemeClr val="lt1"/>
-          </a:fontRef>
-        </p:style>
-        <p:txBody>
-          <a:bodyPr rtlCol="0" anchor="ctr"/>
-          <a:lstStyle/>
-          <a:p>
-            <a:pPr algn="ctr"/>
-          </a:p>
-        </p:txBody>
-      </p:sp>
-      <p:sp>
-        <p:nvSpPr>
-          <p:cNvPr id="5" name="TextBox 4"/>
-          <p:cNvSpPr txBox="1"/>
-          <p:nvPr/>
-        </p:nvSpPr>
-        <p:spPr>
-          <a:xfrm>
-            <a:off x="1645920" y="2011680"/>
-            <a:ext cx="9601200" cy="3474720"/>
+            <a:off x="457200" y="1371600"/>
+            <a:ext cx="11430000" cy="4937760"/>
           </a:xfrm>
           <a:prstGeom prst="rect">
             <a:avLst/>
@@ -5986,35 +5665,146 @@
           <a:p>
             <a:pPr>
               <a:spcAft>
-                <a:spcPts val="2000"/>
+                <a:spcPts val="800"/>
               </a:spcAft>
-              <a:defRPr sz="2000" i="1">
+            </a:pPr>
+            <a:r>
+              <a:rPr sz="1600" b="1">
+                <a:solidFill>
+                  <a:srgbClr val="1F2A4E"/>
+                </a:solidFill>
+              </a:rPr>
+              <a:t>1. Estrutura entregue no Overleaf:  </a:t>
+            </a:r>
+            <a:r>
+              <a:rPr sz="1600">
                 <a:solidFill>
                   <a:srgbClr val="3D424E"/>
                 </a:solidFill>
-              </a:defRPr>
+              </a:rPr>
+              <a:t>há capítulo que o senhor gostaria de ver com tratamento diferente antes da minha próxima rodada de revisão?</a:t>
+            </a:r>
+          </a:p>
+          <a:p>
+            <a:pPr>
+              <a:spcAft>
+                <a:spcPts val="800"/>
+              </a:spcAft>
             </a:pPr>
             <a:r>
-              <a:t>A LLM me poupou tempo em bibliotecas de referência, formatação de fichas e revisão de coerência entre capítulos. Mas cada afirmação central da tese — a pergunta de pesquisa, a escolha do backbone, o mecanismo FiLM, o ajuste ético do OE-1, o argumento de heterogeneidade intra-Latinx — nasceu de leitura minha e de conversas nesta sala. A transposição para o Overleaf foi manual, linha a linha, exatamente para forçar essa apropriação — e o senhor poderá conferir isso lendo o texto entregue hoje.</a:t>
+              <a:rPr sz="1600" b="1">
+                <a:solidFill>
+                  <a:srgbClr val="1F2A4E"/>
+                </a:solidFill>
+              </a:rPr>
+              <a:t>2. Configurações comparativas:  </a:t>
+            </a:r>
+            <a:r>
+              <a:rPr sz="1600">
+                <a:solidFill>
+                  <a:srgbClr val="3D424E"/>
+                </a:solidFill>
+              </a:rPr>
+              <a:t>as 4 configs (A/B/C/D) bastam ou incluo uma 5ª variante (skin tone contínuo ITA/L* em vez de MST discreto)?</a:t>
             </a:r>
           </a:p>
           <a:p>
             <a:pPr>
-              <a:defRPr sz="1400">
-                <a:solidFill>
-                  <a:srgbClr val="707682"/>
-                </a:solidFill>
-              </a:defRPr>
+              <a:spcAft>
+                <a:spcPts val="800"/>
+              </a:spcAft>
             </a:pPr>
             <a:r>
-              <a:t>— posição que vou defender se questionado na banca</a:t>
-            </a:r>
-          </a:p>
-        </p:txBody>
-      </p:sp>
-      <p:sp>
-        <p:nvSpPr>
-          <p:cNvPr id="6" name="TextBox 5"/>
+              <a:rPr sz="1600" b="1">
+                <a:solidFill>
+                  <a:srgbClr val="1F2A4E"/>
+                </a:solidFill>
+              </a:rPr>
+              <a:t>3. Cap 2 — ablation arquitetural:  </a:t>
+            </a:r>
+            <a:r>
+              <a:rPr sz="1600">
+                <a:solidFill>
+                  <a:srgbClr val="3D424E"/>
+                </a:solidFill>
+              </a:rPr>
+              <a:t>faz sentido meia-página comparando FiLM × CBN × cross-attention × AdaIN, ou deixo para a defesa oral?</a:t>
+            </a:r>
+          </a:p>
+          <a:p>
+            <a:pPr>
+              <a:spcAft>
+                <a:spcPts val="800"/>
+              </a:spcAft>
+            </a:pPr>
+            <a:r>
+              <a:rPr sz="1600" b="1">
+                <a:solidFill>
+                  <a:srgbClr val="1F2A4E"/>
+                </a:solidFill>
+              </a:rPr>
+              <a:t>4. OE-4 (fair transfer):  </a:t>
+            </a:r>
+            <a:r>
+              <a:rPr sz="1600">
+                <a:solidFill>
+                  <a:srgbClr val="3D424E"/>
+                </a:solidFill>
+              </a:rPr>
+              <a:t>métrica principal TPR@FAR=1e-4 estratificada por raça, ou DR agregado?</a:t>
+            </a:r>
+          </a:p>
+          <a:p>
+            <a:pPr>
+              <a:spcAft>
+                <a:spcPts val="800"/>
+              </a:spcAft>
+            </a:pPr>
+            <a:r>
+              <a:rPr sz="1600" b="1">
+                <a:solidFill>
+                  <a:srgbClr val="1F2A4E"/>
+                </a:solidFill>
+              </a:rPr>
+              <a:t>5. Extensão de 2 meses:  </a:t>
+            </a:r>
+            <a:r>
+              <a:rPr sz="1600">
+                <a:solidFill>
+                  <a:srgbClr val="3D424E"/>
+                </a:solidFill>
+              </a:rPr>
+              <a:t>trâmite correto — carta direta, requerimento SEI ao PPG, ou processo formal?</a:t>
+            </a:r>
+          </a:p>
+          <a:p>
+            <a:pPr>
+              <a:spcAft>
+                <a:spcPts val="800"/>
+              </a:spcAft>
+            </a:pPr>
+            <a:r>
+              <a:rPr sz="1600" b="1">
+                <a:solidFill>
+                  <a:srgbClr val="1F2A4E"/>
+                </a:solidFill>
+              </a:rPr>
+              <a:t>Bônus:  </a:t>
+            </a:r>
+            <a:r>
+              <a:rPr sz="1600">
+                <a:solidFill>
+                  <a:srgbClr val="3D424E"/>
+                </a:solidFill>
+              </a:rPr>
+              <a:t>sugestões para banca preliminar (fairness externo + CV aplicada)?</a:t>
+            </a:r>
+          </a:p>
+        </p:txBody>
+      </p:sp>
+      <p:sp>
+        <p:nvSpPr>
+          <p:cNvPr id="5" name="TextBox 4"/>
           <p:cNvSpPr txBox="1"/>
           <p:nvPr/>
         </p:nvSpPr>
@@ -6042,7 +5832,7 @@
               </a:defRPr>
             </a:pPr>
             <a:r>
-              <a:t>Preferi trazer isso já, para o senhor calibrar comigo o quanto explicitar em texto vs quanto só demonstrar em resposta.</a:t>
+              <a:t>Nesta semana entro em modo revisão conforme feedback vindo do Overleaf.</a:t>
             </a:r>
           </a:p>
         </p:txBody>
@@ -6137,9 +5927,6 @@
                 </a:solidFill>
               </a:defRPr>
             </a:pPr>
-            <a:r>
-              <a:t>3</a:t>
-            </a:r>
           </a:p>
         </p:txBody>
       </p:sp>
@@ -6173,7 +5960,7 @@
               </a:defRPr>
             </a:pPr>
             <a:r>
-              <a:t>Decisão ética que tomei sozinho</a:t>
+              <a:t>Obrigado</a:t>
             </a:r>
           </a:p>
           <a:p>
@@ -6185,7 +5972,7 @@
               </a:defRPr>
             </a:pPr>
             <a:r>
-              <a:t>Preciso validar o enquadramento no Art. 8º</a:t>
+              <a:t>Aberto para o debate</a:t>
             </a:r>
           </a:p>
         </p:txBody>
@@ -6198,7 +5985,7 @@
 </p:sld>
 </file>
 
-<file path=ppt/slides/slide17.xml><?xml version="1.0" encoding="utf-8"?>
+<file path=ppt/slides/slide2.xml><?xml version="1.0" encoding="utf-8"?>
 <p:sld xmlns:a="http://schemas.openxmlformats.org/drawingml/2006/main" xmlns:p="http://schemas.openxmlformats.org/presentationml/2006/main" xmlns:r="http://schemas.openxmlformats.org/officeDocument/2006/relationships">
   <p:cSld>
     <p:spTree>
@@ -6238,7 +6025,7 @@
               </a:defRPr>
             </a:pPr>
             <a:r>
-              <a:t>Contexto e trade-off que enfrentei</a:t>
+              <a:t>Objetivo desta reunião</a:t>
             </a:r>
           </a:p>
         </p:txBody>
@@ -6319,7 +6106,7 @@
                   <a:srgbClr val="1F2A4E"/>
                 </a:solidFill>
               </a:rPr>
-              <a:t>O gatilho:  </a:t>
+              <a:t>  </a:t>
             </a:r>
             <a:r>
               <a:rPr sz="1600">
@@ -6327,7 +6114,7 @@
                   <a:srgbClr val="3D424E"/>
                 </a:solidFill>
               </a:rPr>
-              <a:t>no OE-1 original eu previa validar MST em ~700 imgs × 3 anotadores via Prolific — crowdsourcing pago, margem cinzenta perante Res. 200/2021 do CONSU</a:t>
+              <a:t/>
             </a:r>
           </a:p>
           <a:p>
@@ -6342,7 +6129,7 @@
                   <a:srgbClr val="1F2A4E"/>
                 </a:solidFill>
               </a:rPr>
-              <a:t>  </a:t>
+              <a:t>1.  </a:t>
             </a:r>
             <a:r>
               <a:rPr sz="1600">
@@ -6350,7 +6137,7 @@
                   <a:srgbClr val="3D424E"/>
                 </a:solidFill>
               </a:rPr>
-              <a:t/>
+              <a:t>Plano até a defesa</a:t>
             </a:r>
           </a:p>
           <a:p>
@@ -6365,7 +6152,7 @@
                   <a:srgbClr val="1F2A4E"/>
                 </a:solidFill>
               </a:rPr>
-              <a:t>Opção A — manter Prolific:  </a:t>
+              <a:t>  </a:t>
             </a:r>
             <a:r>
               <a:rPr sz="1600">
@@ -6373,7 +6160,7 @@
                   <a:srgbClr val="3D424E"/>
                 </a:solidFill>
               </a:rPr>
-              <a:t>amostra maior (2.100 anotações), mas exige CEP com prazo estimado de 2-3 meses — bloqueia defesa em outubro</a:t>
+              <a:t/>
             </a:r>
           </a:p>
           <a:p>
@@ -6388,7 +6175,7 @@
                   <a:srgbClr val="1F2A4E"/>
                 </a:solidFill>
               </a:rPr>
-              <a:t>Opção B — abandonar validação humana:  </a:t>
+              <a:t>2.  </a:t>
             </a:r>
             <a:r>
               <a:rPr sz="1600">
@@ -6396,7 +6183,7 @@
                   <a:srgbClr val="3D424E"/>
                 </a:solidFill>
               </a:rPr>
-              <a:t>SkinToneNet como oráculo — vira ponto único de falha (crítica do NotebookLM)</a:t>
+              <a:t>Estado real da escrita — qualificação no Overleaf, Cap 2 em revisão ativa</a:t>
             </a:r>
           </a:p>
           <a:p>
@@ -6411,7 +6198,7 @@
                   <a:srgbClr val="1F2A4E"/>
                 </a:solidFill>
               </a:rPr>
-              <a:t>Opção C — validação interna reduzida:  </a:t>
+              <a:t>  </a:t>
             </a:r>
             <a:r>
               <a:rPr sz="1600">
@@ -6419,7 +6206,7 @@
                   <a:srgbClr val="3D424E"/>
                 </a:solidFill>
               </a:rPr>
-              <a:t>eu + o senhor anotamos ~200-300 imgs estratificadas por raça e MST. Menor escala, mas suficiente para IAA + concordância com SkinToneNet</a:t>
+              <a:t/>
             </a:r>
           </a:p>
           <a:p>
@@ -6434,7 +6221,7 @@
                   <a:srgbClr val="1F2A4E"/>
                 </a:solidFill>
               </a:rPr>
-              <a:t>  </a:t>
+              <a:t>Já resolvido:  </a:t>
             </a:r>
             <a:r>
               <a:rPr sz="1600">
@@ -6442,53 +6229,7 @@
                   <a:srgbClr val="3D424E"/>
                 </a:solidFill>
               </a:rPr>
-              <a:t/>
-            </a:r>
-          </a:p>
-          <a:p>
-            <a:pPr>
-              <a:spcAft>
-                <a:spcPts val="800"/>
-              </a:spcAft>
-            </a:pPr>
-            <a:r>
-              <a:rPr sz="1600" b="1">
-                <a:solidFill>
-                  <a:srgbClr val="1F2A4E"/>
-                </a:solidFill>
-              </a:rPr>
-              <a:t>Decisão que tomei (Opção C):  </a:t>
-            </a:r>
-            <a:r>
-              <a:rPr sz="1600">
-                <a:solidFill>
-                  <a:srgbClr val="3D424E"/>
-                </a:solidFill>
-              </a:rPr>
-              <a:t>enquadra o projeto no Art. 8º da Res. 200/2021 → dispensa CEP, exige apenas Declaração de Responsabilidade (3 assinaturas: eu + orientador + chefe de departamento)</a:t>
-            </a:r>
-          </a:p>
-          <a:p>
-            <a:pPr>
-              <a:spcAft>
-                <a:spcPts val="800"/>
-              </a:spcAft>
-            </a:pPr>
-            <a:r>
-              <a:rPr sz="1600" b="1">
-                <a:solidFill>
-                  <a:srgbClr val="1F2A4E"/>
-                </a:solidFill>
-              </a:rPr>
-              <a:t>O que preciso hoje:  </a:t>
-            </a:r>
-            <a:r>
-              <a:rPr sz="1600">
-                <a:solidFill>
-                  <a:srgbClr val="3D424E"/>
-                </a:solidFill>
-              </a:rPr>
-              <a:t>1) validar a decisão; 2) confirmar quem é o chefe do departamento que assina</a:t>
+              <a:t>Declaração de Responsabilidade CEP submetida ontem (12/jul) — Art. 8º da Res. 200/2021</a:t>
             </a:r>
           </a:p>
         </p:txBody>
@@ -6523,7 +6264,7 @@
               </a:defRPr>
             </a:pPr>
             <a:r>
-              <a:t>Se preferir voltar para Prolific, eu topo — mas o prazo CEP compromete outubro.</a:t>
+              <a:t>Solicitação pessoal (extensão) e debate técnico fecham a reunião como pontos complementares.</a:t>
             </a:r>
           </a:p>
         </p:txBody>
@@ -6536,7 +6277,7 @@
 </p:sld>
 </file>
 
-<file path=ppt/slides/slide18.xml><?xml version="1.0" encoding="utf-8"?>
+<file path=ppt/slides/slide3.xml><?xml version="1.0" encoding="utf-8"?>
 <p:sld xmlns:a="http://schemas.openxmlformats.org/drawingml/2006/main" xmlns:p="http://schemas.openxmlformats.org/presentationml/2006/main" xmlns:r="http://schemas.openxmlformats.org/officeDocument/2006/relationships">
   <p:cSld>
     <p:spTree>
@@ -6576,7 +6317,7 @@
               </a:defRPr>
             </a:pPr>
             <a:r>
-              <a:t>O que muda tecnicamente entre v3.5 e v3.6 do OE-1</a:t>
+              <a:t>A tese em uma tela</a:t>
             </a:r>
           </a:p>
         </p:txBody>
@@ -6624,440 +6365,190 @@
           </a:p>
         </p:txBody>
       </p:sp>
-      <p:graphicFrame>
-        <p:nvGraphicFramePr>
-          <p:cNvPr id="4" name="Table 3"/>
-          <p:cNvGraphicFramePr>
-            <a:graphicFrameLocks noGrp="1"/>
-          </p:cNvGraphicFramePr>
+      <p:sp>
+        <p:nvSpPr>
+          <p:cNvPr id="4" name="TextBox 3"/>
+          <p:cNvSpPr txBox="1"/>
           <p:nvPr/>
-        </p:nvGraphicFramePr>
-        <p:xfrm>
-          <a:off x="457200" y="1371600"/>
-          <a:ext cx="11430000" cy="4754880"/>
-        </p:xfrm>
-        <a:graphic>
-          <a:graphicData uri="http://schemas.openxmlformats.org/drawingml/2006/table">
-            <a:tbl>
-              <a:tblPr firstRow="1" bandRow="1">
-                <a:tableStyleId>{5C22544A-7EE6-4342-B048-85BDC9FD1C3A}</a:tableStyleId>
-              </a:tblPr>
-              <a:tblGrid>
-                <a:gridCol w="2743200"/>
-                <a:gridCol w="4114800"/>
-                <a:gridCol w="4572000"/>
-              </a:tblGrid>
-              <a:tr h="679268">
-                <a:tc>
-                  <a:txBody>
-                    <a:bodyPr/>
-                    <a:lstStyle/>
-                    <a:p>
-                      <a:r>
-                        <a:rPr sz="1300" b="1">
-                          <a:solidFill>
-                            <a:srgbClr val="FFFFFF"/>
-                          </a:solidFill>
-                        </a:rPr>
-                        <a:t>Aspecto</a:t>
-                      </a:r>
-                    </a:p>
-                  </a:txBody>
-                  <a:tcPr>
-                    <a:solidFill>
-                      <a:srgbClr val="1F2A4E"/>
-                    </a:solidFill>
-                  </a:tcPr>
-                </a:tc>
-                <a:tc>
-                  <a:txBody>
-                    <a:bodyPr/>
-                    <a:lstStyle/>
-                    <a:p>
-                      <a:r>
-                        <a:rPr sz="1300" b="1">
-                          <a:solidFill>
-                            <a:srgbClr val="FFFFFF"/>
-                          </a:solidFill>
-                        </a:rPr>
-                        <a:t>v3.5 (com Prolific)</a:t>
-                      </a:r>
-                    </a:p>
-                  </a:txBody>
-                  <a:tcPr>
-                    <a:solidFill>
-                      <a:srgbClr val="1F2A4E"/>
-                    </a:solidFill>
-                  </a:tcPr>
-                </a:tc>
-                <a:tc>
-                  <a:txBody>
-                    <a:bodyPr/>
-                    <a:lstStyle/>
-                    <a:p>
-                      <a:r>
-                        <a:rPr sz="1300" b="1">
-                          <a:solidFill>
-                            <a:srgbClr val="FFFFFF"/>
-                          </a:solidFill>
-                        </a:rPr>
-                        <a:t>v3.6 (interno)</a:t>
-                      </a:r>
-                    </a:p>
-                  </a:txBody>
-                  <a:tcPr>
-                    <a:solidFill>
-                      <a:srgbClr val="1F2A4E"/>
-                    </a:solidFill>
-                  </a:tcPr>
-                </a:tc>
-              </a:tr>
-              <a:tr h="679268">
-                <a:tc>
-                  <a:txBody>
-                    <a:bodyPr/>
-                    <a:lstStyle/>
-                    <a:p>
-                      <a:r>
-                        <a:rPr sz="1100">
-                          <a:solidFill>
-                            <a:srgbClr val="3D424E"/>
-                          </a:solidFill>
-                        </a:rPr>
-                        <a:t>Escala da validação</a:t>
-                      </a:r>
-                    </a:p>
-                  </a:txBody>
-                  <a:tcPr/>
-                </a:tc>
-                <a:tc>
-                  <a:txBody>
-                    <a:bodyPr/>
-                    <a:lstStyle/>
-                    <a:p>
-                      <a:r>
-                        <a:rPr sz="1100">
-                          <a:solidFill>
-                            <a:srgbClr val="3D424E"/>
-                          </a:solidFill>
-                        </a:rPr>
-                        <a:t>~700 imagens × 3 anotadores externos</a:t>
-                      </a:r>
-                    </a:p>
-                  </a:txBody>
-                  <a:tcPr/>
-                </a:tc>
-                <a:tc>
-                  <a:txBody>
-                    <a:bodyPr/>
-                    <a:lstStyle/>
-                    <a:p>
-                      <a:r>
-                        <a:rPr sz="1100">
-                          <a:solidFill>
-                            <a:srgbClr val="3D424E"/>
-                          </a:solidFill>
-                        </a:rPr>
-                        <a:t>~200-300 imagens × 2-3 anotadores internos</a:t>
-                      </a:r>
-                    </a:p>
-                  </a:txBody>
-                  <a:tcPr/>
-                </a:tc>
-              </a:tr>
-              <a:tr h="679268">
-                <a:tc>
-                  <a:txBody>
-                    <a:bodyPr/>
-                    <a:lstStyle/>
-                    <a:p>
-                      <a:r>
-                        <a:rPr sz="1100">
-                          <a:solidFill>
-                            <a:srgbClr val="3D424E"/>
-                          </a:solidFill>
-                        </a:rPr>
-                        <a:t>Diversidade dos anotadores</a:t>
-                      </a:r>
-                    </a:p>
-                  </a:txBody>
-                  <a:tcPr/>
-                </a:tc>
-                <a:tc>
-                  <a:txBody>
-                    <a:bodyPr/>
-                    <a:lstStyle/>
-                    <a:p>
-                      <a:r>
-                        <a:rPr sz="1100">
-                          <a:solidFill>
-                            <a:srgbClr val="3D424E"/>
-                          </a:solidFill>
-                        </a:rPr>
-                        <a:t>Crowdworkers com perfil variado</a:t>
-                      </a:r>
-                    </a:p>
-                  </a:txBody>
-                  <a:tcPr/>
-                </a:tc>
-                <a:tc>
-                  <a:txBody>
-                    <a:bodyPr/>
-                    <a:lstStyle/>
-                    <a:p>
-                      <a:r>
-                        <a:rPr sz="1100">
-                          <a:solidFill>
-                            <a:srgbClr val="3D424E"/>
-                          </a:solidFill>
-                        </a:rPr>
-                        <a:t>Mestrando + orientador (potencial viés declarado)</a:t>
-                      </a:r>
-                    </a:p>
-                  </a:txBody>
-                  <a:tcPr/>
-                </a:tc>
-              </a:tr>
-              <a:tr h="679268">
-                <a:tc>
-                  <a:txBody>
-                    <a:bodyPr/>
-                    <a:lstStyle/>
-                    <a:p>
-                      <a:r>
-                        <a:rPr sz="1100">
-                          <a:solidFill>
-                            <a:srgbClr val="3D424E"/>
-                          </a:solidFill>
-                        </a:rPr>
-                        <a:t>Métrica de concordância</a:t>
-                      </a:r>
-                    </a:p>
-                  </a:txBody>
-                  <a:tcPr/>
-                </a:tc>
-                <a:tc>
-                  <a:txBody>
-                    <a:bodyPr/>
-                    <a:lstStyle/>
-                    <a:p>
-                      <a:r>
-                        <a:rPr sz="1100">
-                          <a:solidFill>
-                            <a:srgbClr val="3D424E"/>
-                          </a:solidFill>
-                        </a:rPr>
-                        <a:t>Fleiss' kappa (múltiplos anotadores)</a:t>
-                      </a:r>
-                    </a:p>
-                  </a:txBody>
-                  <a:tcPr/>
-                </a:tc>
-                <a:tc>
-                  <a:txBody>
-                    <a:bodyPr/>
-                    <a:lstStyle/>
-                    <a:p>
-                      <a:r>
-                        <a:rPr sz="1100">
-                          <a:solidFill>
-                            <a:srgbClr val="3D424E"/>
-                          </a:solidFill>
-                        </a:rPr>
-                        <a:t>Cohen's kappa (par a par)</a:t>
-                      </a:r>
-                    </a:p>
-                  </a:txBody>
-                  <a:tcPr/>
-                </a:tc>
-              </a:tr>
-              <a:tr h="679268">
-                <a:tc>
-                  <a:txBody>
-                    <a:bodyPr/>
-                    <a:lstStyle/>
-                    <a:p>
-                      <a:r>
-                        <a:rPr sz="1100">
-                          <a:solidFill>
-                            <a:srgbClr val="3D424E"/>
-                          </a:solidFill>
-                        </a:rPr>
-                        <a:t>Poder estatístico</a:t>
-                      </a:r>
-                    </a:p>
-                  </a:txBody>
-                  <a:tcPr/>
-                </a:tc>
-                <a:tc>
-                  <a:txBody>
-                    <a:bodyPr/>
-                    <a:lstStyle/>
-                    <a:p>
-                      <a:r>
-                        <a:rPr sz="1100">
-                          <a:solidFill>
-                            <a:srgbClr val="3D424E"/>
-                          </a:solidFill>
-                        </a:rPr>
-                        <a:t>IC 95 % com margem menor</a:t>
-                      </a:r>
-                    </a:p>
-                  </a:txBody>
-                  <a:tcPr/>
-                </a:tc>
-                <a:tc>
-                  <a:txBody>
-                    <a:bodyPr/>
-                    <a:lstStyle/>
-                    <a:p>
-                      <a:r>
-                        <a:rPr sz="1100">
-                          <a:solidFill>
-                            <a:srgbClr val="3D424E"/>
-                          </a:solidFill>
-                        </a:rPr>
-                        <a:t>IC 95 % com margem maior — declarado como limitação</a:t>
-                      </a:r>
-                    </a:p>
-                  </a:txBody>
-                  <a:tcPr/>
-                </a:tc>
-              </a:tr>
-              <a:tr h="679268">
-                <a:tc>
-                  <a:txBody>
-                    <a:bodyPr/>
-                    <a:lstStyle/>
-                    <a:p>
-                      <a:r>
-                        <a:rPr sz="1100">
-                          <a:solidFill>
-                            <a:srgbClr val="3D424E"/>
-                          </a:solidFill>
-                        </a:rPr>
-                        <a:t>Risco regulatório</a:t>
-                      </a:r>
-                    </a:p>
-                  </a:txBody>
-                  <a:tcPr>
-                    <a:solidFill>
-                      <a:srgbClr val="E8EAED"/>
-                    </a:solidFill>
-                  </a:tcPr>
-                </a:tc>
-                <a:tc>
-                  <a:txBody>
-                    <a:bodyPr/>
-                    <a:lstStyle/>
-                    <a:p>
-                      <a:r>
-                        <a:rPr sz="1100">
-                          <a:solidFill>
-                            <a:srgbClr val="3D424E"/>
-                          </a:solidFill>
-                        </a:rPr>
-                        <a:t>Requer CEP (2-3 meses)</a:t>
-                      </a:r>
-                    </a:p>
-                  </a:txBody>
-                  <a:tcPr>
-                    <a:solidFill>
-                      <a:srgbClr val="E8EAED"/>
-                    </a:solidFill>
-                  </a:tcPr>
-                </a:tc>
-                <a:tc>
-                  <a:txBody>
-                    <a:bodyPr/>
-                    <a:lstStyle/>
-                    <a:p>
-                      <a:r>
-                        <a:rPr sz="1100">
-                          <a:solidFill>
-                            <a:srgbClr val="3D424E"/>
-                          </a:solidFill>
-                        </a:rPr>
-                        <a:t>Art. 8º — apenas Declaração</a:t>
-                      </a:r>
-                    </a:p>
-                  </a:txBody>
-                  <a:tcPr>
-                    <a:solidFill>
-                      <a:srgbClr val="E8EAED"/>
-                    </a:solidFill>
-                  </a:tcPr>
-                </a:tc>
-              </a:tr>
-              <a:tr h="679272">
-                <a:tc>
-                  <a:txBody>
-                    <a:bodyPr/>
-                    <a:lstStyle/>
-                    <a:p>
-                      <a:r>
-                        <a:rPr sz="1100">
-                          <a:solidFill>
-                            <a:srgbClr val="3D424E"/>
-                          </a:solidFill>
-                        </a:rPr>
-                        <a:t>Cronograma</a:t>
-                      </a:r>
-                    </a:p>
-                  </a:txBody>
-                  <a:tcPr>
-                    <a:solidFill>
-                      <a:srgbClr val="E8EAED"/>
-                    </a:solidFill>
-                  </a:tcPr>
-                </a:tc>
-                <a:tc>
-                  <a:txBody>
-                    <a:bodyPr/>
-                    <a:lstStyle/>
-                    <a:p>
-                      <a:r>
-                        <a:rPr sz="1100">
-                          <a:solidFill>
-                            <a:srgbClr val="3D424E"/>
-                          </a:solidFill>
-                        </a:rPr>
-                        <a:t>Bloqueia defesa em outubro</a:t>
-                      </a:r>
-                    </a:p>
-                  </a:txBody>
-                  <a:tcPr>
-                    <a:solidFill>
-                      <a:srgbClr val="E8EAED"/>
-                    </a:solidFill>
-                  </a:tcPr>
-                </a:tc>
-                <a:tc>
-                  <a:txBody>
-                    <a:bodyPr/>
-                    <a:lstStyle/>
-                    <a:p>
-                      <a:r>
-                        <a:rPr sz="1100">
-                          <a:solidFill>
-                            <a:srgbClr val="3D424E"/>
-                          </a:solidFill>
-                        </a:rPr>
-                        <a:t>Compatível com outubro</a:t>
-                      </a:r>
-                    </a:p>
-                  </a:txBody>
-                  <a:tcPr>
-                    <a:solidFill>
-                      <a:srgbClr val="E8EAED"/>
-                    </a:solidFill>
-                  </a:tcPr>
-                </a:tc>
-              </a:tr>
-            </a:tbl>
-          </a:graphicData>
-        </a:graphic>
-      </p:graphicFrame>
+        </p:nvSpPr>
+        <p:spPr>
+          <a:xfrm>
+            <a:off x="457200" y="1371600"/>
+            <a:ext cx="11430000" cy="4937760"/>
+          </a:xfrm>
+          <a:prstGeom prst="rect">
+            <a:avLst/>
+          </a:prstGeom>
+          <a:noFill/>
+        </p:spPr>
+        <p:txBody>
+          <a:bodyPr wrap="square">
+            <a:spAutoFit/>
+          </a:bodyPr>
+          <a:lstStyle/>
+          <a:p>
+            <a:pPr>
+              <a:spcAft>
+                <a:spcPts val="800"/>
+              </a:spcAft>
+            </a:pPr>
+            <a:r>
+              <a:rPr sz="1600" b="1">
+                <a:solidFill>
+                  <a:srgbClr val="1F2A4E"/>
+                </a:solidFill>
+              </a:rPr>
+              <a:t>Problema empírico:  </a:t>
+            </a:r>
+            <a:r>
+              <a:rPr sz="1600">
+                <a:solidFill>
+                  <a:srgbClr val="3D424E"/>
+                </a:solidFill>
+              </a:rPr>
+              <a:t>F1 macro alto mascara disparidade Black ≈ 90 % vs Latinx ≈ 60 % em SOTA sobre FairFace (AlDahoul 2024)</a:t>
+            </a:r>
+          </a:p>
+          <a:p>
+            <a:pPr>
+              <a:spcAft>
+                <a:spcPts val="800"/>
+              </a:spcAft>
+            </a:pPr>
+            <a:r>
+              <a:rPr sz="1600" b="1">
+                <a:solidFill>
+                  <a:srgbClr val="1F2A4E"/>
+                </a:solidFill>
+              </a:rPr>
+              <a:t>Pergunta de pesquisa:  </a:t>
+            </a:r>
+            <a:r>
+              <a:rPr sz="1600">
+                <a:solidFill>
+                  <a:srgbClr val="3D424E"/>
+                </a:solidFill>
+              </a:rPr>
+              <a:t>condicionar arquiteturalmente um classificador racial pelo tom de pele (MST) reduz essa disparidade sem sacrificar acurácia agregada?</a:t>
+            </a:r>
+          </a:p>
+          <a:p>
+            <a:pPr>
+              <a:spcAft>
+                <a:spcPts val="800"/>
+              </a:spcAft>
+            </a:pPr>
+            <a:r>
+              <a:rPr sz="1600" b="1">
+                <a:solidFill>
+                  <a:srgbClr val="1F2A4E"/>
+                </a:solidFill>
+              </a:rPr>
+              <a:t>  </a:t>
+            </a:r>
+            <a:r>
+              <a:rPr sz="1600">
+                <a:solidFill>
+                  <a:srgbClr val="3D424E"/>
+                </a:solidFill>
+              </a:rPr>
+              <a:t/>
+            </a:r>
+          </a:p>
+          <a:p>
+            <a:pPr>
+              <a:spcAft>
+                <a:spcPts val="800"/>
+              </a:spcAft>
+            </a:pPr>
+            <a:r>
+              <a:rPr sz="1600" b="1">
+                <a:solidFill>
+                  <a:srgbClr val="1F2A4E"/>
+                </a:solidFill>
+              </a:rPr>
+              <a:t>Objetivo geral:  </a:t>
+            </a:r>
+            <a:r>
+              <a:rPr sz="1600">
+                <a:solidFill>
+                  <a:srgbClr val="3D424E"/>
+                </a:solidFill>
+              </a:rPr>
+              <a:t>desenvolver e avaliar pipeline de classificação racial que incorpora tom de pele (escala Monk 10 classes) como sinal auxiliar condicionante via mecanismo arquitetural (FiLM)</a:t>
+            </a:r>
+          </a:p>
+          <a:p>
+            <a:pPr>
+              <a:spcAft>
+                <a:spcPts val="800"/>
+              </a:spcAft>
+            </a:pPr>
+            <a:r>
+              <a:rPr sz="1600" b="1">
+                <a:solidFill>
+                  <a:srgbClr val="1F2A4E"/>
+                </a:solidFill>
+              </a:rPr>
+              <a:t>  </a:t>
+            </a:r>
+            <a:r>
+              <a:rPr sz="1600">
+                <a:solidFill>
+                  <a:srgbClr val="3D424E"/>
+                </a:solidFill>
+              </a:rPr>
+              <a:t/>
+            </a:r>
+          </a:p>
+          <a:p>
+            <a:pPr>
+              <a:spcAft>
+                <a:spcPts val="800"/>
+              </a:spcAft>
+            </a:pPr>
+            <a:r>
+              <a:rPr sz="1600" b="1">
+                <a:solidFill>
+                  <a:srgbClr val="1F2A4E"/>
+                </a:solidFill>
+              </a:rPr>
+              <a:t>Contribuição principal:  </a:t>
+            </a:r>
+            <a:r>
+              <a:rPr sz="1600">
+                <a:solidFill>
+                  <a:srgbClr val="3D424E"/>
+                </a:solidFill>
+              </a:rPr>
+              <a:t>primeira instância empírica de tom de pele como contexto arquitetural para race classification multi-classe</a:t>
+            </a:r>
+          </a:p>
+          <a:p>
+            <a:pPr>
+              <a:spcAft>
+                <a:spcPts val="800"/>
+              </a:spcAft>
+            </a:pPr>
+            <a:r>
+              <a:rPr sz="1600" b="1">
+                <a:solidFill>
+                  <a:srgbClr val="1F2A4E"/>
+                </a:solidFill>
+              </a:rPr>
+              <a:t>Diagnóstico central:  </a:t>
+            </a:r>
+            <a:r>
+              <a:rPr sz="1600">
+                <a:solidFill>
+                  <a:srgbClr val="3D424E"/>
+                </a:solidFill>
+              </a:rPr>
+              <a:t>erro Latinx = componente fenotípico irredutível (overlap MST) + componente algorítmico — a decomposição é o diferencial da tese</a:t>
+            </a:r>
+          </a:p>
+        </p:txBody>
+      </p:sp>
       <p:sp>
         <p:nvSpPr>
           <p:cNvPr id="5" name="TextBox 4"/>
@@ -7088,7 +6579,7 @@
               </a:defRPr>
             </a:pPr>
             <a:r>
-              <a:t>A perda de escala é real. Vou declarar explicitamente como limitação metodológica no Cap 4.</a:t>
+              <a:t>MST vs Fitzpatrick: 10 vs 6 classes, projetado para CV vs dermatologia. FiLM vs concatenação: modula vs re-aprende.</a:t>
             </a:r>
           </a:p>
         </p:txBody>
@@ -7101,7 +6592,7 @@
 </p:sld>
 </file>
 
-<file path=ppt/slides/slide19.xml><?xml version="1.0" encoding="utf-8"?>
+<file path=ppt/slides/slide4.xml><?xml version="1.0" encoding="utf-8"?>
 <p:sld xmlns:a="http://schemas.openxmlformats.org/drawingml/2006/main" xmlns:p="http://schemas.openxmlformats.org/presentationml/2006/main" xmlns:r="http://schemas.openxmlformats.org/officeDocument/2006/relationships">
   <p:cSld>
     <p:spTree>
@@ -7141,7 +6632,7 @@
               </a:defRPr>
             </a:pPr>
             <a:r>
-              <a:t>Complemento — solicitação pessoal de extensão de 2 meses</a:t>
+              <a:t>Corpus consolidado — 104 fichas em 11 linhas de pesquisa</a:t>
             </a:r>
           </a:p>
         </p:txBody>
@@ -7189,167 +6680,960 @@
           </a:p>
         </p:txBody>
       </p:sp>
-      <p:sp>
-        <p:nvSpPr>
-          <p:cNvPr id="4" name="TextBox 3"/>
-          <p:cNvSpPr txBox="1"/>
+      <p:graphicFrame>
+        <p:nvGraphicFramePr>
+          <p:cNvPr id="4" name="Table 3"/>
+          <p:cNvGraphicFramePr>
+            <a:graphicFrameLocks noGrp="1"/>
+          </p:cNvGraphicFramePr>
           <p:nvPr/>
-        </p:nvSpPr>
-        <p:spPr>
-          <a:xfrm>
-            <a:off x="457200" y="1371600"/>
-            <a:ext cx="11430000" cy="4937760"/>
-          </a:xfrm>
-          <a:prstGeom prst="rect">
-            <a:avLst/>
-          </a:prstGeom>
-          <a:noFill/>
-        </p:spPr>
-        <p:txBody>
-          <a:bodyPr wrap="square">
-            <a:spAutoFit/>
-          </a:bodyPr>
-          <a:lstStyle/>
-          <a:p>
-            <a:pPr>
-              <a:spcAft>
-                <a:spcPts val="800"/>
-              </a:spcAft>
-            </a:pPr>
-            <a:r>
-              <a:rPr sz="1600" b="1">
-                <a:solidFill>
-                  <a:srgbClr val="1F2A4E"/>
-                </a:solidFill>
-              </a:rPr>
-              <a:t>O que aconteceu:  </a:t>
-            </a:r>
-            <a:r>
-              <a:rPr sz="1600">
-                <a:solidFill>
-                  <a:srgbClr val="3D424E"/>
-                </a:solidFill>
-              </a:rPr>
-              <a:t>minha filha nasceu em 28/março. Fiquei afastado nas semanas seguintes para o cuidado que ela e a mãe precisaram</a:t>
-            </a:r>
-          </a:p>
-          <a:p>
-            <a:pPr>
-              <a:spcAft>
-                <a:spcPts val="800"/>
-              </a:spcAft>
-            </a:pPr>
-            <a:r>
-              <a:rPr sz="1600" b="1">
-                <a:solidFill>
-                  <a:srgbClr val="1F2A4E"/>
-                </a:solidFill>
-              </a:rPr>
-              <a:t>  </a:t>
-            </a:r>
-            <a:r>
-              <a:rPr sz="1600">
-                <a:solidFill>
-                  <a:srgbClr val="3D424E"/>
-                </a:solidFill>
-              </a:rPr>
-              <a:t/>
-            </a:r>
-          </a:p>
-          <a:p>
-            <a:pPr>
-              <a:spcAft>
-                <a:spcPts val="800"/>
-              </a:spcAft>
-            </a:pPr>
-            <a:r>
-              <a:rPr sz="1600" b="1">
-                <a:solidFill>
-                  <a:srgbClr val="1F2A4E"/>
-                </a:solidFill>
-              </a:rPr>
-              <a:t>O que preservei:  </a:t>
-            </a:r>
-            <a:r>
-              <a:rPr sz="1600">
-                <a:solidFill>
-                  <a:srgbClr val="3D424E"/>
-                </a:solidFill>
-              </a:rPr>
-              <a:t>marcos de 15/jul (1ª revisão) e 30/jul (pedido formal) continuam de pé</a:t>
-            </a:r>
-          </a:p>
-          <a:p>
-            <a:pPr>
-              <a:spcAft>
-                <a:spcPts val="800"/>
-              </a:spcAft>
-            </a:pPr>
-            <a:r>
-              <a:rPr sz="1600" b="1">
-                <a:solidFill>
-                  <a:srgbClr val="1F2A4E"/>
-                </a:solidFill>
-              </a:rPr>
-              <a:t>O que estou pedindo:  </a:t>
-            </a:r>
-            <a:r>
-              <a:rPr sz="1600">
-                <a:solidFill>
-                  <a:srgbClr val="3D424E"/>
-                </a:solidFill>
-              </a:rPr>
-              <a:t>extensão de 2 meses no prazo da defesa — de agosto para outubro</a:t>
-            </a:r>
-          </a:p>
-          <a:p>
-            <a:pPr>
-              <a:spcAft>
-                <a:spcPts val="800"/>
-              </a:spcAft>
-            </a:pPr>
-            <a:r>
-              <a:rPr sz="1600" b="1">
-                <a:solidFill>
-                  <a:srgbClr val="1F2A4E"/>
-                </a:solidFill>
-              </a:rPr>
-              <a:t>  </a:t>
-            </a:r>
-            <a:r>
-              <a:rPr sz="1600">
-                <a:solidFill>
-                  <a:srgbClr val="3D424E"/>
-                </a:solidFill>
-              </a:rPr>
-              <a:t/>
-            </a:r>
-          </a:p>
-          <a:p>
-            <a:pPr>
-              <a:spcAft>
-                <a:spcPts val="800"/>
-              </a:spcAft>
-            </a:pPr>
-            <a:r>
-              <a:rPr sz="1600" b="1">
-                <a:solidFill>
-                  <a:srgbClr val="1F2A4E"/>
-                </a:solidFill>
-              </a:rPr>
-              <a:t>Documento:  </a:t>
-            </a:r>
-            <a:r>
-              <a:rPr sz="1600">
-                <a:solidFill>
-                  <a:srgbClr val="3D424E"/>
-                </a:solidFill>
-              </a:rPr>
-              <a:t>carta em 2 parágrafos redigida, pronta para envio via SEI ou trâmite indicado pelo Programa</a:t>
-            </a:r>
-          </a:p>
-        </p:txBody>
-      </p:sp>
+        </p:nvGraphicFramePr>
+        <p:xfrm>
+          <a:off x="457200" y="1371600"/>
+          <a:ext cx="11430000" cy="4754880"/>
+        </p:xfrm>
+        <a:graphic>
+          <a:graphicData uri="http://schemas.openxmlformats.org/drawingml/2006/table">
+            <a:tbl>
+              <a:tblPr firstRow="1" bandRow="1">
+                <a:tableStyleId>{5C22544A-7EE6-4342-B048-85BDC9FD1C3A}</a:tableStyleId>
+              </a:tblPr>
+              <a:tblGrid>
+                <a:gridCol w="4389120"/>
+                <a:gridCol w="640080"/>
+                <a:gridCol w="1097280"/>
+                <a:gridCol w="5303520"/>
+              </a:tblGrid>
+              <a:tr h="365760">
+                <a:tc>
+                  <a:txBody>
+                    <a:bodyPr/>
+                    <a:lstStyle/>
+                    <a:p>
+                      <a:r>
+                        <a:rPr sz="1300" b="1">
+                          <a:solidFill>
+                            <a:srgbClr val="FFFFFF"/>
+                          </a:solidFill>
+                        </a:rPr>
+                        <a:t>Linha de pesquisa</a:t>
+                      </a:r>
+                    </a:p>
+                  </a:txBody>
+                  <a:tcPr>
+                    <a:solidFill>
+                      <a:srgbClr val="1F2A4E"/>
+                    </a:solidFill>
+                  </a:tcPr>
+                </a:tc>
+                <a:tc>
+                  <a:txBody>
+                    <a:bodyPr/>
+                    <a:lstStyle/>
+                    <a:p>
+                      <a:r>
+                        <a:rPr sz="1300" b="1">
+                          <a:solidFill>
+                            <a:srgbClr val="FFFFFF"/>
+                          </a:solidFill>
+                        </a:rPr>
+                        <a:t>N</a:t>
+                      </a:r>
+                    </a:p>
+                  </a:txBody>
+                  <a:tcPr>
+                    <a:solidFill>
+                      <a:srgbClr val="1F2A4E"/>
+                    </a:solidFill>
+                  </a:tcPr>
+                </a:tc>
+                <a:tc>
+                  <a:txBody>
+                    <a:bodyPr/>
+                    <a:lstStyle/>
+                    <a:p>
+                      <a:r>
+                        <a:rPr sz="1300" b="1">
+                          <a:solidFill>
+                            <a:srgbClr val="FFFFFF"/>
+                          </a:solidFill>
+                        </a:rPr>
+                        <a:t>% corpus</a:t>
+                      </a:r>
+                    </a:p>
+                  </a:txBody>
+                  <a:tcPr>
+                    <a:solidFill>
+                      <a:srgbClr val="1F2A4E"/>
+                    </a:solidFill>
+                  </a:tcPr>
+                </a:tc>
+                <a:tc>
+                  <a:txBody>
+                    <a:bodyPr/>
+                    <a:lstStyle/>
+                    <a:p>
+                      <a:r>
+                        <a:rPr sz="1300" b="1">
+                          <a:solidFill>
+                            <a:srgbClr val="FFFFFF"/>
+                          </a:solidFill>
+                        </a:rPr>
+                        <a:t>Papers-âncora</a:t>
+                      </a:r>
+                    </a:p>
+                  </a:txBody>
+                  <a:tcPr>
+                    <a:solidFill>
+                      <a:srgbClr val="1F2A4E"/>
+                    </a:solidFill>
+                  </a:tcPr>
+                </a:tc>
+              </a:tr>
+              <a:tr h="365760">
+                <a:tc>
+                  <a:txBody>
+                    <a:bodyPr/>
+                    <a:lstStyle/>
+                    <a:p>
+                      <a:r>
+                        <a:rPr sz="1100">
+                          <a:solidFill>
+                            <a:srgbClr val="3D424E"/>
+                          </a:solidFill>
+                        </a:rPr>
+                        <a:t>A — Race classification multi-classe</a:t>
+                      </a:r>
+                    </a:p>
+                  </a:txBody>
+                  <a:tcPr/>
+                </a:tc>
+                <a:tc>
+                  <a:txBody>
+                    <a:bodyPr/>
+                    <a:lstStyle/>
+                    <a:p>
+                      <a:r>
+                        <a:rPr sz="1100">
+                          <a:solidFill>
+                            <a:srgbClr val="3D424E"/>
+                          </a:solidFill>
+                        </a:rPr>
+                        <a:t>4</a:t>
+                      </a:r>
+                    </a:p>
+                  </a:txBody>
+                  <a:tcPr/>
+                </a:tc>
+                <a:tc>
+                  <a:txBody>
+                    <a:bodyPr/>
+                    <a:lstStyle/>
+                    <a:p>
+                      <a:r>
+                        <a:rPr sz="1100">
+                          <a:solidFill>
+                            <a:srgbClr val="3D424E"/>
+                          </a:solidFill>
+                        </a:rPr>
+                        <a:t>3,8 %</a:t>
+                      </a:r>
+                    </a:p>
+                  </a:txBody>
+                  <a:tcPr/>
+                </a:tc>
+                <a:tc>
+                  <a:txBody>
+                    <a:bodyPr/>
+                    <a:lstStyle/>
+                    <a:p>
+                      <a:r>
+                        <a:rPr sz="1100">
+                          <a:solidFill>
+                            <a:srgbClr val="3D424E"/>
+                          </a:solidFill>
+                        </a:rPr>
+                        <a:t>Kärkkäinen 2021 (FairFace), AlDahoul 2024</a:t>
+                      </a:r>
+                    </a:p>
+                  </a:txBody>
+                  <a:tcPr/>
+                </a:tc>
+              </a:tr>
+              <a:tr h="365760">
+                <a:tc>
+                  <a:txBody>
+                    <a:bodyPr/>
+                    <a:lstStyle/>
+                    <a:p>
+                      <a:r>
+                        <a:rPr sz="1100">
+                          <a:solidFill>
+                            <a:srgbClr val="3D424E"/>
+                          </a:solidFill>
+                        </a:rPr>
+                        <a:t>B — Face recognition fairness</a:t>
+                      </a:r>
+                    </a:p>
+                  </a:txBody>
+                  <a:tcPr/>
+                </a:tc>
+                <a:tc>
+                  <a:txBody>
+                    <a:bodyPr/>
+                    <a:lstStyle/>
+                    <a:p>
+                      <a:r>
+                        <a:rPr sz="1100">
+                          <a:solidFill>
+                            <a:srgbClr val="3D424E"/>
+                          </a:solidFill>
+                        </a:rPr>
+                        <a:t>16</a:t>
+                      </a:r>
+                    </a:p>
+                  </a:txBody>
+                  <a:tcPr/>
+                </a:tc>
+                <a:tc>
+                  <a:txBody>
+                    <a:bodyPr/>
+                    <a:lstStyle/>
+                    <a:p>
+                      <a:r>
+                        <a:rPr sz="1100">
+                          <a:solidFill>
+                            <a:srgbClr val="3D424E"/>
+                          </a:solidFill>
+                        </a:rPr>
+                        <a:t>15,4 %</a:t>
+                      </a:r>
+                    </a:p>
+                  </a:txBody>
+                  <a:tcPr/>
+                </a:tc>
+                <a:tc>
+                  <a:txBody>
+                    <a:bodyPr/>
+                    <a:lstStyle/>
+                    <a:p>
+                      <a:r>
+                        <a:rPr sz="1100">
+                          <a:solidFill>
+                            <a:srgbClr val="3D424E"/>
+                          </a:solidFill>
+                        </a:rPr>
+                        <a:t>Wang RFW 2019, Robinson BFW 2020, Deng ArcFace</a:t>
+                      </a:r>
+                    </a:p>
+                  </a:txBody>
+                  <a:tcPr/>
+                </a:tc>
+              </a:tr>
+              <a:tr h="365760">
+                <a:tc>
+                  <a:txBody>
+                    <a:bodyPr/>
+                    <a:lstStyle/>
+                    <a:p>
+                      <a:r>
+                        <a:rPr sz="1100">
+                          <a:solidFill>
+                            <a:srgbClr val="3D424E"/>
+                          </a:solidFill>
+                        </a:rPr>
+                        <a:t>C — Skin tone alternativo (Fitzpatrick, MST, ITA)</a:t>
+                      </a:r>
+                    </a:p>
+                  </a:txBody>
+                  <a:tcPr/>
+                </a:tc>
+                <a:tc>
+                  <a:txBody>
+                    <a:bodyPr/>
+                    <a:lstStyle/>
+                    <a:p>
+                      <a:r>
+                        <a:rPr sz="1100">
+                          <a:solidFill>
+                            <a:srgbClr val="3D424E"/>
+                          </a:solidFill>
+                        </a:rPr>
+                        <a:t>7</a:t>
+                      </a:r>
+                    </a:p>
+                  </a:txBody>
+                  <a:tcPr/>
+                </a:tc>
+                <a:tc>
+                  <a:txBody>
+                    <a:bodyPr/>
+                    <a:lstStyle/>
+                    <a:p>
+                      <a:r>
+                        <a:rPr sz="1100">
+                          <a:solidFill>
+                            <a:srgbClr val="3D424E"/>
+                          </a:solidFill>
+                        </a:rPr>
+                        <a:t>6,7 %</a:t>
+                      </a:r>
+                    </a:p>
+                  </a:txBody>
+                  <a:tcPr/>
+                </a:tc>
+                <a:tc>
+                  <a:txBody>
+                    <a:bodyPr/>
+                    <a:lstStyle/>
+                    <a:p>
+                      <a:r>
+                        <a:rPr sz="1100">
+                          <a:solidFill>
+                            <a:srgbClr val="3D424E"/>
+                          </a:solidFill>
+                        </a:rPr>
+                        <a:t>Schumann 2023 (MST), Pereira 2026 (SkinToneNet)</a:t>
+                      </a:r>
+                    </a:p>
+                  </a:txBody>
+                  <a:tcPr/>
+                </a:tc>
+              </a:tr>
+              <a:tr h="365760">
+                <a:tc>
+                  <a:txBody>
+                    <a:bodyPr/>
+                    <a:lstStyle/>
+                    <a:p>
+                      <a:r>
+                        <a:rPr sz="1100">
+                          <a:solidFill>
+                            <a:srgbClr val="3D424E"/>
+                          </a:solidFill>
+                        </a:rPr>
+                        <a:t>D — Mitigação algorítmica</a:t>
+                      </a:r>
+                    </a:p>
+                  </a:txBody>
+                  <a:tcPr/>
+                </a:tc>
+                <a:tc>
+                  <a:txBody>
+                    <a:bodyPr/>
+                    <a:lstStyle/>
+                    <a:p>
+                      <a:r>
+                        <a:rPr sz="1100">
+                          <a:solidFill>
+                            <a:srgbClr val="3D424E"/>
+                          </a:solidFill>
+                        </a:rPr>
+                        <a:t>10</a:t>
+                      </a:r>
+                    </a:p>
+                  </a:txBody>
+                  <a:tcPr/>
+                </a:tc>
+                <a:tc>
+                  <a:txBody>
+                    <a:bodyPr/>
+                    <a:lstStyle/>
+                    <a:p>
+                      <a:r>
+                        <a:rPr sz="1100">
+                          <a:solidFill>
+                            <a:srgbClr val="3D424E"/>
+                          </a:solidFill>
+                        </a:rPr>
+                        <a:t>9,6 %</a:t>
+                      </a:r>
+                    </a:p>
+                  </a:txBody>
+                  <a:tcPr/>
+                </a:tc>
+                <a:tc>
+                  <a:txBody>
+                    <a:bodyPr/>
+                    <a:lstStyle/>
+                    <a:p>
+                      <a:r>
+                        <a:rPr sz="1100">
+                          <a:solidFill>
+                            <a:srgbClr val="3D424E"/>
+                          </a:solidFill>
+                        </a:rPr>
+                        <a:t>Madras LAFTR 2018, Sagawa Group DRO 2020</a:t>
+                      </a:r>
+                    </a:p>
+                  </a:txBody>
+                  <a:tcPr/>
+                </a:tc>
+              </a:tr>
+              <a:tr h="365760">
+                <a:tc>
+                  <a:txBody>
+                    <a:bodyPr/>
+                    <a:lstStyle/>
+                    <a:p>
+                      <a:r>
+                        <a:rPr sz="1100">
+                          <a:solidFill>
+                            <a:srgbClr val="3D424E"/>
+                          </a:solidFill>
+                        </a:rPr>
+                        <a:t>E — Auditoria e Surveys</a:t>
+                      </a:r>
+                    </a:p>
+                  </a:txBody>
+                  <a:tcPr/>
+                </a:tc>
+                <a:tc>
+                  <a:txBody>
+                    <a:bodyPr/>
+                    <a:lstStyle/>
+                    <a:p>
+                      <a:r>
+                        <a:rPr sz="1100">
+                          <a:solidFill>
+                            <a:srgbClr val="3D424E"/>
+                          </a:solidFill>
+                        </a:rPr>
+                        <a:t>14</a:t>
+                      </a:r>
+                    </a:p>
+                  </a:txBody>
+                  <a:tcPr/>
+                </a:tc>
+                <a:tc>
+                  <a:txBody>
+                    <a:bodyPr/>
+                    <a:lstStyle/>
+                    <a:p>
+                      <a:r>
+                        <a:rPr sz="1100">
+                          <a:solidFill>
+                            <a:srgbClr val="3D424E"/>
+                          </a:solidFill>
+                        </a:rPr>
+                        <a:t>13,5 %</a:t>
+                      </a:r>
+                    </a:p>
+                  </a:txBody>
+                  <a:tcPr/>
+                </a:tc>
+                <a:tc>
+                  <a:txBody>
+                    <a:bodyPr/>
+                    <a:lstStyle/>
+                    <a:p>
+                      <a:r>
+                        <a:rPr sz="1100">
+                          <a:solidFill>
+                            <a:srgbClr val="3D424E"/>
+                          </a:solidFill>
+                        </a:rPr>
+                        <a:t>Buolamwini 2018, Mehrabi 2021 survey</a:t>
+                      </a:r>
+                    </a:p>
+                  </a:txBody>
+                  <a:tcPr/>
+                </a:tc>
+              </a:tr>
+              <a:tr h="365760">
+                <a:tc>
+                  <a:txBody>
+                    <a:bodyPr/>
+                    <a:lstStyle/>
+                    <a:p>
+                      <a:r>
+                        <a:rPr sz="1100">
+                          <a:solidFill>
+                            <a:srgbClr val="3D424E"/>
+                          </a:solidFill>
+                        </a:rPr>
+                        <a:t>F — Fundamentação científica e ética</a:t>
+                      </a:r>
+                    </a:p>
+                  </a:txBody>
+                  <a:tcPr/>
+                </a:tc>
+                <a:tc>
+                  <a:txBody>
+                    <a:bodyPr/>
+                    <a:lstStyle/>
+                    <a:p>
+                      <a:r>
+                        <a:rPr sz="1100">
+                          <a:solidFill>
+                            <a:srgbClr val="3D424E"/>
+                          </a:solidFill>
+                        </a:rPr>
+                        <a:t>3</a:t>
+                      </a:r>
+                    </a:p>
+                  </a:txBody>
+                  <a:tcPr/>
+                </a:tc>
+                <a:tc>
+                  <a:txBody>
+                    <a:bodyPr/>
+                    <a:lstStyle/>
+                    <a:p>
+                      <a:r>
+                        <a:rPr sz="1100">
+                          <a:solidFill>
+                            <a:srgbClr val="3D424E"/>
+                          </a:solidFill>
+                        </a:rPr>
+                        <a:t>2,9 %</a:t>
+                      </a:r>
+                    </a:p>
+                  </a:txBody>
+                  <a:tcPr/>
+                </a:tc>
+                <a:tc>
+                  <a:txBody>
+                    <a:bodyPr/>
+                    <a:lstStyle/>
+                    <a:p>
+                      <a:r>
+                        <a:rPr sz="1100">
+                          <a:solidFill>
+                            <a:srgbClr val="3D424E"/>
+                          </a:solidFill>
+                        </a:rPr>
+                        <a:t>Fuentes AAPA 2019, Lewontin 1972</a:t>
+                      </a:r>
+                    </a:p>
+                  </a:txBody>
+                  <a:tcPr/>
+                </a:tc>
+              </a:tr>
+              <a:tr h="365760">
+                <a:tc>
+                  <a:txBody>
+                    <a:bodyPr/>
+                    <a:lstStyle/>
+                    <a:p>
+                      <a:r>
+                        <a:rPr sz="1100">
+                          <a:solidFill>
+                            <a:srgbClr val="3D424E"/>
+                          </a:solidFill>
+                        </a:rPr>
+                        <a:t>G — Mecanismos ML paradigmáticos</a:t>
+                      </a:r>
+                    </a:p>
+                  </a:txBody>
+                  <a:tcPr/>
+                </a:tc>
+                <a:tc>
+                  <a:txBody>
+                    <a:bodyPr/>
+                    <a:lstStyle/>
+                    <a:p>
+                      <a:r>
+                        <a:rPr sz="1100">
+                          <a:solidFill>
+                            <a:srgbClr val="3D424E"/>
+                          </a:solidFill>
+                        </a:rPr>
+                        <a:t>9</a:t>
+                      </a:r>
+                    </a:p>
+                  </a:txBody>
+                  <a:tcPr/>
+                </a:tc>
+                <a:tc>
+                  <a:txBody>
+                    <a:bodyPr/>
+                    <a:lstStyle/>
+                    <a:p>
+                      <a:r>
+                        <a:rPr sz="1100">
+                          <a:solidFill>
+                            <a:srgbClr val="3D424E"/>
+                          </a:solidFill>
+                        </a:rPr>
+                        <a:t>8,7 %</a:t>
+                      </a:r>
+                    </a:p>
+                  </a:txBody>
+                  <a:tcPr/>
+                </a:tc>
+                <a:tc>
+                  <a:txBody>
+                    <a:bodyPr/>
+                    <a:lstStyle/>
+                    <a:p>
+                      <a:r>
+                        <a:rPr sz="1100">
+                          <a:solidFill>
+                            <a:srgbClr val="3D424E"/>
+                          </a:solidFill>
+                        </a:rPr>
+                        <a:t>Perez FiLM 2018, Ba LayerNorm, He ResNet</a:t>
+                      </a:r>
+                    </a:p>
+                  </a:txBody>
+                  <a:tcPr/>
+                </a:tc>
+              </a:tr>
+              <a:tr h="365760">
+                <a:tc>
+                  <a:txBody>
+                    <a:bodyPr/>
+                    <a:lstStyle/>
+                    <a:p>
+                      <a:r>
+                        <a:rPr sz="1100">
+                          <a:solidFill>
+                            <a:srgbClr val="3D424E"/>
+                          </a:solidFill>
+                        </a:rPr>
+                        <a:t>I — VLM / CLIP em fairness</a:t>
+                      </a:r>
+                    </a:p>
+                  </a:txBody>
+                  <a:tcPr/>
+                </a:tc>
+                <a:tc>
+                  <a:txBody>
+                    <a:bodyPr/>
+                    <a:lstStyle/>
+                    <a:p>
+                      <a:r>
+                        <a:rPr sz="1100">
+                          <a:solidFill>
+                            <a:srgbClr val="3D424E"/>
+                          </a:solidFill>
+                        </a:rPr>
+                        <a:t>14</a:t>
+                      </a:r>
+                    </a:p>
+                  </a:txBody>
+                  <a:tcPr/>
+                </a:tc>
+                <a:tc>
+                  <a:txBody>
+                    <a:bodyPr/>
+                    <a:lstStyle/>
+                    <a:p>
+                      <a:r>
+                        <a:rPr sz="1100">
+                          <a:solidFill>
+                            <a:srgbClr val="3D424E"/>
+                          </a:solidFill>
+                        </a:rPr>
+                        <a:t>13,5 %</a:t>
+                      </a:r>
+                    </a:p>
+                  </a:txBody>
+                  <a:tcPr/>
+                </a:tc>
+                <a:tc>
+                  <a:txBody>
+                    <a:bodyPr/>
+                    <a:lstStyle/>
+                    <a:p>
+                      <a:r>
+                        <a:rPr sz="1100">
+                          <a:solidFill>
+                            <a:srgbClr val="3D424E"/>
+                          </a:solidFill>
+                        </a:rPr>
+                        <a:t>Radford CLIP 2021, Luo FairCLIP 2024</a:t>
+                      </a:r>
+                    </a:p>
+                  </a:txBody>
+                  <a:tcPr/>
+                </a:tc>
+              </a:tr>
+              <a:tr h="365760">
+                <a:tc>
+                  <a:txBody>
+                    <a:bodyPr/>
+                    <a:lstStyle/>
+                    <a:p>
+                      <a:r>
+                        <a:rPr sz="1100">
+                          <a:solidFill>
+                            <a:srgbClr val="3D424E"/>
+                          </a:solidFill>
+                        </a:rPr>
+                        <a:t>J — Conditioning moderno</a:t>
+                      </a:r>
+                    </a:p>
+                  </a:txBody>
+                  <a:tcPr/>
+                </a:tc>
+                <a:tc>
+                  <a:txBody>
+                    <a:bodyPr/>
+                    <a:lstStyle/>
+                    <a:p>
+                      <a:r>
+                        <a:rPr sz="1100">
+                          <a:solidFill>
+                            <a:srgbClr val="3D424E"/>
+                          </a:solidFill>
+                        </a:rPr>
+                        <a:t>5</a:t>
+                      </a:r>
+                    </a:p>
+                  </a:txBody>
+                  <a:tcPr/>
+                </a:tc>
+                <a:tc>
+                  <a:txBody>
+                    <a:bodyPr/>
+                    <a:lstStyle/>
+                    <a:p>
+                      <a:r>
+                        <a:rPr sz="1100">
+                          <a:solidFill>
+                            <a:srgbClr val="3D424E"/>
+                          </a:solidFill>
+                        </a:rPr>
+                        <a:t>4,8 %</a:t>
+                      </a:r>
+                    </a:p>
+                  </a:txBody>
+                  <a:tcPr/>
+                </a:tc>
+                <a:tc>
+                  <a:txBody>
+                    <a:bodyPr/>
+                    <a:lstStyle/>
+                    <a:p>
+                      <a:r>
+                        <a:rPr sz="1100">
+                          <a:solidFill>
+                            <a:srgbClr val="3D424E"/>
+                          </a:solidFill>
+                        </a:rPr>
+                        <a:t>Liu ConvNeXt 2022, Dhariwal ADM 2021</a:t>
+                      </a:r>
+                    </a:p>
+                  </a:txBody>
+                  <a:tcPr/>
+                </a:tc>
+              </a:tr>
+              <a:tr h="365760">
+                <a:tc>
+                  <a:txBody>
+                    <a:bodyPr/>
+                    <a:lstStyle/>
+                    <a:p>
+                      <a:r>
+                        <a:rPr sz="1100">
+                          <a:solidFill>
+                            <a:srgbClr val="3D424E"/>
+                          </a:solidFill>
+                        </a:rPr>
+                        <a:t>K — Fundadores de FR (DeepFace, ArcFace, CosFace)</a:t>
+                      </a:r>
+                    </a:p>
+                  </a:txBody>
+                  <a:tcPr/>
+                </a:tc>
+                <a:tc>
+                  <a:txBody>
+                    <a:bodyPr/>
+                    <a:lstStyle/>
+                    <a:p>
+                      <a:r>
+                        <a:rPr sz="1100">
+                          <a:solidFill>
+                            <a:srgbClr val="3D424E"/>
+                          </a:solidFill>
+                        </a:rPr>
+                        <a:t>6</a:t>
+                      </a:r>
+                    </a:p>
+                  </a:txBody>
+                  <a:tcPr/>
+                </a:tc>
+                <a:tc>
+                  <a:txBody>
+                    <a:bodyPr/>
+                    <a:lstStyle/>
+                    <a:p>
+                      <a:r>
+                        <a:rPr sz="1100">
+                          <a:solidFill>
+                            <a:srgbClr val="3D424E"/>
+                          </a:solidFill>
+                        </a:rPr>
+                        <a:t>5,8 %</a:t>
+                      </a:r>
+                    </a:p>
+                  </a:txBody>
+                  <a:tcPr/>
+                </a:tc>
+                <a:tc>
+                  <a:txBody>
+                    <a:bodyPr/>
+                    <a:lstStyle/>
+                    <a:p>
+                      <a:r>
+                        <a:rPr sz="1100">
+                          <a:solidFill>
+                            <a:srgbClr val="3D424E"/>
+                          </a:solidFill>
+                        </a:rPr>
+                        <a:t>Taigman DeepFace 2014, Wang CosFace 2018</a:t>
+                      </a:r>
+                    </a:p>
+                  </a:txBody>
+                  <a:tcPr/>
+                </a:tc>
+              </a:tr>
+              <a:tr h="365760">
+                <a:tc>
+                  <a:txBody>
+                    <a:bodyPr/>
+                    <a:lstStyle/>
+                    <a:p>
+                      <a:r>
+                        <a:rPr sz="1100">
+                          <a:solidFill>
+                            <a:srgbClr val="3D424E"/>
+                          </a:solidFill>
+                        </a:rPr>
+                        <a:t>L — Auxiliar / complementar</a:t>
+                      </a:r>
+                    </a:p>
+                  </a:txBody>
+                  <a:tcPr/>
+                </a:tc>
+                <a:tc>
+                  <a:txBody>
+                    <a:bodyPr/>
+                    <a:lstStyle/>
+                    <a:p>
+                      <a:r>
+                        <a:rPr sz="1100">
+                          <a:solidFill>
+                            <a:srgbClr val="3D424E"/>
+                          </a:solidFill>
+                        </a:rPr>
+                        <a:t>13</a:t>
+                      </a:r>
+                    </a:p>
+                  </a:txBody>
+                  <a:tcPr/>
+                </a:tc>
+                <a:tc>
+                  <a:txBody>
+                    <a:bodyPr/>
+                    <a:lstStyle/>
+                    <a:p>
+                      <a:r>
+                        <a:rPr sz="1100">
+                          <a:solidFill>
+                            <a:srgbClr val="3D424E"/>
+                          </a:solidFill>
+                        </a:rPr>
+                        <a:t>12,5 %</a:t>
+                      </a:r>
+                    </a:p>
+                  </a:txBody>
+                  <a:tcPr/>
+                </a:tc>
+                <a:tc>
+                  <a:txBody>
+                    <a:bodyPr/>
+                    <a:lstStyle/>
+                    <a:p>
+                      <a:r>
+                        <a:rPr sz="1100">
+                          <a:solidFill>
+                            <a:srgbClr val="3D424E"/>
+                          </a:solidFill>
+                        </a:rPr>
+                        <a:t>Karkkainen datasets, Hendrycks robustness</a:t>
+                      </a:r>
+                    </a:p>
+                  </a:txBody>
+                  <a:tcPr/>
+                </a:tc>
+              </a:tr>
+              <a:tr h="365760">
+                <a:tc>
+                  <a:txBody>
+                    <a:bodyPr/>
+                    <a:lstStyle/>
+                    <a:p>
+                      <a:r>
+                        <a:rPr sz="1100">
+                          <a:solidFill>
+                            <a:srgbClr val="3D424E"/>
+                          </a:solidFill>
+                        </a:rPr>
+                        <a:t>R8 — Diversidade Latinx (antropo + genética + socio)</a:t>
+                      </a:r>
+                    </a:p>
+                  </a:txBody>
+                  <a:tcPr/>
+                </a:tc>
+                <a:tc>
+                  <a:txBody>
+                    <a:bodyPr/>
+                    <a:lstStyle/>
+                    <a:p>
+                      <a:r>
+                        <a:rPr sz="1100">
+                          <a:solidFill>
+                            <a:srgbClr val="3D424E"/>
+                          </a:solidFill>
+                        </a:rPr>
+                        <a:t>3</a:t>
+                      </a:r>
+                    </a:p>
+                  </a:txBody>
+                  <a:tcPr/>
+                </a:tc>
+                <a:tc>
+                  <a:txBody>
+                    <a:bodyPr/>
+                    <a:lstStyle/>
+                    <a:p>
+                      <a:r>
+                        <a:rPr sz="1100">
+                          <a:solidFill>
+                            <a:srgbClr val="3D424E"/>
+                          </a:solidFill>
+                        </a:rPr>
+                        <a:t>2,9 %</a:t>
+                      </a:r>
+                    </a:p>
+                  </a:txBody>
+                  <a:tcPr/>
+                </a:tc>
+                <a:tc>
+                  <a:txBody>
+                    <a:bodyPr/>
+                    <a:lstStyle/>
+                    <a:p>
+                      <a:r>
+                        <a:rPr sz="1100">
+                          <a:solidFill>
+                            <a:srgbClr val="3D424E"/>
+                          </a:solidFill>
+                        </a:rPr>
+                        <a:t>Telles 2014, Bryc 2015, Pew 2017</a:t>
+                      </a:r>
+                    </a:p>
+                  </a:txBody>
+                  <a:tcPr/>
+                </a:tc>
+              </a:tr>
+            </a:tbl>
+          </a:graphicData>
+        </a:graphic>
+      </p:graphicFrame>
       <p:sp>
         <p:nvSpPr>
           <p:cNvPr id="5" name="TextBox 4"/>
@@ -7380,7 +7664,7 @@
               </a:defRPr>
             </a:pPr>
             <a:r>
-              <a:t>Fora do escopo dos 3 bullets da agenda, mas precisa de encaminhamento hoje.</a:t>
+              <a:t>Fronteira temporal: 55 fichas (53 %) são 2024+, incluindo 5 papers de 2026 — corpus na fronteira absoluta.</a:t>
             </a:r>
           </a:p>
         </p:txBody>
@@ -7393,7 +7677,150 @@
 </p:sld>
 </file>
 
-<file path=ppt/slides/slide2.xml><?xml version="1.0" encoding="utf-8"?>
+<file path=ppt/slides/slide5.xml><?xml version="1.0" encoding="utf-8"?>
+<p:sld xmlns:a="http://schemas.openxmlformats.org/drawingml/2006/main" xmlns:p="http://schemas.openxmlformats.org/presentationml/2006/main" xmlns:r="http://schemas.openxmlformats.org/officeDocument/2006/relationships">
+  <p:cSld>
+    <p:spTree>
+      <p:nvGrpSpPr>
+        <p:cNvPr id="1" name=""/>
+        <p:cNvGrpSpPr/>
+        <p:nvPr/>
+      </p:nvGrpSpPr>
+      <p:grpSpPr/>
+      <p:sp>
+        <p:nvSpPr>
+          <p:cNvPr id="2" name="Rectangle 1"/>
+          <p:cNvSpPr/>
+          <p:nvPr/>
+        </p:nvSpPr>
+        <p:spPr>
+          <a:xfrm>
+            <a:off x="0" y="0"/>
+            <a:ext cx="12188952" cy="6858000"/>
+          </a:xfrm>
+          <a:prstGeom prst="rect">
+            <a:avLst/>
+          </a:prstGeom>
+          <a:solidFill>
+            <a:srgbClr val="1F2A4E"/>
+          </a:solidFill>
+          <a:ln>
+            <a:noFill/>
+          </a:ln>
+        </p:spPr>
+        <p:style>
+          <a:lnRef idx="1">
+            <a:schemeClr val="accent1"/>
+          </a:lnRef>
+          <a:fillRef idx="3">
+            <a:schemeClr val="accent1"/>
+          </a:fillRef>
+          <a:effectRef idx="2">
+            <a:schemeClr val="accent1"/>
+          </a:effectRef>
+          <a:fontRef idx="minor">
+            <a:schemeClr val="lt1"/>
+          </a:fontRef>
+        </p:style>
+        <p:txBody>
+          <a:bodyPr rtlCol="0" anchor="ctr"/>
+          <a:lstStyle/>
+          <a:p>
+            <a:pPr algn="ctr"/>
+          </a:p>
+        </p:txBody>
+      </p:sp>
+      <p:sp>
+        <p:nvSpPr>
+          <p:cNvPr id="3" name="TextBox 2"/>
+          <p:cNvSpPr txBox="1"/>
+          <p:nvPr/>
+        </p:nvSpPr>
+        <p:spPr>
+          <a:xfrm>
+            <a:off x="731520" y="1371600"/>
+            <a:ext cx="2743200" cy="2743200"/>
+          </a:xfrm>
+          <a:prstGeom prst="rect">
+            <a:avLst/>
+          </a:prstGeom>
+          <a:noFill/>
+        </p:spPr>
+        <p:txBody>
+          <a:bodyPr wrap="none">
+            <a:spAutoFit/>
+          </a:bodyPr>
+          <a:lstStyle/>
+          <a:p>
+            <a:pPr>
+              <a:defRPr sz="14000" b="1">
+                <a:solidFill>
+                  <a:srgbClr val="FFFFFF"/>
+                </a:solidFill>
+              </a:defRPr>
+            </a:pPr>
+            <a:r>
+              <a:t>1</a:t>
+            </a:r>
+          </a:p>
+        </p:txBody>
+      </p:sp>
+      <p:sp>
+        <p:nvSpPr>
+          <p:cNvPr id="4" name="TextBox 3"/>
+          <p:cNvSpPr txBox="1"/>
+          <p:nvPr/>
+        </p:nvSpPr>
+        <p:spPr>
+          <a:xfrm>
+            <a:off x="3931920" y="2286000"/>
+            <a:ext cx="7772400" cy="1828800"/>
+          </a:xfrm>
+          <a:prstGeom prst="rect">
+            <a:avLst/>
+          </a:prstGeom>
+          <a:noFill/>
+        </p:spPr>
+        <p:txBody>
+          <a:bodyPr wrap="square">
+            <a:spAutoFit/>
+          </a:bodyPr>
+          <a:lstStyle/>
+          <a:p>
+            <a:pPr>
+              <a:defRPr sz="3600" b="1">
+                <a:solidFill>
+                  <a:srgbClr val="FFFFFF"/>
+                </a:solidFill>
+              </a:defRPr>
+            </a:pPr>
+            <a:r>
+              <a:t>Plano até a defesa</a:t>
+            </a:r>
+          </a:p>
+          <a:p>
+            <a:pPr>
+              <a:defRPr sz="1800">
+                <a:solidFill>
+                  <a:srgbClr val="E8EAED"/>
+                </a:solidFill>
+              </a:defRPr>
+            </a:pPr>
+            <a:r>
+              <a:t>Três marcos formais, novo horizonte de outubro</a:t>
+            </a:r>
+          </a:p>
+        </p:txBody>
+      </p:sp>
+    </p:spTree>
+  </p:cSld>
+  <p:clrMapOvr>
+    <a:masterClrMapping/>
+  </p:clrMapOvr>
+</p:sld>
+</file>
+
+<file path=ppt/slides/slide6.xml><?xml version="1.0" encoding="utf-8"?>
 <p:sld xmlns:a="http://schemas.openxmlformats.org/drawingml/2006/main" xmlns:p="http://schemas.openxmlformats.org/presentationml/2006/main" xmlns:r="http://schemas.openxmlformats.org/officeDocument/2006/relationships">
   <p:cSld>
     <p:spTree>
@@ -7433,7 +7860,7 @@
               </a:defRPr>
             </a:pPr>
             <a:r>
-              <a:t>Objetivo desta reunião</a:t>
+              <a:t>Cronograma consolidado</a:t>
             </a:r>
           </a:p>
         </p:txBody>
@@ -7481,167 +7908,362 @@
           </a:p>
         </p:txBody>
       </p:sp>
-      <p:sp>
-        <p:nvSpPr>
-          <p:cNvPr id="4" name="TextBox 3"/>
-          <p:cNvSpPr txBox="1"/>
+      <p:graphicFrame>
+        <p:nvGraphicFramePr>
+          <p:cNvPr id="4" name="Table 3"/>
+          <p:cNvGraphicFramePr>
+            <a:graphicFrameLocks noGrp="1"/>
+          </p:cNvGraphicFramePr>
           <p:nvPr/>
-        </p:nvSpPr>
-        <p:spPr>
-          <a:xfrm>
-            <a:off x="457200" y="1371600"/>
-            <a:ext cx="11430000" cy="4937760"/>
-          </a:xfrm>
-          <a:prstGeom prst="rect">
-            <a:avLst/>
-          </a:prstGeom>
-          <a:noFill/>
-        </p:spPr>
-        <p:txBody>
-          <a:bodyPr wrap="square">
-            <a:spAutoFit/>
-          </a:bodyPr>
-          <a:lstStyle/>
-          <a:p>
-            <a:pPr>
-              <a:spcAft>
-                <a:spcPts val="800"/>
-              </a:spcAft>
-            </a:pPr>
-            <a:r>
-              <a:rPr sz="1600" b="1">
-                <a:solidFill>
-                  <a:srgbClr val="1F2A4E"/>
-                </a:solidFill>
-              </a:rPr>
-              <a:t>  </a:t>
-            </a:r>
-            <a:r>
-              <a:rPr sz="1600">
-                <a:solidFill>
-                  <a:srgbClr val="3D424E"/>
-                </a:solidFill>
-              </a:rPr>
-              <a:t/>
-            </a:r>
-          </a:p>
-          <a:p>
-            <a:pPr>
-              <a:spcAft>
-                <a:spcPts val="800"/>
-              </a:spcAft>
-            </a:pPr>
-            <a:r>
-              <a:rPr sz="1600" b="1">
-                <a:solidFill>
-                  <a:srgbClr val="1F2A4E"/>
-                </a:solidFill>
-              </a:rPr>
-              <a:t>1.  </a:t>
-            </a:r>
-            <a:r>
-              <a:rPr sz="1600">
-                <a:solidFill>
-                  <a:srgbClr val="3D424E"/>
-                </a:solidFill>
-              </a:rPr>
-              <a:t>Plano até a defesa</a:t>
-            </a:r>
-          </a:p>
-          <a:p>
-            <a:pPr>
-              <a:spcAft>
-                <a:spcPts val="800"/>
-              </a:spcAft>
-            </a:pPr>
-            <a:r>
-              <a:rPr sz="1600" b="1">
-                <a:solidFill>
-                  <a:srgbClr val="1F2A4E"/>
-                </a:solidFill>
-              </a:rPr>
-              <a:t>  </a:t>
-            </a:r>
-            <a:r>
-              <a:rPr sz="1600">
-                <a:solidFill>
-                  <a:srgbClr val="3D424E"/>
-                </a:solidFill>
-              </a:rPr>
-              <a:t/>
-            </a:r>
-          </a:p>
-          <a:p>
-            <a:pPr>
-              <a:spcAft>
-                <a:spcPts val="800"/>
-              </a:spcAft>
-            </a:pPr>
-            <a:r>
-              <a:rPr sz="1600" b="1">
-                <a:solidFill>
-                  <a:srgbClr val="1F2A4E"/>
-                </a:solidFill>
-              </a:rPr>
-              <a:t>2.  </a:t>
-            </a:r>
-            <a:r>
-              <a:rPr sz="1600">
-                <a:solidFill>
-                  <a:srgbClr val="3D424E"/>
-                </a:solidFill>
-              </a:rPr>
-              <a:t>Estado real da escrita — qualificação migrada para o Overleaf, pronta para primeira revisão</a:t>
-            </a:r>
-          </a:p>
-          <a:p>
-            <a:pPr>
-              <a:spcAft>
-                <a:spcPts val="800"/>
-              </a:spcAft>
-            </a:pPr>
-            <a:r>
-              <a:rPr sz="1600" b="1">
-                <a:solidFill>
-                  <a:srgbClr val="1F2A4E"/>
-                </a:solidFill>
-              </a:rPr>
-              <a:t>  </a:t>
-            </a:r>
-            <a:r>
-              <a:rPr sz="1600">
-                <a:solidFill>
-                  <a:srgbClr val="3D424E"/>
-                </a:solidFill>
-              </a:rPr>
-              <a:t/>
-            </a:r>
-          </a:p>
-          <a:p>
-            <a:pPr>
-              <a:spcAft>
-                <a:spcPts val="800"/>
-              </a:spcAft>
-            </a:pPr>
-            <a:r>
-              <a:rPr sz="1600" b="1">
-                <a:solidFill>
-                  <a:srgbClr val="1F2A4E"/>
-                </a:solidFill>
-              </a:rPr>
-              <a:t>3.  </a:t>
-            </a:r>
-            <a:r>
-              <a:rPr sz="1600">
-                <a:solidFill>
-                  <a:srgbClr val="3D424E"/>
-                </a:solidFill>
-              </a:rPr>
-              <a:t>Decisão de pesquisa ética — Declaração de Responsabilidade em preparação</a:t>
-            </a:r>
-          </a:p>
-        </p:txBody>
-      </p:sp>
+        </p:nvGraphicFramePr>
+        <p:xfrm>
+          <a:off x="457200" y="1371600"/>
+          <a:ext cx="11887200" cy="4754880"/>
+        </p:xfrm>
+        <a:graphic>
+          <a:graphicData uri="http://schemas.openxmlformats.org/drawingml/2006/table">
+            <a:tbl>
+              <a:tblPr firstRow="1" bandRow="1">
+                <a:tableStyleId>{5C22544A-7EE6-4342-B048-85BDC9FD1C3A}</a:tableStyleId>
+              </a:tblPr>
+              <a:tblGrid>
+                <a:gridCol w="457200"/>
+                <a:gridCol w="5029200"/>
+                <a:gridCol w="1828800"/>
+                <a:gridCol w="4572000"/>
+              </a:tblGrid>
+              <a:tr h="1188720">
+                <a:tc>
+                  <a:txBody>
+                    <a:bodyPr/>
+                    <a:lstStyle/>
+                    <a:p>
+                      <a:r>
+                        <a:rPr sz="1300" b="1">
+                          <a:solidFill>
+                            <a:srgbClr val="FFFFFF"/>
+                          </a:solidFill>
+                        </a:rPr>
+                        <a:t>#</a:t>
+                      </a:r>
+                    </a:p>
+                  </a:txBody>
+                  <a:tcPr>
+                    <a:solidFill>
+                      <a:srgbClr val="1F2A4E"/>
+                    </a:solidFill>
+                  </a:tcPr>
+                </a:tc>
+                <a:tc>
+                  <a:txBody>
+                    <a:bodyPr/>
+                    <a:lstStyle/>
+                    <a:p>
+                      <a:r>
+                        <a:rPr sz="1300" b="1">
+                          <a:solidFill>
+                            <a:srgbClr val="FFFFFF"/>
+                          </a:solidFill>
+                        </a:rPr>
+                        <a:t>Marco</a:t>
+                      </a:r>
+                    </a:p>
+                  </a:txBody>
+                  <a:tcPr>
+                    <a:solidFill>
+                      <a:srgbClr val="1F2A4E"/>
+                    </a:solidFill>
+                  </a:tcPr>
+                </a:tc>
+                <a:tc>
+                  <a:txBody>
+                    <a:bodyPr/>
+                    <a:lstStyle/>
+                    <a:p>
+                      <a:r>
+                        <a:rPr sz="1300" b="1">
+                          <a:solidFill>
+                            <a:srgbClr val="FFFFFF"/>
+                          </a:solidFill>
+                        </a:rPr>
+                        <a:t>Data</a:t>
+                      </a:r>
+                    </a:p>
+                  </a:txBody>
+                  <a:tcPr>
+                    <a:solidFill>
+                      <a:srgbClr val="1F2A4E"/>
+                    </a:solidFill>
+                  </a:tcPr>
+                </a:tc>
+                <a:tc>
+                  <a:txBody>
+                    <a:bodyPr/>
+                    <a:lstStyle/>
+                    <a:p>
+                      <a:r>
+                        <a:rPr sz="1300" b="1">
+                          <a:solidFill>
+                            <a:srgbClr val="FFFFFF"/>
+                          </a:solidFill>
+                        </a:rPr>
+                        <a:t>Comentário</a:t>
+                      </a:r>
+                    </a:p>
+                  </a:txBody>
+                  <a:tcPr>
+                    <a:solidFill>
+                      <a:srgbClr val="1F2A4E"/>
+                    </a:solidFill>
+                  </a:tcPr>
+                </a:tc>
+              </a:tr>
+              <a:tr h="1188720">
+                <a:tc>
+                  <a:txBody>
+                    <a:bodyPr/>
+                    <a:lstStyle/>
+                    <a:p>
+                      <a:r>
+                        <a:rPr sz="1100">
+                          <a:solidFill>
+                            <a:srgbClr val="3D424E"/>
+                          </a:solidFill>
+                        </a:rPr>
+                        <a:t>1</a:t>
+                      </a:r>
+                    </a:p>
+                  </a:txBody>
+                  <a:tcPr>
+                    <a:solidFill>
+                      <a:srgbClr val="E8EAED"/>
+                    </a:solidFill>
+                  </a:tcPr>
+                </a:tc>
+                <a:tc>
+                  <a:txBody>
+                    <a:bodyPr/>
+                    <a:lstStyle/>
+                    <a:p>
+                      <a:r>
+                        <a:rPr sz="1100">
+                          <a:solidFill>
+                            <a:srgbClr val="3D424E"/>
+                          </a:solidFill>
+                        </a:rPr>
+                        <a:t>Primeira revisão da qualificação ao orientador</a:t>
+                      </a:r>
+                    </a:p>
+                  </a:txBody>
+                  <a:tcPr>
+                    <a:solidFill>
+                      <a:srgbClr val="E8EAED"/>
+                    </a:solidFill>
+                  </a:tcPr>
+                </a:tc>
+                <a:tc>
+                  <a:txBody>
+                    <a:bodyPr/>
+                    <a:lstStyle/>
+                    <a:p>
+                      <a:r>
+                        <a:rPr sz="1100">
+                          <a:solidFill>
+                            <a:srgbClr val="3D424E"/>
+                          </a:solidFill>
+                        </a:rPr>
+                        <a:t>15/jul/2026</a:t>
+                      </a:r>
+                    </a:p>
+                  </a:txBody>
+                  <a:tcPr>
+                    <a:solidFill>
+                      <a:srgbClr val="E8EAED"/>
+                    </a:solidFill>
+                  </a:tcPr>
+                </a:tc>
+                <a:tc>
+                  <a:txBody>
+                    <a:bodyPr/>
+                    <a:lstStyle/>
+                    <a:p>
+                      <a:r>
+                        <a:rPr sz="1100">
+                          <a:solidFill>
+                            <a:srgbClr val="3D424E"/>
+                          </a:solidFill>
+                        </a:rPr>
+                        <a:t>Overleaf compartilhado hoje; Cap 1, 3, 4, 5 em versão inicial; Cap 2 em revisão ativa</a:t>
+                      </a:r>
+                    </a:p>
+                  </a:txBody>
+                  <a:tcPr>
+                    <a:solidFill>
+                      <a:srgbClr val="E8EAED"/>
+                    </a:solidFill>
+                  </a:tcPr>
+                </a:tc>
+              </a:tr>
+              <a:tr h="1188720">
+                <a:tc>
+                  <a:txBody>
+                    <a:bodyPr/>
+                    <a:lstStyle/>
+                    <a:p>
+                      <a:r>
+                        <a:rPr sz="1100">
+                          <a:solidFill>
+                            <a:srgbClr val="3D424E"/>
+                          </a:solidFill>
+                        </a:rPr>
+                        <a:t>2</a:t>
+                      </a:r>
+                    </a:p>
+                  </a:txBody>
+                  <a:tcPr/>
+                </a:tc>
+                <a:tc>
+                  <a:txBody>
+                    <a:bodyPr/>
+                    <a:lstStyle/>
+                    <a:p>
+                      <a:r>
+                        <a:rPr sz="1100">
+                          <a:solidFill>
+                            <a:srgbClr val="3D424E"/>
+                          </a:solidFill>
+                        </a:rPr>
+                        <a:t>Pedido formal de qualificação ao PPG-CC / ICT</a:t>
+                      </a:r>
+                    </a:p>
+                  </a:txBody>
+                  <a:tcPr/>
+                </a:tc>
+                <a:tc>
+                  <a:txBody>
+                    <a:bodyPr/>
+                    <a:lstStyle/>
+                    <a:p>
+                      <a:r>
+                        <a:rPr sz="1100">
+                          <a:solidFill>
+                            <a:srgbClr val="3D424E"/>
+                          </a:solidFill>
+                        </a:rPr>
+                        <a:t>30/jul/2026</a:t>
+                      </a:r>
+                    </a:p>
+                  </a:txBody>
+                  <a:tcPr/>
+                </a:tc>
+                <a:tc>
+                  <a:txBody>
+                    <a:bodyPr/>
+                    <a:lstStyle/>
+                    <a:p>
+                      <a:r>
+                        <a:rPr sz="1100">
+                          <a:solidFill>
+                            <a:srgbClr val="3D424E"/>
+                          </a:solidFill>
+                        </a:rPr>
+                        <a:t>Prazo regimental do Programa — mantido</a:t>
+                      </a:r>
+                    </a:p>
+                  </a:txBody>
+                  <a:tcPr/>
+                </a:tc>
+              </a:tr>
+              <a:tr h="1188720">
+                <a:tc>
+                  <a:txBody>
+                    <a:bodyPr/>
+                    <a:lstStyle/>
+                    <a:p>
+                      <a:r>
+                        <a:rPr sz="1100">
+                          <a:solidFill>
+                            <a:srgbClr val="3D424E"/>
+                          </a:solidFill>
+                        </a:rPr>
+                        <a:t>3</a:t>
+                      </a:r>
+                    </a:p>
+                  </a:txBody>
+                  <a:tcPr>
+                    <a:solidFill>
+                      <a:srgbClr val="E8EAED"/>
+                    </a:solidFill>
+                  </a:tcPr>
+                </a:tc>
+                <a:tc>
+                  <a:txBody>
+                    <a:bodyPr/>
+                    <a:lstStyle/>
+                    <a:p>
+                      <a:r>
+                        <a:rPr sz="1100">
+                          <a:solidFill>
+                            <a:srgbClr val="3D424E"/>
+                          </a:solidFill>
+                        </a:rPr>
+                        <a:t>Defesa da qualificação</a:t>
+                      </a:r>
+                    </a:p>
+                  </a:txBody>
+                  <a:tcPr>
+                    <a:solidFill>
+                      <a:srgbClr val="E8EAED"/>
+                    </a:solidFill>
+                  </a:tcPr>
+                </a:tc>
+                <a:tc>
+                  <a:txBody>
+                    <a:bodyPr/>
+                    <a:lstStyle/>
+                    <a:p>
+                      <a:r>
+                        <a:rPr sz="1100">
+                          <a:solidFill>
+                            <a:srgbClr val="3D424E"/>
+                          </a:solidFill>
+                        </a:rPr>
+                        <a:t>outubro/2026</a:t>
+                      </a:r>
+                    </a:p>
+                  </a:txBody>
+                  <a:tcPr>
+                    <a:solidFill>
+                      <a:srgbClr val="E8EAED"/>
+                    </a:solidFill>
+                  </a:tcPr>
+                </a:tc>
+                <a:tc>
+                  <a:txBody>
+                    <a:bodyPr/>
+                    <a:lstStyle/>
+                    <a:p>
+                      <a:r>
+                        <a:rPr sz="1100">
+                          <a:solidFill>
+                            <a:srgbClr val="3D424E"/>
+                          </a:solidFill>
+                        </a:rPr>
+                        <a:t>Ajuste de agosto → outubro (extensão de 2 meses solicitada)</a:t>
+                      </a:r>
+                    </a:p>
+                  </a:txBody>
+                  <a:tcPr>
+                    <a:solidFill>
+                      <a:srgbClr val="E8EAED"/>
+                    </a:solidFill>
+                  </a:tcPr>
+                </a:tc>
+              </a:tr>
+            </a:tbl>
+          </a:graphicData>
+        </a:graphic>
+      </p:graphicFrame>
       <p:sp>
         <p:nvSpPr>
           <p:cNvPr id="5" name="TextBox 4"/>
@@ -7672,7 +8294,7 @@
               </a:defRPr>
             </a:pPr>
             <a:r>
-              <a:t>Solicitação pessoal e debate técnico fecham a reunião como pontos complementares.</a:t>
+              <a:t>Marco 1 antecipado em dois dias. Marcos 2 e 3 conforme planejado.</a:t>
             </a:r>
           </a:p>
         </p:txBody>
@@ -7685,7 +8307,150 @@
 </p:sld>
 </file>
 
-<file path=ppt/slides/slide20.xml><?xml version="1.0" encoding="utf-8"?>
+<file path=ppt/slides/slide7.xml><?xml version="1.0" encoding="utf-8"?>
+<p:sld xmlns:a="http://schemas.openxmlformats.org/drawingml/2006/main" xmlns:p="http://schemas.openxmlformats.org/presentationml/2006/main" xmlns:r="http://schemas.openxmlformats.org/officeDocument/2006/relationships">
+  <p:cSld>
+    <p:spTree>
+      <p:nvGrpSpPr>
+        <p:cNvPr id="1" name=""/>
+        <p:cNvGrpSpPr/>
+        <p:nvPr/>
+      </p:nvGrpSpPr>
+      <p:grpSpPr/>
+      <p:sp>
+        <p:nvSpPr>
+          <p:cNvPr id="2" name="Rectangle 1"/>
+          <p:cNvSpPr/>
+          <p:nvPr/>
+        </p:nvSpPr>
+        <p:spPr>
+          <a:xfrm>
+            <a:off x="0" y="0"/>
+            <a:ext cx="12188952" cy="6858000"/>
+          </a:xfrm>
+          <a:prstGeom prst="rect">
+            <a:avLst/>
+          </a:prstGeom>
+          <a:solidFill>
+            <a:srgbClr val="1F2A4E"/>
+          </a:solidFill>
+          <a:ln>
+            <a:noFill/>
+          </a:ln>
+        </p:spPr>
+        <p:style>
+          <a:lnRef idx="1">
+            <a:schemeClr val="accent1"/>
+          </a:lnRef>
+          <a:fillRef idx="3">
+            <a:schemeClr val="accent1"/>
+          </a:fillRef>
+          <a:effectRef idx="2">
+            <a:schemeClr val="accent1"/>
+          </a:effectRef>
+          <a:fontRef idx="minor">
+            <a:schemeClr val="lt1"/>
+          </a:fontRef>
+        </p:style>
+        <p:txBody>
+          <a:bodyPr rtlCol="0" anchor="ctr"/>
+          <a:lstStyle/>
+          <a:p>
+            <a:pPr algn="ctr"/>
+          </a:p>
+        </p:txBody>
+      </p:sp>
+      <p:sp>
+        <p:nvSpPr>
+          <p:cNvPr id="3" name="TextBox 2"/>
+          <p:cNvSpPr txBox="1"/>
+          <p:nvPr/>
+        </p:nvSpPr>
+        <p:spPr>
+          <a:xfrm>
+            <a:off x="731520" y="1371600"/>
+            <a:ext cx="2743200" cy="2743200"/>
+          </a:xfrm>
+          <a:prstGeom prst="rect">
+            <a:avLst/>
+          </a:prstGeom>
+          <a:noFill/>
+        </p:spPr>
+        <p:txBody>
+          <a:bodyPr wrap="none">
+            <a:spAutoFit/>
+          </a:bodyPr>
+          <a:lstStyle/>
+          <a:p>
+            <a:pPr>
+              <a:defRPr sz="14000" b="1">
+                <a:solidFill>
+                  <a:srgbClr val="FFFFFF"/>
+                </a:solidFill>
+              </a:defRPr>
+            </a:pPr>
+            <a:r>
+              <a:t>2</a:t>
+            </a:r>
+          </a:p>
+        </p:txBody>
+      </p:sp>
+      <p:sp>
+        <p:nvSpPr>
+          <p:cNvPr id="4" name="TextBox 3"/>
+          <p:cNvSpPr txBox="1"/>
+          <p:nvPr/>
+        </p:nvSpPr>
+        <p:spPr>
+          <a:xfrm>
+            <a:off x="3931920" y="2286000"/>
+            <a:ext cx="7772400" cy="1828800"/>
+          </a:xfrm>
+          <a:prstGeom prst="rect">
+            <a:avLst/>
+          </a:prstGeom>
+          <a:noFill/>
+        </p:spPr>
+        <p:txBody>
+          <a:bodyPr wrap="square">
+            <a:spAutoFit/>
+          </a:bodyPr>
+          <a:lstStyle/>
+          <a:p>
+            <a:pPr>
+              <a:defRPr sz="3600" b="1">
+                <a:solidFill>
+                  <a:srgbClr val="FFFFFF"/>
+                </a:solidFill>
+              </a:defRPr>
+            </a:pPr>
+            <a:r>
+              <a:t>Estado da escrita</a:t>
+            </a:r>
+          </a:p>
+          <a:p>
+            <a:pPr>
+              <a:defRPr sz="1800">
+                <a:solidFill>
+                  <a:srgbClr val="E8EAED"/>
+                </a:solidFill>
+              </a:defRPr>
+            </a:pPr>
+            <a:r>
+              <a:t>O que já está escrito e como vai virar Overleaf</a:t>
+            </a:r>
+          </a:p>
+        </p:txBody>
+      </p:sp>
+    </p:spTree>
+  </p:cSld>
+  <p:clrMapOvr>
+    <a:masterClrMapping/>
+  </p:clrMapOvr>
+</p:sld>
+</file>
+
+<file path=ppt/slides/slide8.xml><?xml version="1.0" encoding="utf-8"?>
 <p:sld xmlns:a="http://schemas.openxmlformats.org/drawingml/2006/main" xmlns:p="http://schemas.openxmlformats.org/presentationml/2006/main" xmlns:r="http://schemas.openxmlformats.org/officeDocument/2006/relationships">
   <p:cSld>
     <p:spTree>
@@ -7725,7 +8490,7 @@
               </a:defRPr>
             </a:pPr>
             <a:r>
-              <a:t>Perguntas em aberto — técnicas + administrativas</a:t>
+              <a:t>Estado real da escrita — qualificação no Overleaf</a:t>
             </a:r>
           </a:p>
         </p:txBody>
@@ -7806,7 +8571,7 @@
                   <a:srgbClr val="1F2A4E"/>
                 </a:solidFill>
               </a:rPr>
-              <a:t>1. Estrutura entregue no Overleaf:  </a:t>
+              <a:t>Cap 1 — Introdução:  </a:t>
             </a:r>
             <a:r>
               <a:rPr sz="1600">
@@ -7814,7 +8579,7 @@
                   <a:srgbClr val="3D424E"/>
                 </a:solidFill>
               </a:rPr>
-              <a:t>há capítulo que o senhor gostaria de ver com tratamento diferente antes da minha próxima rodada de revisão?</a:t>
+              <a:t>no Overleaf, versão inicial completa; ancora a disparidade Black 90 % × Latinx 60 %</a:t>
             </a:r>
           </a:p>
           <a:p>
@@ -7829,7 +8594,7 @@
                   <a:srgbClr val="1F2A4E"/>
                 </a:solidFill>
               </a:rPr>
-              <a:t>2. Configurações comparativas:  </a:t>
+              <a:t>Cap 2 — Revisão:  </a:t>
             </a:r>
             <a:r>
               <a:rPr sz="1600">
@@ -7837,7 +8602,7 @@
                   <a:srgbClr val="3D424E"/>
                 </a:solidFill>
               </a:rPr>
-              <a:t>as 4 configs (A/B/C/D) bastam ou incluo uma 5ª variante (skin tone contínuo ITA/L* em vez de MST discreto)?</a:t>
+              <a:t>em escrita e revisão ativa; corpo bibliográfico está sendo densificado com 104 referências mapeadas</a:t>
             </a:r>
           </a:p>
           <a:p>
@@ -7852,7 +8617,7 @@
                   <a:srgbClr val="1F2A4E"/>
                 </a:solidFill>
               </a:rPr>
-              <a:t>3. Cap 2 — ablation arquitetural:  </a:t>
+              <a:t>Cap 3 — Objetivos:  </a:t>
             </a:r>
             <a:r>
               <a:rPr sz="1600">
@@ -7860,7 +8625,7 @@
                   <a:srgbClr val="3D424E"/>
                 </a:solidFill>
               </a:rPr>
-              <a:t>faz sentido meia-página comparando FiLM × CBN × cross-attention × AdaIN, ou deixo para a defesa oral?</a:t>
+              <a:t>no Overleaf; OG + 6 OE + 6 hipóteses + 7 contribuições</a:t>
             </a:r>
           </a:p>
           <a:p>
@@ -7875,7 +8640,7 @@
                   <a:srgbClr val="1F2A4E"/>
                 </a:solidFill>
               </a:rPr>
-              <a:t>4. OE-4 (fair transfer):  </a:t>
+              <a:t>Cap 4 — Metodologia:  </a:t>
             </a:r>
             <a:r>
               <a:rPr sz="1600">
@@ -7883,7 +8648,7 @@
                   <a:srgbClr val="3D424E"/>
                 </a:solidFill>
               </a:rPr>
-              <a:t>métrica principal TPR@FAR=1e-4 estratificada por raça, ou DR agregado?</a:t>
+              <a:t>no Overleaf; pipeline 6 etapas + 4 configurações + adequação ética CEP formalizada</a:t>
             </a:r>
           </a:p>
           <a:p>
@@ -7898,7 +8663,7 @@
                   <a:srgbClr val="1F2A4E"/>
                 </a:solidFill>
               </a:rPr>
-              <a:t>5. Declaração CEP:  </a:t>
+              <a:t>Cap 5 — Cronograma:  </a:t>
             </a:r>
             <a:r>
               <a:rPr sz="1600">
@@ -7906,7 +8671,7 @@
                   <a:srgbClr val="3D424E"/>
                 </a:solidFill>
               </a:rPr>
-              <a:t>quem é o chefe do departamento que assina? Posso encaminhar o projeto formatado hoje mesmo.</a:t>
+              <a:t>no Overleaf; marcos ajustados conforme plano consolidado</a:t>
             </a:r>
           </a:p>
           <a:p>
@@ -7921,7 +8686,7 @@
                   <a:srgbClr val="1F2A4E"/>
                 </a:solidFill>
               </a:rPr>
-              <a:t>6. Extensão de 2 meses:  </a:t>
+              <a:t>  </a:t>
             </a:r>
             <a:r>
               <a:rPr sz="1600">
@@ -7929,7 +8694,7 @@
                   <a:srgbClr val="3D424E"/>
                 </a:solidFill>
               </a:rPr>
-              <a:t>trâmite correto — carta direta, requerimento SEI ao PPG, ou processo formal?</a:t>
+              <a:t/>
             </a:r>
           </a:p>
           <a:p>
@@ -7944,7 +8709,7 @@
                   <a:srgbClr val="1F2A4E"/>
                 </a:solidFill>
               </a:rPr>
-              <a:t>Bônus:  </a:t>
+              <a:t>Transposição:  </a:t>
             </a:r>
             <a:r>
               <a:rPr sz="1600">
@@ -7952,7 +8717,30 @@
                   <a:srgbClr val="3D424E"/>
                 </a:solidFill>
               </a:rPr>
-              <a:t>sugestões para banca preliminar (fairness externo + CV aplicada)?</a:t>
+              <a:t>esqueleto no Overleaf; bibliografia .bib com 104 entradas importada; referências cruzadas testadas</a:t>
+            </a:r>
+          </a:p>
+          <a:p>
+            <a:pPr>
+              <a:spcAft>
+                <a:spcPts val="800"/>
+              </a:spcAft>
+            </a:pPr>
+            <a:r>
+              <a:rPr sz="1600" b="1">
+                <a:solidFill>
+                  <a:srgbClr val="1F2A4E"/>
+                </a:solidFill>
+              </a:rPr>
+              <a:t>Compartilhamento:  </a:t>
+            </a:r>
+            <a:r>
+              <a:rPr sz="1600">
+                <a:solidFill>
+                  <a:srgbClr val="3D424E"/>
+                </a:solidFill>
+              </a:rPr>
+              <a:t>convite do Overleaf enviado ao senhor a partir desta reunião — foco maior de revisão pedido no Cap 2</a:t>
             </a:r>
           </a:p>
         </p:txBody>
@@ -7987,7 +8775,7 @@
               </a:defRPr>
             </a:pPr>
             <a:r>
-              <a:t>Nesta semana entro em modo revisão conforme feedback vindo do Overleaf.</a:t>
+              <a:t>Cap 2 é o capítulo mais denso e onde ainda concentro esforço técnico esta semana.</a:t>
             </a:r>
           </a:p>
         </p:txBody>
@@ -8000,147 +8788,7 @@
 </p:sld>
 </file>
 
-<file path=ppt/slides/slide21.xml><?xml version="1.0" encoding="utf-8"?>
-<p:sld xmlns:a="http://schemas.openxmlformats.org/drawingml/2006/main" xmlns:p="http://schemas.openxmlformats.org/presentationml/2006/main" xmlns:r="http://schemas.openxmlformats.org/officeDocument/2006/relationships">
-  <p:cSld>
-    <p:spTree>
-      <p:nvGrpSpPr>
-        <p:cNvPr id="1" name=""/>
-        <p:cNvGrpSpPr/>
-        <p:nvPr/>
-      </p:nvGrpSpPr>
-      <p:grpSpPr/>
-      <p:sp>
-        <p:nvSpPr>
-          <p:cNvPr id="2" name="Rectangle 1"/>
-          <p:cNvSpPr/>
-          <p:nvPr/>
-        </p:nvSpPr>
-        <p:spPr>
-          <a:xfrm>
-            <a:off x="0" y="0"/>
-            <a:ext cx="12188952" cy="6858000"/>
-          </a:xfrm>
-          <a:prstGeom prst="rect">
-            <a:avLst/>
-          </a:prstGeom>
-          <a:solidFill>
-            <a:srgbClr val="1F2A4E"/>
-          </a:solidFill>
-          <a:ln>
-            <a:noFill/>
-          </a:ln>
-        </p:spPr>
-        <p:style>
-          <a:lnRef idx="1">
-            <a:schemeClr val="accent1"/>
-          </a:lnRef>
-          <a:fillRef idx="3">
-            <a:schemeClr val="accent1"/>
-          </a:fillRef>
-          <a:effectRef idx="2">
-            <a:schemeClr val="accent1"/>
-          </a:effectRef>
-          <a:fontRef idx="minor">
-            <a:schemeClr val="lt1"/>
-          </a:fontRef>
-        </p:style>
-        <p:txBody>
-          <a:bodyPr rtlCol="0" anchor="ctr"/>
-          <a:lstStyle/>
-          <a:p>
-            <a:pPr algn="ctr"/>
-          </a:p>
-        </p:txBody>
-      </p:sp>
-      <p:sp>
-        <p:nvSpPr>
-          <p:cNvPr id="3" name="TextBox 2"/>
-          <p:cNvSpPr txBox="1"/>
-          <p:nvPr/>
-        </p:nvSpPr>
-        <p:spPr>
-          <a:xfrm>
-            <a:off x="731520" y="1371600"/>
-            <a:ext cx="2743200" cy="2743200"/>
-          </a:xfrm>
-          <a:prstGeom prst="rect">
-            <a:avLst/>
-          </a:prstGeom>
-          <a:noFill/>
-        </p:spPr>
-        <p:txBody>
-          <a:bodyPr wrap="none">
-            <a:spAutoFit/>
-          </a:bodyPr>
-          <a:lstStyle/>
-          <a:p>
-            <a:pPr>
-              <a:defRPr sz="14000" b="1">
-                <a:solidFill>
-                  <a:srgbClr val="FFFFFF"/>
-                </a:solidFill>
-              </a:defRPr>
-            </a:pPr>
-          </a:p>
-        </p:txBody>
-      </p:sp>
-      <p:sp>
-        <p:nvSpPr>
-          <p:cNvPr id="4" name="TextBox 3"/>
-          <p:cNvSpPr txBox="1"/>
-          <p:nvPr/>
-        </p:nvSpPr>
-        <p:spPr>
-          <a:xfrm>
-            <a:off x="3931920" y="2286000"/>
-            <a:ext cx="7772400" cy="1828800"/>
-          </a:xfrm>
-          <a:prstGeom prst="rect">
-            <a:avLst/>
-          </a:prstGeom>
-          <a:noFill/>
-        </p:spPr>
-        <p:txBody>
-          <a:bodyPr wrap="square">
-            <a:spAutoFit/>
-          </a:bodyPr>
-          <a:lstStyle/>
-          <a:p>
-            <a:pPr>
-              <a:defRPr sz="3600" b="1">
-                <a:solidFill>
-                  <a:srgbClr val="FFFFFF"/>
-                </a:solidFill>
-              </a:defRPr>
-            </a:pPr>
-            <a:r>
-              <a:t>Obrigado</a:t>
-            </a:r>
-          </a:p>
-          <a:p>
-            <a:pPr>
-              <a:defRPr sz="1800">
-                <a:solidFill>
-                  <a:srgbClr val="E8EAED"/>
-                </a:solidFill>
-              </a:defRPr>
-            </a:pPr>
-            <a:r>
-              <a:t>Aberto para o debate</a:t>
-            </a:r>
-          </a:p>
-        </p:txBody>
-      </p:sp>
-    </p:spTree>
-  </p:cSld>
-  <p:clrMapOvr>
-    <a:masterClrMapping/>
-  </p:clrMapOvr>
-</p:sld>
-</file>
-
-<file path=ppt/slides/slide3.xml><?xml version="1.0" encoding="utf-8"?>
+<file path=ppt/slides/slide9.xml><?xml version="1.0" encoding="utf-8"?>
 <p:sld xmlns:a="http://schemas.openxmlformats.org/drawingml/2006/main" xmlns:p="http://schemas.openxmlformats.org/presentationml/2006/main" xmlns:r="http://schemas.openxmlformats.org/officeDocument/2006/relationships">
   <p:cSld>
     <p:spTree>
@@ -8180,7 +8828,7 @@
               </a:defRPr>
             </a:pPr>
             <a:r>
-              <a:t>A tese em uma tela</a:t>
+              <a:t>Pipeline proposto — seis etapas encadeadas</a:t>
             </a:r>
           </a:p>
         </p:txBody>
@@ -8228,321 +8876,6 @@
           </a:p>
         </p:txBody>
       </p:sp>
-      <p:sp>
-        <p:nvSpPr>
-          <p:cNvPr id="4" name="TextBox 3"/>
-          <p:cNvSpPr txBox="1"/>
-          <p:nvPr/>
-        </p:nvSpPr>
-        <p:spPr>
-          <a:xfrm>
-            <a:off x="457200" y="1371600"/>
-            <a:ext cx="11430000" cy="4937760"/>
-          </a:xfrm>
-          <a:prstGeom prst="rect">
-            <a:avLst/>
-          </a:prstGeom>
-          <a:noFill/>
-        </p:spPr>
-        <p:txBody>
-          <a:bodyPr wrap="square">
-            <a:spAutoFit/>
-          </a:bodyPr>
-          <a:lstStyle/>
-          <a:p>
-            <a:pPr>
-              <a:spcAft>
-                <a:spcPts val="800"/>
-              </a:spcAft>
-            </a:pPr>
-            <a:r>
-              <a:rPr sz="1600" b="1">
-                <a:solidFill>
-                  <a:srgbClr val="1F2A4E"/>
-                </a:solidFill>
-              </a:rPr>
-              <a:t>Problema empírico:  </a:t>
-            </a:r>
-            <a:r>
-              <a:rPr sz="1600">
-                <a:solidFill>
-                  <a:srgbClr val="3D424E"/>
-                </a:solidFill>
-              </a:rPr>
-              <a:t>F1 macro alto mascara disparidade Black ≈ 90 % vs Latinx ≈ 60 % em SOTA sobre FairFace (AlDahoul 2024)</a:t>
-            </a:r>
-          </a:p>
-          <a:p>
-            <a:pPr>
-              <a:spcAft>
-                <a:spcPts val="800"/>
-              </a:spcAft>
-            </a:pPr>
-            <a:r>
-              <a:rPr sz="1600" b="1">
-                <a:solidFill>
-                  <a:srgbClr val="1F2A4E"/>
-                </a:solidFill>
-              </a:rPr>
-              <a:t>Pergunta de pesquisa:  </a:t>
-            </a:r>
-            <a:r>
-              <a:rPr sz="1600">
-                <a:solidFill>
-                  <a:srgbClr val="3D424E"/>
-                </a:solidFill>
-              </a:rPr>
-              <a:t>condicionar arquiteturalmente um classificador racial pelo tom de pele (MST) reduz essa disparidade sem sacrificar acurácia agregada?</a:t>
-            </a:r>
-          </a:p>
-          <a:p>
-            <a:pPr>
-              <a:spcAft>
-                <a:spcPts val="800"/>
-              </a:spcAft>
-            </a:pPr>
-            <a:r>
-              <a:rPr sz="1600" b="1">
-                <a:solidFill>
-                  <a:srgbClr val="1F2A4E"/>
-                </a:solidFill>
-              </a:rPr>
-              <a:t>  </a:t>
-            </a:r>
-            <a:r>
-              <a:rPr sz="1600">
-                <a:solidFill>
-                  <a:srgbClr val="3D424E"/>
-                </a:solidFill>
-              </a:rPr>
-              <a:t/>
-            </a:r>
-          </a:p>
-          <a:p>
-            <a:pPr>
-              <a:spcAft>
-                <a:spcPts val="800"/>
-              </a:spcAft>
-            </a:pPr>
-            <a:r>
-              <a:rPr sz="1600" b="1">
-                <a:solidFill>
-                  <a:srgbClr val="1F2A4E"/>
-                </a:solidFill>
-              </a:rPr>
-              <a:t>Objetivo geral:  </a:t>
-            </a:r>
-            <a:r>
-              <a:rPr sz="1600">
-                <a:solidFill>
-                  <a:srgbClr val="3D424E"/>
-                </a:solidFill>
-              </a:rPr>
-              <a:t>desenvolver e avaliar pipeline de classificação racial que incorpora tom de pele (escala Monk 10 classes) como sinal auxiliar condicionante via mecanismo arquitetural (FiLM)</a:t>
-            </a:r>
-          </a:p>
-          <a:p>
-            <a:pPr>
-              <a:spcAft>
-                <a:spcPts val="800"/>
-              </a:spcAft>
-            </a:pPr>
-            <a:r>
-              <a:rPr sz="1600" b="1">
-                <a:solidFill>
-                  <a:srgbClr val="1F2A4E"/>
-                </a:solidFill>
-              </a:rPr>
-              <a:t>  </a:t>
-            </a:r>
-            <a:r>
-              <a:rPr sz="1600">
-                <a:solidFill>
-                  <a:srgbClr val="3D424E"/>
-                </a:solidFill>
-              </a:rPr>
-              <a:t/>
-            </a:r>
-          </a:p>
-          <a:p>
-            <a:pPr>
-              <a:spcAft>
-                <a:spcPts val="800"/>
-              </a:spcAft>
-            </a:pPr>
-            <a:r>
-              <a:rPr sz="1600" b="1">
-                <a:solidFill>
-                  <a:srgbClr val="1F2A4E"/>
-                </a:solidFill>
-              </a:rPr>
-              <a:t>Contribuição principal:  </a:t>
-            </a:r>
-            <a:r>
-              <a:rPr sz="1600">
-                <a:solidFill>
-                  <a:srgbClr val="3D424E"/>
-                </a:solidFill>
-              </a:rPr>
-              <a:t>primeira instância empírica de tom de pele como contexto arquitetural para race classification multi-classe</a:t>
-            </a:r>
-          </a:p>
-          <a:p>
-            <a:pPr>
-              <a:spcAft>
-                <a:spcPts val="800"/>
-              </a:spcAft>
-            </a:pPr>
-            <a:r>
-              <a:rPr sz="1600" b="1">
-                <a:solidFill>
-                  <a:srgbClr val="1F2A4E"/>
-                </a:solidFill>
-              </a:rPr>
-              <a:t>Diagnóstico central:  </a:t>
-            </a:r>
-            <a:r>
-              <a:rPr sz="1600">
-                <a:solidFill>
-                  <a:srgbClr val="3D424E"/>
-                </a:solidFill>
-              </a:rPr>
-              <a:t>erro Latinx = componente fenotípico irredutível (overlap MST) + componente algorítmico — a decomposição é o diferencial da tese</a:t>
-            </a:r>
-          </a:p>
-        </p:txBody>
-      </p:sp>
-      <p:sp>
-        <p:nvSpPr>
-          <p:cNvPr id="5" name="TextBox 4"/>
-          <p:cNvSpPr txBox="1"/>
-          <p:nvPr/>
-        </p:nvSpPr>
-        <p:spPr>
-          <a:xfrm>
-            <a:off x="457200" y="6446520"/>
-            <a:ext cx="11430000" cy="365760"/>
-          </a:xfrm>
-          <a:prstGeom prst="rect">
-            <a:avLst/>
-          </a:prstGeom>
-          <a:noFill/>
-        </p:spPr>
-        <p:txBody>
-          <a:bodyPr wrap="none">
-            <a:spAutoFit/>
-          </a:bodyPr>
-          <a:lstStyle/>
-          <a:p>
-            <a:pPr>
-              <a:defRPr sz="1000" i="1">
-                <a:solidFill>
-                  <a:srgbClr val="707682"/>
-                </a:solidFill>
-              </a:defRPr>
-            </a:pPr>
-            <a:r>
-              <a:t>MST vs Fitzpatrick: 10 vs 6 classes, projetado para CV vs dermatologia. FiLM vs concatenação: modula vs re-aprende.</a:t>
-            </a:r>
-          </a:p>
-        </p:txBody>
-      </p:sp>
-    </p:spTree>
-  </p:cSld>
-  <p:clrMapOvr>
-    <a:masterClrMapping/>
-  </p:clrMapOvr>
-</p:sld>
-</file>
-
-<file path=ppt/slides/slide4.xml><?xml version="1.0" encoding="utf-8"?>
-<p:sld xmlns:a="http://schemas.openxmlformats.org/drawingml/2006/main" xmlns:p="http://schemas.openxmlformats.org/presentationml/2006/main" xmlns:r="http://schemas.openxmlformats.org/officeDocument/2006/relationships">
-  <p:cSld>
-    <p:spTree>
-      <p:nvGrpSpPr>
-        <p:cNvPr id="1" name=""/>
-        <p:cNvGrpSpPr/>
-        <p:nvPr/>
-      </p:nvGrpSpPr>
-      <p:grpSpPr/>
-      <p:sp>
-        <p:nvSpPr>
-          <p:cNvPr id="2" name="TextBox 1"/>
-          <p:cNvSpPr txBox="1"/>
-          <p:nvPr/>
-        </p:nvSpPr>
-        <p:spPr>
-          <a:xfrm>
-            <a:off x="457200" y="365760"/>
-            <a:ext cx="11430000" cy="822960"/>
-          </a:xfrm>
-          <a:prstGeom prst="rect">
-            <a:avLst/>
-          </a:prstGeom>
-          <a:noFill/>
-        </p:spPr>
-        <p:txBody>
-          <a:bodyPr wrap="square">
-            <a:spAutoFit/>
-          </a:bodyPr>
-          <a:lstStyle/>
-          <a:p>
-            <a:pPr>
-              <a:defRPr sz="2600" b="1">
-                <a:solidFill>
-                  <a:srgbClr val="1F2A4E"/>
-                </a:solidFill>
-              </a:defRPr>
-            </a:pPr>
-            <a:r>
-              <a:t>Corpus consolidado — 104 fichas em 11 linhas de pesquisa</a:t>
-            </a:r>
-          </a:p>
-        </p:txBody>
-      </p:sp>
-      <p:sp>
-        <p:nvSpPr>
-          <p:cNvPr id="3" name="Rectangle 2"/>
-          <p:cNvSpPr/>
-          <p:nvPr/>
-        </p:nvSpPr>
-        <p:spPr>
-          <a:xfrm>
-            <a:off x="457200" y="1143000"/>
-            <a:ext cx="11430000" cy="36576"/>
-          </a:xfrm>
-          <a:prstGeom prst="rect">
-            <a:avLst/>
-          </a:prstGeom>
-          <a:solidFill>
-            <a:srgbClr val="1F2A4E"/>
-          </a:solidFill>
-          <a:ln>
-            <a:noFill/>
-          </a:ln>
-        </p:spPr>
-        <p:style>
-          <a:lnRef idx="1">
-            <a:schemeClr val="accent1"/>
-          </a:lnRef>
-          <a:fillRef idx="3">
-            <a:schemeClr val="accent1"/>
-          </a:fillRef>
-          <a:effectRef idx="2">
-            <a:schemeClr val="accent1"/>
-          </a:effectRef>
-          <a:fontRef idx="minor">
-            <a:schemeClr val="lt1"/>
-          </a:fontRef>
-        </p:style>
-        <p:txBody>
-          <a:bodyPr rtlCol="0" anchor="ctr"/>
-          <a:lstStyle/>
-          <a:p>
-            <a:pPr algn="ctr"/>
-          </a:p>
-        </p:txBody>
-      </p:sp>
       <p:graphicFrame>
         <p:nvGraphicFramePr>
           <p:cNvPr id="4" name="Table 3"/>
@@ -8562,12 +8895,11 @@
                 <a:tableStyleId>{5C22544A-7EE6-4342-B048-85BDC9FD1C3A}</a:tableStyleId>
               </a:tblPr>
               <a:tblGrid>
-                <a:gridCol w="4389120"/>
-                <a:gridCol w="640080"/>
-                <a:gridCol w="1097280"/>
-                <a:gridCol w="5303520"/>
+                <a:gridCol w="2560320"/>
+                <a:gridCol w="5029200"/>
+                <a:gridCol w="3840480"/>
               </a:tblGrid>
-              <a:tr h="365760">
+              <a:tr h="679268">
                 <a:tc>
                   <a:txBody>
                     <a:bodyPr/>
@@ -8579,7 +8911,7 @@
                             <a:srgbClr val="FFFFFF"/>
                           </a:solidFill>
                         </a:rPr>
-                        <a:t>Linha de pesquisa</a:t>
+                        <a:t>Etapa</a:t>
                       </a:r>
                     </a:p>
                   </a:txBody>
@@ -8600,7 +8932,7 @@
                             <a:srgbClr val="FFFFFF"/>
                           </a:solidFill>
                         </a:rPr>
-                        <a:t>N</a:t>
+                        <a:t>O que faz</a:t>
                       </a:r>
                     </a:p>
                   </a:txBody>
@@ -8621,7 +8953,7 @@
                             <a:srgbClr val="FFFFFF"/>
                           </a:solidFill>
                         </a:rPr>
-                        <a:t>% corpus</a:t>
+                        <a:t>Entrega / contribuição</a:t>
                       </a:r>
                     </a:p>
                   </a:txBody>
@@ -8631,866 +8963,347 @@
                     </a:solidFill>
                   </a:tcPr>
                 </a:tc>
-                <a:tc>
-                  <a:txBody>
-                    <a:bodyPr/>
-                    <a:lstStyle/>
-                    <a:p>
-                      <a:r>
-                        <a:rPr sz="1300" b="1">
-                          <a:solidFill>
-                            <a:srgbClr val="FFFFFF"/>
-                          </a:solidFill>
-                        </a:rPr>
-                        <a:t>Papers-âncora</a:t>
+              </a:tr>
+              <a:tr h="679268">
+                <a:tc>
+                  <a:txBody>
+                    <a:bodyPr/>
+                    <a:lstStyle/>
+                    <a:p>
+                      <a:r>
+                        <a:rPr sz="1100">
+                          <a:solidFill>
+                            <a:srgbClr val="3D424E"/>
+                          </a:solidFill>
+                        </a:rPr>
+                        <a:t>1. Classificador MST</a:t>
+                      </a:r>
+                    </a:p>
+                  </a:txBody>
+                  <a:tcPr/>
+                </a:tc>
+                <a:tc>
+                  <a:txBody>
+                    <a:bodyPr/>
+                    <a:lstStyle/>
+                    <a:p>
+                      <a:r>
+                        <a:rPr sz="1100">
+                          <a:solidFill>
+                            <a:srgbClr val="3D424E"/>
+                          </a:solidFill>
+                        </a:rPr>
+                        <a:t>SkinToneNet pré-treinado + validação interna em subset FairFace estratificado</a:t>
+                      </a:r>
+                    </a:p>
+                  </a:txBody>
+                  <a:tcPr/>
+                </a:tc>
+                <a:tc>
+                  <a:txBody>
+                    <a:bodyPr/>
+                    <a:lstStyle/>
+                    <a:p>
+                      <a:r>
+                        <a:rPr sz="1100">
+                          <a:solidFill>
+                            <a:srgbClr val="3D424E"/>
+                          </a:solidFill>
+                        </a:rPr>
+                        <a:t>Insumo do pipeline (não é contribuição)</a:t>
+                      </a:r>
+                    </a:p>
+                  </a:txBody>
+                  <a:tcPr/>
+                </a:tc>
+              </a:tr>
+              <a:tr h="679268">
+                <a:tc>
+                  <a:txBody>
+                    <a:bodyPr/>
+                    <a:lstStyle/>
+                    <a:p>
+                      <a:r>
+                        <a:rPr sz="1100">
+                          <a:solidFill>
+                            <a:srgbClr val="3D424E"/>
+                          </a:solidFill>
+                        </a:rPr>
+                        <a:t>2. Auditoria FairFace</a:t>
+                      </a:r>
+                    </a:p>
+                  </a:txBody>
+                  <a:tcPr/>
+                </a:tc>
+                <a:tc>
+                  <a:txBody>
+                    <a:bodyPr/>
+                    <a:lstStyle/>
+                    <a:p>
+                      <a:r>
+                        <a:rPr sz="1100">
+                          <a:solidFill>
+                            <a:srgbClr val="3D424E"/>
+                          </a:solidFill>
+                        </a:rPr>
+                        <a:t>Aplicar SkinToneNet sobre todo FairFace validation set</a:t>
+                      </a:r>
+                    </a:p>
+                  </a:txBody>
+                  <a:tcPr/>
+                </a:tc>
+                <a:tc>
+                  <a:txBody>
+                    <a:bodyPr/>
+                    <a:lstStyle/>
+                    <a:p>
+                      <a:r>
+                        <a:rPr sz="1100">
+                          <a:solidFill>
+                            <a:srgbClr val="3D424E"/>
+                          </a:solidFill>
+                        </a:rPr>
+                        <a:t>Matriz pública MST × race classes — Contribuição C2</a:t>
+                      </a:r>
+                    </a:p>
+                  </a:txBody>
+                  <a:tcPr/>
+                </a:tc>
+              </a:tr>
+              <a:tr h="679268">
+                <a:tc>
+                  <a:txBody>
+                    <a:bodyPr/>
+                    <a:lstStyle/>
+                    <a:p>
+                      <a:r>
+                        <a:rPr sz="1100">
+                          <a:solidFill>
+                            <a:srgbClr val="3D424E"/>
+                          </a:solidFill>
+                        </a:rPr>
+                        <a:t>3. Race classifier com conditioning</a:t>
                       </a:r>
                     </a:p>
                   </a:txBody>
                   <a:tcPr>
                     <a:solidFill>
-                      <a:srgbClr val="1F2A4E"/>
+                      <a:srgbClr val="E8EAED"/>
                     </a:solidFill>
                   </a:tcPr>
                 </a:tc>
+                <a:tc>
+                  <a:txBody>
+                    <a:bodyPr/>
+                    <a:lstStyle/>
+                    <a:p>
+                      <a:r>
+                        <a:rPr sz="1100">
+                          <a:solidFill>
+                            <a:srgbClr val="3D424E"/>
+                          </a:solidFill>
+                        </a:rPr>
+                        <a:t>ConvNeXt-T fine-tuned em FairFace, camadas FiLM por estágio recebendo vetor MST</a:t>
+                      </a:r>
+                    </a:p>
+                  </a:txBody>
+                  <a:tcPr>
+                    <a:solidFill>
+                      <a:srgbClr val="E8EAED"/>
+                    </a:solidFill>
+                  </a:tcPr>
+                </a:tc>
+                <a:tc>
+                  <a:txBody>
+                    <a:bodyPr/>
+                    <a:lstStyle/>
+                    <a:p>
+                      <a:r>
+                        <a:rPr sz="1100">
+                          <a:solidFill>
+                            <a:srgbClr val="3D424E"/>
+                          </a:solidFill>
+                        </a:rPr>
+                        <a:t>Configurações A/B/C/D — Contribuição C3</a:t>
+                      </a:r>
+                    </a:p>
+                  </a:txBody>
+                  <a:tcPr>
+                    <a:solidFill>
+                      <a:srgbClr val="E8EAED"/>
+                    </a:solidFill>
+                  </a:tcPr>
+                </a:tc>
               </a:tr>
-              <a:tr h="365760">
-                <a:tc>
-                  <a:txBody>
-                    <a:bodyPr/>
-                    <a:lstStyle/>
-                    <a:p>
-                      <a:r>
-                        <a:rPr sz="1100">
-                          <a:solidFill>
-                            <a:srgbClr val="3D424E"/>
-                          </a:solidFill>
-                        </a:rPr>
-                        <a:t>A — Race classification multi-classe</a:t>
-                      </a:r>
-                    </a:p>
-                  </a:txBody>
-                  <a:tcPr/>
-                </a:tc>
-                <a:tc>
-                  <a:txBody>
-                    <a:bodyPr/>
-                    <a:lstStyle/>
-                    <a:p>
-                      <a:r>
-                        <a:rPr sz="1100">
-                          <a:solidFill>
-                            <a:srgbClr val="3D424E"/>
-                          </a:solidFill>
-                        </a:rPr>
-                        <a:t>4</a:t>
-                      </a:r>
-                    </a:p>
-                  </a:txBody>
-                  <a:tcPr/>
-                </a:tc>
-                <a:tc>
-                  <a:txBody>
-                    <a:bodyPr/>
-                    <a:lstStyle/>
-                    <a:p>
-                      <a:r>
-                        <a:rPr sz="1100">
-                          <a:solidFill>
-                            <a:srgbClr val="3D424E"/>
-                          </a:solidFill>
-                        </a:rPr>
-                        <a:t>3,8 %</a:t>
-                      </a:r>
-                    </a:p>
-                  </a:txBody>
-                  <a:tcPr/>
-                </a:tc>
-                <a:tc>
-                  <a:txBody>
-                    <a:bodyPr/>
-                    <a:lstStyle/>
-                    <a:p>
-                      <a:r>
-                        <a:rPr sz="1100">
-                          <a:solidFill>
-                            <a:srgbClr val="3D424E"/>
-                          </a:solidFill>
-                        </a:rPr>
-                        <a:t>Kärkkäinen 2021 (FairFace), AlDahoul 2024</a:t>
+              <a:tr h="679268">
+                <a:tc>
+                  <a:txBody>
+                    <a:bodyPr/>
+                    <a:lstStyle/>
+                    <a:p>
+                      <a:r>
+                        <a:rPr sz="1100">
+                          <a:solidFill>
+                            <a:srgbClr val="3D424E"/>
+                          </a:solidFill>
+                        </a:rPr>
+                        <a:t>4. Comparação contra baselines</a:t>
+                      </a:r>
+                    </a:p>
+                  </a:txBody>
+                  <a:tcPr/>
+                </a:tc>
+                <a:tc>
+                  <a:txBody>
+                    <a:bodyPr/>
+                    <a:lstStyle/>
+                    <a:p>
+                      <a:r>
+                        <a:rPr sz="1100">
+                          <a:solidFill>
+                            <a:srgbClr val="3D424E"/>
+                          </a:solidFill>
+                        </a:rPr>
+                        <a:t>6 baselines: ResNet-34, ConvNeXt-T puro, FSCL+, Group DRO, FineFACE, Adversarial</a:t>
+                      </a:r>
+                    </a:p>
+                  </a:txBody>
+                  <a:tcPr/>
+                </a:tc>
+                <a:tc>
+                  <a:txBody>
+                    <a:bodyPr/>
+                    <a:lstStyle/>
+                    <a:p>
+                      <a:r>
+                        <a:rPr sz="1100">
+                          <a:solidFill>
+                            <a:srgbClr val="3D424E"/>
+                          </a:solidFill>
+                        </a:rPr>
+                        <a:t>Triangulação DR + worst-class F1 + EO_h — Contribuição C4</a:t>
                       </a:r>
                     </a:p>
                   </a:txBody>
                   <a:tcPr/>
                 </a:tc>
               </a:tr>
-              <a:tr h="365760">
-                <a:tc>
-                  <a:txBody>
-                    <a:bodyPr/>
-                    <a:lstStyle/>
-                    <a:p>
-                      <a:r>
-                        <a:rPr sz="1100">
-                          <a:solidFill>
-                            <a:srgbClr val="3D424E"/>
-                          </a:solidFill>
-                        </a:rPr>
-                        <a:t>B — Face recognition fairness</a:t>
-                      </a:r>
-                    </a:p>
-                  </a:txBody>
-                  <a:tcPr/>
-                </a:tc>
-                <a:tc>
-                  <a:txBody>
-                    <a:bodyPr/>
-                    <a:lstStyle/>
-                    <a:p>
-                      <a:r>
-                        <a:rPr sz="1100">
-                          <a:solidFill>
-                            <a:srgbClr val="3D424E"/>
-                          </a:solidFill>
-                        </a:rPr>
-                        <a:t>16</a:t>
-                      </a:r>
-                    </a:p>
-                  </a:txBody>
-                  <a:tcPr/>
-                </a:tc>
-                <a:tc>
-                  <a:txBody>
-                    <a:bodyPr/>
-                    <a:lstStyle/>
-                    <a:p>
-                      <a:r>
-                        <a:rPr sz="1100">
-                          <a:solidFill>
-                            <a:srgbClr val="3D424E"/>
-                          </a:solidFill>
-                        </a:rPr>
-                        <a:t>15,4 %</a:t>
-                      </a:r>
-                    </a:p>
-                  </a:txBody>
-                  <a:tcPr/>
-                </a:tc>
-                <a:tc>
-                  <a:txBody>
-                    <a:bodyPr/>
-                    <a:lstStyle/>
-                    <a:p>
-                      <a:r>
-                        <a:rPr sz="1100">
-                          <a:solidFill>
-                            <a:srgbClr val="3D424E"/>
-                          </a:solidFill>
-                        </a:rPr>
-                        <a:t>Wang RFW 2019, Robinson BFW 2020, Deng ArcFace</a:t>
+              <a:tr h="679268">
+                <a:tc>
+                  <a:txBody>
+                    <a:bodyPr/>
+                    <a:lstStyle/>
+                    <a:p>
+                      <a:r>
+                        <a:rPr sz="1100">
+                          <a:solidFill>
+                            <a:srgbClr val="3D424E"/>
+                          </a:solidFill>
+                        </a:rPr>
+                        <a:t>5. Fair transferência</a:t>
+                      </a:r>
+                    </a:p>
+                  </a:txBody>
+                  <a:tcPr/>
+                </a:tc>
+                <a:tc>
+                  <a:txBody>
+                    <a:bodyPr/>
+                    <a:lstStyle/>
+                    <a:p>
+                      <a:r>
+                        <a:rPr sz="1100">
+                          <a:solidFill>
+                            <a:srgbClr val="3D424E"/>
+                          </a:solidFill>
+                        </a:rPr>
+                        <a:t>Aplicar backbone fair em face recognition downstream (RFW ou BFW)</a:t>
+                      </a:r>
+                    </a:p>
+                  </a:txBody>
+                  <a:tcPr/>
+                </a:tc>
+                <a:tc>
+                  <a:txBody>
+                    <a:bodyPr/>
+                    <a:lstStyle/>
+                    <a:p>
+                      <a:r>
+                        <a:rPr sz="1100">
+                          <a:solidFill>
+                            <a:srgbClr val="3D424E"/>
+                          </a:solidFill>
+                        </a:rPr>
+                        <a:t>Demonstração de fair transfer — Contribuição C5</a:t>
                       </a:r>
                     </a:p>
                   </a:txBody>
                   <a:tcPr/>
                 </a:tc>
               </a:tr>
-              <a:tr h="365760">
-                <a:tc>
-                  <a:txBody>
-                    <a:bodyPr/>
-                    <a:lstStyle/>
-                    <a:p>
-                      <a:r>
-                        <a:rPr sz="1100">
-                          <a:solidFill>
-                            <a:srgbClr val="3D424E"/>
-                          </a:solidFill>
-                        </a:rPr>
-                        <a:t>C — Skin tone alternativo (Fitzpatrick, MST, ITA)</a:t>
-                      </a:r>
-                    </a:p>
-                  </a:txBody>
-                  <a:tcPr/>
-                </a:tc>
-                <a:tc>
-                  <a:txBody>
-                    <a:bodyPr/>
-                    <a:lstStyle/>
-                    <a:p>
-                      <a:r>
-                        <a:rPr sz="1100">
-                          <a:solidFill>
-                            <a:srgbClr val="3D424E"/>
-                          </a:solidFill>
-                        </a:rPr>
-                        <a:t>7</a:t>
-                      </a:r>
-                    </a:p>
-                  </a:txBody>
-                  <a:tcPr/>
-                </a:tc>
-                <a:tc>
-                  <a:txBody>
-                    <a:bodyPr/>
-                    <a:lstStyle/>
-                    <a:p>
-                      <a:r>
-                        <a:rPr sz="1100">
-                          <a:solidFill>
-                            <a:srgbClr val="3D424E"/>
-                          </a:solidFill>
-                        </a:rPr>
-                        <a:t>6,7 %</a:t>
-                      </a:r>
-                    </a:p>
-                  </a:txBody>
-                  <a:tcPr/>
-                </a:tc>
-                <a:tc>
-                  <a:txBody>
-                    <a:bodyPr/>
-                    <a:lstStyle/>
-                    <a:p>
-                      <a:r>
-                        <a:rPr sz="1100">
-                          <a:solidFill>
-                            <a:srgbClr val="3D424E"/>
-                          </a:solidFill>
-                        </a:rPr>
-                        <a:t>Schumann 2023 (MST), Pereira 2026 (SkinToneNet)</a:t>
-                      </a:r>
-                    </a:p>
-                  </a:txBody>
-                  <a:tcPr/>
-                </a:tc>
-              </a:tr>
-              <a:tr h="365760">
-                <a:tc>
-                  <a:txBody>
-                    <a:bodyPr/>
-                    <a:lstStyle/>
-                    <a:p>
-                      <a:r>
-                        <a:rPr sz="1100">
-                          <a:solidFill>
-                            <a:srgbClr val="3D424E"/>
-                          </a:solidFill>
-                        </a:rPr>
-                        <a:t>D — Mitigação algorítmica</a:t>
-                      </a:r>
-                    </a:p>
-                  </a:txBody>
-                  <a:tcPr/>
-                </a:tc>
-                <a:tc>
-                  <a:txBody>
-                    <a:bodyPr/>
-                    <a:lstStyle/>
-                    <a:p>
-                      <a:r>
-                        <a:rPr sz="1100">
-                          <a:solidFill>
-                            <a:srgbClr val="3D424E"/>
-                          </a:solidFill>
-                        </a:rPr>
-                        <a:t>10</a:t>
-                      </a:r>
-                    </a:p>
-                  </a:txBody>
-                  <a:tcPr/>
-                </a:tc>
-                <a:tc>
-                  <a:txBody>
-                    <a:bodyPr/>
-                    <a:lstStyle/>
-                    <a:p>
-                      <a:r>
-                        <a:rPr sz="1100">
-                          <a:solidFill>
-                            <a:srgbClr val="3D424E"/>
-                          </a:solidFill>
-                        </a:rPr>
-                        <a:t>9,6 %</a:t>
-                      </a:r>
-                    </a:p>
-                  </a:txBody>
-                  <a:tcPr/>
-                </a:tc>
-                <a:tc>
-                  <a:txBody>
-                    <a:bodyPr/>
-                    <a:lstStyle/>
-                    <a:p>
-                      <a:r>
-                        <a:rPr sz="1100">
-                          <a:solidFill>
-                            <a:srgbClr val="3D424E"/>
-                          </a:solidFill>
-                        </a:rPr>
-                        <a:t>Madras LAFTR 2018, Sagawa Group DRO 2020</a:t>
-                      </a:r>
-                    </a:p>
-                  </a:txBody>
-                  <a:tcPr/>
-                </a:tc>
-              </a:tr>
-              <a:tr h="365760">
-                <a:tc>
-                  <a:txBody>
-                    <a:bodyPr/>
-                    <a:lstStyle/>
-                    <a:p>
-                      <a:r>
-                        <a:rPr sz="1100">
-                          <a:solidFill>
-                            <a:srgbClr val="3D424E"/>
-                          </a:solidFill>
-                        </a:rPr>
-                        <a:t>E — Auditoria e Surveys</a:t>
-                      </a:r>
-                    </a:p>
-                  </a:txBody>
-                  <a:tcPr/>
-                </a:tc>
-                <a:tc>
-                  <a:txBody>
-                    <a:bodyPr/>
-                    <a:lstStyle/>
-                    <a:p>
-                      <a:r>
-                        <a:rPr sz="1100">
-                          <a:solidFill>
-                            <a:srgbClr val="3D424E"/>
-                          </a:solidFill>
-                        </a:rPr>
-                        <a:t>14</a:t>
-                      </a:r>
-                    </a:p>
-                  </a:txBody>
-                  <a:tcPr/>
-                </a:tc>
-                <a:tc>
-                  <a:txBody>
-                    <a:bodyPr/>
-                    <a:lstStyle/>
-                    <a:p>
-                      <a:r>
-                        <a:rPr sz="1100">
-                          <a:solidFill>
-                            <a:srgbClr val="3D424E"/>
-                          </a:solidFill>
-                        </a:rPr>
-                        <a:t>13,5 %</a:t>
-                      </a:r>
-                    </a:p>
-                  </a:txBody>
-                  <a:tcPr/>
-                </a:tc>
-                <a:tc>
-                  <a:txBody>
-                    <a:bodyPr/>
-                    <a:lstStyle/>
-                    <a:p>
-                      <a:r>
-                        <a:rPr sz="1100">
-                          <a:solidFill>
-                            <a:srgbClr val="3D424E"/>
-                          </a:solidFill>
-                        </a:rPr>
-                        <a:t>Buolamwini 2018, Mehrabi 2021 survey</a:t>
-                      </a:r>
-                    </a:p>
-                  </a:txBody>
-                  <a:tcPr/>
-                </a:tc>
-              </a:tr>
-              <a:tr h="365760">
-                <a:tc>
-                  <a:txBody>
-                    <a:bodyPr/>
-                    <a:lstStyle/>
-                    <a:p>
-                      <a:r>
-                        <a:rPr sz="1100">
-                          <a:solidFill>
-                            <a:srgbClr val="3D424E"/>
-                          </a:solidFill>
-                        </a:rPr>
-                        <a:t>F — Fundamentação científica e ética</a:t>
-                      </a:r>
-                    </a:p>
-                  </a:txBody>
-                  <a:tcPr/>
-                </a:tc>
-                <a:tc>
-                  <a:txBody>
-                    <a:bodyPr/>
-                    <a:lstStyle/>
-                    <a:p>
-                      <a:r>
-                        <a:rPr sz="1100">
-                          <a:solidFill>
-                            <a:srgbClr val="3D424E"/>
-                          </a:solidFill>
-                        </a:rPr>
-                        <a:t>3</a:t>
-                      </a:r>
-                    </a:p>
-                  </a:txBody>
-                  <a:tcPr/>
-                </a:tc>
-                <a:tc>
-                  <a:txBody>
-                    <a:bodyPr/>
-                    <a:lstStyle/>
-                    <a:p>
-                      <a:r>
-                        <a:rPr sz="1100">
-                          <a:solidFill>
-                            <a:srgbClr val="3D424E"/>
-                          </a:solidFill>
-                        </a:rPr>
-                        <a:t>2,9 %</a:t>
-                      </a:r>
-                    </a:p>
-                  </a:txBody>
-                  <a:tcPr/>
-                </a:tc>
-                <a:tc>
-                  <a:txBody>
-                    <a:bodyPr/>
-                    <a:lstStyle/>
-                    <a:p>
-                      <a:r>
-                        <a:rPr sz="1100">
-                          <a:solidFill>
-                            <a:srgbClr val="3D424E"/>
-                          </a:solidFill>
-                        </a:rPr>
-                        <a:t>Fuentes AAPA 2019, Lewontin 1972</a:t>
-                      </a:r>
-                    </a:p>
-                  </a:txBody>
-                  <a:tcPr/>
-                </a:tc>
-              </a:tr>
-              <a:tr h="365760">
-                <a:tc>
-                  <a:txBody>
-                    <a:bodyPr/>
-                    <a:lstStyle/>
-                    <a:p>
-                      <a:r>
-                        <a:rPr sz="1100">
-                          <a:solidFill>
-                            <a:srgbClr val="3D424E"/>
-                          </a:solidFill>
-                        </a:rPr>
-                        <a:t>G — Mecanismos ML paradigmáticos</a:t>
-                      </a:r>
-                    </a:p>
-                  </a:txBody>
-                  <a:tcPr/>
-                </a:tc>
-                <a:tc>
-                  <a:txBody>
-                    <a:bodyPr/>
-                    <a:lstStyle/>
-                    <a:p>
-                      <a:r>
-                        <a:rPr sz="1100">
-                          <a:solidFill>
-                            <a:srgbClr val="3D424E"/>
-                          </a:solidFill>
-                        </a:rPr>
-                        <a:t>9</a:t>
-                      </a:r>
-                    </a:p>
-                  </a:txBody>
-                  <a:tcPr/>
-                </a:tc>
-                <a:tc>
-                  <a:txBody>
-                    <a:bodyPr/>
-                    <a:lstStyle/>
-                    <a:p>
-                      <a:r>
-                        <a:rPr sz="1100">
-                          <a:solidFill>
-                            <a:srgbClr val="3D424E"/>
-                          </a:solidFill>
-                        </a:rPr>
-                        <a:t>8,7 %</a:t>
-                      </a:r>
-                    </a:p>
-                  </a:txBody>
-                  <a:tcPr/>
-                </a:tc>
-                <a:tc>
-                  <a:txBody>
-                    <a:bodyPr/>
-                    <a:lstStyle/>
-                    <a:p>
-                      <a:r>
-                        <a:rPr sz="1100">
-                          <a:solidFill>
-                            <a:srgbClr val="3D424E"/>
-                          </a:solidFill>
-                        </a:rPr>
-                        <a:t>Perez FiLM 2018, Ba LayerNorm, He ResNet</a:t>
-                      </a:r>
-                    </a:p>
-                  </a:txBody>
-                  <a:tcPr/>
-                </a:tc>
-              </a:tr>
-              <a:tr h="365760">
-                <a:tc>
-                  <a:txBody>
-                    <a:bodyPr/>
-                    <a:lstStyle/>
-                    <a:p>
-                      <a:r>
-                        <a:rPr sz="1100">
-                          <a:solidFill>
-                            <a:srgbClr val="3D424E"/>
-                          </a:solidFill>
-                        </a:rPr>
-                        <a:t>I — VLM / CLIP em fairness</a:t>
-                      </a:r>
-                    </a:p>
-                  </a:txBody>
-                  <a:tcPr/>
-                </a:tc>
-                <a:tc>
-                  <a:txBody>
-                    <a:bodyPr/>
-                    <a:lstStyle/>
-                    <a:p>
-                      <a:r>
-                        <a:rPr sz="1100">
-                          <a:solidFill>
-                            <a:srgbClr val="3D424E"/>
-                          </a:solidFill>
-                        </a:rPr>
-                        <a:t>14</a:t>
-                      </a:r>
-                    </a:p>
-                  </a:txBody>
-                  <a:tcPr/>
-                </a:tc>
-                <a:tc>
-                  <a:txBody>
-                    <a:bodyPr/>
-                    <a:lstStyle/>
-                    <a:p>
-                      <a:r>
-                        <a:rPr sz="1100">
-                          <a:solidFill>
-                            <a:srgbClr val="3D424E"/>
-                          </a:solidFill>
-                        </a:rPr>
-                        <a:t>13,5 %</a:t>
-                      </a:r>
-                    </a:p>
-                  </a:txBody>
-                  <a:tcPr/>
-                </a:tc>
-                <a:tc>
-                  <a:txBody>
-                    <a:bodyPr/>
-                    <a:lstStyle/>
-                    <a:p>
-                      <a:r>
-                        <a:rPr sz="1100">
-                          <a:solidFill>
-                            <a:srgbClr val="3D424E"/>
-                          </a:solidFill>
-                        </a:rPr>
-                        <a:t>Radford CLIP 2021, Luo FairCLIP 2024</a:t>
-                      </a:r>
-                    </a:p>
-                  </a:txBody>
-                  <a:tcPr/>
-                </a:tc>
-              </a:tr>
-              <a:tr h="365760">
-                <a:tc>
-                  <a:txBody>
-                    <a:bodyPr/>
-                    <a:lstStyle/>
-                    <a:p>
-                      <a:r>
-                        <a:rPr sz="1100">
-                          <a:solidFill>
-                            <a:srgbClr val="3D424E"/>
-                          </a:solidFill>
-                        </a:rPr>
-                        <a:t>J — Conditioning moderno</a:t>
-                      </a:r>
-                    </a:p>
-                  </a:txBody>
-                  <a:tcPr/>
-                </a:tc>
-                <a:tc>
-                  <a:txBody>
-                    <a:bodyPr/>
-                    <a:lstStyle/>
-                    <a:p>
-                      <a:r>
-                        <a:rPr sz="1100">
-                          <a:solidFill>
-                            <a:srgbClr val="3D424E"/>
-                          </a:solidFill>
-                        </a:rPr>
-                        <a:t>5</a:t>
-                      </a:r>
-                    </a:p>
-                  </a:txBody>
-                  <a:tcPr/>
-                </a:tc>
-                <a:tc>
-                  <a:txBody>
-                    <a:bodyPr/>
-                    <a:lstStyle/>
-                    <a:p>
-                      <a:r>
-                        <a:rPr sz="1100">
-                          <a:solidFill>
-                            <a:srgbClr val="3D424E"/>
-                          </a:solidFill>
-                        </a:rPr>
-                        <a:t>4,8 %</a:t>
-                      </a:r>
-                    </a:p>
-                  </a:txBody>
-                  <a:tcPr/>
-                </a:tc>
-                <a:tc>
-                  <a:txBody>
-                    <a:bodyPr/>
-                    <a:lstStyle/>
-                    <a:p>
-                      <a:r>
-                        <a:rPr sz="1100">
-                          <a:solidFill>
-                            <a:srgbClr val="3D424E"/>
-                          </a:solidFill>
-                        </a:rPr>
-                        <a:t>Liu ConvNeXt 2022, Dhariwal ADM 2021</a:t>
-                      </a:r>
-                    </a:p>
-                  </a:txBody>
-                  <a:tcPr/>
-                </a:tc>
-              </a:tr>
-              <a:tr h="365760">
-                <a:tc>
-                  <a:txBody>
-                    <a:bodyPr/>
-                    <a:lstStyle/>
-                    <a:p>
-                      <a:r>
-                        <a:rPr sz="1100">
-                          <a:solidFill>
-                            <a:srgbClr val="3D424E"/>
-                          </a:solidFill>
-                        </a:rPr>
-                        <a:t>K — Fundadores de FR (DeepFace, ArcFace, CosFace)</a:t>
-                      </a:r>
-                    </a:p>
-                  </a:txBody>
-                  <a:tcPr/>
-                </a:tc>
-                <a:tc>
-                  <a:txBody>
-                    <a:bodyPr/>
-                    <a:lstStyle/>
-                    <a:p>
-                      <a:r>
-                        <a:rPr sz="1100">
-                          <a:solidFill>
-                            <a:srgbClr val="3D424E"/>
-                          </a:solidFill>
-                        </a:rPr>
-                        <a:t>6</a:t>
-                      </a:r>
-                    </a:p>
-                  </a:txBody>
-                  <a:tcPr/>
-                </a:tc>
-                <a:tc>
-                  <a:txBody>
-                    <a:bodyPr/>
-                    <a:lstStyle/>
-                    <a:p>
-                      <a:r>
-                        <a:rPr sz="1100">
-                          <a:solidFill>
-                            <a:srgbClr val="3D424E"/>
-                          </a:solidFill>
-                        </a:rPr>
-                        <a:t>5,8 %</a:t>
-                      </a:r>
-                    </a:p>
-                  </a:txBody>
-                  <a:tcPr/>
-                </a:tc>
-                <a:tc>
-                  <a:txBody>
-                    <a:bodyPr/>
-                    <a:lstStyle/>
-                    <a:p>
-                      <a:r>
-                        <a:rPr sz="1100">
-                          <a:solidFill>
-                            <a:srgbClr val="3D424E"/>
-                          </a:solidFill>
-                        </a:rPr>
-                        <a:t>Taigman DeepFace 2014, Wang CosFace 2018</a:t>
-                      </a:r>
-                    </a:p>
-                  </a:txBody>
-                  <a:tcPr/>
-                </a:tc>
-              </a:tr>
-              <a:tr h="365760">
-                <a:tc>
-                  <a:txBody>
-                    <a:bodyPr/>
-                    <a:lstStyle/>
-                    <a:p>
-                      <a:r>
-                        <a:rPr sz="1100">
-                          <a:solidFill>
-                            <a:srgbClr val="3D424E"/>
-                          </a:solidFill>
-                        </a:rPr>
-                        <a:t>L — Auxiliar / complementar</a:t>
-                      </a:r>
-                    </a:p>
-                  </a:txBody>
-                  <a:tcPr/>
-                </a:tc>
-                <a:tc>
-                  <a:txBody>
-                    <a:bodyPr/>
-                    <a:lstStyle/>
-                    <a:p>
-                      <a:r>
-                        <a:rPr sz="1100">
-                          <a:solidFill>
-                            <a:srgbClr val="3D424E"/>
-                          </a:solidFill>
-                        </a:rPr>
-                        <a:t>13</a:t>
-                      </a:r>
-                    </a:p>
-                  </a:txBody>
-                  <a:tcPr/>
-                </a:tc>
-                <a:tc>
-                  <a:txBody>
-                    <a:bodyPr/>
-                    <a:lstStyle/>
-                    <a:p>
-                      <a:r>
-                        <a:rPr sz="1100">
-                          <a:solidFill>
-                            <a:srgbClr val="3D424E"/>
-                          </a:solidFill>
-                        </a:rPr>
-                        <a:t>12,5 %</a:t>
-                      </a:r>
-                    </a:p>
-                  </a:txBody>
-                  <a:tcPr/>
-                </a:tc>
-                <a:tc>
-                  <a:txBody>
-                    <a:bodyPr/>
-                    <a:lstStyle/>
-                    <a:p>
-                      <a:r>
-                        <a:rPr sz="1100">
-                          <a:solidFill>
-                            <a:srgbClr val="3D424E"/>
-                          </a:solidFill>
-                        </a:rPr>
-                        <a:t>Karkkainen datasets, Hendrycks robustness</a:t>
-                      </a:r>
-                    </a:p>
-                  </a:txBody>
-                  <a:tcPr/>
-                </a:tc>
-              </a:tr>
-              <a:tr h="365760">
-                <a:tc>
-                  <a:txBody>
-                    <a:bodyPr/>
-                    <a:lstStyle/>
-                    <a:p>
-                      <a:r>
-                        <a:rPr sz="1100">
-                          <a:solidFill>
-                            <a:srgbClr val="3D424E"/>
-                          </a:solidFill>
-                        </a:rPr>
-                        <a:t>R8 — Diversidade Latinx (antropo + genética + socio)</a:t>
-                      </a:r>
-                    </a:p>
-                  </a:txBody>
-                  <a:tcPr/>
-                </a:tc>
-                <a:tc>
-                  <a:txBody>
-                    <a:bodyPr/>
-                    <a:lstStyle/>
-                    <a:p>
-                      <a:r>
-                        <a:rPr sz="1100">
-                          <a:solidFill>
-                            <a:srgbClr val="3D424E"/>
-                          </a:solidFill>
-                        </a:rPr>
-                        <a:t>3</a:t>
-                      </a:r>
-                    </a:p>
-                  </a:txBody>
-                  <a:tcPr/>
-                </a:tc>
-                <a:tc>
-                  <a:txBody>
-                    <a:bodyPr/>
-                    <a:lstStyle/>
-                    <a:p>
-                      <a:r>
-                        <a:rPr sz="1100">
-                          <a:solidFill>
-                            <a:srgbClr val="3D424E"/>
-                          </a:solidFill>
-                        </a:rPr>
-                        <a:t>2,9 %</a:t>
-                      </a:r>
-                    </a:p>
-                  </a:txBody>
-                  <a:tcPr/>
-                </a:tc>
-                <a:tc>
-                  <a:txBody>
-                    <a:bodyPr/>
-                    <a:lstStyle/>
-                    <a:p>
-                      <a:r>
-                        <a:rPr sz="1100">
-                          <a:solidFill>
-                            <a:srgbClr val="3D424E"/>
-                          </a:solidFill>
-                        </a:rPr>
-                        <a:t>Telles 2014, Bryc 2015, Pew 2017</a:t>
-                      </a:r>
-                    </a:p>
-                  </a:txBody>
-                  <a:tcPr/>
+              <a:tr h="679272">
+                <a:tc>
+                  <a:txBody>
+                    <a:bodyPr/>
+                    <a:lstStyle/>
+                    <a:p>
+                      <a:r>
+                        <a:rPr sz="1100">
+                          <a:solidFill>
+                            <a:srgbClr val="3D424E"/>
+                          </a:solidFill>
+                        </a:rPr>
+                        <a:t>6. Síntese decompositiva</a:t>
+                      </a:r>
+                    </a:p>
+                  </a:txBody>
+                  <a:tcPr>
+                    <a:solidFill>
+                      <a:srgbClr val="E8EAED"/>
+                    </a:solidFill>
+                  </a:tcPr>
+                </a:tc>
+                <a:tc>
+                  <a:txBody>
+                    <a:bodyPr/>
+                    <a:lstStyle/>
+                    <a:p>
+                      <a:r>
+                        <a:rPr sz="1100">
+                          <a:solidFill>
+                            <a:srgbClr val="3D424E"/>
+                          </a:solidFill>
+                        </a:rPr>
+                        <a:t>Combinar C2 + C5 para separar componente fenotípico do algorítmico do erro Latinx</a:t>
+                      </a:r>
+                    </a:p>
+                  </a:txBody>
+                  <a:tcPr>
+                    <a:solidFill>
+                      <a:srgbClr val="E8EAED"/>
+                    </a:solidFill>
+                  </a:tcPr>
+                </a:tc>
+                <a:tc>
+                  <a:txBody>
+                    <a:bodyPr/>
+                    <a:lstStyle/>
+                    <a:p>
+                      <a:r>
+                        <a:rPr sz="1100">
+                          <a:solidFill>
+                            <a:srgbClr val="3D424E"/>
+                          </a:solidFill>
+                        </a:rPr>
+                        <a:t>Decomposição pixel info × skin tone — Contribuição C6/OE-6</a:t>
+                      </a:r>
+                    </a:p>
+                  </a:txBody>
+                  <a:tcPr>
+                    <a:solidFill>
+                      <a:srgbClr val="E8EAED"/>
+                    </a:solidFill>
+                  </a:tcPr>
                 </a:tc>
               </a:tr>
             </a:tbl>
@@ -9527,1261 +9340,7 @@
               </a:defRPr>
             </a:pPr>
             <a:r>
-              <a:t>Fronteira temporal: 55 fichas (53 %) são 2024+, incluindo 5 papers de 2026 — corpus na fronteira absoluta.</a:t>
-            </a:r>
-          </a:p>
-        </p:txBody>
-      </p:sp>
-    </p:spTree>
-  </p:cSld>
-  <p:clrMapOvr>
-    <a:masterClrMapping/>
-  </p:clrMapOvr>
-</p:sld>
-</file>
-
-<file path=ppt/slides/slide5.xml><?xml version="1.0" encoding="utf-8"?>
-<p:sld xmlns:a="http://schemas.openxmlformats.org/drawingml/2006/main" xmlns:p="http://schemas.openxmlformats.org/presentationml/2006/main" xmlns:r="http://schemas.openxmlformats.org/officeDocument/2006/relationships">
-  <p:cSld>
-    <p:spTree>
-      <p:nvGrpSpPr>
-        <p:cNvPr id="1" name=""/>
-        <p:cNvGrpSpPr/>
-        <p:nvPr/>
-      </p:nvGrpSpPr>
-      <p:grpSpPr/>
-      <p:sp>
-        <p:nvSpPr>
-          <p:cNvPr id="2" name="Rectangle 1"/>
-          <p:cNvSpPr/>
-          <p:nvPr/>
-        </p:nvSpPr>
-        <p:spPr>
-          <a:xfrm>
-            <a:off x="0" y="0"/>
-            <a:ext cx="12188952" cy="6858000"/>
-          </a:xfrm>
-          <a:prstGeom prst="rect">
-            <a:avLst/>
-          </a:prstGeom>
-          <a:solidFill>
-            <a:srgbClr val="1F2A4E"/>
-          </a:solidFill>
-          <a:ln>
-            <a:noFill/>
-          </a:ln>
-        </p:spPr>
-        <p:style>
-          <a:lnRef idx="1">
-            <a:schemeClr val="accent1"/>
-          </a:lnRef>
-          <a:fillRef idx="3">
-            <a:schemeClr val="accent1"/>
-          </a:fillRef>
-          <a:effectRef idx="2">
-            <a:schemeClr val="accent1"/>
-          </a:effectRef>
-          <a:fontRef idx="minor">
-            <a:schemeClr val="lt1"/>
-          </a:fontRef>
-        </p:style>
-        <p:txBody>
-          <a:bodyPr rtlCol="0" anchor="ctr"/>
-          <a:lstStyle/>
-          <a:p>
-            <a:pPr algn="ctr"/>
-          </a:p>
-        </p:txBody>
-      </p:sp>
-      <p:sp>
-        <p:nvSpPr>
-          <p:cNvPr id="3" name="TextBox 2"/>
-          <p:cNvSpPr txBox="1"/>
-          <p:nvPr/>
-        </p:nvSpPr>
-        <p:spPr>
-          <a:xfrm>
-            <a:off x="731520" y="1371600"/>
-            <a:ext cx="2743200" cy="2743200"/>
-          </a:xfrm>
-          <a:prstGeom prst="rect">
-            <a:avLst/>
-          </a:prstGeom>
-          <a:noFill/>
-        </p:spPr>
-        <p:txBody>
-          <a:bodyPr wrap="none">
-            <a:spAutoFit/>
-          </a:bodyPr>
-          <a:lstStyle/>
-          <a:p>
-            <a:pPr>
-              <a:defRPr sz="14000" b="1">
-                <a:solidFill>
-                  <a:srgbClr val="FFFFFF"/>
-                </a:solidFill>
-              </a:defRPr>
-            </a:pPr>
-            <a:r>
-              <a:t>1</a:t>
-            </a:r>
-          </a:p>
-        </p:txBody>
-      </p:sp>
-      <p:sp>
-        <p:nvSpPr>
-          <p:cNvPr id="4" name="TextBox 3"/>
-          <p:cNvSpPr txBox="1"/>
-          <p:nvPr/>
-        </p:nvSpPr>
-        <p:spPr>
-          <a:xfrm>
-            <a:off x="3931920" y="2286000"/>
-            <a:ext cx="7772400" cy="1828800"/>
-          </a:xfrm>
-          <a:prstGeom prst="rect">
-            <a:avLst/>
-          </a:prstGeom>
-          <a:noFill/>
-        </p:spPr>
-        <p:txBody>
-          <a:bodyPr wrap="square">
-            <a:spAutoFit/>
-          </a:bodyPr>
-          <a:lstStyle/>
-          <a:p>
-            <a:pPr>
-              <a:defRPr sz="3600" b="1">
-                <a:solidFill>
-                  <a:srgbClr val="FFFFFF"/>
-                </a:solidFill>
-              </a:defRPr>
-            </a:pPr>
-            <a:r>
-              <a:t>Plano até a defesa</a:t>
-            </a:r>
-          </a:p>
-          <a:p>
-            <a:pPr>
-              <a:defRPr sz="1800">
-                <a:solidFill>
-                  <a:srgbClr val="E8EAED"/>
-                </a:solidFill>
-              </a:defRPr>
-            </a:pPr>
-            <a:r>
-              <a:t>Três marcos formais, novo horizonte de outubro</a:t>
-            </a:r>
-          </a:p>
-        </p:txBody>
-      </p:sp>
-    </p:spTree>
-  </p:cSld>
-  <p:clrMapOvr>
-    <a:masterClrMapping/>
-  </p:clrMapOvr>
-</p:sld>
-</file>
-
-<file path=ppt/slides/slide6.xml><?xml version="1.0" encoding="utf-8"?>
-<p:sld xmlns:a="http://schemas.openxmlformats.org/drawingml/2006/main" xmlns:p="http://schemas.openxmlformats.org/presentationml/2006/main" xmlns:r="http://schemas.openxmlformats.org/officeDocument/2006/relationships">
-  <p:cSld>
-    <p:spTree>
-      <p:nvGrpSpPr>
-        <p:cNvPr id="1" name=""/>
-        <p:cNvGrpSpPr/>
-        <p:nvPr/>
-      </p:nvGrpSpPr>
-      <p:grpSpPr/>
-      <p:sp>
-        <p:nvSpPr>
-          <p:cNvPr id="2" name="Rectangle 1"/>
-          <p:cNvSpPr/>
-          <p:nvPr/>
-        </p:nvSpPr>
-        <p:spPr>
-          <a:xfrm>
-            <a:off x="0" y="0"/>
-            <a:ext cx="12188952" cy="6858000"/>
-          </a:xfrm>
-          <a:prstGeom prst="rect">
-            <a:avLst/>
-          </a:prstGeom>
-          <a:solidFill>
-            <a:srgbClr val="1F2A4E"/>
-          </a:solidFill>
-          <a:ln>
-            <a:noFill/>
-          </a:ln>
-        </p:spPr>
-        <p:style>
-          <a:lnRef idx="1">
-            <a:schemeClr val="accent1"/>
-          </a:lnRef>
-          <a:fillRef idx="3">
-            <a:schemeClr val="accent1"/>
-          </a:fillRef>
-          <a:effectRef idx="2">
-            <a:schemeClr val="accent1"/>
-          </a:effectRef>
-          <a:fontRef idx="minor">
-            <a:schemeClr val="lt1"/>
-          </a:fontRef>
-        </p:style>
-        <p:txBody>
-          <a:bodyPr rtlCol="0" anchor="ctr"/>
-          <a:lstStyle/>
-          <a:p>
-            <a:pPr algn="ctr"/>
-          </a:p>
-        </p:txBody>
-      </p:sp>
-      <p:sp>
-        <p:nvSpPr>
-          <p:cNvPr id="3" name="TextBox 2"/>
-          <p:cNvSpPr txBox="1"/>
-          <p:nvPr/>
-        </p:nvSpPr>
-        <p:spPr>
-          <a:xfrm>
-            <a:off x="731520" y="1371600"/>
-            <a:ext cx="2743200" cy="2743200"/>
-          </a:xfrm>
-          <a:prstGeom prst="rect">
-            <a:avLst/>
-          </a:prstGeom>
-          <a:noFill/>
-        </p:spPr>
-        <p:txBody>
-          <a:bodyPr wrap="none">
-            <a:spAutoFit/>
-          </a:bodyPr>
-          <a:lstStyle/>
-          <a:p>
-            <a:pPr>
-              <a:defRPr sz="14000" b="1">
-                <a:solidFill>
-                  <a:srgbClr val="FFFFFF"/>
-                </a:solidFill>
-              </a:defRPr>
-            </a:pPr>
-            <a:r>
-              <a:t>1</a:t>
-            </a:r>
-          </a:p>
-        </p:txBody>
-      </p:sp>
-      <p:sp>
-        <p:nvSpPr>
-          <p:cNvPr id="4" name="TextBox 3"/>
-          <p:cNvSpPr txBox="1"/>
-          <p:nvPr/>
-        </p:nvSpPr>
-        <p:spPr>
-          <a:xfrm>
-            <a:off x="3931920" y="2286000"/>
-            <a:ext cx="7772400" cy="1828800"/>
-          </a:xfrm>
-          <a:prstGeom prst="rect">
-            <a:avLst/>
-          </a:prstGeom>
-          <a:noFill/>
-        </p:spPr>
-        <p:txBody>
-          <a:bodyPr wrap="square">
-            <a:spAutoFit/>
-          </a:bodyPr>
-          <a:lstStyle/>
-          <a:p>
-            <a:pPr>
-              <a:defRPr sz="3600" b="1">
-                <a:solidFill>
-                  <a:srgbClr val="FFFFFF"/>
-                </a:solidFill>
-              </a:defRPr>
-            </a:pPr>
-            <a:r>
-              <a:t>Plano até a defesa</a:t>
-            </a:r>
-          </a:p>
-          <a:p>
-            <a:pPr>
-              <a:defRPr sz="1800">
-                <a:solidFill>
-                  <a:srgbClr val="E8EAED"/>
-                </a:solidFill>
-              </a:defRPr>
-            </a:pPr>
-            <a:r>
-              <a:t>Três marcos formais, novo horizonte de outubro</a:t>
-            </a:r>
-          </a:p>
-        </p:txBody>
-      </p:sp>
-    </p:spTree>
-  </p:cSld>
-  <p:clrMapOvr>
-    <a:masterClrMapping/>
-  </p:clrMapOvr>
-</p:sld>
-</file>
-
-<file path=ppt/slides/slide7.xml><?xml version="1.0" encoding="utf-8"?>
-<p:sld xmlns:a="http://schemas.openxmlformats.org/drawingml/2006/main" xmlns:p="http://schemas.openxmlformats.org/presentationml/2006/main" xmlns:r="http://schemas.openxmlformats.org/officeDocument/2006/relationships">
-  <p:cSld>
-    <p:spTree>
-      <p:nvGrpSpPr>
-        <p:cNvPr id="1" name=""/>
-        <p:cNvGrpSpPr/>
-        <p:nvPr/>
-      </p:nvGrpSpPr>
-      <p:grpSpPr/>
-      <p:sp>
-        <p:nvSpPr>
-          <p:cNvPr id="2" name="TextBox 1"/>
-          <p:cNvSpPr txBox="1"/>
-          <p:nvPr/>
-        </p:nvSpPr>
-        <p:spPr>
-          <a:xfrm>
-            <a:off x="457200" y="365760"/>
-            <a:ext cx="11430000" cy="822960"/>
-          </a:xfrm>
-          <a:prstGeom prst="rect">
-            <a:avLst/>
-          </a:prstGeom>
-          <a:noFill/>
-        </p:spPr>
-        <p:txBody>
-          <a:bodyPr wrap="square">
-            <a:spAutoFit/>
-          </a:bodyPr>
-          <a:lstStyle/>
-          <a:p>
-            <a:pPr>
-              <a:defRPr sz="2600" b="1">
-                <a:solidFill>
-                  <a:srgbClr val="1F2A4E"/>
-                </a:solidFill>
-              </a:defRPr>
-            </a:pPr>
-            <a:r>
-              <a:t>Cronograma consolidado</a:t>
-            </a:r>
-          </a:p>
-        </p:txBody>
-      </p:sp>
-      <p:sp>
-        <p:nvSpPr>
-          <p:cNvPr id="3" name="Rectangle 2"/>
-          <p:cNvSpPr/>
-          <p:nvPr/>
-        </p:nvSpPr>
-        <p:spPr>
-          <a:xfrm>
-            <a:off x="457200" y="1143000"/>
-            <a:ext cx="11430000" cy="36576"/>
-          </a:xfrm>
-          <a:prstGeom prst="rect">
-            <a:avLst/>
-          </a:prstGeom>
-          <a:solidFill>
-            <a:srgbClr val="1F2A4E"/>
-          </a:solidFill>
-          <a:ln>
-            <a:noFill/>
-          </a:ln>
-        </p:spPr>
-        <p:style>
-          <a:lnRef idx="1">
-            <a:schemeClr val="accent1"/>
-          </a:lnRef>
-          <a:fillRef idx="3">
-            <a:schemeClr val="accent1"/>
-          </a:fillRef>
-          <a:effectRef idx="2">
-            <a:schemeClr val="accent1"/>
-          </a:effectRef>
-          <a:fontRef idx="minor">
-            <a:schemeClr val="lt1"/>
-          </a:fontRef>
-        </p:style>
-        <p:txBody>
-          <a:bodyPr rtlCol="0" anchor="ctr"/>
-          <a:lstStyle/>
-          <a:p>
-            <a:pPr algn="ctr"/>
-          </a:p>
-        </p:txBody>
-      </p:sp>
-      <p:graphicFrame>
-        <p:nvGraphicFramePr>
-          <p:cNvPr id="4" name="Table 3"/>
-          <p:cNvGraphicFramePr>
-            <a:graphicFrameLocks noGrp="1"/>
-          </p:cNvGraphicFramePr>
-          <p:nvPr/>
-        </p:nvGraphicFramePr>
-        <p:xfrm>
-          <a:off x="457200" y="1371600"/>
-          <a:ext cx="11887200" cy="4754880"/>
-        </p:xfrm>
-        <a:graphic>
-          <a:graphicData uri="http://schemas.openxmlformats.org/drawingml/2006/table">
-            <a:tbl>
-              <a:tblPr firstRow="1" bandRow="1">
-                <a:tableStyleId>{5C22544A-7EE6-4342-B048-85BDC9FD1C3A}</a:tableStyleId>
-              </a:tblPr>
-              <a:tblGrid>
-                <a:gridCol w="457200"/>
-                <a:gridCol w="5029200"/>
-                <a:gridCol w="1828800"/>
-                <a:gridCol w="4572000"/>
-              </a:tblGrid>
-              <a:tr h="1188720">
-                <a:tc>
-                  <a:txBody>
-                    <a:bodyPr/>
-                    <a:lstStyle/>
-                    <a:p>
-                      <a:r>
-                        <a:rPr sz="1300" b="1">
-                          <a:solidFill>
-                            <a:srgbClr val="FFFFFF"/>
-                          </a:solidFill>
-                        </a:rPr>
-                        <a:t>#</a:t>
-                      </a:r>
-                    </a:p>
-                  </a:txBody>
-                  <a:tcPr>
-                    <a:solidFill>
-                      <a:srgbClr val="1F2A4E"/>
-                    </a:solidFill>
-                  </a:tcPr>
-                </a:tc>
-                <a:tc>
-                  <a:txBody>
-                    <a:bodyPr/>
-                    <a:lstStyle/>
-                    <a:p>
-                      <a:r>
-                        <a:rPr sz="1300" b="1">
-                          <a:solidFill>
-                            <a:srgbClr val="FFFFFF"/>
-                          </a:solidFill>
-                        </a:rPr>
-                        <a:t>Marco</a:t>
-                      </a:r>
-                    </a:p>
-                  </a:txBody>
-                  <a:tcPr>
-                    <a:solidFill>
-                      <a:srgbClr val="1F2A4E"/>
-                    </a:solidFill>
-                  </a:tcPr>
-                </a:tc>
-                <a:tc>
-                  <a:txBody>
-                    <a:bodyPr/>
-                    <a:lstStyle/>
-                    <a:p>
-                      <a:r>
-                        <a:rPr sz="1300" b="1">
-                          <a:solidFill>
-                            <a:srgbClr val="FFFFFF"/>
-                          </a:solidFill>
-                        </a:rPr>
-                        <a:t>Data</a:t>
-                      </a:r>
-                    </a:p>
-                  </a:txBody>
-                  <a:tcPr>
-                    <a:solidFill>
-                      <a:srgbClr val="1F2A4E"/>
-                    </a:solidFill>
-                  </a:tcPr>
-                </a:tc>
-                <a:tc>
-                  <a:txBody>
-                    <a:bodyPr/>
-                    <a:lstStyle/>
-                    <a:p>
-                      <a:r>
-                        <a:rPr sz="1300" b="1">
-                          <a:solidFill>
-                            <a:srgbClr val="FFFFFF"/>
-                          </a:solidFill>
-                        </a:rPr>
-                        <a:t>Comentário</a:t>
-                      </a:r>
-                    </a:p>
-                  </a:txBody>
-                  <a:tcPr>
-                    <a:solidFill>
-                      <a:srgbClr val="1F2A4E"/>
-                    </a:solidFill>
-                  </a:tcPr>
-                </a:tc>
-              </a:tr>
-              <a:tr h="1188720">
-                <a:tc>
-                  <a:txBody>
-                    <a:bodyPr/>
-                    <a:lstStyle/>
-                    <a:p>
-                      <a:r>
-                        <a:rPr sz="1100">
-                          <a:solidFill>
-                            <a:srgbClr val="3D424E"/>
-                          </a:solidFill>
-                        </a:rPr>
-                        <a:t>1</a:t>
-                      </a:r>
-                    </a:p>
-                  </a:txBody>
-                  <a:tcPr>
-                    <a:solidFill>
-                      <a:srgbClr val="E8EAED"/>
-                    </a:solidFill>
-                  </a:tcPr>
-                </a:tc>
-                <a:tc>
-                  <a:txBody>
-                    <a:bodyPr/>
-                    <a:lstStyle/>
-                    <a:p>
-                      <a:r>
-                        <a:rPr sz="1100">
-                          <a:solidFill>
-                            <a:srgbClr val="3D424E"/>
-                          </a:solidFill>
-                        </a:rPr>
-                        <a:t>Primeira revisão da qualificação ao orientador</a:t>
-                      </a:r>
-                    </a:p>
-                  </a:txBody>
-                  <a:tcPr>
-                    <a:solidFill>
-                      <a:srgbClr val="E8EAED"/>
-                    </a:solidFill>
-                  </a:tcPr>
-                </a:tc>
-                <a:tc>
-                  <a:txBody>
-                    <a:bodyPr/>
-                    <a:lstStyle/>
-                    <a:p>
-                      <a:r>
-                        <a:rPr sz="1100">
-                          <a:solidFill>
-                            <a:srgbClr val="3D424E"/>
-                          </a:solidFill>
-                        </a:rPr>
-                        <a:t>15/jul/2026</a:t>
-                      </a:r>
-                    </a:p>
-                  </a:txBody>
-                  <a:tcPr>
-                    <a:solidFill>
-                      <a:srgbClr val="E8EAED"/>
-                    </a:solidFill>
-                  </a:tcPr>
-                </a:tc>
-                <a:tc>
-                  <a:txBody>
-                    <a:bodyPr/>
-                    <a:lstStyle/>
-                    <a:p>
-                      <a:r>
-                        <a:rPr sz="1100">
-                          <a:solidFill>
-                            <a:srgbClr val="3D424E"/>
-                          </a:solidFill>
-                        </a:rPr>
-                        <a:t>PRONTA — Overleaf compartilhado hoje (48h antes do marco)</a:t>
-                      </a:r>
-                    </a:p>
-                  </a:txBody>
-                  <a:tcPr>
-                    <a:solidFill>
-                      <a:srgbClr val="E8EAED"/>
-                    </a:solidFill>
-                  </a:tcPr>
-                </a:tc>
-              </a:tr>
-              <a:tr h="1188720">
-                <a:tc>
-                  <a:txBody>
-                    <a:bodyPr/>
-                    <a:lstStyle/>
-                    <a:p>
-                      <a:r>
-                        <a:rPr sz="1100">
-                          <a:solidFill>
-                            <a:srgbClr val="3D424E"/>
-                          </a:solidFill>
-                        </a:rPr>
-                        <a:t>2</a:t>
-                      </a:r>
-                    </a:p>
-                  </a:txBody>
-                  <a:tcPr/>
-                </a:tc>
-                <a:tc>
-                  <a:txBody>
-                    <a:bodyPr/>
-                    <a:lstStyle/>
-                    <a:p>
-                      <a:r>
-                        <a:rPr sz="1100">
-                          <a:solidFill>
-                            <a:srgbClr val="3D424E"/>
-                          </a:solidFill>
-                        </a:rPr>
-                        <a:t>Pedido formal de qualificação ao PPG-CC / ICT</a:t>
-                      </a:r>
-                    </a:p>
-                  </a:txBody>
-                  <a:tcPr/>
-                </a:tc>
-                <a:tc>
-                  <a:txBody>
-                    <a:bodyPr/>
-                    <a:lstStyle/>
-                    <a:p>
-                      <a:r>
-                        <a:rPr sz="1100">
-                          <a:solidFill>
-                            <a:srgbClr val="3D424E"/>
-                          </a:solidFill>
-                        </a:rPr>
-                        <a:t>30/jul/2026</a:t>
-                      </a:r>
-                    </a:p>
-                  </a:txBody>
-                  <a:tcPr/>
-                </a:tc>
-                <a:tc>
-                  <a:txBody>
-                    <a:bodyPr/>
-                    <a:lstStyle/>
-                    <a:p>
-                      <a:r>
-                        <a:rPr sz="1100">
-                          <a:solidFill>
-                            <a:srgbClr val="3D424E"/>
-                          </a:solidFill>
-                        </a:rPr>
-                        <a:t>Prazo regimental do Programa — mantido</a:t>
-                      </a:r>
-                    </a:p>
-                  </a:txBody>
-                  <a:tcPr/>
-                </a:tc>
-              </a:tr>
-              <a:tr h="1188720">
-                <a:tc>
-                  <a:txBody>
-                    <a:bodyPr/>
-                    <a:lstStyle/>
-                    <a:p>
-                      <a:r>
-                        <a:rPr sz="1100">
-                          <a:solidFill>
-                            <a:srgbClr val="3D424E"/>
-                          </a:solidFill>
-                        </a:rPr>
-                        <a:t>3</a:t>
-                      </a:r>
-                    </a:p>
-                  </a:txBody>
-                  <a:tcPr>
-                    <a:solidFill>
-                      <a:srgbClr val="E8EAED"/>
-                    </a:solidFill>
-                  </a:tcPr>
-                </a:tc>
-                <a:tc>
-                  <a:txBody>
-                    <a:bodyPr/>
-                    <a:lstStyle/>
-                    <a:p>
-                      <a:r>
-                        <a:rPr sz="1100">
-                          <a:solidFill>
-                            <a:srgbClr val="3D424E"/>
-                          </a:solidFill>
-                        </a:rPr>
-                        <a:t>Defesa da qualificação</a:t>
-                      </a:r>
-                    </a:p>
-                  </a:txBody>
-                  <a:tcPr>
-                    <a:solidFill>
-                      <a:srgbClr val="E8EAED"/>
-                    </a:solidFill>
-                  </a:tcPr>
-                </a:tc>
-                <a:tc>
-                  <a:txBody>
-                    <a:bodyPr/>
-                    <a:lstStyle/>
-                    <a:p>
-                      <a:r>
-                        <a:rPr sz="1100">
-                          <a:solidFill>
-                            <a:srgbClr val="3D424E"/>
-                          </a:solidFill>
-                        </a:rPr>
-                        <a:t>outubro/2026</a:t>
-                      </a:r>
-                    </a:p>
-                  </a:txBody>
-                  <a:tcPr>
-                    <a:solidFill>
-                      <a:srgbClr val="E8EAED"/>
-                    </a:solidFill>
-                  </a:tcPr>
-                </a:tc>
-                <a:tc>
-                  <a:txBody>
-                    <a:bodyPr/>
-                    <a:lstStyle/>
-                    <a:p>
-                      <a:r>
-                        <a:rPr sz="1100">
-                          <a:solidFill>
-                            <a:srgbClr val="3D424E"/>
-                          </a:solidFill>
-                        </a:rPr>
-                        <a:t>Ajuste de agosto → outubro (extensão de 2 meses solicitada)</a:t>
-                      </a:r>
-                    </a:p>
-                  </a:txBody>
-                  <a:tcPr>
-                    <a:solidFill>
-                      <a:srgbClr val="E8EAED"/>
-                    </a:solidFill>
-                  </a:tcPr>
-                </a:tc>
-              </a:tr>
-            </a:tbl>
-          </a:graphicData>
-        </a:graphic>
-      </p:graphicFrame>
-      <p:sp>
-        <p:nvSpPr>
-          <p:cNvPr id="5" name="TextBox 4"/>
-          <p:cNvSpPr txBox="1"/>
-          <p:nvPr/>
-        </p:nvSpPr>
-        <p:spPr>
-          <a:xfrm>
-            <a:off x="457200" y="6446520"/>
-            <a:ext cx="11430000" cy="365760"/>
-          </a:xfrm>
-          <a:prstGeom prst="rect">
-            <a:avLst/>
-          </a:prstGeom>
-          <a:noFill/>
-        </p:spPr>
-        <p:txBody>
-          <a:bodyPr wrap="none">
-            <a:spAutoFit/>
-          </a:bodyPr>
-          <a:lstStyle/>
-          <a:p>
-            <a:pPr>
-              <a:defRPr sz="1000" i="1">
-                <a:solidFill>
-                  <a:srgbClr val="707682"/>
-                </a:solidFill>
-              </a:defRPr>
-            </a:pPr>
-            <a:r>
-              <a:t>Marco 1 antecipado em dois dias. Marcos 2 e 3 conforme planejado.</a:t>
-            </a:r>
-          </a:p>
-        </p:txBody>
-      </p:sp>
-    </p:spTree>
-  </p:cSld>
-  <p:clrMapOvr>
-    <a:masterClrMapping/>
-  </p:clrMapOvr>
-</p:sld>
-</file>
-
-<file path=ppt/slides/slide8.xml><?xml version="1.0" encoding="utf-8"?>
-<p:sld xmlns:a="http://schemas.openxmlformats.org/drawingml/2006/main" xmlns:p="http://schemas.openxmlformats.org/presentationml/2006/main" xmlns:r="http://schemas.openxmlformats.org/officeDocument/2006/relationships">
-  <p:cSld>
-    <p:spTree>
-      <p:nvGrpSpPr>
-        <p:cNvPr id="1" name=""/>
-        <p:cNvGrpSpPr/>
-        <p:nvPr/>
-      </p:nvGrpSpPr>
-      <p:grpSpPr/>
-      <p:sp>
-        <p:nvSpPr>
-          <p:cNvPr id="2" name="Rectangle 1"/>
-          <p:cNvSpPr/>
-          <p:nvPr/>
-        </p:nvSpPr>
-        <p:spPr>
-          <a:xfrm>
-            <a:off x="0" y="0"/>
-            <a:ext cx="12188952" cy="6858000"/>
-          </a:xfrm>
-          <a:prstGeom prst="rect">
-            <a:avLst/>
-          </a:prstGeom>
-          <a:solidFill>
-            <a:srgbClr val="1F2A4E"/>
-          </a:solidFill>
-          <a:ln>
-            <a:noFill/>
-          </a:ln>
-        </p:spPr>
-        <p:style>
-          <a:lnRef idx="1">
-            <a:schemeClr val="accent1"/>
-          </a:lnRef>
-          <a:fillRef idx="3">
-            <a:schemeClr val="accent1"/>
-          </a:fillRef>
-          <a:effectRef idx="2">
-            <a:schemeClr val="accent1"/>
-          </a:effectRef>
-          <a:fontRef idx="minor">
-            <a:schemeClr val="lt1"/>
-          </a:fontRef>
-        </p:style>
-        <p:txBody>
-          <a:bodyPr rtlCol="0" anchor="ctr"/>
-          <a:lstStyle/>
-          <a:p>
-            <a:pPr algn="ctr"/>
-          </a:p>
-        </p:txBody>
-      </p:sp>
-      <p:sp>
-        <p:nvSpPr>
-          <p:cNvPr id="3" name="TextBox 2"/>
-          <p:cNvSpPr txBox="1"/>
-          <p:nvPr/>
-        </p:nvSpPr>
-        <p:spPr>
-          <a:xfrm>
-            <a:off x="731520" y="1371600"/>
-            <a:ext cx="2743200" cy="2743200"/>
-          </a:xfrm>
-          <a:prstGeom prst="rect">
-            <a:avLst/>
-          </a:prstGeom>
-          <a:noFill/>
-        </p:spPr>
-        <p:txBody>
-          <a:bodyPr wrap="none">
-            <a:spAutoFit/>
-          </a:bodyPr>
-          <a:lstStyle/>
-          <a:p>
-            <a:pPr>
-              <a:defRPr sz="14000" b="1">
-                <a:solidFill>
-                  <a:srgbClr val="FFFFFF"/>
-                </a:solidFill>
-              </a:defRPr>
-            </a:pPr>
-            <a:r>
-              <a:t>2</a:t>
-            </a:r>
-          </a:p>
-        </p:txBody>
-      </p:sp>
-      <p:sp>
-        <p:nvSpPr>
-          <p:cNvPr id="4" name="TextBox 3"/>
-          <p:cNvSpPr txBox="1"/>
-          <p:nvPr/>
-        </p:nvSpPr>
-        <p:spPr>
-          <a:xfrm>
-            <a:off x="3931920" y="2286000"/>
-            <a:ext cx="7772400" cy="1828800"/>
-          </a:xfrm>
-          <a:prstGeom prst="rect">
-            <a:avLst/>
-          </a:prstGeom>
-          <a:noFill/>
-        </p:spPr>
-        <p:txBody>
-          <a:bodyPr wrap="square">
-            <a:spAutoFit/>
-          </a:bodyPr>
-          <a:lstStyle/>
-          <a:p>
-            <a:pPr>
-              <a:defRPr sz="3600" b="1">
-                <a:solidFill>
-                  <a:srgbClr val="FFFFFF"/>
-                </a:solidFill>
-              </a:defRPr>
-            </a:pPr>
-            <a:r>
-              <a:t>Estado da escrita</a:t>
-            </a:r>
-          </a:p>
-          <a:p>
-            <a:pPr>
-              <a:defRPr sz="1800">
-                <a:solidFill>
-                  <a:srgbClr val="E8EAED"/>
-                </a:solidFill>
-              </a:defRPr>
-            </a:pPr>
-            <a:r>
-              <a:t>O que já está escrito e como vai virar Overleaf</a:t>
-            </a:r>
-          </a:p>
-        </p:txBody>
-      </p:sp>
-    </p:spTree>
-  </p:cSld>
-  <p:clrMapOvr>
-    <a:masterClrMapping/>
-  </p:clrMapOvr>
-</p:sld>
-</file>
-
-<file path=ppt/slides/slide9.xml><?xml version="1.0" encoding="utf-8"?>
-<p:sld xmlns:a="http://schemas.openxmlformats.org/drawingml/2006/main" xmlns:p="http://schemas.openxmlformats.org/presentationml/2006/main" xmlns:r="http://schemas.openxmlformats.org/officeDocument/2006/relationships">
-  <p:cSld>
-    <p:spTree>
-      <p:nvGrpSpPr>
-        <p:cNvPr id="1" name=""/>
-        <p:cNvGrpSpPr/>
-        <p:nvPr/>
-      </p:nvGrpSpPr>
-      <p:grpSpPr/>
-      <p:sp>
-        <p:nvSpPr>
-          <p:cNvPr id="2" name="TextBox 1"/>
-          <p:cNvSpPr txBox="1"/>
-          <p:nvPr/>
-        </p:nvSpPr>
-        <p:spPr>
-          <a:xfrm>
-            <a:off x="457200" y="365760"/>
-            <a:ext cx="11430000" cy="822960"/>
-          </a:xfrm>
-          <a:prstGeom prst="rect">
-            <a:avLst/>
-          </a:prstGeom>
-          <a:noFill/>
-        </p:spPr>
-        <p:txBody>
-          <a:bodyPr wrap="square">
-            <a:spAutoFit/>
-          </a:bodyPr>
-          <a:lstStyle/>
-          <a:p>
-            <a:pPr>
-              <a:defRPr sz="2600" b="1">
-                <a:solidFill>
-                  <a:srgbClr val="1F2A4E"/>
-                </a:solidFill>
-              </a:defRPr>
-            </a:pPr>
-            <a:r>
-              <a:t>Estado real da escrita — qualificação migrada para o Overleaf</a:t>
-            </a:r>
-          </a:p>
-        </p:txBody>
-      </p:sp>
-      <p:sp>
-        <p:nvSpPr>
-          <p:cNvPr id="3" name="Rectangle 2"/>
-          <p:cNvSpPr/>
-          <p:nvPr/>
-        </p:nvSpPr>
-        <p:spPr>
-          <a:xfrm>
-            <a:off x="457200" y="1143000"/>
-            <a:ext cx="11430000" cy="36576"/>
-          </a:xfrm>
-          <a:prstGeom prst="rect">
-            <a:avLst/>
-          </a:prstGeom>
-          <a:solidFill>
-            <a:srgbClr val="1F2A4E"/>
-          </a:solidFill>
-          <a:ln>
-            <a:noFill/>
-          </a:ln>
-        </p:spPr>
-        <p:style>
-          <a:lnRef idx="1">
-            <a:schemeClr val="accent1"/>
-          </a:lnRef>
-          <a:fillRef idx="3">
-            <a:schemeClr val="accent1"/>
-          </a:fillRef>
-          <a:effectRef idx="2">
-            <a:schemeClr val="accent1"/>
-          </a:effectRef>
-          <a:fontRef idx="minor">
-            <a:schemeClr val="lt1"/>
-          </a:fontRef>
-        </p:style>
-        <p:txBody>
-          <a:bodyPr rtlCol="0" anchor="ctr"/>
-          <a:lstStyle/>
-          <a:p>
-            <a:pPr algn="ctr"/>
-          </a:p>
-        </p:txBody>
-      </p:sp>
-      <p:sp>
-        <p:nvSpPr>
-          <p:cNvPr id="4" name="TextBox 3"/>
-          <p:cNvSpPr txBox="1"/>
-          <p:nvPr/>
-        </p:nvSpPr>
-        <p:spPr>
-          <a:xfrm>
-            <a:off x="457200" y="1371600"/>
-            <a:ext cx="11430000" cy="4937760"/>
-          </a:xfrm>
-          <a:prstGeom prst="rect">
-            <a:avLst/>
-          </a:prstGeom>
-          <a:noFill/>
-        </p:spPr>
-        <p:txBody>
-          <a:bodyPr wrap="square">
-            <a:spAutoFit/>
-          </a:bodyPr>
-          <a:lstStyle/>
-          <a:p>
-            <a:pPr>
-              <a:spcAft>
-                <a:spcPts val="800"/>
-              </a:spcAft>
-            </a:pPr>
-            <a:r>
-              <a:rPr sz="1600" b="1">
-                <a:solidFill>
-                  <a:srgbClr val="1F2A4E"/>
-                </a:solidFill>
-              </a:rPr>
-              <a:t>Cap 1 — Introdução:  </a:t>
-            </a:r>
-            <a:r>
-              <a:rPr sz="1600">
-                <a:solidFill>
-                  <a:srgbClr val="3D424E"/>
-                </a:solidFill>
-              </a:rPr>
-              <a:t>no Overleaf; ancora a disparidade Black 90 % × Latinx 60 % e a pergunta de pesquisa</a:t>
-            </a:r>
-          </a:p>
-          <a:p>
-            <a:pPr>
-              <a:spcAft>
-                <a:spcPts val="800"/>
-              </a:spcAft>
-            </a:pPr>
-            <a:r>
-              <a:rPr sz="1600" b="1">
-                <a:solidFill>
-                  <a:srgbClr val="1F2A4E"/>
-                </a:solidFill>
-              </a:rPr>
-              <a:t>Cap 2 — Revisão:  </a:t>
-            </a:r>
-            <a:r>
-              <a:rPr sz="1600">
-                <a:solidFill>
-                  <a:srgbClr val="3D424E"/>
-                </a:solidFill>
-              </a:rPr>
-              <a:t>no Overleaf; fairness (Buolamwini, Hardt, Kleinberg) + MST (Schumann, Pereira) + FiLM (Perez)</a:t>
-            </a:r>
-          </a:p>
-          <a:p>
-            <a:pPr>
-              <a:spcAft>
-                <a:spcPts val="800"/>
-              </a:spcAft>
-            </a:pPr>
-            <a:r>
-              <a:rPr sz="1600" b="1">
-                <a:solidFill>
-                  <a:srgbClr val="1F2A4E"/>
-                </a:solidFill>
-              </a:rPr>
-              <a:t>Cap 3 — Objetivos:  </a:t>
-            </a:r>
-            <a:r>
-              <a:rPr sz="1600">
-                <a:solidFill>
-                  <a:srgbClr val="3D424E"/>
-                </a:solidFill>
-              </a:rPr>
-              <a:t>no Overleaf; OG + 6 OE + 6 hipóteses + 7 contribuições</a:t>
-            </a:r>
-          </a:p>
-          <a:p>
-            <a:pPr>
-              <a:spcAft>
-                <a:spcPts val="800"/>
-              </a:spcAft>
-            </a:pPr>
-            <a:r>
-              <a:rPr sz="1600" b="1">
-                <a:solidFill>
-                  <a:srgbClr val="1F2A4E"/>
-                </a:solidFill>
-              </a:rPr>
-              <a:t>Cap 4 — Metodologia:  </a:t>
-            </a:r>
-            <a:r>
-              <a:rPr sz="1600">
-                <a:solidFill>
-                  <a:srgbClr val="3D424E"/>
-                </a:solidFill>
-              </a:rPr>
-              <a:t>no Overleaf; pipeline 6 etapas + 4 configurações + adequação ética CEP formalizada</a:t>
-            </a:r>
-          </a:p>
-          <a:p>
-            <a:pPr>
-              <a:spcAft>
-                <a:spcPts val="800"/>
-              </a:spcAft>
-            </a:pPr>
-            <a:r>
-              <a:rPr sz="1600" b="1">
-                <a:solidFill>
-                  <a:srgbClr val="1F2A4E"/>
-                </a:solidFill>
-              </a:rPr>
-              <a:t>Cap 5 — Cronograma:  </a:t>
-            </a:r>
-            <a:r>
-              <a:rPr sz="1600">
-                <a:solidFill>
-                  <a:srgbClr val="3D424E"/>
-                </a:solidFill>
-              </a:rPr>
-              <a:t>no Overleaf; marcos ajustados conforme plano consolidado</a:t>
-            </a:r>
-          </a:p>
-          <a:p>
-            <a:pPr>
-              <a:spcAft>
-                <a:spcPts val="800"/>
-              </a:spcAft>
-            </a:pPr>
-            <a:r>
-              <a:rPr sz="1600" b="1">
-                <a:solidFill>
-                  <a:srgbClr val="1F2A4E"/>
-                </a:solidFill>
-              </a:rPr>
-              <a:t>  </a:t>
-            </a:r>
-            <a:r>
-              <a:rPr sz="1600">
-                <a:solidFill>
-                  <a:srgbClr val="3D424E"/>
-                </a:solidFill>
-              </a:rPr>
-              <a:t/>
-            </a:r>
-          </a:p>
-          <a:p>
-            <a:pPr>
-              <a:spcAft>
-                <a:spcPts val="800"/>
-              </a:spcAft>
-            </a:pPr>
-            <a:r>
-              <a:rPr sz="1600" b="1">
-                <a:solidFill>
-                  <a:srgbClr val="1F2A4E"/>
-                </a:solidFill>
-              </a:rPr>
-              <a:t>Transposição:  </a:t>
-            </a:r>
-            <a:r>
-              <a:rPr sz="1600">
-                <a:solidFill>
-                  <a:srgbClr val="3D424E"/>
-                </a:solidFill>
-              </a:rPr>
-              <a:t>concluída — LaTeX no Overleaf, bibliografia .bib com 104 entradas importada, referências cruzadas testadas</a:t>
-            </a:r>
-          </a:p>
-          <a:p>
-            <a:pPr>
-              <a:spcAft>
-                <a:spcPts val="800"/>
-              </a:spcAft>
-            </a:pPr>
-            <a:r>
-              <a:rPr sz="1600" b="1">
-                <a:solidFill>
-                  <a:srgbClr val="1F2A4E"/>
-                </a:solidFill>
-              </a:rPr>
-              <a:t>Compartilhamento:  </a:t>
-            </a:r>
-            <a:r>
-              <a:rPr sz="1600">
-                <a:solidFill>
-                  <a:srgbClr val="3D424E"/>
-                </a:solidFill>
-              </a:rPr>
-              <a:t>convite do Overleaf enviado ao senhor a partir desta reunião — pronto para primeira revisão</a:t>
-            </a:r>
-          </a:p>
-        </p:txBody>
-      </p:sp>
-      <p:sp>
-        <p:nvSpPr>
-          <p:cNvPr id="5" name="TextBox 4"/>
-          <p:cNvSpPr txBox="1"/>
-          <p:nvPr/>
-        </p:nvSpPr>
-        <p:spPr>
-          <a:xfrm>
-            <a:off x="457200" y="6446520"/>
-            <a:ext cx="11430000" cy="365760"/>
-          </a:xfrm>
-          <a:prstGeom prst="rect">
-            <a:avLst/>
-          </a:prstGeom>
-          <a:noFill/>
-        </p:spPr>
-        <p:txBody>
-          <a:bodyPr wrap="none">
-            <a:spAutoFit/>
-          </a:bodyPr>
-          <a:lstStyle/>
-          <a:p>
-            <a:pPr>
-              <a:defRPr sz="1000" i="1">
-                <a:solidFill>
-                  <a:srgbClr val="707682"/>
-                </a:solidFill>
-              </a:defRPr>
-            </a:pPr>
-            <a:r>
-              <a:t>Marco 15/jul antecipado. Nesta semana entro em modo escuta e revisão conforme feedback.</a:t>
+              <a:t>Etapa 3 é onde o mecanismo FiLM entra. Etapa 6 é o diagnóstico central da tese.</a:t>
             </a:r>
           </a:p>
         </p:txBody>

--- a/docs/ativo/material_reuniao_orientador_2026-07-13.pptx
+++ b/docs/ativo/material_reuniao_orientador_2026-07-13.pptx
@@ -5,24 +5,23 @@
     <p:sldMasterId id="2147483648" r:id="rId1"/>
   </p:sldMasterIdLst>
   <p:sldIdLst>
-    <p:sldId id="256" r:id="rId7"/>
-    <p:sldId id="257" r:id="rId8"/>
-    <p:sldId id="258" r:id="rId9"/>
-    <p:sldId id="259" r:id="rId10"/>
-    <p:sldId id="260" r:id="rId11"/>
-    <p:sldId id="261" r:id="rId12"/>
-    <p:sldId id="262" r:id="rId13"/>
-    <p:sldId id="263" r:id="rId14"/>
-    <p:sldId id="264" r:id="rId15"/>
-    <p:sldId id="265" r:id="rId16"/>
-    <p:sldId id="266" r:id="rId17"/>
-    <p:sldId id="267" r:id="rId18"/>
-    <p:sldId id="268" r:id="rId19"/>
-    <p:sldId id="269" r:id="rId20"/>
-    <p:sldId id="270" r:id="rId21"/>
-    <p:sldId id="271" r:id="rId22"/>
+    <p:sldId id="256" r:id="rId2"/>
+    <p:sldId id="257" r:id="rId3"/>
+    <p:sldId id="258" r:id="rId4"/>
+    <p:sldId id="259" r:id="rId5"/>
+    <p:sldId id="260" r:id="rId6"/>
+    <p:sldId id="261" r:id="rId7"/>
+    <p:sldId id="262" r:id="rId8"/>
+    <p:sldId id="263" r:id="rId9"/>
+    <p:sldId id="264" r:id="rId10"/>
+    <p:sldId id="265" r:id="rId11"/>
+    <p:sldId id="266" r:id="rId12"/>
+    <p:sldId id="267" r:id="rId13"/>
+    <p:sldId id="268" r:id="rId14"/>
+    <p:sldId id="270" r:id="rId15"/>
+    <p:sldId id="271" r:id="rId16"/>
   </p:sldIdLst>
-  <p:sldSz cx="12188952" cy="6858000" type="screen4x3"/>
+  <p:sldSz cx="12188825" cy="6858000"/>
   <p:notesSz cx="6858000" cy="9144000"/>
   <p:defaultTextStyle>
     <a:defPPr>
@@ -119,6 +118,22 @@
       </a:defRPr>
     </a:lvl9pPr>
   </p:defaultTextStyle>
+  <p:extLst>
+    <p:ext uri="{EFAFB233-063F-42B5-8137-9DF3F51BA10A}">
+      <p15:sldGuideLst xmlns:p15="http://schemas.microsoft.com/office/powerpoint/2012/main">
+        <p15:guide id="1" orient="horz" pos="2160">
+          <p15:clr>
+            <a:srgbClr val="A4A3A4"/>
+          </p15:clr>
+        </p15:guide>
+        <p15:guide id="2" pos="2880">
+          <p15:clr>
+            <a:srgbClr val="A4A3A4"/>
+          </p15:clr>
+        </p15:guide>
+      </p15:sldGuideLst>
+    </p:ext>
+  </p:extLst>
 </p:presentation>
 </file>
 
@@ -160,10 +175,9 @@
           <a:lstStyle/>
           <a:p>
             <a:r>
-              <a:rPr lang="en-US" smtClean="0"/>
+              <a:rPr lang="en-US"/>
               <a:t>Click to edit Master title style</a:t>
             </a:r>
-            <a:endParaRPr lang="en-US"/>
           </a:p>
         </p:txBody>
       </p:sp>
@@ -279,10 +293,9 @@
           </a:lstStyle>
           <a:p>
             <a:r>
-              <a:rPr lang="en-US" smtClean="0"/>
+              <a:rPr lang="en-US"/>
               <a:t>Click to edit Master subtitle style</a:t>
             </a:r>
-            <a:endParaRPr lang="en-US"/>
           </a:p>
         </p:txBody>
       </p:sp>
@@ -303,7 +316,7 @@
           <a:p>
             <a:fld id="{5BCAD085-E8A6-8845-BD4E-CB4CCA059FC4}" type="datetimeFigureOut">
               <a:rPr lang="en-US" smtClean="0"/>
-              <a:t>1/27/13</a:t>
+              <a:t>7/13/2026</a:t>
             </a:fld>
             <a:endParaRPr lang="en-US"/>
           </a:p>
@@ -345,7 +358,7 @@
           <a:p>
             <a:fld id="{C1FF6DA9-008F-8B48-92A6-B652298478BF}" type="slidenum">
               <a:rPr lang="en-US" smtClean="0"/>
-              <a:t>‹#›</a:t>
+              <a:t>‹nº›</a:t>
             </a:fld>
             <a:endParaRPr lang="en-US"/>
           </a:p>
@@ -397,10 +410,9 @@
           <a:lstStyle/>
           <a:p>
             <a:r>
-              <a:rPr lang="en-US" smtClean="0"/>
+              <a:rPr lang="en-US"/>
               <a:t>Click to edit Master title style</a:t>
             </a:r>
-            <a:endParaRPr lang="en-US"/>
           </a:p>
         </p:txBody>
       </p:sp>
@@ -421,38 +433,37 @@
           <a:p>
             <a:pPr lvl="0"/>
             <a:r>
-              <a:rPr lang="en-US" smtClean="0"/>
+              <a:rPr lang="en-US"/>
               <a:t>Click to edit Master text styles</a:t>
             </a:r>
           </a:p>
           <a:p>
             <a:pPr lvl="1"/>
             <a:r>
-              <a:rPr lang="en-US" smtClean="0"/>
+              <a:rPr lang="en-US"/>
               <a:t>Second level</a:t>
             </a:r>
           </a:p>
           <a:p>
             <a:pPr lvl="2"/>
             <a:r>
-              <a:rPr lang="en-US" smtClean="0"/>
+              <a:rPr lang="en-US"/>
               <a:t>Third level</a:t>
             </a:r>
           </a:p>
           <a:p>
             <a:pPr lvl="3"/>
             <a:r>
-              <a:rPr lang="en-US" smtClean="0"/>
+              <a:rPr lang="en-US"/>
               <a:t>Fourth level</a:t>
             </a:r>
           </a:p>
           <a:p>
             <a:pPr lvl="4"/>
             <a:r>
-              <a:rPr lang="en-US" smtClean="0"/>
+              <a:rPr lang="en-US"/>
               <a:t>Fifth level</a:t>
             </a:r>
-            <a:endParaRPr lang="en-US"/>
           </a:p>
         </p:txBody>
       </p:sp>
@@ -473,7 +484,7 @@
           <a:p>
             <a:fld id="{5BCAD085-E8A6-8845-BD4E-CB4CCA059FC4}" type="datetimeFigureOut">
               <a:rPr lang="en-US" smtClean="0"/>
-              <a:t>1/27/13</a:t>
+              <a:t>7/13/2026</a:t>
             </a:fld>
             <a:endParaRPr lang="en-US"/>
           </a:p>
@@ -515,7 +526,7 @@
           <a:p>
             <a:fld id="{C1FF6DA9-008F-8B48-92A6-B652298478BF}" type="slidenum">
               <a:rPr lang="en-US" smtClean="0"/>
-              <a:t>‹#›</a:t>
+              <a:t>‹nº›</a:t>
             </a:fld>
             <a:endParaRPr lang="en-US"/>
           </a:p>
@@ -572,10 +583,9 @@
           <a:lstStyle/>
           <a:p>
             <a:r>
-              <a:rPr lang="en-US" smtClean="0"/>
+              <a:rPr lang="en-US"/>
               <a:t>Click to edit Master title style</a:t>
             </a:r>
-            <a:endParaRPr lang="en-US"/>
           </a:p>
         </p:txBody>
       </p:sp>
@@ -601,38 +611,37 @@
           <a:p>
             <a:pPr lvl="0"/>
             <a:r>
-              <a:rPr lang="en-US" smtClean="0"/>
+              <a:rPr lang="en-US"/>
               <a:t>Click to edit Master text styles</a:t>
             </a:r>
           </a:p>
           <a:p>
             <a:pPr lvl="1"/>
             <a:r>
-              <a:rPr lang="en-US" smtClean="0"/>
+              <a:rPr lang="en-US"/>
               <a:t>Second level</a:t>
             </a:r>
           </a:p>
           <a:p>
             <a:pPr lvl="2"/>
             <a:r>
-              <a:rPr lang="en-US" smtClean="0"/>
+              <a:rPr lang="en-US"/>
               <a:t>Third level</a:t>
             </a:r>
           </a:p>
           <a:p>
             <a:pPr lvl="3"/>
             <a:r>
-              <a:rPr lang="en-US" smtClean="0"/>
+              <a:rPr lang="en-US"/>
               <a:t>Fourth level</a:t>
             </a:r>
           </a:p>
           <a:p>
             <a:pPr lvl="4"/>
             <a:r>
-              <a:rPr lang="en-US" smtClean="0"/>
+              <a:rPr lang="en-US"/>
               <a:t>Fifth level</a:t>
             </a:r>
-            <a:endParaRPr lang="en-US"/>
           </a:p>
         </p:txBody>
       </p:sp>
@@ -653,7 +662,7 @@
           <a:p>
             <a:fld id="{5BCAD085-E8A6-8845-BD4E-CB4CCA059FC4}" type="datetimeFigureOut">
               <a:rPr lang="en-US" smtClean="0"/>
-              <a:t>1/27/13</a:t>
+              <a:t>7/13/2026</a:t>
             </a:fld>
             <a:endParaRPr lang="en-US"/>
           </a:p>
@@ -695,7 +704,7 @@
           <a:p>
             <a:fld id="{C1FF6DA9-008F-8B48-92A6-B652298478BF}" type="slidenum">
               <a:rPr lang="en-US" smtClean="0"/>
-              <a:t>‹#›</a:t>
+              <a:t>‹nº›</a:t>
             </a:fld>
             <a:endParaRPr lang="en-US"/>
           </a:p>
@@ -747,10 +756,9 @@
           <a:lstStyle/>
           <a:p>
             <a:r>
-              <a:rPr lang="en-US" smtClean="0"/>
+              <a:rPr lang="en-US"/>
               <a:t>Click to edit Master title style</a:t>
             </a:r>
-            <a:endParaRPr lang="en-US"/>
           </a:p>
         </p:txBody>
       </p:sp>
@@ -771,38 +779,37 @@
           <a:p>
             <a:pPr lvl="0"/>
             <a:r>
-              <a:rPr lang="en-US" smtClean="0"/>
+              <a:rPr lang="en-US"/>
               <a:t>Click to edit Master text styles</a:t>
             </a:r>
           </a:p>
           <a:p>
             <a:pPr lvl="1"/>
             <a:r>
-              <a:rPr lang="en-US" smtClean="0"/>
+              <a:rPr lang="en-US"/>
               <a:t>Second level</a:t>
             </a:r>
           </a:p>
           <a:p>
             <a:pPr lvl="2"/>
             <a:r>
-              <a:rPr lang="en-US" smtClean="0"/>
+              <a:rPr lang="en-US"/>
               <a:t>Third level</a:t>
             </a:r>
           </a:p>
           <a:p>
             <a:pPr lvl="3"/>
             <a:r>
-              <a:rPr lang="en-US" smtClean="0"/>
+              <a:rPr lang="en-US"/>
               <a:t>Fourth level</a:t>
             </a:r>
           </a:p>
           <a:p>
             <a:pPr lvl="4"/>
             <a:r>
-              <a:rPr lang="en-US" smtClean="0"/>
+              <a:rPr lang="en-US"/>
               <a:t>Fifth level</a:t>
             </a:r>
-            <a:endParaRPr lang="en-US"/>
           </a:p>
         </p:txBody>
       </p:sp>
@@ -823,7 +830,7 @@
           <a:p>
             <a:fld id="{5BCAD085-E8A6-8845-BD4E-CB4CCA059FC4}" type="datetimeFigureOut">
               <a:rPr lang="en-US" smtClean="0"/>
-              <a:t>1/27/13</a:t>
+              <a:t>7/13/2026</a:t>
             </a:fld>
             <a:endParaRPr lang="en-US"/>
           </a:p>
@@ -865,7 +872,7 @@
           <a:p>
             <a:fld id="{C1FF6DA9-008F-8B48-92A6-B652298478BF}" type="slidenum">
               <a:rPr lang="en-US" smtClean="0"/>
-              <a:t>‹#›</a:t>
+              <a:t>‹nº›</a:t>
             </a:fld>
             <a:endParaRPr lang="en-US"/>
           </a:p>
@@ -926,10 +933,9 @@
           </a:lstStyle>
           <a:p>
             <a:r>
-              <a:rPr lang="en-US" smtClean="0"/>
+              <a:rPr lang="en-US"/>
               <a:t>Click to edit Master title style</a:t>
             </a:r>
-            <a:endParaRPr lang="en-US"/>
           </a:p>
         </p:txBody>
       </p:sp>
@@ -1046,7 +1052,7 @@
           <a:p>
             <a:pPr lvl="0"/>
             <a:r>
-              <a:rPr lang="en-US" smtClean="0"/>
+              <a:rPr lang="en-US"/>
               <a:t>Click to edit Master text styles</a:t>
             </a:r>
           </a:p>
@@ -1069,7 +1075,7 @@
           <a:p>
             <a:fld id="{5BCAD085-E8A6-8845-BD4E-CB4CCA059FC4}" type="datetimeFigureOut">
               <a:rPr lang="en-US" smtClean="0"/>
-              <a:t>1/27/13</a:t>
+              <a:t>7/13/2026</a:t>
             </a:fld>
             <a:endParaRPr lang="en-US"/>
           </a:p>
@@ -1111,7 +1117,7 @@
           <a:p>
             <a:fld id="{C1FF6DA9-008F-8B48-92A6-B652298478BF}" type="slidenum">
               <a:rPr lang="en-US" smtClean="0"/>
-              <a:t>‹#›</a:t>
+              <a:t>‹nº›</a:t>
             </a:fld>
             <a:endParaRPr lang="en-US"/>
           </a:p>
@@ -1163,10 +1169,9 @@
           <a:lstStyle/>
           <a:p>
             <a:r>
-              <a:rPr lang="en-US" smtClean="0"/>
+              <a:rPr lang="en-US"/>
               <a:t>Click to edit Master title style</a:t>
             </a:r>
-            <a:endParaRPr lang="en-US"/>
           </a:p>
         </p:txBody>
       </p:sp>
@@ -1220,38 +1225,37 @@
           <a:p>
             <a:pPr lvl="0"/>
             <a:r>
-              <a:rPr lang="en-US" smtClean="0"/>
+              <a:rPr lang="en-US"/>
               <a:t>Click to edit Master text styles</a:t>
             </a:r>
           </a:p>
           <a:p>
             <a:pPr lvl="1"/>
             <a:r>
-              <a:rPr lang="en-US" smtClean="0"/>
+              <a:rPr lang="en-US"/>
               <a:t>Second level</a:t>
             </a:r>
           </a:p>
           <a:p>
             <a:pPr lvl="2"/>
             <a:r>
-              <a:rPr lang="en-US" smtClean="0"/>
+              <a:rPr lang="en-US"/>
               <a:t>Third level</a:t>
             </a:r>
           </a:p>
           <a:p>
             <a:pPr lvl="3"/>
             <a:r>
-              <a:rPr lang="en-US" smtClean="0"/>
+              <a:rPr lang="en-US"/>
               <a:t>Fourth level</a:t>
             </a:r>
           </a:p>
           <a:p>
             <a:pPr lvl="4"/>
             <a:r>
-              <a:rPr lang="en-US" smtClean="0"/>
+              <a:rPr lang="en-US"/>
               <a:t>Fifth level</a:t>
             </a:r>
-            <a:endParaRPr lang="en-US"/>
           </a:p>
         </p:txBody>
       </p:sp>
@@ -1305,38 +1309,37 @@
           <a:p>
             <a:pPr lvl="0"/>
             <a:r>
-              <a:rPr lang="en-US" smtClean="0"/>
+              <a:rPr lang="en-US"/>
               <a:t>Click to edit Master text styles</a:t>
             </a:r>
           </a:p>
           <a:p>
             <a:pPr lvl="1"/>
             <a:r>
-              <a:rPr lang="en-US" smtClean="0"/>
+              <a:rPr lang="en-US"/>
               <a:t>Second level</a:t>
             </a:r>
           </a:p>
           <a:p>
             <a:pPr lvl="2"/>
             <a:r>
-              <a:rPr lang="en-US" smtClean="0"/>
+              <a:rPr lang="en-US"/>
               <a:t>Third level</a:t>
             </a:r>
           </a:p>
           <a:p>
             <a:pPr lvl="3"/>
             <a:r>
-              <a:rPr lang="en-US" smtClean="0"/>
+              <a:rPr lang="en-US"/>
               <a:t>Fourth level</a:t>
             </a:r>
           </a:p>
           <a:p>
             <a:pPr lvl="4"/>
             <a:r>
-              <a:rPr lang="en-US" smtClean="0"/>
+              <a:rPr lang="en-US"/>
               <a:t>Fifth level</a:t>
             </a:r>
-            <a:endParaRPr lang="en-US"/>
           </a:p>
         </p:txBody>
       </p:sp>
@@ -1357,7 +1360,7 @@
           <a:p>
             <a:fld id="{5BCAD085-E8A6-8845-BD4E-CB4CCA059FC4}" type="datetimeFigureOut">
               <a:rPr lang="en-US" smtClean="0"/>
-              <a:t>1/27/13</a:t>
+              <a:t>7/13/2026</a:t>
             </a:fld>
             <a:endParaRPr lang="en-US"/>
           </a:p>
@@ -1399,7 +1402,7 @@
           <a:p>
             <a:fld id="{C1FF6DA9-008F-8B48-92A6-B652298478BF}" type="slidenum">
               <a:rPr lang="en-US" smtClean="0"/>
-              <a:t>‹#›</a:t>
+              <a:t>‹nº›</a:t>
             </a:fld>
             <a:endParaRPr lang="en-US"/>
           </a:p>
@@ -1455,10 +1458,9 @@
           </a:lstStyle>
           <a:p>
             <a:r>
-              <a:rPr lang="en-US" smtClean="0"/>
+              <a:rPr lang="en-US"/>
               <a:t>Click to edit Master title style</a:t>
             </a:r>
-            <a:endParaRPr lang="en-US"/>
           </a:p>
         </p:txBody>
       </p:sp>
@@ -1521,7 +1523,7 @@
           <a:p>
             <a:pPr lvl="0"/>
             <a:r>
-              <a:rPr lang="en-US" smtClean="0"/>
+              <a:rPr lang="en-US"/>
               <a:t>Click to edit Master text styles</a:t>
             </a:r>
           </a:p>
@@ -1577,38 +1579,37 @@
           <a:p>
             <a:pPr lvl="0"/>
             <a:r>
-              <a:rPr lang="en-US" smtClean="0"/>
+              <a:rPr lang="en-US"/>
               <a:t>Click to edit Master text styles</a:t>
             </a:r>
           </a:p>
           <a:p>
             <a:pPr lvl="1"/>
             <a:r>
-              <a:rPr lang="en-US" smtClean="0"/>
+              <a:rPr lang="en-US"/>
               <a:t>Second level</a:t>
             </a:r>
           </a:p>
           <a:p>
             <a:pPr lvl="2"/>
             <a:r>
-              <a:rPr lang="en-US" smtClean="0"/>
+              <a:rPr lang="en-US"/>
               <a:t>Third level</a:t>
             </a:r>
           </a:p>
           <a:p>
             <a:pPr lvl="3"/>
             <a:r>
-              <a:rPr lang="en-US" smtClean="0"/>
+              <a:rPr lang="en-US"/>
               <a:t>Fourth level</a:t>
             </a:r>
           </a:p>
           <a:p>
             <a:pPr lvl="4"/>
             <a:r>
-              <a:rPr lang="en-US" smtClean="0"/>
+              <a:rPr lang="en-US"/>
               <a:t>Fifth level</a:t>
             </a:r>
-            <a:endParaRPr lang="en-US"/>
           </a:p>
         </p:txBody>
       </p:sp>
@@ -1671,7 +1672,7 @@
           <a:p>
             <a:pPr lvl="0"/>
             <a:r>
-              <a:rPr lang="en-US" smtClean="0"/>
+              <a:rPr lang="en-US"/>
               <a:t>Click to edit Master text styles</a:t>
             </a:r>
           </a:p>
@@ -1727,38 +1728,37 @@
           <a:p>
             <a:pPr lvl="0"/>
             <a:r>
-              <a:rPr lang="en-US" smtClean="0"/>
+              <a:rPr lang="en-US"/>
               <a:t>Click to edit Master text styles</a:t>
             </a:r>
           </a:p>
           <a:p>
             <a:pPr lvl="1"/>
             <a:r>
-              <a:rPr lang="en-US" smtClean="0"/>
+              <a:rPr lang="en-US"/>
               <a:t>Second level</a:t>
             </a:r>
           </a:p>
           <a:p>
             <a:pPr lvl="2"/>
             <a:r>
-              <a:rPr lang="en-US" smtClean="0"/>
+              <a:rPr lang="en-US"/>
               <a:t>Third level</a:t>
             </a:r>
           </a:p>
           <a:p>
             <a:pPr lvl="3"/>
             <a:r>
-              <a:rPr lang="en-US" smtClean="0"/>
+              <a:rPr lang="en-US"/>
               <a:t>Fourth level</a:t>
             </a:r>
           </a:p>
           <a:p>
             <a:pPr lvl="4"/>
             <a:r>
-              <a:rPr lang="en-US" smtClean="0"/>
+              <a:rPr lang="en-US"/>
               <a:t>Fifth level</a:t>
             </a:r>
-            <a:endParaRPr lang="en-US"/>
           </a:p>
         </p:txBody>
       </p:sp>
@@ -1779,7 +1779,7 @@
           <a:p>
             <a:fld id="{5BCAD085-E8A6-8845-BD4E-CB4CCA059FC4}" type="datetimeFigureOut">
               <a:rPr lang="en-US" smtClean="0"/>
-              <a:t>1/27/13</a:t>
+              <a:t>7/13/2026</a:t>
             </a:fld>
             <a:endParaRPr lang="en-US"/>
           </a:p>
@@ -1821,7 +1821,7 @@
           <a:p>
             <a:fld id="{C1FF6DA9-008F-8B48-92A6-B652298478BF}" type="slidenum">
               <a:rPr lang="en-US" smtClean="0"/>
-              <a:t>‹#›</a:t>
+              <a:t>‹nº›</a:t>
             </a:fld>
             <a:endParaRPr lang="en-US"/>
           </a:p>
@@ -1873,10 +1873,9 @@
           <a:lstStyle/>
           <a:p>
             <a:r>
-              <a:rPr lang="en-US" smtClean="0"/>
+              <a:rPr lang="en-US"/>
               <a:t>Click to edit Master title style</a:t>
             </a:r>
-            <a:endParaRPr lang="en-US"/>
           </a:p>
         </p:txBody>
       </p:sp>
@@ -1897,7 +1896,7 @@
           <a:p>
             <a:fld id="{5BCAD085-E8A6-8845-BD4E-CB4CCA059FC4}" type="datetimeFigureOut">
               <a:rPr lang="en-US" smtClean="0"/>
-              <a:t>1/27/13</a:t>
+              <a:t>7/13/2026</a:t>
             </a:fld>
             <a:endParaRPr lang="en-US"/>
           </a:p>
@@ -1939,7 +1938,7 @@
           <a:p>
             <a:fld id="{C1FF6DA9-008F-8B48-92A6-B652298478BF}" type="slidenum">
               <a:rPr lang="en-US" smtClean="0"/>
-              <a:t>‹#›</a:t>
+              <a:t>‹nº›</a:t>
             </a:fld>
             <a:endParaRPr lang="en-US"/>
           </a:p>
@@ -1992,7 +1991,7 @@
           <a:p>
             <a:fld id="{5BCAD085-E8A6-8845-BD4E-CB4CCA059FC4}" type="datetimeFigureOut">
               <a:rPr lang="en-US" smtClean="0"/>
-              <a:t>1/27/13</a:t>
+              <a:t>7/13/2026</a:t>
             </a:fld>
             <a:endParaRPr lang="en-US"/>
           </a:p>
@@ -2034,7 +2033,7 @@
           <a:p>
             <a:fld id="{C1FF6DA9-008F-8B48-92A6-B652298478BF}" type="slidenum">
               <a:rPr lang="en-US" smtClean="0"/>
-              <a:t>‹#›</a:t>
+              <a:t>‹nº›</a:t>
             </a:fld>
             <a:endParaRPr lang="en-US"/>
           </a:p>
@@ -2095,10 +2094,9 @@
           </a:lstStyle>
           <a:p>
             <a:r>
-              <a:rPr lang="en-US" smtClean="0"/>
+              <a:rPr lang="en-US"/>
               <a:t>Click to edit Master title style</a:t>
             </a:r>
-            <a:endParaRPr lang="en-US"/>
           </a:p>
         </p:txBody>
       </p:sp>
@@ -2152,38 +2150,37 @@
           <a:p>
             <a:pPr lvl="0"/>
             <a:r>
-              <a:rPr lang="en-US" smtClean="0"/>
+              <a:rPr lang="en-US"/>
               <a:t>Click to edit Master text styles</a:t>
             </a:r>
           </a:p>
           <a:p>
             <a:pPr lvl="1"/>
             <a:r>
-              <a:rPr lang="en-US" smtClean="0"/>
+              <a:rPr lang="en-US"/>
               <a:t>Second level</a:t>
             </a:r>
           </a:p>
           <a:p>
             <a:pPr lvl="2"/>
             <a:r>
-              <a:rPr lang="en-US" smtClean="0"/>
+              <a:rPr lang="en-US"/>
               <a:t>Third level</a:t>
             </a:r>
           </a:p>
           <a:p>
             <a:pPr lvl="3"/>
             <a:r>
-              <a:rPr lang="en-US" smtClean="0"/>
+              <a:rPr lang="en-US"/>
               <a:t>Fourth level</a:t>
             </a:r>
           </a:p>
           <a:p>
             <a:pPr lvl="4"/>
             <a:r>
-              <a:rPr lang="en-US" smtClean="0"/>
+              <a:rPr lang="en-US"/>
               <a:t>Fifth level</a:t>
             </a:r>
-            <a:endParaRPr lang="en-US"/>
           </a:p>
         </p:txBody>
       </p:sp>
@@ -2246,7 +2243,7 @@
           <a:p>
             <a:pPr lvl="0"/>
             <a:r>
-              <a:rPr lang="en-US" smtClean="0"/>
+              <a:rPr lang="en-US"/>
               <a:t>Click to edit Master text styles</a:t>
             </a:r>
           </a:p>
@@ -2269,7 +2266,7 @@
           <a:p>
             <a:fld id="{5BCAD085-E8A6-8845-BD4E-CB4CCA059FC4}" type="datetimeFigureOut">
               <a:rPr lang="en-US" smtClean="0"/>
-              <a:t>1/27/13</a:t>
+              <a:t>7/13/2026</a:t>
             </a:fld>
             <a:endParaRPr lang="en-US"/>
           </a:p>
@@ -2311,7 +2308,7 @@
           <a:p>
             <a:fld id="{C1FF6DA9-008F-8B48-92A6-B652298478BF}" type="slidenum">
               <a:rPr lang="en-US" smtClean="0"/>
-              <a:t>‹#›</a:t>
+              <a:t>‹nº›</a:t>
             </a:fld>
             <a:endParaRPr lang="en-US"/>
           </a:p>
@@ -2372,10 +2369,9 @@
           </a:lstStyle>
           <a:p>
             <a:r>
-              <a:rPr lang="en-US" smtClean="0"/>
+              <a:rPr lang="en-US"/>
               <a:t>Click to edit Master title style</a:t>
             </a:r>
-            <a:endParaRPr lang="en-US"/>
           </a:p>
         </p:txBody>
       </p:sp>
@@ -2499,7 +2495,7 @@
           <a:p>
             <a:pPr lvl="0"/>
             <a:r>
-              <a:rPr lang="en-US" smtClean="0"/>
+              <a:rPr lang="en-US"/>
               <a:t>Click to edit Master text styles</a:t>
             </a:r>
           </a:p>
@@ -2522,7 +2518,7 @@
           <a:p>
             <a:fld id="{5BCAD085-E8A6-8845-BD4E-CB4CCA059FC4}" type="datetimeFigureOut">
               <a:rPr lang="en-US" smtClean="0"/>
-              <a:t>1/27/13</a:t>
+              <a:t>7/13/2026</a:t>
             </a:fld>
             <a:endParaRPr lang="en-US"/>
           </a:p>
@@ -2564,7 +2560,7 @@
           <a:p>
             <a:fld id="{C1FF6DA9-008F-8B48-92A6-B652298478BF}" type="slidenum">
               <a:rPr lang="en-US" smtClean="0"/>
-              <a:t>‹#›</a:t>
+              <a:t>‹nº›</a:t>
             </a:fld>
             <a:endParaRPr lang="en-US"/>
           </a:p>
@@ -2631,10 +2627,9 @@
           <a:lstStyle/>
           <a:p>
             <a:r>
-              <a:rPr lang="en-US" smtClean="0"/>
+              <a:rPr lang="en-US"/>
               <a:t>Click to edit Master title style</a:t>
             </a:r>
-            <a:endParaRPr lang="en-US"/>
           </a:p>
         </p:txBody>
       </p:sp>
@@ -2665,38 +2660,37 @@
           <a:p>
             <a:pPr lvl="0"/>
             <a:r>
-              <a:rPr lang="en-US" smtClean="0"/>
+              <a:rPr lang="en-US"/>
               <a:t>Click to edit Master text styles</a:t>
             </a:r>
           </a:p>
           <a:p>
             <a:pPr lvl="1"/>
             <a:r>
-              <a:rPr lang="en-US" smtClean="0"/>
+              <a:rPr lang="en-US"/>
               <a:t>Second level</a:t>
             </a:r>
           </a:p>
           <a:p>
             <a:pPr lvl="2"/>
             <a:r>
-              <a:rPr lang="en-US" smtClean="0"/>
+              <a:rPr lang="en-US"/>
               <a:t>Third level</a:t>
             </a:r>
           </a:p>
           <a:p>
             <a:pPr lvl="3"/>
             <a:r>
-              <a:rPr lang="en-US" smtClean="0"/>
+              <a:rPr lang="en-US"/>
               <a:t>Fourth level</a:t>
             </a:r>
           </a:p>
           <a:p>
             <a:pPr lvl="4"/>
             <a:r>
-              <a:rPr lang="en-US" smtClean="0"/>
+              <a:rPr lang="en-US"/>
               <a:t>Fifth level</a:t>
             </a:r>
-            <a:endParaRPr lang="en-US"/>
           </a:p>
         </p:txBody>
       </p:sp>
@@ -2735,7 +2729,7 @@
           <a:p>
             <a:fld id="{5BCAD085-E8A6-8845-BD4E-CB4CCA059FC4}" type="datetimeFigureOut">
               <a:rPr lang="en-US" smtClean="0"/>
-              <a:t>1/27/13</a:t>
+              <a:t>7/13/2026</a:t>
             </a:fld>
             <a:endParaRPr lang="en-US"/>
           </a:p>
@@ -2813,7 +2807,7 @@
           <a:p>
             <a:fld id="{C1FF6DA9-008F-8B48-92A6-B652298478BF}" type="slidenum">
               <a:rPr lang="en-US" smtClean="0"/>
-              <a:t>‹#›</a:t>
+              <a:t>‹nº›</a:t>
             </a:fld>
             <a:endParaRPr lang="en-US"/>
           </a:p>
@@ -3094,7 +3088,7 @@
 </file>
 
 <file path=ppt/slides/slide1.xml><?xml version="1.0" encoding="utf-8"?>
-<p:sld xmlns:a="http://schemas.openxmlformats.org/drawingml/2006/main" xmlns:p="http://schemas.openxmlformats.org/presentationml/2006/main" xmlns:r="http://schemas.openxmlformats.org/officeDocument/2006/relationships">
+<p:sld xmlns:a="http://schemas.openxmlformats.org/drawingml/2006/main" xmlns:r="http://schemas.openxmlformats.org/officeDocument/2006/relationships" xmlns:p="http://schemas.openxmlformats.org/presentationml/2006/main">
   <p:cSld>
     <p:spTree>
       <p:nvGrpSpPr>
@@ -3102,7 +3096,14 @@
         <p:cNvGrpSpPr/>
         <p:nvPr/>
       </p:nvGrpSpPr>
-      <p:grpSpPr/>
+      <p:grpSpPr>
+        <a:xfrm>
+          <a:off x="0" y="0"/>
+          <a:ext cx="0" cy="0"/>
+          <a:chOff x="0" y="0"/>
+          <a:chExt cx="0" cy="0"/>
+        </a:xfrm>
+      </p:grpSpPr>
       <p:sp>
         <p:nvSpPr>
           <p:cNvPr id="2" name="Rectangle 1"/>
@@ -3143,6 +3144,7 @@
           <a:lstStyle/>
           <a:p>
             <a:pPr algn="ctr"/>
+            <a:endParaRPr/>
           </a:p>
         </p:txBody>
       </p:sp>
@@ -3285,7 +3287,7 @@
 </file>
 
 <file path=ppt/slides/slide10.xml><?xml version="1.0" encoding="utf-8"?>
-<p:sld xmlns:a="http://schemas.openxmlformats.org/drawingml/2006/main" xmlns:p="http://schemas.openxmlformats.org/presentationml/2006/main" xmlns:r="http://schemas.openxmlformats.org/officeDocument/2006/relationships">
+<p:sld xmlns:a="http://schemas.openxmlformats.org/drawingml/2006/main" xmlns:r="http://schemas.openxmlformats.org/officeDocument/2006/relationships" xmlns:p="http://schemas.openxmlformats.org/presentationml/2006/main">
   <p:cSld>
     <p:spTree>
       <p:nvGrpSpPr>
@@ -3293,7 +3295,14 @@
         <p:cNvGrpSpPr/>
         <p:nvPr/>
       </p:nvGrpSpPr>
-      <p:grpSpPr/>
+      <p:grpSpPr>
+        <a:xfrm>
+          <a:off x="0" y="0"/>
+          <a:ext cx="0" cy="0"/>
+          <a:chOff x="0" y="0"/>
+          <a:chExt cx="0" cy="0"/>
+        </a:xfrm>
+      </p:grpSpPr>
       <p:sp>
         <p:nvSpPr>
           <p:cNvPr id="2" name="TextBox 1"/>
@@ -3369,6 +3378,7 @@
           <a:lstStyle/>
           <a:p>
             <a:pPr algn="ctr"/>
+            <a:endParaRPr/>
           </a:p>
         </p:txBody>
       </p:sp>
@@ -3378,11 +3388,17 @@
           <p:cNvGraphicFramePr>
             <a:graphicFrameLocks noGrp="1"/>
           </p:cNvGraphicFramePr>
-          <p:nvPr/>
+          <p:nvPr>
+            <p:extLst>
+              <p:ext uri="{D42A27DB-BD31-4B8C-83A1-F6EECF244321}">
+                <p14:modId xmlns:p14="http://schemas.microsoft.com/office/powerpoint/2010/main" val="1329448271"/>
+              </p:ext>
+            </p:extLst>
+          </p:nvPr>
         </p:nvGraphicFramePr>
         <p:xfrm>
           <a:off x="457200" y="1371600"/>
-          <a:ext cx="12161520" cy="4754880"/>
+          <a:ext cx="11429999" cy="4754880"/>
         </p:xfrm>
         <a:graphic>
           <a:graphicData uri="http://schemas.openxmlformats.org/drawingml/2006/table">
@@ -3391,10 +3407,34 @@
                 <a:tableStyleId>{5C22544A-7EE6-4342-B048-85BDC9FD1C3A}</a:tableStyleId>
               </a:tblPr>
               <a:tblGrid>
-                <a:gridCol w="914400"/>
-                <a:gridCol w="3474720"/>
-                <a:gridCol w="3200400"/>
-                <a:gridCol w="4572000"/>
+                <a:gridCol w="859398">
+                  <a:extLst>
+                    <a:ext uri="{9D8B030D-6E8A-4147-A177-3AD203B41FA5}">
+                      <a16:colId xmlns:a16="http://schemas.microsoft.com/office/drawing/2014/main" val="20000"/>
+                    </a:ext>
+                  </a:extLst>
+                </a:gridCol>
+                <a:gridCol w="3265714">
+                  <a:extLst>
+                    <a:ext uri="{9D8B030D-6E8A-4147-A177-3AD203B41FA5}">
+                      <a16:colId xmlns:a16="http://schemas.microsoft.com/office/drawing/2014/main" val="20001"/>
+                    </a:ext>
+                  </a:extLst>
+                </a:gridCol>
+                <a:gridCol w="3007895">
+                  <a:extLst>
+                    <a:ext uri="{9D8B030D-6E8A-4147-A177-3AD203B41FA5}">
+                      <a16:colId xmlns:a16="http://schemas.microsoft.com/office/drawing/2014/main" val="20002"/>
+                    </a:ext>
+                  </a:extLst>
+                </a:gridCol>
+                <a:gridCol w="4296992">
+                  <a:extLst>
+                    <a:ext uri="{9D8B030D-6E8A-4147-A177-3AD203B41FA5}">
+                      <a16:colId xmlns:a16="http://schemas.microsoft.com/office/drawing/2014/main" val="20003"/>
+                    </a:ext>
+                  </a:extLst>
+                </a:gridCol>
               </a:tblGrid>
               <a:tr h="950976">
                 <a:tc>
@@ -3481,6 +3521,11 @@
                     </a:solidFill>
                   </a:tcPr>
                 </a:tc>
+                <a:extLst>
+                  <a:ext uri="{0D108BD9-81ED-4DB2-BD59-A6C34878D82A}">
+                    <a16:rowId xmlns:a16="http://schemas.microsoft.com/office/drawing/2014/main" val="10000"/>
+                  </a:ext>
+                </a:extLst>
               </a:tr>
               <a:tr h="950976">
                 <a:tc>
@@ -3551,6 +3596,11 @@
                   </a:txBody>
                   <a:tcPr/>
                 </a:tc>
+                <a:extLst>
+                  <a:ext uri="{0D108BD9-81ED-4DB2-BD59-A6C34878D82A}">
+                    <a16:rowId xmlns:a16="http://schemas.microsoft.com/office/drawing/2014/main" val="10001"/>
+                  </a:ext>
+                </a:extLst>
               </a:tr>
               <a:tr h="950976">
                 <a:tc>
@@ -3580,12 +3630,36 @@
                     <a:lstStyle/>
                     <a:p>
                       <a:r>
-                        <a:rPr sz="1100">
-                          <a:solidFill>
-                            <a:srgbClr val="3D424E"/>
-                          </a:solidFill>
-                        </a:rPr>
-                        <a:t>ConvNeXt-T + FiLM linear</a:t>
+                        <a:rPr sz="1100" dirty="0" err="1">
+                          <a:solidFill>
+                            <a:srgbClr val="3D424E"/>
+                          </a:solidFill>
+                        </a:rPr>
+                        <a:t>ConvNeXt</a:t>
+                      </a:r>
+                      <a:r>
+                        <a:rPr sz="1100" dirty="0">
+                          <a:solidFill>
+                            <a:srgbClr val="3D424E"/>
+                          </a:solidFill>
+                        </a:rPr>
+                        <a:t>-T + </a:t>
+                      </a:r>
+                      <a:r>
+                        <a:rPr sz="1100" dirty="0" err="1">
+                          <a:solidFill>
+                            <a:srgbClr val="3D424E"/>
+                          </a:solidFill>
+                        </a:rPr>
+                        <a:t>FiLM</a:t>
+                      </a:r>
+                      <a:r>
+                        <a:rPr sz="1100" dirty="0">
+                          <a:solidFill>
+                            <a:srgbClr val="3D424E"/>
+                          </a:solidFill>
+                        </a:rPr>
+                        <a:t> linear</a:t>
                       </a:r>
                     </a:p>
                   </a:txBody>
@@ -3637,6 +3711,11 @@
                     </a:solidFill>
                   </a:tcPr>
                 </a:tc>
+                <a:extLst>
+                  <a:ext uri="{0D108BD9-81ED-4DB2-BD59-A6C34878D82A}">
+                    <a16:rowId xmlns:a16="http://schemas.microsoft.com/office/drawing/2014/main" val="10002"/>
+                  </a:ext>
+                </a:extLst>
               </a:tr>
               <a:tr h="950976">
                 <a:tc>
@@ -3707,6 +3786,11 @@
                   </a:txBody>
                   <a:tcPr/>
                 </a:tc>
+                <a:extLst>
+                  <a:ext uri="{0D108BD9-81ED-4DB2-BD59-A6C34878D82A}">
+                    <a16:rowId xmlns:a16="http://schemas.microsoft.com/office/drawing/2014/main" val="10003"/>
+                  </a:ext>
+                </a:extLst>
               </a:tr>
               <a:tr h="950976">
                 <a:tc>
@@ -3732,12 +3816,58 @@
                     <a:lstStyle/>
                     <a:p>
                       <a:r>
+                        <a:rPr sz="1100" dirty="0" err="1">
+                          <a:solidFill>
+                            <a:srgbClr val="3D424E"/>
+                          </a:solidFill>
+                        </a:rPr>
+                        <a:t>ConvNeXt</a:t>
+                      </a:r>
+                      <a:r>
+                        <a:rPr sz="1100" dirty="0">
+                          <a:solidFill>
+                            <a:srgbClr val="3D424E"/>
+                          </a:solidFill>
+                        </a:rPr>
+                        <a:t>-T + </a:t>
+                      </a:r>
+                      <a:r>
+                        <a:rPr sz="1100" dirty="0" err="1">
+                          <a:solidFill>
+                            <a:srgbClr val="3D424E"/>
+                          </a:solidFill>
+                        </a:rPr>
+                        <a:t>FiLM</a:t>
+                      </a:r>
+                      <a:r>
+                        <a:rPr lang="pt-BR" sz="1100" dirty="0">
+                          <a:solidFill>
+                            <a:srgbClr val="3D424E"/>
+                          </a:solidFill>
+                        </a:rPr>
+                        <a:t> (não linear)</a:t>
+                      </a:r>
+                      <a:endParaRPr sz="1100" dirty="0">
+                        <a:solidFill>
+                          <a:srgbClr val="3D424E"/>
+                        </a:solidFill>
+                      </a:endParaRPr>
+                    </a:p>
+                  </a:txBody>
+                  <a:tcPr/>
+                </a:tc>
+                <a:tc>
+                  <a:txBody>
+                    <a:bodyPr/>
+                    <a:lstStyle/>
+                    <a:p>
+                      <a:r>
                         <a:rPr sz="1100">
                           <a:solidFill>
                             <a:srgbClr val="3D424E"/>
                           </a:solidFill>
                         </a:rPr>
-                        <a:t>ConvNeXt-T + FiLM</a:t>
+                        <a:t>Embedding CLIP-text 512-dim</a:t>
                       </a:r>
                     </a:p>
                   </a:txBody>
@@ -3749,34 +3879,54 @@
                     <a:lstStyle/>
                     <a:p>
                       <a:r>
-                        <a:rPr sz="1100">
-                          <a:solidFill>
-                            <a:srgbClr val="3D424E"/>
-                          </a:solidFill>
-                        </a:rPr>
-                        <a:t>Embedding CLIP-text 512-dim</a:t>
+                        <a:rPr sz="1100" dirty="0">
+                          <a:solidFill>
+                            <a:srgbClr val="3D424E"/>
+                          </a:solidFill>
+                        </a:rPr>
+                        <a:t>CLIP </a:t>
+                      </a:r>
+                      <a:r>
+                        <a:rPr sz="1100" dirty="0" err="1">
+                          <a:solidFill>
+                            <a:srgbClr val="3D424E"/>
+                          </a:solidFill>
+                        </a:rPr>
+                        <a:t>como</a:t>
+                      </a:r>
+                      <a:r>
+                        <a:rPr sz="1100" dirty="0">
+                          <a:solidFill>
+                            <a:srgbClr val="3D424E"/>
+                          </a:solidFill>
+                        </a:rPr>
+                        <a:t> </a:t>
+                      </a:r>
+                      <a:r>
+                        <a:rPr sz="1100" dirty="0" err="1">
+                          <a:solidFill>
+                            <a:srgbClr val="3D424E"/>
+                          </a:solidFill>
+                        </a:rPr>
+                        <a:t>alternativa</a:t>
+                      </a:r>
+                      <a:r>
+                        <a:rPr sz="1100" dirty="0">
+                          <a:solidFill>
+                            <a:srgbClr val="3D424E"/>
+                          </a:solidFill>
+                        </a:rPr>
+                        <a:t> moderna</a:t>
                       </a:r>
                     </a:p>
                   </a:txBody>
                   <a:tcPr/>
                 </a:tc>
-                <a:tc>
-                  <a:txBody>
-                    <a:bodyPr/>
-                    <a:lstStyle/>
-                    <a:p>
-                      <a:r>
-                        <a:rPr sz="1100">
-                          <a:solidFill>
-                            <a:srgbClr val="3D424E"/>
-                          </a:solidFill>
-                        </a:rPr>
-                        <a:t>Recomendação da reunião 15/jun — CLIP como alternativa moderna</a:t>
-                      </a:r>
-                    </a:p>
-                  </a:txBody>
-                  <a:tcPr/>
-                </a:tc>
+                <a:extLst>
+                  <a:ext uri="{0D108BD9-81ED-4DB2-BD59-A6C34878D82A}">
+                    <a16:rowId xmlns:a16="http://schemas.microsoft.com/office/drawing/2014/main" val="10004"/>
+                  </a:ext>
+                </a:extLst>
               </a:tr>
             </a:tbl>
           </a:graphicData>
@@ -3826,7 +3976,7 @@
 </file>
 
 <file path=ppt/slides/slide11.xml><?xml version="1.0" encoding="utf-8"?>
-<p:sld xmlns:a="http://schemas.openxmlformats.org/drawingml/2006/main" xmlns:p="http://schemas.openxmlformats.org/presentationml/2006/main" xmlns:r="http://schemas.openxmlformats.org/officeDocument/2006/relationships">
+<p:sld xmlns:a="http://schemas.openxmlformats.org/drawingml/2006/main" xmlns:r="http://schemas.openxmlformats.org/officeDocument/2006/relationships" xmlns:p="http://schemas.openxmlformats.org/presentationml/2006/main" show="0">
   <p:cSld>
     <p:spTree>
       <p:nvGrpSpPr>
@@ -3834,7 +3984,14 @@
         <p:cNvGrpSpPr/>
         <p:nvPr/>
       </p:nvGrpSpPr>
-      <p:grpSpPr/>
+      <p:grpSpPr>
+        <a:xfrm>
+          <a:off x="0" y="0"/>
+          <a:ext cx="0" cy="0"/>
+          <a:chOff x="0" y="0"/>
+          <a:chExt cx="0" cy="0"/>
+        </a:xfrm>
+      </p:grpSpPr>
       <p:sp>
         <p:nvSpPr>
           <p:cNvPr id="2" name="TextBox 1"/>
@@ -3910,6 +4067,7 @@
           <a:lstStyle/>
           <a:p>
             <a:pPr algn="ctr"/>
+            <a:endParaRPr/>
           </a:p>
         </p:txBody>
       </p:sp>
@@ -3922,7 +4080,7 @@
         <p:spPr>
           <a:xfrm>
             <a:off x="457200" y="1371600"/>
-            <a:ext cx="11430000" cy="4937760"/>
+            <a:ext cx="11430000" cy="3765133"/>
           </a:xfrm>
           <a:prstGeom prst="rect">
             <a:avLst/>
@@ -3941,20 +4099,244 @@
               </a:spcAft>
             </a:pPr>
             <a:r>
-              <a:rPr sz="1600" b="1">
+              <a:rPr sz="1600" b="1" dirty="0" err="1">
                 <a:solidFill>
                   <a:srgbClr val="1F2A4E"/>
                 </a:solidFill>
               </a:rPr>
-              <a:t>Problema conhecido:  </a:t>
-            </a:r>
-            <a:r>
-              <a:rPr sz="1600">
-                <a:solidFill>
-                  <a:srgbClr val="3D424E"/>
-                </a:solidFill>
-              </a:rPr>
-              <a:t>modelos SOTA reportam F1 Latinx próximo de 60 % há três anos — persiste mesmo em modelos multimodais recentes (AlDahoul 2024)</a:t>
+              <a:t>Problema</a:t>
+            </a:r>
+            <a:r>
+              <a:rPr sz="1600" b="1" dirty="0">
+                <a:solidFill>
+                  <a:srgbClr val="1F2A4E"/>
+                </a:solidFill>
+              </a:rPr>
+              <a:t> </a:t>
+            </a:r>
+            <a:r>
+              <a:rPr sz="1600" b="1" dirty="0" err="1">
+                <a:solidFill>
+                  <a:srgbClr val="1F2A4E"/>
+                </a:solidFill>
+              </a:rPr>
+              <a:t>conhecido</a:t>
+            </a:r>
+            <a:r>
+              <a:rPr sz="1600" b="1" dirty="0">
+                <a:solidFill>
+                  <a:srgbClr val="1F2A4E"/>
+                </a:solidFill>
+              </a:rPr>
+              <a:t>:  </a:t>
+            </a:r>
+            <a:r>
+              <a:rPr sz="1600" dirty="0" err="1">
+                <a:solidFill>
+                  <a:srgbClr val="3D424E"/>
+                </a:solidFill>
+              </a:rPr>
+              <a:t>modelos</a:t>
+            </a:r>
+            <a:r>
+              <a:rPr sz="1600" dirty="0">
+                <a:solidFill>
+                  <a:srgbClr val="3D424E"/>
+                </a:solidFill>
+              </a:rPr>
+              <a:t> SOTA </a:t>
+            </a:r>
+            <a:r>
+              <a:rPr sz="1600" dirty="0" err="1">
+                <a:solidFill>
+                  <a:srgbClr val="3D424E"/>
+                </a:solidFill>
+              </a:rPr>
+              <a:t>reportam</a:t>
+            </a:r>
+            <a:r>
+              <a:rPr sz="1600" dirty="0">
+                <a:solidFill>
+                  <a:srgbClr val="3D424E"/>
+                </a:solidFill>
+              </a:rPr>
+              <a:t> F1 Latinx </a:t>
+            </a:r>
+            <a:r>
+              <a:rPr sz="1600" dirty="0" err="1">
+                <a:solidFill>
+                  <a:srgbClr val="3D424E"/>
+                </a:solidFill>
+              </a:rPr>
+              <a:t>próximo</a:t>
+            </a:r>
+            <a:r>
+              <a:rPr sz="1600" dirty="0">
+                <a:solidFill>
+                  <a:srgbClr val="3D424E"/>
+                </a:solidFill>
+              </a:rPr>
+              <a:t> de 60% </a:t>
+            </a:r>
+            <a:r>
+              <a:rPr sz="1600" dirty="0" err="1">
+                <a:solidFill>
+                  <a:srgbClr val="3D424E"/>
+                </a:solidFill>
+              </a:rPr>
+              <a:t>há</a:t>
+            </a:r>
+            <a:r>
+              <a:rPr sz="1600" dirty="0">
+                <a:solidFill>
+                  <a:srgbClr val="3D424E"/>
+                </a:solidFill>
+              </a:rPr>
+              <a:t> </a:t>
+            </a:r>
+            <a:r>
+              <a:rPr sz="1600" dirty="0" err="1">
+                <a:solidFill>
+                  <a:srgbClr val="3D424E"/>
+                </a:solidFill>
+              </a:rPr>
+              <a:t>três</a:t>
+            </a:r>
+            <a:r>
+              <a:rPr sz="1600" dirty="0">
+                <a:solidFill>
+                  <a:srgbClr val="3D424E"/>
+                </a:solidFill>
+              </a:rPr>
+              <a:t> </a:t>
+            </a:r>
+            <a:r>
+              <a:rPr sz="1600" dirty="0" err="1">
+                <a:solidFill>
+                  <a:srgbClr val="3D424E"/>
+                </a:solidFill>
+              </a:rPr>
+              <a:t>anos</a:t>
+            </a:r>
+            <a:r>
+              <a:rPr sz="1600" dirty="0">
+                <a:solidFill>
+                  <a:srgbClr val="3D424E"/>
+                </a:solidFill>
+              </a:rPr>
+              <a:t> — </a:t>
+            </a:r>
+            <a:r>
+              <a:rPr sz="1600" dirty="0" err="1">
+                <a:solidFill>
+                  <a:srgbClr val="3D424E"/>
+                </a:solidFill>
+              </a:rPr>
+              <a:t>persiste</a:t>
+            </a:r>
+            <a:r>
+              <a:rPr sz="1600" dirty="0">
+                <a:solidFill>
+                  <a:srgbClr val="3D424E"/>
+                </a:solidFill>
+              </a:rPr>
+              <a:t> </a:t>
+            </a:r>
+            <a:r>
+              <a:rPr sz="1600" dirty="0" err="1">
+                <a:solidFill>
+                  <a:srgbClr val="3D424E"/>
+                </a:solidFill>
+              </a:rPr>
+              <a:t>mesmo</a:t>
+            </a:r>
+            <a:r>
+              <a:rPr sz="1600" dirty="0">
+                <a:solidFill>
+                  <a:srgbClr val="3D424E"/>
+                </a:solidFill>
+              </a:rPr>
+              <a:t> </a:t>
+            </a:r>
+            <a:r>
+              <a:rPr sz="1600" dirty="0" err="1">
+                <a:solidFill>
+                  <a:srgbClr val="3D424E"/>
+                </a:solidFill>
+              </a:rPr>
+              <a:t>em</a:t>
+            </a:r>
+            <a:r>
+              <a:rPr sz="1600" dirty="0">
+                <a:solidFill>
+                  <a:srgbClr val="3D424E"/>
+                </a:solidFill>
+              </a:rPr>
+              <a:t> </a:t>
+            </a:r>
+            <a:r>
+              <a:rPr sz="1600" dirty="0" err="1">
+                <a:solidFill>
+                  <a:srgbClr val="3D424E"/>
+                </a:solidFill>
+              </a:rPr>
+              <a:t>modelos</a:t>
+            </a:r>
+            <a:r>
+              <a:rPr sz="1600" dirty="0">
+                <a:solidFill>
+                  <a:srgbClr val="3D424E"/>
+                </a:solidFill>
+              </a:rPr>
+              <a:t> </a:t>
+            </a:r>
+            <a:r>
+              <a:rPr sz="1600" dirty="0" err="1">
+                <a:solidFill>
+                  <a:srgbClr val="3D424E"/>
+                </a:solidFill>
+              </a:rPr>
+              <a:t>multimodais</a:t>
+            </a:r>
+            <a:r>
+              <a:rPr sz="1600" dirty="0">
+                <a:solidFill>
+                  <a:srgbClr val="3D424E"/>
+                </a:solidFill>
+              </a:rPr>
+              <a:t> </a:t>
+            </a:r>
+            <a:r>
+              <a:rPr sz="1600" dirty="0" err="1">
+                <a:solidFill>
+                  <a:srgbClr val="3D424E"/>
+                </a:solidFill>
+              </a:rPr>
+              <a:t>recentes</a:t>
+            </a:r>
+            <a:r>
+              <a:rPr sz="1600" dirty="0">
+                <a:solidFill>
+                  <a:srgbClr val="3D424E"/>
+                </a:solidFill>
+              </a:rPr>
+              <a:t> (</a:t>
+            </a:r>
+            <a:r>
+              <a:rPr sz="1600" dirty="0" err="1">
+                <a:solidFill>
+                  <a:srgbClr val="3D424E"/>
+                </a:solidFill>
+              </a:rPr>
+              <a:t>AlDahoul</a:t>
+            </a:r>
+            <a:r>
+              <a:rPr sz="1600" dirty="0">
+                <a:solidFill>
+                  <a:srgbClr val="3D424E"/>
+                </a:solidFill>
+              </a:rPr>
+              <a:t> 2024)</a:t>
             </a:r>
           </a:p>
           <a:p>
@@ -3964,20 +4346,12 @@
               </a:spcAft>
             </a:pPr>
             <a:r>
-              <a:rPr sz="1600" b="1">
+              <a:rPr sz="1600" b="1" dirty="0">
                 <a:solidFill>
                   <a:srgbClr val="1F2A4E"/>
                 </a:solidFill>
               </a:rPr>
               <a:t>  </a:t>
-            </a:r>
-            <a:r>
-              <a:rPr sz="1600">
-                <a:solidFill>
-                  <a:srgbClr val="3D424E"/>
-                </a:solidFill>
-              </a:rPr>
-              <a:t/>
             </a:r>
           </a:p>
           <a:p>
@@ -3987,20 +4361,196 @@
               </a:spcAft>
             </a:pPr>
             <a:r>
-              <a:rPr sz="1600" b="1">
+              <a:rPr sz="1600" b="1" dirty="0" err="1">
                 <a:solidFill>
                   <a:srgbClr val="1F2A4E"/>
                 </a:solidFill>
               </a:rPr>
-              <a:t>Diagnóstico novo:  </a:t>
-            </a:r>
-            <a:r>
-              <a:rPr sz="1600">
-                <a:solidFill>
-                  <a:srgbClr val="3D424E"/>
-                </a:solidFill>
-              </a:rPr>
-              <a:t>não é só bias algorítmico. É heterogeneidade fenotípica intra-categoria que a rotulagem monolítica de FairFace apaga.</a:t>
+              <a:t>Diagnóstico</a:t>
+            </a:r>
+            <a:r>
+              <a:rPr sz="1600" b="1" dirty="0">
+                <a:solidFill>
+                  <a:srgbClr val="1F2A4E"/>
+                </a:solidFill>
+              </a:rPr>
+              <a:t> novo:  </a:t>
+            </a:r>
+            <a:r>
+              <a:rPr sz="1600" dirty="0" err="1">
+                <a:solidFill>
+                  <a:srgbClr val="3D424E"/>
+                </a:solidFill>
+              </a:rPr>
+              <a:t>não</a:t>
+            </a:r>
+            <a:r>
+              <a:rPr sz="1600" dirty="0">
+                <a:solidFill>
+                  <a:srgbClr val="3D424E"/>
+                </a:solidFill>
+              </a:rPr>
+              <a:t> é </a:t>
+            </a:r>
+            <a:r>
+              <a:rPr sz="1600" dirty="0" err="1">
+                <a:solidFill>
+                  <a:srgbClr val="3D424E"/>
+                </a:solidFill>
+              </a:rPr>
+              <a:t>só</a:t>
+            </a:r>
+            <a:r>
+              <a:rPr sz="1600" dirty="0">
+                <a:solidFill>
+                  <a:srgbClr val="3D424E"/>
+                </a:solidFill>
+              </a:rPr>
+              <a:t> bias </a:t>
+            </a:r>
+            <a:r>
+              <a:rPr sz="1600" dirty="0" err="1">
+                <a:solidFill>
+                  <a:srgbClr val="3D424E"/>
+                </a:solidFill>
+              </a:rPr>
+              <a:t>algorítmico</a:t>
+            </a:r>
+            <a:r>
+              <a:rPr sz="1600" dirty="0">
+                <a:solidFill>
+                  <a:srgbClr val="3D424E"/>
+                </a:solidFill>
+              </a:rPr>
+              <a:t>. É </a:t>
+            </a:r>
+            <a:r>
+              <a:rPr sz="1600" dirty="0" err="1">
+                <a:solidFill>
+                  <a:srgbClr val="3D424E"/>
+                </a:solidFill>
+              </a:rPr>
+              <a:t>heterogeneidade</a:t>
+            </a:r>
+            <a:r>
+              <a:rPr sz="1600" dirty="0">
+                <a:solidFill>
+                  <a:srgbClr val="3D424E"/>
+                </a:solidFill>
+              </a:rPr>
+              <a:t> </a:t>
+            </a:r>
+            <a:r>
+              <a:rPr sz="1600" dirty="0" err="1">
+                <a:solidFill>
+                  <a:srgbClr val="3D424E"/>
+                </a:solidFill>
+              </a:rPr>
+              <a:t>fenotípica</a:t>
+            </a:r>
+            <a:r>
+              <a:rPr sz="1600" dirty="0">
+                <a:solidFill>
+                  <a:srgbClr val="3D424E"/>
+                </a:solidFill>
+              </a:rPr>
+              <a:t> intra-</a:t>
+            </a:r>
+            <a:r>
+              <a:rPr sz="1600" dirty="0" err="1">
+                <a:solidFill>
+                  <a:srgbClr val="3D424E"/>
+                </a:solidFill>
+              </a:rPr>
+              <a:t>categoria</a:t>
+            </a:r>
+            <a:r>
+              <a:rPr sz="1600" dirty="0">
+                <a:solidFill>
+                  <a:srgbClr val="3D424E"/>
+                </a:solidFill>
+              </a:rPr>
+              <a:t> </a:t>
+            </a:r>
+            <a:r>
+              <a:rPr sz="1600" dirty="0" err="1">
+                <a:solidFill>
+                  <a:srgbClr val="3D424E"/>
+                </a:solidFill>
+              </a:rPr>
+              <a:t>que</a:t>
+            </a:r>
+            <a:r>
+              <a:rPr sz="1600" dirty="0">
+                <a:solidFill>
+                  <a:srgbClr val="3D424E"/>
+                </a:solidFill>
+              </a:rPr>
+              <a:t> a </a:t>
+            </a:r>
+            <a:r>
+              <a:rPr sz="1600" dirty="0" err="1">
+                <a:solidFill>
+                  <a:srgbClr val="3D424E"/>
+                </a:solidFill>
+              </a:rPr>
+              <a:t>rotulagem</a:t>
+            </a:r>
+            <a:r>
+              <a:rPr sz="1600" dirty="0">
+                <a:solidFill>
+                  <a:srgbClr val="3D424E"/>
+                </a:solidFill>
+              </a:rPr>
+              <a:t> </a:t>
+            </a:r>
+            <a:r>
+              <a:rPr sz="1600" dirty="0" err="1">
+                <a:solidFill>
+                  <a:srgbClr val="3D424E"/>
+                </a:solidFill>
+              </a:rPr>
+              <a:t>monolítica</a:t>
+            </a:r>
+            <a:r>
+              <a:rPr sz="1600" dirty="0">
+                <a:solidFill>
+                  <a:srgbClr val="3D424E"/>
+                </a:solidFill>
+              </a:rPr>
+              <a:t> de </a:t>
+            </a:r>
+            <a:r>
+              <a:rPr sz="1600" dirty="0" err="1">
+                <a:solidFill>
+                  <a:srgbClr val="3D424E"/>
+                </a:solidFill>
+              </a:rPr>
+              <a:t>FairFace</a:t>
+            </a:r>
+            <a:r>
+              <a:rPr sz="1600" dirty="0">
+                <a:solidFill>
+                  <a:srgbClr val="3D424E"/>
+                </a:solidFill>
+              </a:rPr>
+              <a:t> </a:t>
+            </a:r>
+            <a:r>
+              <a:rPr sz="1600" dirty="0" err="1">
+                <a:solidFill>
+                  <a:srgbClr val="3D424E"/>
+                </a:solidFill>
+              </a:rPr>
+              <a:t>apaga</a:t>
+            </a:r>
+            <a:r>
+              <a:rPr sz="1600" dirty="0">
+                <a:solidFill>
+                  <a:srgbClr val="3D424E"/>
+                </a:solidFill>
+              </a:rPr>
+              <a:t>.</a:t>
             </a:r>
           </a:p>
           <a:p>
@@ -4010,20 +4560,12 @@
               </a:spcAft>
             </a:pPr>
             <a:r>
-              <a:rPr sz="1600" b="1">
+              <a:rPr sz="1600" b="1" dirty="0">
                 <a:solidFill>
                   <a:srgbClr val="1F2A4E"/>
                 </a:solidFill>
               </a:rPr>
               <a:t>  </a:t>
-            </a:r>
-            <a:r>
-              <a:rPr sz="1600">
-                <a:solidFill>
-                  <a:srgbClr val="3D424E"/>
-                </a:solidFill>
-              </a:rPr>
-              <a:t/>
             </a:r>
           </a:p>
           <a:p>
@@ -4038,7 +4580,32 @@
               </a:defRPr>
             </a:pPr>
             <a:r>
-              <a:t>— Fundamentação empírica agora tripla:</a:t>
+              <a:rPr dirty="0"/>
+              <a:t>— </a:t>
+            </a:r>
+            <a:r>
+              <a:rPr dirty="0" err="1"/>
+              <a:t>Fundamentação</a:t>
+            </a:r>
+            <a:r>
+              <a:rPr dirty="0"/>
+              <a:t> </a:t>
+            </a:r>
+            <a:r>
+              <a:rPr dirty="0" err="1"/>
+              <a:t>empírica</a:t>
+            </a:r>
+            <a:r>
+              <a:rPr dirty="0"/>
+              <a:t> agora </a:t>
+            </a:r>
+            <a:r>
+              <a:rPr dirty="0" err="1"/>
+              <a:t>tripla</a:t>
+            </a:r>
+            <a:r>
+              <a:rPr dirty="0"/>
+              <a:t>:</a:t>
             </a:r>
           </a:p>
           <a:p>
@@ -4048,21 +4615,170 @@
               </a:spcAft>
             </a:pPr>
             <a:r>
-              <a:rPr sz="1600" b="1">
+              <a:rPr sz="1600" b="1" dirty="0" err="1">
                 <a:solidFill>
                   <a:srgbClr val="1F2A4E"/>
                 </a:solidFill>
               </a:rPr>
-              <a:t>Antropologia:  </a:t>
-            </a:r>
-            <a:r>
-              <a:rPr sz="1600">
-                <a:solidFill>
-                  <a:srgbClr val="3D424E"/>
-                </a:solidFill>
-              </a:rPr>
-              <a:t>Telles 2014 (PERLA, 4 países latino-americanos) documenta pigmentocracia — tom de pele varia mais dentro da categoria do que entre elas</a:t>
-            </a:r>
+              <a:t>Antropologia</a:t>
+            </a:r>
+            <a:r>
+              <a:rPr sz="1600" b="1" dirty="0">
+                <a:solidFill>
+                  <a:srgbClr val="1F2A4E"/>
+                </a:solidFill>
+              </a:rPr>
+              <a:t>:  </a:t>
+            </a:r>
+            <a:r>
+              <a:rPr sz="1600" dirty="0">
+                <a:solidFill>
+                  <a:srgbClr val="3D424E"/>
+                </a:solidFill>
+              </a:rPr>
+              <a:t>Telles 2014 (PERLA, 4 </a:t>
+            </a:r>
+            <a:r>
+              <a:rPr sz="1600" dirty="0" err="1">
+                <a:solidFill>
+                  <a:srgbClr val="3D424E"/>
+                </a:solidFill>
+              </a:rPr>
+              <a:t>países</a:t>
+            </a:r>
+            <a:r>
+              <a:rPr sz="1600" dirty="0">
+                <a:solidFill>
+                  <a:srgbClr val="3D424E"/>
+                </a:solidFill>
+              </a:rPr>
+              <a:t> </a:t>
+            </a:r>
+            <a:r>
+              <a:rPr sz="1600" dirty="0" err="1">
+                <a:solidFill>
+                  <a:srgbClr val="3D424E"/>
+                </a:solidFill>
+              </a:rPr>
+              <a:t>latino</a:t>
+            </a:r>
+            <a:r>
+              <a:rPr sz="1600" dirty="0">
+                <a:solidFill>
+                  <a:srgbClr val="3D424E"/>
+                </a:solidFill>
+              </a:rPr>
+              <a:t>-americanos) documenta </a:t>
+            </a:r>
+            <a:r>
+              <a:rPr sz="1600" dirty="0" err="1">
+                <a:solidFill>
+                  <a:srgbClr val="3D424E"/>
+                </a:solidFill>
+              </a:rPr>
+              <a:t>pigmentocracia</a:t>
+            </a:r>
+            <a:r>
+              <a:rPr sz="1600" dirty="0">
+                <a:solidFill>
+                  <a:srgbClr val="3D424E"/>
+                </a:solidFill>
+              </a:rPr>
+              <a:t> — tom de </a:t>
+            </a:r>
+            <a:r>
+              <a:rPr sz="1600" dirty="0" err="1">
+                <a:solidFill>
+                  <a:srgbClr val="3D424E"/>
+                </a:solidFill>
+              </a:rPr>
+              <a:t>pele</a:t>
+            </a:r>
+            <a:r>
+              <a:rPr sz="1600" dirty="0">
+                <a:solidFill>
+                  <a:srgbClr val="3D424E"/>
+                </a:solidFill>
+              </a:rPr>
+              <a:t> varia </a:t>
+            </a:r>
+            <a:r>
+              <a:rPr sz="1600" dirty="0" err="1">
+                <a:solidFill>
+                  <a:srgbClr val="3D424E"/>
+                </a:solidFill>
+              </a:rPr>
+              <a:t>mais</a:t>
+            </a:r>
+            <a:r>
+              <a:rPr sz="1600" dirty="0">
+                <a:solidFill>
+                  <a:srgbClr val="3D424E"/>
+                </a:solidFill>
+              </a:rPr>
+              <a:t> </a:t>
+            </a:r>
+            <a:r>
+              <a:rPr sz="1600" dirty="0" err="1">
+                <a:solidFill>
+                  <a:srgbClr val="3D424E"/>
+                </a:solidFill>
+              </a:rPr>
+              <a:t>dentro</a:t>
+            </a:r>
+            <a:r>
+              <a:rPr sz="1600" dirty="0">
+                <a:solidFill>
+                  <a:srgbClr val="3D424E"/>
+                </a:solidFill>
+              </a:rPr>
+              <a:t> da </a:t>
+            </a:r>
+            <a:r>
+              <a:rPr sz="1600" dirty="0" err="1">
+                <a:solidFill>
+                  <a:srgbClr val="3D424E"/>
+                </a:solidFill>
+              </a:rPr>
+              <a:t>categoria</a:t>
+            </a:r>
+            <a:r>
+              <a:rPr sz="1600" dirty="0">
+                <a:solidFill>
+                  <a:srgbClr val="3D424E"/>
+                </a:solidFill>
+              </a:rPr>
+              <a:t> do </a:t>
+            </a:r>
+            <a:r>
+              <a:rPr sz="1600" dirty="0" err="1">
+                <a:solidFill>
+                  <a:srgbClr val="3D424E"/>
+                </a:solidFill>
+              </a:rPr>
+              <a:t>que</a:t>
+            </a:r>
+            <a:r>
+              <a:rPr sz="1600" dirty="0">
+                <a:solidFill>
+                  <a:srgbClr val="3D424E"/>
+                </a:solidFill>
+              </a:rPr>
+              <a:t> entre </a:t>
+            </a:r>
+            <a:r>
+              <a:rPr sz="1600" dirty="0" err="1">
+                <a:solidFill>
+                  <a:srgbClr val="3D424E"/>
+                </a:solidFill>
+              </a:rPr>
+              <a:t>elas</a:t>
+            </a:r>
+            <a:endParaRPr sz="1600" dirty="0">
+              <a:solidFill>
+                <a:srgbClr val="3D424E"/>
+              </a:solidFill>
+            </a:endParaRPr>
           </a:p>
           <a:p>
             <a:pPr>
@@ -4071,20 +4787,108 @@
               </a:spcAft>
             </a:pPr>
             <a:r>
-              <a:rPr sz="1600" b="1">
+              <a:rPr sz="1600" b="1" dirty="0" err="1">
                 <a:solidFill>
                   <a:srgbClr val="1F2A4E"/>
                 </a:solidFill>
               </a:rPr>
-              <a:t>Genética:  </a:t>
-            </a:r>
-            <a:r>
-              <a:rPr sz="1600">
-                <a:solidFill>
-                  <a:srgbClr val="3D424E"/>
-                </a:solidFill>
-              </a:rPr>
-              <a:t>Bryc 2015 (AJHG, 162 mil indivíduos) — ancestralidade Native + European + African altamente variável em Latinos</a:t>
+              <a:t>Genética</a:t>
+            </a:r>
+            <a:r>
+              <a:rPr sz="1600" b="1" dirty="0">
+                <a:solidFill>
+                  <a:srgbClr val="1F2A4E"/>
+                </a:solidFill>
+              </a:rPr>
+              <a:t>:  </a:t>
+            </a:r>
+            <a:r>
+              <a:rPr sz="1600" dirty="0">
+                <a:solidFill>
+                  <a:srgbClr val="3D424E"/>
+                </a:solidFill>
+              </a:rPr>
+              <a:t>Bryc 2015 (AJHG, 162 mil </a:t>
+            </a:r>
+            <a:r>
+              <a:rPr sz="1600" dirty="0" err="1">
+                <a:solidFill>
+                  <a:srgbClr val="3D424E"/>
+                </a:solidFill>
+              </a:rPr>
+              <a:t>indivíduos</a:t>
+            </a:r>
+            <a:r>
+              <a:rPr sz="1600" dirty="0">
+                <a:solidFill>
+                  <a:srgbClr val="3D424E"/>
+                </a:solidFill>
+              </a:rPr>
+              <a:t>) — </a:t>
+            </a:r>
+            <a:r>
+              <a:rPr sz="1600" dirty="0" err="1">
+                <a:solidFill>
+                  <a:srgbClr val="3D424E"/>
+                </a:solidFill>
+              </a:rPr>
+              <a:t>ancestralidade</a:t>
+            </a:r>
+            <a:r>
+              <a:rPr sz="1600" dirty="0">
+                <a:solidFill>
+                  <a:srgbClr val="3D424E"/>
+                </a:solidFill>
+              </a:rPr>
+              <a:t> Native + European + African </a:t>
+            </a:r>
+            <a:r>
+              <a:rPr sz="1600" dirty="0" err="1">
+                <a:solidFill>
+                  <a:srgbClr val="3D424E"/>
+                </a:solidFill>
+              </a:rPr>
+              <a:t>altamente</a:t>
+            </a:r>
+            <a:r>
+              <a:rPr sz="1600" dirty="0">
+                <a:solidFill>
+                  <a:srgbClr val="3D424E"/>
+                </a:solidFill>
+              </a:rPr>
+              <a:t> </a:t>
+            </a:r>
+            <a:r>
+              <a:rPr sz="1600" dirty="0" err="1">
+                <a:solidFill>
+                  <a:srgbClr val="3D424E"/>
+                </a:solidFill>
+              </a:rPr>
+              <a:t>variável</a:t>
+            </a:r>
+            <a:r>
+              <a:rPr sz="1600" dirty="0">
+                <a:solidFill>
+                  <a:srgbClr val="3D424E"/>
+                </a:solidFill>
+              </a:rPr>
+              <a:t> </a:t>
+            </a:r>
+            <a:r>
+              <a:rPr sz="1600" dirty="0" err="1">
+                <a:solidFill>
+                  <a:srgbClr val="3D424E"/>
+                </a:solidFill>
+              </a:rPr>
+              <a:t>em</a:t>
+            </a:r>
+            <a:r>
+              <a:rPr sz="1600" dirty="0">
+                <a:solidFill>
+                  <a:srgbClr val="3D424E"/>
+                </a:solidFill>
+              </a:rPr>
+              <a:t> Latinos</a:t>
             </a:r>
           </a:p>
           <a:p>
@@ -4094,20 +4898,188 @@
               </a:spcAft>
             </a:pPr>
             <a:r>
-              <a:rPr sz="1600" b="1">
+              <a:rPr sz="1600" b="1" dirty="0" err="1">
                 <a:solidFill>
                   <a:srgbClr val="1F2A4E"/>
                 </a:solidFill>
               </a:rPr>
-              <a:t>Sociologia:  </a:t>
-            </a:r>
-            <a:r>
-              <a:rPr sz="1600">
-                <a:solidFill>
-                  <a:srgbClr val="3D424E"/>
-                </a:solidFill>
-              </a:rPr>
-              <a:t>Pew 2017 — identidade Hispanic cai de 97 % para 50 % em quatro gerações nos EUA. Categoria é sociopolítica, não fenotípica.</a:t>
+              <a:t>Sociologia</a:t>
+            </a:r>
+            <a:r>
+              <a:rPr sz="1600" b="1" dirty="0">
+                <a:solidFill>
+                  <a:srgbClr val="1F2A4E"/>
+                </a:solidFill>
+              </a:rPr>
+              <a:t>:  </a:t>
+            </a:r>
+            <a:r>
+              <a:rPr sz="1600" dirty="0">
+                <a:solidFill>
+                  <a:srgbClr val="3D424E"/>
+                </a:solidFill>
+              </a:rPr>
+              <a:t>Pew 2017 — </a:t>
+            </a:r>
+            <a:r>
+              <a:rPr sz="1600" dirty="0" err="1">
+                <a:solidFill>
+                  <a:srgbClr val="3D424E"/>
+                </a:solidFill>
+              </a:rPr>
+              <a:t>identidade</a:t>
+            </a:r>
+            <a:r>
+              <a:rPr sz="1600" dirty="0">
+                <a:solidFill>
+                  <a:srgbClr val="3D424E"/>
+                </a:solidFill>
+              </a:rPr>
+              <a:t> Hispanic </a:t>
+            </a:r>
+            <a:r>
+              <a:rPr sz="1600" dirty="0" err="1">
+                <a:solidFill>
+                  <a:srgbClr val="3D424E"/>
+                </a:solidFill>
+              </a:rPr>
+              <a:t>cai</a:t>
+            </a:r>
+            <a:r>
+              <a:rPr sz="1600" dirty="0">
+                <a:solidFill>
+                  <a:srgbClr val="3D424E"/>
+                </a:solidFill>
+              </a:rPr>
+              <a:t> de 97 % para 50 % </a:t>
+            </a:r>
+            <a:r>
+              <a:rPr sz="1600" dirty="0" err="1">
+                <a:solidFill>
+                  <a:srgbClr val="3D424E"/>
+                </a:solidFill>
+              </a:rPr>
+              <a:t>em</a:t>
+            </a:r>
+            <a:r>
+              <a:rPr sz="1600" dirty="0">
+                <a:solidFill>
+                  <a:srgbClr val="3D424E"/>
+                </a:solidFill>
+              </a:rPr>
+              <a:t> </a:t>
+            </a:r>
+            <a:r>
+              <a:rPr sz="1600" dirty="0" err="1">
+                <a:solidFill>
+                  <a:srgbClr val="3D424E"/>
+                </a:solidFill>
+              </a:rPr>
+              <a:t>quatro</a:t>
+            </a:r>
+            <a:r>
+              <a:rPr sz="1600" dirty="0">
+                <a:solidFill>
+                  <a:srgbClr val="3D424E"/>
+                </a:solidFill>
+              </a:rPr>
+              <a:t> </a:t>
+            </a:r>
+            <a:r>
+              <a:rPr sz="1600" dirty="0" err="1">
+                <a:solidFill>
+                  <a:srgbClr val="3D424E"/>
+                </a:solidFill>
+              </a:rPr>
+              <a:t>gerações</a:t>
+            </a:r>
+            <a:r>
+              <a:rPr sz="1600" dirty="0">
+                <a:solidFill>
+                  <a:srgbClr val="3D424E"/>
+                </a:solidFill>
+              </a:rPr>
+              <a:t> </a:t>
+            </a:r>
+            <a:r>
+              <a:rPr sz="1600" dirty="0" err="1">
+                <a:solidFill>
+                  <a:srgbClr val="3D424E"/>
+                </a:solidFill>
+              </a:rPr>
+              <a:t>nos</a:t>
+            </a:r>
+            <a:r>
+              <a:rPr sz="1600" dirty="0">
+                <a:solidFill>
+                  <a:srgbClr val="3D424E"/>
+                </a:solidFill>
+              </a:rPr>
+              <a:t> EUA. </a:t>
+            </a:r>
+            <a:r>
+              <a:rPr sz="1600" dirty="0" err="1">
+                <a:solidFill>
+                  <a:srgbClr val="3D424E"/>
+                </a:solidFill>
+              </a:rPr>
+              <a:t>Categoria</a:t>
+            </a:r>
+            <a:r>
+              <a:rPr sz="1600" dirty="0">
+                <a:solidFill>
+                  <a:srgbClr val="3D424E"/>
+                </a:solidFill>
+              </a:rPr>
+              <a:t> é </a:t>
+            </a:r>
+            <a:r>
+              <a:rPr sz="1600" dirty="0" err="1">
+                <a:solidFill>
+                  <a:srgbClr val="3D424E"/>
+                </a:solidFill>
+              </a:rPr>
+              <a:t>sociopolítica</a:t>
+            </a:r>
+            <a:r>
+              <a:rPr sz="1600" dirty="0">
+                <a:solidFill>
+                  <a:srgbClr val="3D424E"/>
+                </a:solidFill>
+              </a:rPr>
+              <a:t>, </a:t>
+            </a:r>
+            <a:r>
+              <a:rPr sz="1600" dirty="0" err="1">
+                <a:solidFill>
+                  <a:srgbClr val="3D424E"/>
+                </a:solidFill>
+              </a:rPr>
+              <a:t>não</a:t>
+            </a:r>
+            <a:r>
+              <a:rPr sz="1600" dirty="0">
+                <a:solidFill>
+                  <a:srgbClr val="3D424E"/>
+                </a:solidFill>
+              </a:rPr>
+              <a:t> </a:t>
+            </a:r>
+            <a:r>
+              <a:rPr sz="1600" dirty="0" err="1">
+                <a:solidFill>
+                  <a:srgbClr val="3D424E"/>
+                </a:solidFill>
+              </a:rPr>
+              <a:t>fenotípica</a:t>
+            </a:r>
+            <a:r>
+              <a:rPr sz="1600" dirty="0">
+                <a:solidFill>
+                  <a:srgbClr val="3D424E"/>
+                </a:solidFill>
+              </a:rPr>
+              <a:t>.</a:t>
             </a:r>
           </a:p>
         </p:txBody>
@@ -4156,7 +5128,7 @@
 </file>
 
 <file path=ppt/slides/slide12.xml><?xml version="1.0" encoding="utf-8"?>
-<p:sld xmlns:a="http://schemas.openxmlformats.org/drawingml/2006/main" xmlns:p="http://schemas.openxmlformats.org/presentationml/2006/main" xmlns:r="http://schemas.openxmlformats.org/officeDocument/2006/relationships">
+<p:sld xmlns:a="http://schemas.openxmlformats.org/drawingml/2006/main" xmlns:r="http://schemas.openxmlformats.org/officeDocument/2006/relationships" xmlns:p="http://schemas.openxmlformats.org/presentationml/2006/main">
   <p:cSld>
     <p:spTree>
       <p:nvGrpSpPr>
@@ -4164,7 +5136,14 @@
         <p:cNvGrpSpPr/>
         <p:nvPr/>
       </p:nvGrpSpPr>
-      <p:grpSpPr/>
+      <p:grpSpPr>
+        <a:xfrm>
+          <a:off x="0" y="0"/>
+          <a:ext cx="0" cy="0"/>
+          <a:chOff x="0" y="0"/>
+          <a:chExt cx="0" cy="0"/>
+        </a:xfrm>
+      </p:grpSpPr>
       <p:sp>
         <p:nvSpPr>
           <p:cNvPr id="2" name="TextBox 1"/>
@@ -4240,6 +5219,7 @@
           <a:lstStyle/>
           <a:p>
             <a:pPr algn="ctr"/>
+            <a:endParaRPr/>
           </a:p>
         </p:txBody>
       </p:sp>
@@ -4249,11 +5229,17 @@
           <p:cNvGraphicFramePr>
             <a:graphicFrameLocks noGrp="1"/>
           </p:cNvGraphicFramePr>
-          <p:nvPr/>
+          <p:nvPr>
+            <p:extLst>
+              <p:ext uri="{D42A27DB-BD31-4B8C-83A1-F6EECF244321}">
+                <p14:modId xmlns:p14="http://schemas.microsoft.com/office/powerpoint/2010/main" val="3321045047"/>
+              </p:ext>
+            </p:extLst>
+          </p:nvPr>
         </p:nvGraphicFramePr>
         <p:xfrm>
           <a:off x="457200" y="1371600"/>
-          <a:ext cx="11430000" cy="4754880"/>
+          <a:ext cx="11430000" cy="4922520"/>
         </p:xfrm>
         <a:graphic>
           <a:graphicData uri="http://schemas.openxmlformats.org/drawingml/2006/table">
@@ -4262,9 +5248,27 @@
                 <a:tableStyleId>{5C22544A-7EE6-4342-B048-85BDC9FD1C3A}</a:tableStyleId>
               </a:tblPr>
               <a:tblGrid>
-                <a:gridCol w="3200400"/>
-                <a:gridCol w="1645920"/>
-                <a:gridCol w="6583680"/>
+                <a:gridCol w="3200400">
+                  <a:extLst>
+                    <a:ext uri="{9D8B030D-6E8A-4147-A177-3AD203B41FA5}">
+                      <a16:colId xmlns:a16="http://schemas.microsoft.com/office/drawing/2014/main" val="20000"/>
+                    </a:ext>
+                  </a:extLst>
+                </a:gridCol>
+                <a:gridCol w="1645920">
+                  <a:extLst>
+                    <a:ext uri="{9D8B030D-6E8A-4147-A177-3AD203B41FA5}">
+                      <a16:colId xmlns:a16="http://schemas.microsoft.com/office/drawing/2014/main" val="20001"/>
+                    </a:ext>
+                  </a:extLst>
+                </a:gridCol>
+                <a:gridCol w="6583680">
+                  <a:extLst>
+                    <a:ext uri="{9D8B030D-6E8A-4147-A177-3AD203B41FA5}">
+                      <a16:colId xmlns:a16="http://schemas.microsoft.com/office/drawing/2014/main" val="20002"/>
+                    </a:ext>
+                  </a:extLst>
+                </a:gridCol>
               </a:tblGrid>
               <a:tr h="594360">
                 <a:tc>
@@ -4330,6 +5334,11 @@
                     </a:solidFill>
                   </a:tcPr>
                 </a:tc>
+                <a:extLst>
+                  <a:ext uri="{0D108BD9-81ED-4DB2-BD59-A6C34878D82A}">
+                    <a16:rowId xmlns:a16="http://schemas.microsoft.com/office/drawing/2014/main" val="10000"/>
+                  </a:ext>
+                </a:extLst>
               </a:tr>
               <a:tr h="594360">
                 <a:tc>
@@ -4383,6 +5392,11 @@
                   </a:txBody>
                   <a:tcPr/>
                 </a:tc>
+                <a:extLst>
+                  <a:ext uri="{0D108BD9-81ED-4DB2-BD59-A6C34878D82A}">
+                    <a16:rowId xmlns:a16="http://schemas.microsoft.com/office/drawing/2014/main" val="10001"/>
+                  </a:ext>
+                </a:extLst>
               </a:tr>
               <a:tr h="594360">
                 <a:tc>
@@ -4436,6 +5450,11 @@
                   </a:txBody>
                   <a:tcPr/>
                 </a:tc>
+                <a:extLst>
+                  <a:ext uri="{0D108BD9-81ED-4DB2-BD59-A6C34878D82A}">
+                    <a16:rowId xmlns:a16="http://schemas.microsoft.com/office/drawing/2014/main" val="10002"/>
+                  </a:ext>
+                </a:extLst>
               </a:tr>
               <a:tr h="594360">
                 <a:tc>
@@ -4478,17 +5497,142 @@
                     <a:lstStyle/>
                     <a:p>
                       <a:r>
-                        <a:rPr sz="1100">
-                          <a:solidFill>
-                            <a:srgbClr val="3D424E"/>
-                          </a:solidFill>
-                        </a:rPr>
-                        <a:t>FaceScanPaliGemma 75,7 % acc; Pangelinan 2023 refuta via 'pixel info' (endereçado por H6)</a:t>
+                        <a:rPr sz="1100" dirty="0" err="1">
+                          <a:solidFill>
+                            <a:srgbClr val="3D424E"/>
+                          </a:solidFill>
+                        </a:rPr>
+                        <a:t>FaceScanPaliGemma</a:t>
+                      </a:r>
+                      <a:r>
+                        <a:rPr sz="1100" dirty="0">
+                          <a:solidFill>
+                            <a:srgbClr val="3D424E"/>
+                          </a:solidFill>
+                        </a:rPr>
+                        <a:t> 75,7 % acc; Pangelinan 2023 </a:t>
+                      </a:r>
+                      <a:r>
+                        <a:rPr sz="1100" dirty="0" err="1">
+                          <a:solidFill>
+                            <a:srgbClr val="3D424E"/>
+                          </a:solidFill>
+                        </a:rPr>
+                        <a:t>refuta</a:t>
+                      </a:r>
+                      <a:r>
+                        <a:rPr sz="1100" dirty="0">
+                          <a:solidFill>
+                            <a:srgbClr val="3D424E"/>
+                          </a:solidFill>
+                        </a:rPr>
+                        <a:t> via 'pixel info' (</a:t>
+                      </a:r>
+                      <a:r>
+                        <a:rPr lang="pt-BR" sz="1100" dirty="0">
+                          <a:solidFill>
+                            <a:srgbClr val="3D424E"/>
+                          </a:solidFill>
+                        </a:rPr>
+                        <a:t>Controlo pixel </a:t>
+                      </a:r>
+                      <a:r>
+                        <a:rPr lang="pt-BR" sz="1100" dirty="0" err="1">
+                          <a:solidFill>
+                            <a:srgbClr val="3D424E"/>
+                          </a:solidFill>
+                        </a:rPr>
+                        <a:t>information</a:t>
+                      </a:r>
+                      <a:r>
+                        <a:rPr lang="pt-BR" sz="1100" dirty="0">
+                          <a:solidFill>
+                            <a:srgbClr val="3D424E"/>
+                          </a:solidFill>
+                        </a:rPr>
+                        <a:t> via </a:t>
+                      </a:r>
+                      <a:r>
+                        <a:rPr lang="pt-BR" sz="1100" dirty="0" err="1">
+                          <a:solidFill>
+                            <a:srgbClr val="3D424E"/>
+                          </a:solidFill>
+                        </a:rPr>
+                        <a:t>BiSeNet</a:t>
+                      </a:r>
+                      <a:r>
+                        <a:rPr lang="pt-BR" sz="1100" dirty="0">
+                          <a:solidFill>
+                            <a:srgbClr val="3D424E"/>
+                          </a:solidFill>
+                        </a:rPr>
+                        <a:t> </a:t>
+                      </a:r>
+                      <a:r>
+                        <a:rPr lang="pt-BR" sz="1100" dirty="0" err="1">
+                          <a:solidFill>
+                            <a:srgbClr val="3D424E"/>
+                          </a:solidFill>
+                        </a:rPr>
+                        <a:t>segmentation</a:t>
+                      </a:r>
+                      <a:r>
+                        <a:rPr lang="pt-BR" sz="1100" dirty="0">
+                          <a:solidFill>
+                            <a:srgbClr val="3D424E"/>
+                          </a:solidFill>
+                        </a:rPr>
+                        <a:t> e vejo o que sobra. Se sobrar ≥ X% de variância inexplicada, então há viés algorítmico residual que o </a:t>
+                      </a:r>
+                      <a:r>
+                        <a:rPr lang="pt-BR" sz="1100" dirty="0" err="1">
+                          <a:solidFill>
+                            <a:srgbClr val="3D424E"/>
+                          </a:solidFill>
+                        </a:rPr>
+                        <a:t>conditioning</a:t>
+                      </a:r>
+                      <a:r>
+                        <a:rPr lang="pt-BR" sz="1100" dirty="0">
+                          <a:solidFill>
+                            <a:srgbClr val="3D424E"/>
+                          </a:solidFill>
+                        </a:rPr>
+                        <a:t> MST pode mitigar. Se sobrar &lt; X%, </a:t>
+                      </a:r>
+                      <a:r>
+                        <a:rPr lang="pt-BR" sz="1100" dirty="0" err="1">
+                          <a:solidFill>
+                            <a:srgbClr val="3D424E"/>
+                          </a:solidFill>
+                        </a:rPr>
+                        <a:t>Pangelinan</a:t>
+                      </a:r>
+                      <a:r>
+                        <a:rPr lang="pt-BR" sz="1100" dirty="0">
+                          <a:solidFill>
+                            <a:srgbClr val="3D424E"/>
+                          </a:solidFill>
+                        </a:rPr>
+                        <a:t> estava certo — e isso ainda seria contribuição valiosa como diagnóstico estrutural."</a:t>
+                      </a:r>
+                      <a:r>
+                        <a:rPr sz="1100" dirty="0">
+                          <a:solidFill>
+                            <a:srgbClr val="3D424E"/>
+                          </a:solidFill>
+                        </a:rPr>
+                        <a:t>)</a:t>
                       </a:r>
                     </a:p>
                   </a:txBody>
                   <a:tcPr/>
                 </a:tc>
+                <a:extLst>
+                  <a:ext uri="{0D108BD9-81ED-4DB2-BD59-A6C34878D82A}">
+                    <a16:rowId xmlns:a16="http://schemas.microsoft.com/office/drawing/2014/main" val="10003"/>
+                  </a:ext>
+                </a:extLst>
               </a:tr>
               <a:tr h="594360">
                 <a:tc>
@@ -4531,17 +5675,46 @@
                     <a:lstStyle/>
                     <a:p>
                       <a:r>
-                        <a:rPr sz="1100">
-                          <a:solidFill>
-                            <a:srgbClr val="3D424E"/>
-                          </a:solidFill>
-                        </a:rPr>
-                        <a:t>Diversidade intra-Latinx monolítica — respondido pela Rodada 8 (Telles/Bryc/Pew)</a:t>
+                        <a:rPr sz="1100" dirty="0" err="1">
+                          <a:solidFill>
+                            <a:srgbClr val="3D424E"/>
+                          </a:solidFill>
+                        </a:rPr>
+                        <a:t>Diversidade</a:t>
+                      </a:r>
+                      <a:r>
+                        <a:rPr sz="1100" dirty="0">
+                          <a:solidFill>
+                            <a:srgbClr val="3D424E"/>
+                          </a:solidFill>
+                        </a:rPr>
+                        <a:t> intra-Latinx </a:t>
+                      </a:r>
+                      <a:r>
+                        <a:rPr sz="1100" dirty="0" err="1">
+                          <a:solidFill>
+                            <a:srgbClr val="3D424E"/>
+                          </a:solidFill>
+                        </a:rPr>
+                        <a:t>monolítica</a:t>
+                      </a:r>
+                      <a:r>
+                        <a:rPr sz="1100" dirty="0">
+                          <a:solidFill>
+                            <a:srgbClr val="3D424E"/>
+                          </a:solidFill>
+                        </a:rPr>
+                        <a:t> — (Telles/Bryc/Pew)</a:t>
                       </a:r>
                     </a:p>
                   </a:txBody>
                   <a:tcPr/>
                 </a:tc>
+                <a:extLst>
+                  <a:ext uri="{0D108BD9-81ED-4DB2-BD59-A6C34878D82A}">
+                    <a16:rowId xmlns:a16="http://schemas.microsoft.com/office/drawing/2014/main" val="10004"/>
+                  </a:ext>
+                </a:extLst>
               </a:tr>
               <a:tr h="594360">
                 <a:tc>
@@ -4595,6 +5768,11 @@
                   </a:txBody>
                   <a:tcPr/>
                 </a:tc>
+                <a:extLst>
+                  <a:ext uri="{0D108BD9-81ED-4DB2-BD59-A6C34878D82A}">
+                    <a16:rowId xmlns:a16="http://schemas.microsoft.com/office/drawing/2014/main" val="10005"/>
+                  </a:ext>
+                </a:extLst>
               </a:tr>
               <a:tr h="594360">
                 <a:tc>
@@ -4648,6 +5826,11 @@
                   </a:txBody>
                   <a:tcPr/>
                 </a:tc>
+                <a:extLst>
+                  <a:ext uri="{0D108BD9-81ED-4DB2-BD59-A6C34878D82A}">
+                    <a16:rowId xmlns:a16="http://schemas.microsoft.com/office/drawing/2014/main" val="10006"/>
+                  </a:ext>
+                </a:extLst>
               </a:tr>
               <a:tr h="594360">
                 <a:tc>
@@ -4690,17 +5873,75 @@
                     <a:lstStyle/>
                     <a:p>
                       <a:r>
-                        <a:rPr sz="1100">
-                          <a:solidFill>
-                            <a:srgbClr val="3D424E"/>
-                          </a:solidFill>
-                        </a:rPr>
-                        <a:t>Sequenciamento + controle de confounders + ablação + rigor estatístico</a:t>
-                      </a:r>
+                        <a:rPr sz="1100" dirty="0" err="1">
+                          <a:solidFill>
+                            <a:srgbClr val="3D424E"/>
+                          </a:solidFill>
+                        </a:rPr>
+                        <a:t>Sequenciamento</a:t>
+                      </a:r>
+                      <a:r>
+                        <a:rPr sz="1100" dirty="0">
+                          <a:solidFill>
+                            <a:srgbClr val="3D424E"/>
+                          </a:solidFill>
+                        </a:rPr>
+                        <a:t> + </a:t>
+                      </a:r>
+                      <a:r>
+                        <a:rPr sz="1100" dirty="0" err="1">
+                          <a:solidFill>
+                            <a:srgbClr val="3D424E"/>
+                          </a:solidFill>
+                        </a:rPr>
+                        <a:t>controle</a:t>
+                      </a:r>
+                      <a:r>
+                        <a:rPr sz="1100" dirty="0">
+                          <a:solidFill>
+                            <a:srgbClr val="3D424E"/>
+                          </a:solidFill>
+                        </a:rPr>
+                        <a:t> de confounders + </a:t>
+                      </a:r>
+                      <a:r>
+                        <a:rPr sz="1100" dirty="0" err="1">
+                          <a:solidFill>
+                            <a:srgbClr val="3D424E"/>
+                          </a:solidFill>
+                        </a:rPr>
+                        <a:t>ablação</a:t>
+                      </a:r>
+                      <a:r>
+                        <a:rPr sz="1100" dirty="0">
+                          <a:solidFill>
+                            <a:srgbClr val="3D424E"/>
+                          </a:solidFill>
+                        </a:rPr>
+                        <a:t> + rigor </a:t>
+                      </a:r>
+                      <a:r>
+                        <a:rPr sz="1100" dirty="0" err="1">
+                          <a:solidFill>
+                            <a:srgbClr val="3D424E"/>
+                          </a:solidFill>
+                        </a:rPr>
+                        <a:t>estatístico</a:t>
+                      </a:r>
+                      <a:endParaRPr sz="1100" dirty="0">
+                        <a:solidFill>
+                          <a:srgbClr val="3D424E"/>
+                        </a:solidFill>
+                      </a:endParaRPr>
                     </a:p>
                   </a:txBody>
                   <a:tcPr/>
                 </a:tc>
+                <a:extLst>
+                  <a:ext uri="{0D108BD9-81ED-4DB2-BD59-A6C34878D82A}">
+                    <a16:rowId xmlns:a16="http://schemas.microsoft.com/office/drawing/2014/main" val="10007"/>
+                  </a:ext>
+                </a:extLst>
               </a:tr>
             </a:tbl>
           </a:graphicData>
@@ -4750,7 +5991,7 @@
 </file>
 
 <file path=ppt/slides/slide13.xml><?xml version="1.0" encoding="utf-8"?>
-<p:sld xmlns:a="http://schemas.openxmlformats.org/drawingml/2006/main" xmlns:p="http://schemas.openxmlformats.org/presentationml/2006/main" xmlns:r="http://schemas.openxmlformats.org/officeDocument/2006/relationships">
+<p:sld xmlns:a="http://schemas.openxmlformats.org/drawingml/2006/main" xmlns:r="http://schemas.openxmlformats.org/officeDocument/2006/relationships" xmlns:p="http://schemas.openxmlformats.org/presentationml/2006/main" show="0">
   <p:cSld>
     <p:spTree>
       <p:nvGrpSpPr>
@@ -4758,7 +5999,14 @@
         <p:cNvGrpSpPr/>
         <p:nvPr/>
       </p:nvGrpSpPr>
-      <p:grpSpPr/>
+      <p:grpSpPr>
+        <a:xfrm>
+          <a:off x="0" y="0"/>
+          <a:ext cx="0" cy="0"/>
+          <a:chOff x="0" y="0"/>
+          <a:chExt cx="0" cy="0"/>
+        </a:xfrm>
+      </p:grpSpPr>
       <p:sp>
         <p:nvSpPr>
           <p:cNvPr id="2" name="TextBox 1"/>
@@ -4834,6 +6082,7 @@
           <a:lstStyle/>
           <a:p>
             <a:pPr algn="ctr"/>
+            <a:endParaRPr/>
           </a:p>
         </p:txBody>
       </p:sp>
@@ -4843,11 +6092,17 @@
           <p:cNvGraphicFramePr>
             <a:graphicFrameLocks noGrp="1"/>
           </p:cNvGraphicFramePr>
-          <p:nvPr/>
+          <p:nvPr>
+            <p:extLst>
+              <p:ext uri="{D42A27DB-BD31-4B8C-83A1-F6EECF244321}">
+                <p14:modId xmlns:p14="http://schemas.microsoft.com/office/powerpoint/2010/main" val="2451676779"/>
+              </p:ext>
+            </p:extLst>
+          </p:nvPr>
         </p:nvGraphicFramePr>
         <p:xfrm>
           <a:off x="457200" y="1371600"/>
-          <a:ext cx="11887200" cy="4754880"/>
+          <a:ext cx="11430000" cy="4754880"/>
         </p:xfrm>
         <a:graphic>
           <a:graphicData uri="http://schemas.openxmlformats.org/drawingml/2006/table">
@@ -4856,9 +6111,27 @@
                 <a:tableStyleId>{5C22544A-7EE6-4342-B048-85BDC9FD1C3A}</a:tableStyleId>
               </a:tblPr>
               <a:tblGrid>
-                <a:gridCol w="3200400"/>
-                <a:gridCol w="4114800"/>
-                <a:gridCol w="4572000"/>
+                <a:gridCol w="3077308">
+                  <a:extLst>
+                    <a:ext uri="{9D8B030D-6E8A-4147-A177-3AD203B41FA5}">
+                      <a16:colId xmlns:a16="http://schemas.microsoft.com/office/drawing/2014/main" val="20000"/>
+                    </a:ext>
+                  </a:extLst>
+                </a:gridCol>
+                <a:gridCol w="3956538">
+                  <a:extLst>
+                    <a:ext uri="{9D8B030D-6E8A-4147-A177-3AD203B41FA5}">
+                      <a16:colId xmlns:a16="http://schemas.microsoft.com/office/drawing/2014/main" val="20001"/>
+                    </a:ext>
+                  </a:extLst>
+                </a:gridCol>
+                <a:gridCol w="4396154">
+                  <a:extLst>
+                    <a:ext uri="{9D8B030D-6E8A-4147-A177-3AD203B41FA5}">
+                      <a16:colId xmlns:a16="http://schemas.microsoft.com/office/drawing/2014/main" val="20002"/>
+                    </a:ext>
+                  </a:extLst>
+                </a:gridCol>
               </a:tblGrid>
               <a:tr h="792480">
                 <a:tc>
@@ -4924,6 +6197,11 @@
                     </a:solidFill>
                   </a:tcPr>
                 </a:tc>
+                <a:extLst>
+                  <a:ext uri="{0D108BD9-81ED-4DB2-BD59-A6C34878D82A}">
+                    <a16:rowId xmlns:a16="http://schemas.microsoft.com/office/drawing/2014/main" val="10000"/>
+                  </a:ext>
+                </a:extLst>
               </a:tr>
               <a:tr h="792480">
                 <a:tc>
@@ -4989,6 +6267,11 @@
                     </a:solidFill>
                   </a:tcPr>
                 </a:tc>
+                <a:extLst>
+                  <a:ext uri="{0D108BD9-81ED-4DB2-BD59-A6C34878D82A}">
+                    <a16:rowId xmlns:a16="http://schemas.microsoft.com/office/drawing/2014/main" val="10001"/>
+                  </a:ext>
+                </a:extLst>
               </a:tr>
               <a:tr h="792480">
                 <a:tc>
@@ -5054,6 +6337,11 @@
                     </a:solidFill>
                   </a:tcPr>
                 </a:tc>
+                <a:extLst>
+                  <a:ext uri="{0D108BD9-81ED-4DB2-BD59-A6C34878D82A}">
+                    <a16:rowId xmlns:a16="http://schemas.microsoft.com/office/drawing/2014/main" val="10002"/>
+                  </a:ext>
+                </a:extLst>
               </a:tr>
               <a:tr h="792480">
                 <a:tc>
@@ -5096,17 +6384,99 @@
                     <a:lstStyle/>
                     <a:p>
                       <a:r>
-                        <a:rPr sz="1100">
-                          <a:solidFill>
-                            <a:srgbClr val="3D424E"/>
-                          </a:solidFill>
-                        </a:rPr>
-                        <a:t>Alternativa avaliada — abandonada por custo computacional</a:t>
-                      </a:r>
+                        <a:rPr sz="1100" dirty="0">
+                          <a:solidFill>
+                            <a:srgbClr val="3D424E"/>
+                          </a:solidFill>
+                        </a:rPr>
+                        <a:t>Alternativa </a:t>
+                      </a:r>
+                      <a:r>
+                        <a:rPr sz="1100" dirty="0" err="1">
+                          <a:solidFill>
+                            <a:srgbClr val="3D424E"/>
+                          </a:solidFill>
+                        </a:rPr>
+                        <a:t>avaliada</a:t>
+                      </a:r>
+                      <a:r>
+                        <a:rPr sz="1100" dirty="0">
+                          <a:solidFill>
+                            <a:srgbClr val="3D424E"/>
+                          </a:solidFill>
+                        </a:rPr>
+                        <a:t> — </a:t>
+                      </a:r>
+                      <a:r>
+                        <a:rPr sz="1100" dirty="0" err="1">
+                          <a:solidFill>
+                            <a:srgbClr val="3D424E"/>
+                          </a:solidFill>
+                        </a:rPr>
+                        <a:t>abandonada</a:t>
+                      </a:r>
+                      <a:r>
+                        <a:rPr sz="1100" dirty="0">
+                          <a:solidFill>
+                            <a:srgbClr val="3D424E"/>
+                          </a:solidFill>
+                        </a:rPr>
+                        <a:t> </a:t>
+                      </a:r>
+                      <a:r>
+                        <a:rPr sz="1100" dirty="0" err="1">
+                          <a:solidFill>
+                            <a:srgbClr val="3D424E"/>
+                          </a:solidFill>
+                        </a:rPr>
+                        <a:t>por</a:t>
+                      </a:r>
+                      <a:r>
+                        <a:rPr sz="1100" dirty="0">
+                          <a:solidFill>
+                            <a:srgbClr val="3D424E"/>
+                          </a:solidFill>
+                        </a:rPr>
+                        <a:t> </a:t>
+                      </a:r>
+                      <a:r>
+                        <a:rPr sz="1100" dirty="0" err="1">
+                          <a:solidFill>
+                            <a:srgbClr val="3D424E"/>
+                          </a:solidFill>
+                        </a:rPr>
+                        <a:t>custo</a:t>
+                      </a:r>
+                      <a:r>
+                        <a:rPr sz="1100" dirty="0">
+                          <a:solidFill>
+                            <a:srgbClr val="3D424E"/>
+                          </a:solidFill>
+                        </a:rPr>
+                        <a:t> </a:t>
+                      </a:r>
+                      <a:r>
+                        <a:rPr sz="1100" dirty="0" err="1">
+                          <a:solidFill>
+                            <a:srgbClr val="3D424E"/>
+                          </a:solidFill>
+                        </a:rPr>
+                        <a:t>computacional</a:t>
+                      </a:r>
+                      <a:endParaRPr sz="1100" dirty="0">
+                        <a:solidFill>
+                          <a:srgbClr val="3D424E"/>
+                        </a:solidFill>
+                      </a:endParaRPr>
                     </a:p>
                   </a:txBody>
                   <a:tcPr/>
                 </a:tc>
+                <a:extLst>
+                  <a:ext uri="{0D108BD9-81ED-4DB2-BD59-A6C34878D82A}">
+                    <a16:rowId xmlns:a16="http://schemas.microsoft.com/office/drawing/2014/main" val="10003"/>
+                  </a:ext>
+                </a:extLst>
               </a:tr>
               <a:tr h="792480">
                 <a:tc>
@@ -5160,6 +6530,11 @@
                   </a:txBody>
                   <a:tcPr/>
                 </a:tc>
+                <a:extLst>
+                  <a:ext uri="{0D108BD9-81ED-4DB2-BD59-A6C34878D82A}">
+                    <a16:rowId xmlns:a16="http://schemas.microsoft.com/office/drawing/2014/main" val="10004"/>
+                  </a:ext>
+                </a:extLst>
               </a:tr>
               <a:tr h="792480">
                 <a:tc>
@@ -5202,17 +6577,91 @@
                     <a:lstStyle/>
                     <a:p>
                       <a:r>
-                        <a:rPr sz="1100">
-                          <a:solidFill>
-                            <a:srgbClr val="3D424E"/>
-                          </a:solidFill>
-                        </a:rPr>
-                        <a:t>Interseciona com MST — MST é já uma discretização de espectro</a:t>
-                      </a:r>
+                        <a:rPr sz="1100" dirty="0" err="1">
+                          <a:solidFill>
+                            <a:srgbClr val="3D424E"/>
+                          </a:solidFill>
+                        </a:rPr>
+                        <a:t>Interseciona</a:t>
+                      </a:r>
+                      <a:r>
+                        <a:rPr sz="1100" dirty="0">
+                          <a:solidFill>
+                            <a:srgbClr val="3D424E"/>
+                          </a:solidFill>
+                        </a:rPr>
+                        <a:t> com MST — MST é </a:t>
+                      </a:r>
+                      <a:r>
+                        <a:rPr sz="1100" dirty="0" err="1">
+                          <a:solidFill>
+                            <a:srgbClr val="3D424E"/>
+                          </a:solidFill>
+                        </a:rPr>
+                        <a:t>já</a:t>
+                      </a:r>
+                      <a:r>
+                        <a:rPr sz="1100" dirty="0">
+                          <a:solidFill>
+                            <a:srgbClr val="3D424E"/>
+                          </a:solidFill>
+                        </a:rPr>
+                        <a:t> </a:t>
+                      </a:r>
+                      <a:r>
+                        <a:rPr sz="1100" dirty="0" err="1">
+                          <a:solidFill>
+                            <a:srgbClr val="3D424E"/>
+                          </a:solidFill>
+                        </a:rPr>
+                        <a:t>uma</a:t>
+                      </a:r>
+                      <a:r>
+                        <a:rPr sz="1100" dirty="0">
+                          <a:solidFill>
+                            <a:srgbClr val="3D424E"/>
+                          </a:solidFill>
+                        </a:rPr>
+                        <a:t> </a:t>
+                      </a:r>
+                      <a:r>
+                        <a:rPr sz="1100" dirty="0" err="1">
+                          <a:solidFill>
+                            <a:srgbClr val="3D424E"/>
+                          </a:solidFill>
+                        </a:rPr>
+                        <a:t>discretização</a:t>
+                      </a:r>
+                      <a:r>
+                        <a:rPr sz="1100" dirty="0">
+                          <a:solidFill>
+                            <a:srgbClr val="3D424E"/>
+                          </a:solidFill>
+                        </a:rPr>
+                        <a:t> de </a:t>
+                      </a:r>
+                      <a:r>
+                        <a:rPr sz="1100" dirty="0" err="1">
+                          <a:solidFill>
+                            <a:srgbClr val="3D424E"/>
+                          </a:solidFill>
+                        </a:rPr>
+                        <a:t>espectro</a:t>
+                      </a:r>
+                      <a:endParaRPr sz="1100" dirty="0">
+                        <a:solidFill>
+                          <a:srgbClr val="3D424E"/>
+                        </a:solidFill>
+                      </a:endParaRPr>
                     </a:p>
                   </a:txBody>
                   <a:tcPr/>
                 </a:tc>
+                <a:extLst>
+                  <a:ext uri="{0D108BD9-81ED-4DB2-BD59-A6C34878D82A}">
+                    <a16:rowId xmlns:a16="http://schemas.microsoft.com/office/drawing/2014/main" val="10005"/>
+                  </a:ext>
+                </a:extLst>
               </a:tr>
             </a:tbl>
           </a:graphicData>
@@ -5262,7 +6711,7 @@
 </file>
 
 <file path=ppt/slides/slide14.xml><?xml version="1.0" encoding="utf-8"?>
-<p:sld xmlns:a="http://schemas.openxmlformats.org/drawingml/2006/main" xmlns:p="http://schemas.openxmlformats.org/presentationml/2006/main" xmlns:r="http://schemas.openxmlformats.org/officeDocument/2006/relationships">
+<p:sld xmlns:a="http://schemas.openxmlformats.org/drawingml/2006/main" xmlns:r="http://schemas.openxmlformats.org/officeDocument/2006/relationships" xmlns:p="http://schemas.openxmlformats.org/presentationml/2006/main" show="0">
   <p:cSld>
     <p:spTree>
       <p:nvGrpSpPr>
@@ -5270,7 +6719,14 @@
         <p:cNvGrpSpPr/>
         <p:nvPr/>
       </p:nvGrpSpPr>
-      <p:grpSpPr/>
+      <p:grpSpPr>
+        <a:xfrm>
+          <a:off x="0" y="0"/>
+          <a:ext cx="0" cy="0"/>
+          <a:chOff x="0" y="0"/>
+          <a:chExt cx="0" cy="0"/>
+        </a:xfrm>
+      </p:grpSpPr>
       <p:sp>
         <p:nvSpPr>
           <p:cNvPr id="2" name="TextBox 1"/>
@@ -5301,7 +6757,7 @@
               </a:defRPr>
             </a:pPr>
             <a:r>
-              <a:t>Complemento — solicitação pessoal de extensão de 2 meses</a:t>
+              <a:t>Perguntas em aberto — técnicas + administrativas</a:t>
             </a:r>
           </a:p>
         </p:txBody>
@@ -5346,6 +6802,7 @@
           <a:lstStyle/>
           <a:p>
             <a:pPr algn="ctr"/>
+            <a:endParaRPr/>
           </a:p>
         </p:txBody>
       </p:sp>
@@ -5382,7 +6839,7 @@
                   <a:srgbClr val="1F2A4E"/>
                 </a:solidFill>
               </a:rPr>
-              <a:t>O que aconteceu:  </a:t>
+              <a:t>1. Estrutura entregue no Overleaf:  </a:t>
             </a:r>
             <a:r>
               <a:rPr sz="1600">
@@ -5390,7 +6847,7 @@
                   <a:srgbClr val="3D424E"/>
                 </a:solidFill>
               </a:rPr>
-              <a:t>minha filha nasceu em 28/março. Fiquei afastado nas semanas seguintes para o cuidado que ela e a mãe precisaram</a:t>
+              <a:t>há capítulo que o senhor gostaria de ver com tratamento diferente antes da minha próxima rodada de revisão?</a:t>
             </a:r>
           </a:p>
           <a:p>
@@ -5405,7 +6862,7 @@
                   <a:srgbClr val="1F2A4E"/>
                 </a:solidFill>
               </a:rPr>
-              <a:t>  </a:t>
+              <a:t>2. Configurações comparativas:  </a:t>
             </a:r>
             <a:r>
               <a:rPr sz="1600">
@@ -5413,7 +6870,7 @@
                   <a:srgbClr val="3D424E"/>
                 </a:solidFill>
               </a:rPr>
-              <a:t/>
+              <a:t>as 4 configs (A/B/C/D) bastam ou incluo uma 5ª variante (skin tone contínuo ITA/L* em vez de MST discreto)?</a:t>
             </a:r>
           </a:p>
           <a:p>
@@ -5428,7 +6885,7 @@
                   <a:srgbClr val="1F2A4E"/>
                 </a:solidFill>
               </a:rPr>
-              <a:t>O que preservei:  </a:t>
+              <a:t>3. Cap 2 — ablation arquitetural:  </a:t>
             </a:r>
             <a:r>
               <a:rPr sz="1600">
@@ -5436,7 +6893,7 @@
                   <a:srgbClr val="3D424E"/>
                 </a:solidFill>
               </a:rPr>
-              <a:t>marcos de 15/jul (1ª revisão) e 30/jul (pedido formal) continuam de pé</a:t>
+              <a:t>faz sentido meia-página comparando FiLM × CBN × cross-attention × AdaIN, ou deixo para a defesa oral?</a:t>
             </a:r>
           </a:p>
           <a:p>
@@ -5451,7 +6908,7 @@
                   <a:srgbClr val="1F2A4E"/>
                 </a:solidFill>
               </a:rPr>
-              <a:t>O que estou pedindo:  </a:t>
+              <a:t>4. OE-4 (fair transfer):  </a:t>
             </a:r>
             <a:r>
               <a:rPr sz="1600">
@@ -5459,7 +6916,7 @@
                   <a:srgbClr val="3D424E"/>
                 </a:solidFill>
               </a:rPr>
-              <a:t>extensão de 2 meses no prazo da defesa — de agosto para outubro</a:t>
+              <a:t>métrica principal TPR@FAR=1e-4 estratificada por raça, ou DR agregado?</a:t>
             </a:r>
           </a:p>
           <a:p>
@@ -5474,7 +6931,7 @@
                   <a:srgbClr val="1F2A4E"/>
                 </a:solidFill>
               </a:rPr>
-              <a:t>  </a:t>
+              <a:t>5. Extensão de 2 meses:  </a:t>
             </a:r>
             <a:r>
               <a:rPr sz="1600">
@@ -5482,7 +6939,7 @@
                   <a:srgbClr val="3D424E"/>
                 </a:solidFill>
               </a:rPr>
-              <a:t/>
+              <a:t>trâmite correto — carta direta, requerimento SEI ao PPG, ou processo formal?</a:t>
             </a:r>
           </a:p>
           <a:p>
@@ -5497,7 +6954,7 @@
                   <a:srgbClr val="1F2A4E"/>
                 </a:solidFill>
               </a:rPr>
-              <a:t>Documento:  </a:t>
+              <a:t>Bônus:  </a:t>
             </a:r>
             <a:r>
               <a:rPr sz="1600">
@@ -5505,7 +6962,7 @@
                   <a:srgbClr val="3D424E"/>
                 </a:solidFill>
               </a:rPr>
-              <a:t>carta em 2 parágrafos redigida, pronta para envio via SEI ou trâmite indicado pelo Programa</a:t>
+              <a:t>sugestões para banca preliminar (fairness externo + CV aplicada)?</a:t>
             </a:r>
           </a:p>
         </p:txBody>
@@ -5540,7 +6997,7 @@
               </a:defRPr>
             </a:pPr>
             <a:r>
-              <a:t>Complemento à agenda, mas precisa de encaminhamento hoje.</a:t>
+              <a:t>Nesta semana entro em modo revisão conforme feedback vindo do Overleaf.</a:t>
             </a:r>
           </a:p>
         </p:txBody>
@@ -5554,7 +7011,7 @@
 </file>
 
 <file path=ppt/slides/slide15.xml><?xml version="1.0" encoding="utf-8"?>
-<p:sld xmlns:a="http://schemas.openxmlformats.org/drawingml/2006/main" xmlns:p="http://schemas.openxmlformats.org/presentationml/2006/main" xmlns:r="http://schemas.openxmlformats.org/officeDocument/2006/relationships">
+<p:sld xmlns:a="http://schemas.openxmlformats.org/drawingml/2006/main" xmlns:r="http://schemas.openxmlformats.org/officeDocument/2006/relationships" xmlns:p="http://schemas.openxmlformats.org/presentationml/2006/main">
   <p:cSld>
     <p:spTree>
       <p:nvGrpSpPr>
@@ -5562,7 +7019,163 @@
         <p:cNvGrpSpPr/>
         <p:nvPr/>
       </p:nvGrpSpPr>
-      <p:grpSpPr/>
+      <p:grpSpPr>
+        <a:xfrm>
+          <a:off x="0" y="0"/>
+          <a:ext cx="0" cy="0"/>
+          <a:chOff x="0" y="0"/>
+          <a:chExt cx="0" cy="0"/>
+        </a:xfrm>
+      </p:grpSpPr>
+      <p:sp>
+        <p:nvSpPr>
+          <p:cNvPr id="2" name="Rectangle 1"/>
+          <p:cNvSpPr/>
+          <p:nvPr/>
+        </p:nvSpPr>
+        <p:spPr>
+          <a:xfrm>
+            <a:off x="0" y="0"/>
+            <a:ext cx="12188952" cy="6858000"/>
+          </a:xfrm>
+          <a:prstGeom prst="rect">
+            <a:avLst/>
+          </a:prstGeom>
+          <a:solidFill>
+            <a:srgbClr val="1F2A4E"/>
+          </a:solidFill>
+          <a:ln>
+            <a:noFill/>
+          </a:ln>
+        </p:spPr>
+        <p:style>
+          <a:lnRef idx="1">
+            <a:schemeClr val="accent1"/>
+          </a:lnRef>
+          <a:fillRef idx="3">
+            <a:schemeClr val="accent1"/>
+          </a:fillRef>
+          <a:effectRef idx="2">
+            <a:schemeClr val="accent1"/>
+          </a:effectRef>
+          <a:fontRef idx="minor">
+            <a:schemeClr val="lt1"/>
+          </a:fontRef>
+        </p:style>
+        <p:txBody>
+          <a:bodyPr rtlCol="0" anchor="ctr"/>
+          <a:lstStyle/>
+          <a:p>
+            <a:pPr algn="ctr"/>
+            <a:endParaRPr/>
+          </a:p>
+        </p:txBody>
+      </p:sp>
+      <p:sp>
+        <p:nvSpPr>
+          <p:cNvPr id="3" name="TextBox 2"/>
+          <p:cNvSpPr txBox="1"/>
+          <p:nvPr/>
+        </p:nvSpPr>
+        <p:spPr>
+          <a:xfrm>
+            <a:off x="731520" y="1371600"/>
+            <a:ext cx="2743200" cy="2743200"/>
+          </a:xfrm>
+          <a:prstGeom prst="rect">
+            <a:avLst/>
+          </a:prstGeom>
+          <a:noFill/>
+        </p:spPr>
+        <p:txBody>
+          <a:bodyPr wrap="none">
+            <a:spAutoFit/>
+          </a:bodyPr>
+          <a:lstStyle/>
+          <a:p>
+            <a:pPr>
+              <a:defRPr sz="14000" b="1">
+                <a:solidFill>
+                  <a:srgbClr val="FFFFFF"/>
+                </a:solidFill>
+              </a:defRPr>
+            </a:pPr>
+            <a:endParaRPr/>
+          </a:p>
+        </p:txBody>
+      </p:sp>
+      <p:sp>
+        <p:nvSpPr>
+          <p:cNvPr id="4" name="TextBox 3"/>
+          <p:cNvSpPr txBox="1"/>
+          <p:nvPr/>
+        </p:nvSpPr>
+        <p:spPr>
+          <a:xfrm>
+            <a:off x="3931920" y="2286000"/>
+            <a:ext cx="7772400" cy="1828800"/>
+          </a:xfrm>
+          <a:prstGeom prst="rect">
+            <a:avLst/>
+          </a:prstGeom>
+          <a:noFill/>
+        </p:spPr>
+        <p:txBody>
+          <a:bodyPr wrap="square">
+            <a:spAutoFit/>
+          </a:bodyPr>
+          <a:lstStyle/>
+          <a:p>
+            <a:pPr>
+              <a:defRPr sz="3600" b="1">
+                <a:solidFill>
+                  <a:srgbClr val="FFFFFF"/>
+                </a:solidFill>
+              </a:defRPr>
+            </a:pPr>
+            <a:r>
+              <a:t>Obrigado</a:t>
+            </a:r>
+          </a:p>
+          <a:p>
+            <a:pPr>
+              <a:defRPr sz="1800">
+                <a:solidFill>
+                  <a:srgbClr val="E8EAED"/>
+                </a:solidFill>
+              </a:defRPr>
+            </a:pPr>
+            <a:r>
+              <a:t>Aberto para o debate</a:t>
+            </a:r>
+          </a:p>
+        </p:txBody>
+      </p:sp>
+    </p:spTree>
+  </p:cSld>
+  <p:clrMapOvr>
+    <a:masterClrMapping/>
+  </p:clrMapOvr>
+</p:sld>
+</file>
+
+<file path=ppt/slides/slide2.xml><?xml version="1.0" encoding="utf-8"?>
+<p:sld xmlns:a="http://schemas.openxmlformats.org/drawingml/2006/main" xmlns:r="http://schemas.openxmlformats.org/officeDocument/2006/relationships" xmlns:p="http://schemas.openxmlformats.org/presentationml/2006/main">
+  <p:cSld>
+    <p:spTree>
+      <p:nvGrpSpPr>
+        <p:cNvPr id="1" name=""/>
+        <p:cNvGrpSpPr/>
+        <p:nvPr/>
+      </p:nvGrpSpPr>
+      <p:grpSpPr>
+        <a:xfrm>
+          <a:off x="0" y="0"/>
+          <a:ext cx="0" cy="0"/>
+          <a:chOff x="0" y="0"/>
+          <a:chExt cx="0" cy="0"/>
+        </a:xfrm>
+      </p:grpSpPr>
       <p:sp>
         <p:nvSpPr>
           <p:cNvPr id="2" name="TextBox 1"/>
@@ -5593,7 +7206,7 @@
               </a:defRPr>
             </a:pPr>
             <a:r>
-              <a:t>Perguntas em aberto — técnicas + administrativas</a:t>
+              <a:t>Objetivo desta reunião</a:t>
             </a:r>
           </a:p>
         </p:txBody>
@@ -5638,6 +7251,7 @@
           <a:lstStyle/>
           <a:p>
             <a:pPr algn="ctr"/>
+            <a:endParaRPr/>
           </a:p>
         </p:txBody>
       </p:sp>
@@ -5674,15 +7288,7 @@
                   <a:srgbClr val="1F2A4E"/>
                 </a:solidFill>
               </a:rPr>
-              <a:t>1. Estrutura entregue no Overleaf:  </a:t>
-            </a:r>
-            <a:r>
-              <a:rPr sz="1600">
-                <a:solidFill>
-                  <a:srgbClr val="3D424E"/>
-                </a:solidFill>
-              </a:rPr>
-              <a:t>há capítulo que o senhor gostaria de ver com tratamento diferente antes da minha próxima rodada de revisão?</a:t>
+              <a:t>  </a:t>
             </a:r>
           </a:p>
           <a:p>
@@ -5697,7 +7303,7 @@
                   <a:srgbClr val="1F2A4E"/>
                 </a:solidFill>
               </a:rPr>
-              <a:t>2. Configurações comparativas:  </a:t>
+              <a:t>1.  </a:t>
             </a:r>
             <a:r>
               <a:rPr sz="1600">
@@ -5705,7 +7311,7 @@
                   <a:srgbClr val="3D424E"/>
                 </a:solidFill>
               </a:rPr>
-              <a:t>as 4 configs (A/B/C/D) bastam ou incluo uma 5ª variante (skin tone contínuo ITA/L* em vez de MST discreto)?</a:t>
+              <a:t>Plano até a defesa</a:t>
             </a:r>
           </a:p>
           <a:p>
@@ -5720,15 +7326,7 @@
                   <a:srgbClr val="1F2A4E"/>
                 </a:solidFill>
               </a:rPr>
-              <a:t>3. Cap 2 — ablation arquitetural:  </a:t>
-            </a:r>
-            <a:r>
-              <a:rPr sz="1600">
-                <a:solidFill>
-                  <a:srgbClr val="3D424E"/>
-                </a:solidFill>
-              </a:rPr>
-              <a:t>faz sentido meia-página comparando FiLM × CBN × cross-attention × AdaIN, ou deixo para a defesa oral?</a:t>
+              <a:t>  </a:t>
             </a:r>
           </a:p>
           <a:p>
@@ -5743,7 +7341,7 @@
                   <a:srgbClr val="1F2A4E"/>
                 </a:solidFill>
               </a:rPr>
-              <a:t>4. OE-4 (fair transfer):  </a:t>
+              <a:t>2.  </a:t>
             </a:r>
             <a:r>
               <a:rPr sz="1600">
@@ -5751,7 +7349,7 @@
                   <a:srgbClr val="3D424E"/>
                 </a:solidFill>
               </a:rPr>
-              <a:t>métrica principal TPR@FAR=1e-4 estratificada por raça, ou DR agregado?</a:t>
+              <a:t>Estado real da escrita — qualificação no Overleaf, Cap 2 em revisão ativa</a:t>
             </a:r>
           </a:p>
           <a:p>
@@ -5766,15 +7364,7 @@
                   <a:srgbClr val="1F2A4E"/>
                 </a:solidFill>
               </a:rPr>
-              <a:t>5. Extensão de 2 meses:  </a:t>
-            </a:r>
-            <a:r>
-              <a:rPr sz="1600">
-                <a:solidFill>
-                  <a:srgbClr val="3D424E"/>
-                </a:solidFill>
-              </a:rPr>
-              <a:t>trâmite correto — carta direta, requerimento SEI ao PPG, ou processo formal?</a:t>
+              <a:t>  </a:t>
             </a:r>
           </a:p>
           <a:p>
@@ -5789,7 +7379,7 @@
                   <a:srgbClr val="1F2A4E"/>
                 </a:solidFill>
               </a:rPr>
-              <a:t>Bônus:  </a:t>
+              <a:t>Já resolvido:  </a:t>
             </a:r>
             <a:r>
               <a:rPr sz="1600">
@@ -5797,42 +7387,7 @@
                   <a:srgbClr val="3D424E"/>
                 </a:solidFill>
               </a:rPr>
-              <a:t>sugestões para banca preliminar (fairness externo + CV aplicada)?</a:t>
-            </a:r>
-          </a:p>
-        </p:txBody>
-      </p:sp>
-      <p:sp>
-        <p:nvSpPr>
-          <p:cNvPr id="5" name="TextBox 4"/>
-          <p:cNvSpPr txBox="1"/>
-          <p:nvPr/>
-        </p:nvSpPr>
-        <p:spPr>
-          <a:xfrm>
-            <a:off x="457200" y="6446520"/>
-            <a:ext cx="11430000" cy="365760"/>
-          </a:xfrm>
-          <a:prstGeom prst="rect">
-            <a:avLst/>
-          </a:prstGeom>
-          <a:noFill/>
-        </p:spPr>
-        <p:txBody>
-          <a:bodyPr wrap="none">
-            <a:spAutoFit/>
-          </a:bodyPr>
-          <a:lstStyle/>
-          <a:p>
-            <a:pPr>
-              <a:defRPr sz="1000" i="1">
-                <a:solidFill>
-                  <a:srgbClr val="707682"/>
-                </a:solidFill>
-              </a:defRPr>
-            </a:pPr>
-            <a:r>
-              <a:t>Nesta semana entro em modo revisão conforme feedback vindo do Overleaf.</a:t>
+              <a:t>Declaração de Responsabilidade CEP submetida ontem (12/jul) — Art. 8º da Res. 200/2021</a:t>
             </a:r>
           </a:p>
         </p:txBody>
@@ -5845,8 +7400,8 @@
 </p:sld>
 </file>
 
-<file path=ppt/slides/slide16.xml><?xml version="1.0" encoding="utf-8"?>
-<p:sld xmlns:a="http://schemas.openxmlformats.org/drawingml/2006/main" xmlns:p="http://schemas.openxmlformats.org/presentationml/2006/main" xmlns:r="http://schemas.openxmlformats.org/officeDocument/2006/relationships">
+<file path=ppt/slides/slide3.xml><?xml version="1.0" encoding="utf-8"?>
+<p:sld xmlns:a="http://schemas.openxmlformats.org/drawingml/2006/main" xmlns:r="http://schemas.openxmlformats.org/officeDocument/2006/relationships" xmlns:p="http://schemas.openxmlformats.org/presentationml/2006/main">
   <p:cSld>
     <p:spTree>
       <p:nvGrpSpPr>
@@ -5854,147 +7409,14 @@
         <p:cNvGrpSpPr/>
         <p:nvPr/>
       </p:nvGrpSpPr>
-      <p:grpSpPr/>
-      <p:sp>
-        <p:nvSpPr>
-          <p:cNvPr id="2" name="Rectangle 1"/>
-          <p:cNvSpPr/>
-          <p:nvPr/>
-        </p:nvSpPr>
-        <p:spPr>
-          <a:xfrm>
-            <a:off x="0" y="0"/>
-            <a:ext cx="12188952" cy="6858000"/>
-          </a:xfrm>
-          <a:prstGeom prst="rect">
-            <a:avLst/>
-          </a:prstGeom>
-          <a:solidFill>
-            <a:srgbClr val="1F2A4E"/>
-          </a:solidFill>
-          <a:ln>
-            <a:noFill/>
-          </a:ln>
-        </p:spPr>
-        <p:style>
-          <a:lnRef idx="1">
-            <a:schemeClr val="accent1"/>
-          </a:lnRef>
-          <a:fillRef idx="3">
-            <a:schemeClr val="accent1"/>
-          </a:fillRef>
-          <a:effectRef idx="2">
-            <a:schemeClr val="accent1"/>
-          </a:effectRef>
-          <a:fontRef idx="minor">
-            <a:schemeClr val="lt1"/>
-          </a:fontRef>
-        </p:style>
-        <p:txBody>
-          <a:bodyPr rtlCol="0" anchor="ctr"/>
-          <a:lstStyle/>
-          <a:p>
-            <a:pPr algn="ctr"/>
-          </a:p>
-        </p:txBody>
-      </p:sp>
-      <p:sp>
-        <p:nvSpPr>
-          <p:cNvPr id="3" name="TextBox 2"/>
-          <p:cNvSpPr txBox="1"/>
-          <p:nvPr/>
-        </p:nvSpPr>
-        <p:spPr>
-          <a:xfrm>
-            <a:off x="731520" y="1371600"/>
-            <a:ext cx="2743200" cy="2743200"/>
-          </a:xfrm>
-          <a:prstGeom prst="rect">
-            <a:avLst/>
-          </a:prstGeom>
-          <a:noFill/>
-        </p:spPr>
-        <p:txBody>
-          <a:bodyPr wrap="none">
-            <a:spAutoFit/>
-          </a:bodyPr>
-          <a:lstStyle/>
-          <a:p>
-            <a:pPr>
-              <a:defRPr sz="14000" b="1">
-                <a:solidFill>
-                  <a:srgbClr val="FFFFFF"/>
-                </a:solidFill>
-              </a:defRPr>
-            </a:pPr>
-          </a:p>
-        </p:txBody>
-      </p:sp>
-      <p:sp>
-        <p:nvSpPr>
-          <p:cNvPr id="4" name="TextBox 3"/>
-          <p:cNvSpPr txBox="1"/>
-          <p:nvPr/>
-        </p:nvSpPr>
-        <p:spPr>
-          <a:xfrm>
-            <a:off x="3931920" y="2286000"/>
-            <a:ext cx="7772400" cy="1828800"/>
-          </a:xfrm>
-          <a:prstGeom prst="rect">
-            <a:avLst/>
-          </a:prstGeom>
-          <a:noFill/>
-        </p:spPr>
-        <p:txBody>
-          <a:bodyPr wrap="square">
-            <a:spAutoFit/>
-          </a:bodyPr>
-          <a:lstStyle/>
-          <a:p>
-            <a:pPr>
-              <a:defRPr sz="3600" b="1">
-                <a:solidFill>
-                  <a:srgbClr val="FFFFFF"/>
-                </a:solidFill>
-              </a:defRPr>
-            </a:pPr>
-            <a:r>
-              <a:t>Obrigado</a:t>
-            </a:r>
-          </a:p>
-          <a:p>
-            <a:pPr>
-              <a:defRPr sz="1800">
-                <a:solidFill>
-                  <a:srgbClr val="E8EAED"/>
-                </a:solidFill>
-              </a:defRPr>
-            </a:pPr>
-            <a:r>
-              <a:t>Aberto para o debate</a:t>
-            </a:r>
-          </a:p>
-        </p:txBody>
-      </p:sp>
-    </p:spTree>
-  </p:cSld>
-  <p:clrMapOvr>
-    <a:masterClrMapping/>
-  </p:clrMapOvr>
-</p:sld>
-</file>
-
-<file path=ppt/slides/slide2.xml><?xml version="1.0" encoding="utf-8"?>
-<p:sld xmlns:a="http://schemas.openxmlformats.org/drawingml/2006/main" xmlns:p="http://schemas.openxmlformats.org/presentationml/2006/main" xmlns:r="http://schemas.openxmlformats.org/officeDocument/2006/relationships">
-  <p:cSld>
-    <p:spTree>
-      <p:nvGrpSpPr>
-        <p:cNvPr id="1" name=""/>
-        <p:cNvGrpSpPr/>
-        <p:nvPr/>
-      </p:nvGrpSpPr>
-      <p:grpSpPr/>
+      <p:grpSpPr>
+        <a:xfrm>
+          <a:off x="0" y="0"/>
+          <a:ext cx="0" cy="0"/>
+          <a:chOff x="0" y="0"/>
+          <a:chExt cx="0" cy="0"/>
+        </a:xfrm>
+      </p:grpSpPr>
       <p:sp>
         <p:nvSpPr>
           <p:cNvPr id="2" name="TextBox 1"/>
@@ -6025,7 +7447,7 @@
               </a:defRPr>
             </a:pPr>
             <a:r>
-              <a:t>Objetivo desta reunião</a:t>
+              <a:t>A tese em uma tela</a:t>
             </a:r>
           </a:p>
         </p:txBody>
@@ -6070,6 +7492,7 @@
           <a:lstStyle/>
           <a:p>
             <a:pPr algn="ctr"/>
+            <a:endParaRPr/>
           </a:p>
         </p:txBody>
       </p:sp>
@@ -6106,7 +7529,7 @@
                   <a:srgbClr val="1F2A4E"/>
                 </a:solidFill>
               </a:rPr>
-              <a:t>  </a:t>
+              <a:t>Problema empírico:  </a:t>
             </a:r>
             <a:r>
               <a:rPr sz="1600">
@@ -6114,7 +7537,7 @@
                   <a:srgbClr val="3D424E"/>
                 </a:solidFill>
               </a:rPr>
-              <a:t/>
+              <a:t>F1 macro alto mascara disparidade Black ≈ 90 % vs Latinx ≈ 60 % em SOTA sobre FairFace (AlDahoul 2024)</a:t>
             </a:r>
           </a:p>
           <a:p>
@@ -6129,7 +7552,7 @@
                   <a:srgbClr val="1F2A4E"/>
                 </a:solidFill>
               </a:rPr>
-              <a:t>1.  </a:t>
+              <a:t>Pergunta de pesquisa:  </a:t>
             </a:r>
             <a:r>
               <a:rPr sz="1600">
@@ -6137,7 +7560,7 @@
                   <a:srgbClr val="3D424E"/>
                 </a:solidFill>
               </a:rPr>
-              <a:t>Plano até a defesa</a:t>
+              <a:t>condicionar arquiteturalmente um classificador racial pelo tom de pele (MST) reduz essa disparidade sem sacrificar acurácia agregada?</a:t>
             </a:r>
           </a:p>
           <a:p>
@@ -6154,14 +7577,6 @@
               </a:rPr>
               <a:t>  </a:t>
             </a:r>
-            <a:r>
-              <a:rPr sz="1600">
-                <a:solidFill>
-                  <a:srgbClr val="3D424E"/>
-                </a:solidFill>
-              </a:rPr>
-              <a:t/>
-            </a:r>
           </a:p>
           <a:p>
             <a:pPr>
@@ -6175,7 +7590,7 @@
                   <a:srgbClr val="1F2A4E"/>
                 </a:solidFill>
               </a:rPr>
-              <a:t>2.  </a:t>
+              <a:t>Objetivo geral:  </a:t>
             </a:r>
             <a:r>
               <a:rPr sz="1600">
@@ -6183,7 +7598,7 @@
                   <a:srgbClr val="3D424E"/>
                 </a:solidFill>
               </a:rPr>
-              <a:t>Estado real da escrita — qualificação no Overleaf, Cap 2 em revisão ativa</a:t>
+              <a:t>desenvolver e avaliar pipeline de classificação racial que incorpora tom de pele (escala Monk 10 classes) como sinal auxiliar condicionante via mecanismo arquitetural (FiLM)</a:t>
             </a:r>
           </a:p>
           <a:p>
@@ -6200,14 +7615,6 @@
               </a:rPr>
               <a:t>  </a:t>
             </a:r>
-            <a:r>
-              <a:rPr sz="1600">
-                <a:solidFill>
-                  <a:srgbClr val="3D424E"/>
-                </a:solidFill>
-              </a:rPr>
-              <a:t/>
-            </a:r>
           </a:p>
           <a:p>
             <a:pPr>
@@ -6221,7 +7628,7 @@
                   <a:srgbClr val="1F2A4E"/>
                 </a:solidFill>
               </a:rPr>
-              <a:t>Já resolvido:  </a:t>
+              <a:t>Contribuição principal:  </a:t>
             </a:r>
             <a:r>
               <a:rPr sz="1600">
@@ -6229,42 +7636,30 @@
                   <a:srgbClr val="3D424E"/>
                 </a:solidFill>
               </a:rPr>
-              <a:t>Declaração de Responsabilidade CEP submetida ontem (12/jul) — Art. 8º da Res. 200/2021</a:t>
-            </a:r>
-          </a:p>
-        </p:txBody>
-      </p:sp>
-      <p:sp>
-        <p:nvSpPr>
-          <p:cNvPr id="5" name="TextBox 4"/>
-          <p:cNvSpPr txBox="1"/>
-          <p:nvPr/>
-        </p:nvSpPr>
-        <p:spPr>
-          <a:xfrm>
-            <a:off x="457200" y="6446520"/>
-            <a:ext cx="11430000" cy="365760"/>
-          </a:xfrm>
-          <a:prstGeom prst="rect">
-            <a:avLst/>
-          </a:prstGeom>
-          <a:noFill/>
-        </p:spPr>
-        <p:txBody>
-          <a:bodyPr wrap="none">
-            <a:spAutoFit/>
-          </a:bodyPr>
-          <a:lstStyle/>
+              <a:t>primeira instância empírica de tom de pele como contexto arquitetural para race classification multi-classe</a:t>
+            </a:r>
+          </a:p>
           <a:p>
             <a:pPr>
-              <a:defRPr sz="1000" i="1">
-                <a:solidFill>
-                  <a:srgbClr val="707682"/>
-                </a:solidFill>
-              </a:defRPr>
+              <a:spcAft>
+                <a:spcPts val="800"/>
+              </a:spcAft>
             </a:pPr>
             <a:r>
-              <a:t>Solicitação pessoal (extensão) e debate técnico fecham a reunião como pontos complementares.</a:t>
+              <a:rPr sz="1600" b="1">
+                <a:solidFill>
+                  <a:srgbClr val="1F2A4E"/>
+                </a:solidFill>
+              </a:rPr>
+              <a:t>Diagnóstico central:  </a:t>
+            </a:r>
+            <a:r>
+              <a:rPr sz="1600">
+                <a:solidFill>
+                  <a:srgbClr val="3D424E"/>
+                </a:solidFill>
+              </a:rPr>
+              <a:t>erro Latinx = componente fenotípico irredutível (overlap MST) + componente algorítmico — a decomposição é o diferencial da tese</a:t>
             </a:r>
           </a:p>
         </p:txBody>
@@ -6277,8 +7672,8 @@
 </p:sld>
 </file>
 
-<file path=ppt/slides/slide3.xml><?xml version="1.0" encoding="utf-8"?>
-<p:sld xmlns:a="http://schemas.openxmlformats.org/drawingml/2006/main" xmlns:p="http://schemas.openxmlformats.org/presentationml/2006/main" xmlns:r="http://schemas.openxmlformats.org/officeDocument/2006/relationships">
+<file path=ppt/slides/slide4.xml><?xml version="1.0" encoding="utf-8"?>
+<p:sld xmlns:a="http://schemas.openxmlformats.org/drawingml/2006/main" xmlns:r="http://schemas.openxmlformats.org/officeDocument/2006/relationships" xmlns:p="http://schemas.openxmlformats.org/presentationml/2006/main">
   <p:cSld>
     <p:spTree>
       <p:nvGrpSpPr>
@@ -6286,7 +7681,14 @@
         <p:cNvGrpSpPr/>
         <p:nvPr/>
       </p:nvGrpSpPr>
-      <p:grpSpPr/>
+      <p:grpSpPr>
+        <a:xfrm>
+          <a:off x="0" y="0"/>
+          <a:ext cx="0" cy="0"/>
+          <a:chOff x="0" y="0"/>
+          <a:chExt cx="0" cy="0"/>
+        </a:xfrm>
+      </p:grpSpPr>
       <p:sp>
         <p:nvSpPr>
           <p:cNvPr id="2" name="TextBox 1"/>
@@ -6317,7 +7719,7 @@
               </a:defRPr>
             </a:pPr>
             <a:r>
-              <a:t>A tese em uma tela</a:t>
+              <a:t>Corpus consolidado — 104 fichas em 11 linhas de pesquisa</a:t>
             </a:r>
           </a:p>
         </p:txBody>
@@ -6362,6 +7764,1214 @@
           <a:lstStyle/>
           <a:p>
             <a:pPr algn="ctr"/>
+            <a:endParaRPr/>
+          </a:p>
+        </p:txBody>
+      </p:sp>
+      <p:graphicFrame>
+        <p:nvGraphicFramePr>
+          <p:cNvPr id="4" name="Table 3"/>
+          <p:cNvGraphicFramePr>
+            <a:graphicFrameLocks noGrp="1"/>
+          </p:cNvGraphicFramePr>
+          <p:nvPr/>
+        </p:nvGraphicFramePr>
+        <p:xfrm>
+          <a:off x="457200" y="1371600"/>
+          <a:ext cx="11430000" cy="4754880"/>
+        </p:xfrm>
+        <a:graphic>
+          <a:graphicData uri="http://schemas.openxmlformats.org/drawingml/2006/table">
+            <a:tbl>
+              <a:tblPr firstRow="1" bandRow="1">
+                <a:tableStyleId>{5C22544A-7EE6-4342-B048-85BDC9FD1C3A}</a:tableStyleId>
+              </a:tblPr>
+              <a:tblGrid>
+                <a:gridCol w="4389120">
+                  <a:extLst>
+                    <a:ext uri="{9D8B030D-6E8A-4147-A177-3AD203B41FA5}">
+                      <a16:colId xmlns:a16="http://schemas.microsoft.com/office/drawing/2014/main" val="20000"/>
+                    </a:ext>
+                  </a:extLst>
+                </a:gridCol>
+                <a:gridCol w="640080">
+                  <a:extLst>
+                    <a:ext uri="{9D8B030D-6E8A-4147-A177-3AD203B41FA5}">
+                      <a16:colId xmlns:a16="http://schemas.microsoft.com/office/drawing/2014/main" val="20001"/>
+                    </a:ext>
+                  </a:extLst>
+                </a:gridCol>
+                <a:gridCol w="1097280">
+                  <a:extLst>
+                    <a:ext uri="{9D8B030D-6E8A-4147-A177-3AD203B41FA5}">
+                      <a16:colId xmlns:a16="http://schemas.microsoft.com/office/drawing/2014/main" val="20002"/>
+                    </a:ext>
+                  </a:extLst>
+                </a:gridCol>
+                <a:gridCol w="5303520">
+                  <a:extLst>
+                    <a:ext uri="{9D8B030D-6E8A-4147-A177-3AD203B41FA5}">
+                      <a16:colId xmlns:a16="http://schemas.microsoft.com/office/drawing/2014/main" val="20003"/>
+                    </a:ext>
+                  </a:extLst>
+                </a:gridCol>
+              </a:tblGrid>
+              <a:tr h="365760">
+                <a:tc>
+                  <a:txBody>
+                    <a:bodyPr/>
+                    <a:lstStyle/>
+                    <a:p>
+                      <a:r>
+                        <a:rPr sz="1300" b="1">
+                          <a:solidFill>
+                            <a:srgbClr val="FFFFFF"/>
+                          </a:solidFill>
+                        </a:rPr>
+                        <a:t>Linha de pesquisa</a:t>
+                      </a:r>
+                    </a:p>
+                  </a:txBody>
+                  <a:tcPr>
+                    <a:solidFill>
+                      <a:srgbClr val="1F2A4E"/>
+                    </a:solidFill>
+                  </a:tcPr>
+                </a:tc>
+                <a:tc>
+                  <a:txBody>
+                    <a:bodyPr/>
+                    <a:lstStyle/>
+                    <a:p>
+                      <a:r>
+                        <a:rPr sz="1300" b="1">
+                          <a:solidFill>
+                            <a:srgbClr val="FFFFFF"/>
+                          </a:solidFill>
+                        </a:rPr>
+                        <a:t>N</a:t>
+                      </a:r>
+                    </a:p>
+                  </a:txBody>
+                  <a:tcPr>
+                    <a:solidFill>
+                      <a:srgbClr val="1F2A4E"/>
+                    </a:solidFill>
+                  </a:tcPr>
+                </a:tc>
+                <a:tc>
+                  <a:txBody>
+                    <a:bodyPr/>
+                    <a:lstStyle/>
+                    <a:p>
+                      <a:r>
+                        <a:rPr sz="1300" b="1">
+                          <a:solidFill>
+                            <a:srgbClr val="FFFFFF"/>
+                          </a:solidFill>
+                        </a:rPr>
+                        <a:t>% corpus</a:t>
+                      </a:r>
+                    </a:p>
+                  </a:txBody>
+                  <a:tcPr>
+                    <a:solidFill>
+                      <a:srgbClr val="1F2A4E"/>
+                    </a:solidFill>
+                  </a:tcPr>
+                </a:tc>
+                <a:tc>
+                  <a:txBody>
+                    <a:bodyPr/>
+                    <a:lstStyle/>
+                    <a:p>
+                      <a:r>
+                        <a:rPr sz="1300" b="1">
+                          <a:solidFill>
+                            <a:srgbClr val="FFFFFF"/>
+                          </a:solidFill>
+                        </a:rPr>
+                        <a:t>Papers-âncora</a:t>
+                      </a:r>
+                    </a:p>
+                  </a:txBody>
+                  <a:tcPr>
+                    <a:solidFill>
+                      <a:srgbClr val="1F2A4E"/>
+                    </a:solidFill>
+                  </a:tcPr>
+                </a:tc>
+                <a:extLst>
+                  <a:ext uri="{0D108BD9-81ED-4DB2-BD59-A6C34878D82A}">
+                    <a16:rowId xmlns:a16="http://schemas.microsoft.com/office/drawing/2014/main" val="10000"/>
+                  </a:ext>
+                </a:extLst>
+              </a:tr>
+              <a:tr h="365760">
+                <a:tc>
+                  <a:txBody>
+                    <a:bodyPr/>
+                    <a:lstStyle/>
+                    <a:p>
+                      <a:r>
+                        <a:rPr sz="1100">
+                          <a:solidFill>
+                            <a:srgbClr val="3D424E"/>
+                          </a:solidFill>
+                        </a:rPr>
+                        <a:t>A — Race classification multi-classe</a:t>
+                      </a:r>
+                    </a:p>
+                  </a:txBody>
+                  <a:tcPr/>
+                </a:tc>
+                <a:tc>
+                  <a:txBody>
+                    <a:bodyPr/>
+                    <a:lstStyle/>
+                    <a:p>
+                      <a:r>
+                        <a:rPr sz="1100">
+                          <a:solidFill>
+                            <a:srgbClr val="3D424E"/>
+                          </a:solidFill>
+                        </a:rPr>
+                        <a:t>4</a:t>
+                      </a:r>
+                    </a:p>
+                  </a:txBody>
+                  <a:tcPr/>
+                </a:tc>
+                <a:tc>
+                  <a:txBody>
+                    <a:bodyPr/>
+                    <a:lstStyle/>
+                    <a:p>
+                      <a:r>
+                        <a:rPr sz="1100">
+                          <a:solidFill>
+                            <a:srgbClr val="3D424E"/>
+                          </a:solidFill>
+                        </a:rPr>
+                        <a:t>3,8 %</a:t>
+                      </a:r>
+                    </a:p>
+                  </a:txBody>
+                  <a:tcPr/>
+                </a:tc>
+                <a:tc>
+                  <a:txBody>
+                    <a:bodyPr/>
+                    <a:lstStyle/>
+                    <a:p>
+                      <a:r>
+                        <a:rPr sz="1100">
+                          <a:solidFill>
+                            <a:srgbClr val="3D424E"/>
+                          </a:solidFill>
+                        </a:rPr>
+                        <a:t>Kärkkäinen 2021 (FairFace), AlDahoul 2024</a:t>
+                      </a:r>
+                    </a:p>
+                  </a:txBody>
+                  <a:tcPr/>
+                </a:tc>
+                <a:extLst>
+                  <a:ext uri="{0D108BD9-81ED-4DB2-BD59-A6C34878D82A}">
+                    <a16:rowId xmlns:a16="http://schemas.microsoft.com/office/drawing/2014/main" val="10001"/>
+                  </a:ext>
+                </a:extLst>
+              </a:tr>
+              <a:tr h="365760">
+                <a:tc>
+                  <a:txBody>
+                    <a:bodyPr/>
+                    <a:lstStyle/>
+                    <a:p>
+                      <a:r>
+                        <a:rPr sz="1100">
+                          <a:solidFill>
+                            <a:srgbClr val="3D424E"/>
+                          </a:solidFill>
+                        </a:rPr>
+                        <a:t>B — Face recognition fairness</a:t>
+                      </a:r>
+                    </a:p>
+                  </a:txBody>
+                  <a:tcPr/>
+                </a:tc>
+                <a:tc>
+                  <a:txBody>
+                    <a:bodyPr/>
+                    <a:lstStyle/>
+                    <a:p>
+                      <a:r>
+                        <a:rPr sz="1100">
+                          <a:solidFill>
+                            <a:srgbClr val="3D424E"/>
+                          </a:solidFill>
+                        </a:rPr>
+                        <a:t>16</a:t>
+                      </a:r>
+                    </a:p>
+                  </a:txBody>
+                  <a:tcPr/>
+                </a:tc>
+                <a:tc>
+                  <a:txBody>
+                    <a:bodyPr/>
+                    <a:lstStyle/>
+                    <a:p>
+                      <a:r>
+                        <a:rPr sz="1100">
+                          <a:solidFill>
+                            <a:srgbClr val="3D424E"/>
+                          </a:solidFill>
+                        </a:rPr>
+                        <a:t>15,4 %</a:t>
+                      </a:r>
+                    </a:p>
+                  </a:txBody>
+                  <a:tcPr/>
+                </a:tc>
+                <a:tc>
+                  <a:txBody>
+                    <a:bodyPr/>
+                    <a:lstStyle/>
+                    <a:p>
+                      <a:r>
+                        <a:rPr sz="1100">
+                          <a:solidFill>
+                            <a:srgbClr val="3D424E"/>
+                          </a:solidFill>
+                        </a:rPr>
+                        <a:t>Wang RFW 2019, Robinson BFW 2020, Deng ArcFace</a:t>
+                      </a:r>
+                    </a:p>
+                  </a:txBody>
+                  <a:tcPr/>
+                </a:tc>
+                <a:extLst>
+                  <a:ext uri="{0D108BD9-81ED-4DB2-BD59-A6C34878D82A}">
+                    <a16:rowId xmlns:a16="http://schemas.microsoft.com/office/drawing/2014/main" val="10002"/>
+                  </a:ext>
+                </a:extLst>
+              </a:tr>
+              <a:tr h="365760">
+                <a:tc>
+                  <a:txBody>
+                    <a:bodyPr/>
+                    <a:lstStyle/>
+                    <a:p>
+                      <a:r>
+                        <a:rPr sz="1100">
+                          <a:solidFill>
+                            <a:srgbClr val="3D424E"/>
+                          </a:solidFill>
+                        </a:rPr>
+                        <a:t>C — Skin tone alternativo (Fitzpatrick, MST, ITA)</a:t>
+                      </a:r>
+                    </a:p>
+                  </a:txBody>
+                  <a:tcPr/>
+                </a:tc>
+                <a:tc>
+                  <a:txBody>
+                    <a:bodyPr/>
+                    <a:lstStyle/>
+                    <a:p>
+                      <a:r>
+                        <a:rPr sz="1100">
+                          <a:solidFill>
+                            <a:srgbClr val="3D424E"/>
+                          </a:solidFill>
+                        </a:rPr>
+                        <a:t>7</a:t>
+                      </a:r>
+                    </a:p>
+                  </a:txBody>
+                  <a:tcPr/>
+                </a:tc>
+                <a:tc>
+                  <a:txBody>
+                    <a:bodyPr/>
+                    <a:lstStyle/>
+                    <a:p>
+                      <a:r>
+                        <a:rPr sz="1100">
+                          <a:solidFill>
+                            <a:srgbClr val="3D424E"/>
+                          </a:solidFill>
+                        </a:rPr>
+                        <a:t>6,7 %</a:t>
+                      </a:r>
+                    </a:p>
+                  </a:txBody>
+                  <a:tcPr/>
+                </a:tc>
+                <a:tc>
+                  <a:txBody>
+                    <a:bodyPr/>
+                    <a:lstStyle/>
+                    <a:p>
+                      <a:r>
+                        <a:rPr sz="1100">
+                          <a:solidFill>
+                            <a:srgbClr val="3D424E"/>
+                          </a:solidFill>
+                        </a:rPr>
+                        <a:t>Schumann 2023 (MST), Pereira 2026 (SkinToneNet)</a:t>
+                      </a:r>
+                    </a:p>
+                  </a:txBody>
+                  <a:tcPr/>
+                </a:tc>
+                <a:extLst>
+                  <a:ext uri="{0D108BD9-81ED-4DB2-BD59-A6C34878D82A}">
+                    <a16:rowId xmlns:a16="http://schemas.microsoft.com/office/drawing/2014/main" val="10003"/>
+                  </a:ext>
+                </a:extLst>
+              </a:tr>
+              <a:tr h="365760">
+                <a:tc>
+                  <a:txBody>
+                    <a:bodyPr/>
+                    <a:lstStyle/>
+                    <a:p>
+                      <a:r>
+                        <a:rPr sz="1100">
+                          <a:solidFill>
+                            <a:srgbClr val="3D424E"/>
+                          </a:solidFill>
+                        </a:rPr>
+                        <a:t>D — Mitigação algorítmica</a:t>
+                      </a:r>
+                    </a:p>
+                  </a:txBody>
+                  <a:tcPr/>
+                </a:tc>
+                <a:tc>
+                  <a:txBody>
+                    <a:bodyPr/>
+                    <a:lstStyle/>
+                    <a:p>
+                      <a:r>
+                        <a:rPr sz="1100">
+                          <a:solidFill>
+                            <a:srgbClr val="3D424E"/>
+                          </a:solidFill>
+                        </a:rPr>
+                        <a:t>10</a:t>
+                      </a:r>
+                    </a:p>
+                  </a:txBody>
+                  <a:tcPr/>
+                </a:tc>
+                <a:tc>
+                  <a:txBody>
+                    <a:bodyPr/>
+                    <a:lstStyle/>
+                    <a:p>
+                      <a:r>
+                        <a:rPr sz="1100">
+                          <a:solidFill>
+                            <a:srgbClr val="3D424E"/>
+                          </a:solidFill>
+                        </a:rPr>
+                        <a:t>9,6 %</a:t>
+                      </a:r>
+                    </a:p>
+                  </a:txBody>
+                  <a:tcPr/>
+                </a:tc>
+                <a:tc>
+                  <a:txBody>
+                    <a:bodyPr/>
+                    <a:lstStyle/>
+                    <a:p>
+                      <a:r>
+                        <a:rPr sz="1100">
+                          <a:solidFill>
+                            <a:srgbClr val="3D424E"/>
+                          </a:solidFill>
+                        </a:rPr>
+                        <a:t>Madras LAFTR 2018, Sagawa Group DRO 2020</a:t>
+                      </a:r>
+                    </a:p>
+                  </a:txBody>
+                  <a:tcPr/>
+                </a:tc>
+                <a:extLst>
+                  <a:ext uri="{0D108BD9-81ED-4DB2-BD59-A6C34878D82A}">
+                    <a16:rowId xmlns:a16="http://schemas.microsoft.com/office/drawing/2014/main" val="10004"/>
+                  </a:ext>
+                </a:extLst>
+              </a:tr>
+              <a:tr h="365760">
+                <a:tc>
+                  <a:txBody>
+                    <a:bodyPr/>
+                    <a:lstStyle/>
+                    <a:p>
+                      <a:r>
+                        <a:rPr sz="1100">
+                          <a:solidFill>
+                            <a:srgbClr val="3D424E"/>
+                          </a:solidFill>
+                        </a:rPr>
+                        <a:t>E — Auditoria e Surveys</a:t>
+                      </a:r>
+                    </a:p>
+                  </a:txBody>
+                  <a:tcPr/>
+                </a:tc>
+                <a:tc>
+                  <a:txBody>
+                    <a:bodyPr/>
+                    <a:lstStyle/>
+                    <a:p>
+                      <a:r>
+                        <a:rPr sz="1100">
+                          <a:solidFill>
+                            <a:srgbClr val="3D424E"/>
+                          </a:solidFill>
+                        </a:rPr>
+                        <a:t>14</a:t>
+                      </a:r>
+                    </a:p>
+                  </a:txBody>
+                  <a:tcPr/>
+                </a:tc>
+                <a:tc>
+                  <a:txBody>
+                    <a:bodyPr/>
+                    <a:lstStyle/>
+                    <a:p>
+                      <a:r>
+                        <a:rPr sz="1100">
+                          <a:solidFill>
+                            <a:srgbClr val="3D424E"/>
+                          </a:solidFill>
+                        </a:rPr>
+                        <a:t>13,5 %</a:t>
+                      </a:r>
+                    </a:p>
+                  </a:txBody>
+                  <a:tcPr/>
+                </a:tc>
+                <a:tc>
+                  <a:txBody>
+                    <a:bodyPr/>
+                    <a:lstStyle/>
+                    <a:p>
+                      <a:r>
+                        <a:rPr sz="1100">
+                          <a:solidFill>
+                            <a:srgbClr val="3D424E"/>
+                          </a:solidFill>
+                        </a:rPr>
+                        <a:t>Buolamwini 2018, Mehrabi 2021 survey</a:t>
+                      </a:r>
+                    </a:p>
+                  </a:txBody>
+                  <a:tcPr/>
+                </a:tc>
+                <a:extLst>
+                  <a:ext uri="{0D108BD9-81ED-4DB2-BD59-A6C34878D82A}">
+                    <a16:rowId xmlns:a16="http://schemas.microsoft.com/office/drawing/2014/main" val="10005"/>
+                  </a:ext>
+                </a:extLst>
+              </a:tr>
+              <a:tr h="365760">
+                <a:tc>
+                  <a:txBody>
+                    <a:bodyPr/>
+                    <a:lstStyle/>
+                    <a:p>
+                      <a:r>
+                        <a:rPr sz="1100">
+                          <a:solidFill>
+                            <a:srgbClr val="3D424E"/>
+                          </a:solidFill>
+                        </a:rPr>
+                        <a:t>F — Fundamentação científica e ética</a:t>
+                      </a:r>
+                    </a:p>
+                  </a:txBody>
+                  <a:tcPr/>
+                </a:tc>
+                <a:tc>
+                  <a:txBody>
+                    <a:bodyPr/>
+                    <a:lstStyle/>
+                    <a:p>
+                      <a:r>
+                        <a:rPr sz="1100">
+                          <a:solidFill>
+                            <a:srgbClr val="3D424E"/>
+                          </a:solidFill>
+                        </a:rPr>
+                        <a:t>3</a:t>
+                      </a:r>
+                    </a:p>
+                  </a:txBody>
+                  <a:tcPr/>
+                </a:tc>
+                <a:tc>
+                  <a:txBody>
+                    <a:bodyPr/>
+                    <a:lstStyle/>
+                    <a:p>
+                      <a:r>
+                        <a:rPr sz="1100">
+                          <a:solidFill>
+                            <a:srgbClr val="3D424E"/>
+                          </a:solidFill>
+                        </a:rPr>
+                        <a:t>2,9 %</a:t>
+                      </a:r>
+                    </a:p>
+                  </a:txBody>
+                  <a:tcPr/>
+                </a:tc>
+                <a:tc>
+                  <a:txBody>
+                    <a:bodyPr/>
+                    <a:lstStyle/>
+                    <a:p>
+                      <a:r>
+                        <a:rPr sz="1100">
+                          <a:solidFill>
+                            <a:srgbClr val="3D424E"/>
+                          </a:solidFill>
+                        </a:rPr>
+                        <a:t>Fuentes AAPA 2019, Lewontin 1972</a:t>
+                      </a:r>
+                    </a:p>
+                  </a:txBody>
+                  <a:tcPr/>
+                </a:tc>
+                <a:extLst>
+                  <a:ext uri="{0D108BD9-81ED-4DB2-BD59-A6C34878D82A}">
+                    <a16:rowId xmlns:a16="http://schemas.microsoft.com/office/drawing/2014/main" val="10006"/>
+                  </a:ext>
+                </a:extLst>
+              </a:tr>
+              <a:tr h="365760">
+                <a:tc>
+                  <a:txBody>
+                    <a:bodyPr/>
+                    <a:lstStyle/>
+                    <a:p>
+                      <a:r>
+                        <a:rPr sz="1100">
+                          <a:solidFill>
+                            <a:srgbClr val="3D424E"/>
+                          </a:solidFill>
+                        </a:rPr>
+                        <a:t>G — Mecanismos ML paradigmáticos</a:t>
+                      </a:r>
+                    </a:p>
+                  </a:txBody>
+                  <a:tcPr/>
+                </a:tc>
+                <a:tc>
+                  <a:txBody>
+                    <a:bodyPr/>
+                    <a:lstStyle/>
+                    <a:p>
+                      <a:r>
+                        <a:rPr sz="1100">
+                          <a:solidFill>
+                            <a:srgbClr val="3D424E"/>
+                          </a:solidFill>
+                        </a:rPr>
+                        <a:t>9</a:t>
+                      </a:r>
+                    </a:p>
+                  </a:txBody>
+                  <a:tcPr/>
+                </a:tc>
+                <a:tc>
+                  <a:txBody>
+                    <a:bodyPr/>
+                    <a:lstStyle/>
+                    <a:p>
+                      <a:r>
+                        <a:rPr sz="1100">
+                          <a:solidFill>
+                            <a:srgbClr val="3D424E"/>
+                          </a:solidFill>
+                        </a:rPr>
+                        <a:t>8,7 %</a:t>
+                      </a:r>
+                    </a:p>
+                  </a:txBody>
+                  <a:tcPr/>
+                </a:tc>
+                <a:tc>
+                  <a:txBody>
+                    <a:bodyPr/>
+                    <a:lstStyle/>
+                    <a:p>
+                      <a:r>
+                        <a:rPr sz="1100">
+                          <a:solidFill>
+                            <a:srgbClr val="3D424E"/>
+                          </a:solidFill>
+                        </a:rPr>
+                        <a:t>Perez FiLM 2018, Ba LayerNorm, He ResNet</a:t>
+                      </a:r>
+                    </a:p>
+                  </a:txBody>
+                  <a:tcPr/>
+                </a:tc>
+                <a:extLst>
+                  <a:ext uri="{0D108BD9-81ED-4DB2-BD59-A6C34878D82A}">
+                    <a16:rowId xmlns:a16="http://schemas.microsoft.com/office/drawing/2014/main" val="10007"/>
+                  </a:ext>
+                </a:extLst>
+              </a:tr>
+              <a:tr h="365760">
+                <a:tc>
+                  <a:txBody>
+                    <a:bodyPr/>
+                    <a:lstStyle/>
+                    <a:p>
+                      <a:r>
+                        <a:rPr sz="1100">
+                          <a:solidFill>
+                            <a:srgbClr val="3D424E"/>
+                          </a:solidFill>
+                        </a:rPr>
+                        <a:t>I — VLM / CLIP em fairness</a:t>
+                      </a:r>
+                    </a:p>
+                  </a:txBody>
+                  <a:tcPr/>
+                </a:tc>
+                <a:tc>
+                  <a:txBody>
+                    <a:bodyPr/>
+                    <a:lstStyle/>
+                    <a:p>
+                      <a:r>
+                        <a:rPr sz="1100">
+                          <a:solidFill>
+                            <a:srgbClr val="3D424E"/>
+                          </a:solidFill>
+                        </a:rPr>
+                        <a:t>14</a:t>
+                      </a:r>
+                    </a:p>
+                  </a:txBody>
+                  <a:tcPr/>
+                </a:tc>
+                <a:tc>
+                  <a:txBody>
+                    <a:bodyPr/>
+                    <a:lstStyle/>
+                    <a:p>
+                      <a:r>
+                        <a:rPr sz="1100">
+                          <a:solidFill>
+                            <a:srgbClr val="3D424E"/>
+                          </a:solidFill>
+                        </a:rPr>
+                        <a:t>13,5 %</a:t>
+                      </a:r>
+                    </a:p>
+                  </a:txBody>
+                  <a:tcPr/>
+                </a:tc>
+                <a:tc>
+                  <a:txBody>
+                    <a:bodyPr/>
+                    <a:lstStyle/>
+                    <a:p>
+                      <a:r>
+                        <a:rPr sz="1100">
+                          <a:solidFill>
+                            <a:srgbClr val="3D424E"/>
+                          </a:solidFill>
+                        </a:rPr>
+                        <a:t>Radford CLIP 2021, Luo FairCLIP 2024</a:t>
+                      </a:r>
+                    </a:p>
+                  </a:txBody>
+                  <a:tcPr/>
+                </a:tc>
+                <a:extLst>
+                  <a:ext uri="{0D108BD9-81ED-4DB2-BD59-A6C34878D82A}">
+                    <a16:rowId xmlns:a16="http://schemas.microsoft.com/office/drawing/2014/main" val="10008"/>
+                  </a:ext>
+                </a:extLst>
+              </a:tr>
+              <a:tr h="365760">
+                <a:tc>
+                  <a:txBody>
+                    <a:bodyPr/>
+                    <a:lstStyle/>
+                    <a:p>
+                      <a:r>
+                        <a:rPr sz="1100">
+                          <a:solidFill>
+                            <a:srgbClr val="3D424E"/>
+                          </a:solidFill>
+                        </a:rPr>
+                        <a:t>J — Conditioning moderno</a:t>
+                      </a:r>
+                    </a:p>
+                  </a:txBody>
+                  <a:tcPr/>
+                </a:tc>
+                <a:tc>
+                  <a:txBody>
+                    <a:bodyPr/>
+                    <a:lstStyle/>
+                    <a:p>
+                      <a:r>
+                        <a:rPr sz="1100">
+                          <a:solidFill>
+                            <a:srgbClr val="3D424E"/>
+                          </a:solidFill>
+                        </a:rPr>
+                        <a:t>5</a:t>
+                      </a:r>
+                    </a:p>
+                  </a:txBody>
+                  <a:tcPr/>
+                </a:tc>
+                <a:tc>
+                  <a:txBody>
+                    <a:bodyPr/>
+                    <a:lstStyle/>
+                    <a:p>
+                      <a:r>
+                        <a:rPr sz="1100">
+                          <a:solidFill>
+                            <a:srgbClr val="3D424E"/>
+                          </a:solidFill>
+                        </a:rPr>
+                        <a:t>4,8 %</a:t>
+                      </a:r>
+                    </a:p>
+                  </a:txBody>
+                  <a:tcPr/>
+                </a:tc>
+                <a:tc>
+                  <a:txBody>
+                    <a:bodyPr/>
+                    <a:lstStyle/>
+                    <a:p>
+                      <a:r>
+                        <a:rPr sz="1100">
+                          <a:solidFill>
+                            <a:srgbClr val="3D424E"/>
+                          </a:solidFill>
+                        </a:rPr>
+                        <a:t>Liu ConvNeXt 2022, Dhariwal ADM 2021</a:t>
+                      </a:r>
+                    </a:p>
+                  </a:txBody>
+                  <a:tcPr/>
+                </a:tc>
+                <a:extLst>
+                  <a:ext uri="{0D108BD9-81ED-4DB2-BD59-A6C34878D82A}">
+                    <a16:rowId xmlns:a16="http://schemas.microsoft.com/office/drawing/2014/main" val="10009"/>
+                  </a:ext>
+                </a:extLst>
+              </a:tr>
+              <a:tr h="365760">
+                <a:tc>
+                  <a:txBody>
+                    <a:bodyPr/>
+                    <a:lstStyle/>
+                    <a:p>
+                      <a:r>
+                        <a:rPr sz="1100">
+                          <a:solidFill>
+                            <a:srgbClr val="3D424E"/>
+                          </a:solidFill>
+                        </a:rPr>
+                        <a:t>K — Fundadores de FR (DeepFace, ArcFace, CosFace)</a:t>
+                      </a:r>
+                    </a:p>
+                  </a:txBody>
+                  <a:tcPr/>
+                </a:tc>
+                <a:tc>
+                  <a:txBody>
+                    <a:bodyPr/>
+                    <a:lstStyle/>
+                    <a:p>
+                      <a:r>
+                        <a:rPr sz="1100">
+                          <a:solidFill>
+                            <a:srgbClr val="3D424E"/>
+                          </a:solidFill>
+                        </a:rPr>
+                        <a:t>6</a:t>
+                      </a:r>
+                    </a:p>
+                  </a:txBody>
+                  <a:tcPr/>
+                </a:tc>
+                <a:tc>
+                  <a:txBody>
+                    <a:bodyPr/>
+                    <a:lstStyle/>
+                    <a:p>
+                      <a:r>
+                        <a:rPr sz="1100">
+                          <a:solidFill>
+                            <a:srgbClr val="3D424E"/>
+                          </a:solidFill>
+                        </a:rPr>
+                        <a:t>5,8 %</a:t>
+                      </a:r>
+                    </a:p>
+                  </a:txBody>
+                  <a:tcPr/>
+                </a:tc>
+                <a:tc>
+                  <a:txBody>
+                    <a:bodyPr/>
+                    <a:lstStyle/>
+                    <a:p>
+                      <a:r>
+                        <a:rPr sz="1100">
+                          <a:solidFill>
+                            <a:srgbClr val="3D424E"/>
+                          </a:solidFill>
+                        </a:rPr>
+                        <a:t>Taigman DeepFace 2014, Wang CosFace 2018</a:t>
+                      </a:r>
+                    </a:p>
+                  </a:txBody>
+                  <a:tcPr/>
+                </a:tc>
+                <a:extLst>
+                  <a:ext uri="{0D108BD9-81ED-4DB2-BD59-A6C34878D82A}">
+                    <a16:rowId xmlns:a16="http://schemas.microsoft.com/office/drawing/2014/main" val="10010"/>
+                  </a:ext>
+                </a:extLst>
+              </a:tr>
+              <a:tr h="365760">
+                <a:tc>
+                  <a:txBody>
+                    <a:bodyPr/>
+                    <a:lstStyle/>
+                    <a:p>
+                      <a:r>
+                        <a:rPr sz="1100">
+                          <a:solidFill>
+                            <a:srgbClr val="3D424E"/>
+                          </a:solidFill>
+                        </a:rPr>
+                        <a:t>L — Auxiliar / complementar</a:t>
+                      </a:r>
+                    </a:p>
+                  </a:txBody>
+                  <a:tcPr/>
+                </a:tc>
+                <a:tc>
+                  <a:txBody>
+                    <a:bodyPr/>
+                    <a:lstStyle/>
+                    <a:p>
+                      <a:r>
+                        <a:rPr sz="1100">
+                          <a:solidFill>
+                            <a:srgbClr val="3D424E"/>
+                          </a:solidFill>
+                        </a:rPr>
+                        <a:t>13</a:t>
+                      </a:r>
+                    </a:p>
+                  </a:txBody>
+                  <a:tcPr/>
+                </a:tc>
+                <a:tc>
+                  <a:txBody>
+                    <a:bodyPr/>
+                    <a:lstStyle/>
+                    <a:p>
+                      <a:r>
+                        <a:rPr sz="1100">
+                          <a:solidFill>
+                            <a:srgbClr val="3D424E"/>
+                          </a:solidFill>
+                        </a:rPr>
+                        <a:t>12,5 %</a:t>
+                      </a:r>
+                    </a:p>
+                  </a:txBody>
+                  <a:tcPr/>
+                </a:tc>
+                <a:tc>
+                  <a:txBody>
+                    <a:bodyPr/>
+                    <a:lstStyle/>
+                    <a:p>
+                      <a:r>
+                        <a:rPr sz="1100">
+                          <a:solidFill>
+                            <a:srgbClr val="3D424E"/>
+                          </a:solidFill>
+                        </a:rPr>
+                        <a:t>Karkkainen datasets, Hendrycks robustness</a:t>
+                      </a:r>
+                    </a:p>
+                  </a:txBody>
+                  <a:tcPr/>
+                </a:tc>
+                <a:extLst>
+                  <a:ext uri="{0D108BD9-81ED-4DB2-BD59-A6C34878D82A}">
+                    <a16:rowId xmlns:a16="http://schemas.microsoft.com/office/drawing/2014/main" val="10011"/>
+                  </a:ext>
+                </a:extLst>
+              </a:tr>
+              <a:tr h="365760">
+                <a:tc>
+                  <a:txBody>
+                    <a:bodyPr/>
+                    <a:lstStyle/>
+                    <a:p>
+                      <a:r>
+                        <a:rPr sz="1100">
+                          <a:solidFill>
+                            <a:srgbClr val="3D424E"/>
+                          </a:solidFill>
+                        </a:rPr>
+                        <a:t>R8 — Diversidade Latinx (antropo + genética + socio)</a:t>
+                      </a:r>
+                    </a:p>
+                  </a:txBody>
+                  <a:tcPr/>
+                </a:tc>
+                <a:tc>
+                  <a:txBody>
+                    <a:bodyPr/>
+                    <a:lstStyle/>
+                    <a:p>
+                      <a:r>
+                        <a:rPr sz="1100">
+                          <a:solidFill>
+                            <a:srgbClr val="3D424E"/>
+                          </a:solidFill>
+                        </a:rPr>
+                        <a:t>3</a:t>
+                      </a:r>
+                    </a:p>
+                  </a:txBody>
+                  <a:tcPr/>
+                </a:tc>
+                <a:tc>
+                  <a:txBody>
+                    <a:bodyPr/>
+                    <a:lstStyle/>
+                    <a:p>
+                      <a:r>
+                        <a:rPr sz="1100">
+                          <a:solidFill>
+                            <a:srgbClr val="3D424E"/>
+                          </a:solidFill>
+                        </a:rPr>
+                        <a:t>2,9 %</a:t>
+                      </a:r>
+                    </a:p>
+                  </a:txBody>
+                  <a:tcPr/>
+                </a:tc>
+                <a:tc>
+                  <a:txBody>
+                    <a:bodyPr/>
+                    <a:lstStyle/>
+                    <a:p>
+                      <a:r>
+                        <a:rPr sz="1100">
+                          <a:solidFill>
+                            <a:srgbClr val="3D424E"/>
+                          </a:solidFill>
+                        </a:rPr>
+                        <a:t>Telles 2014, Bryc 2015, Pew 2017</a:t>
+                      </a:r>
+                    </a:p>
+                  </a:txBody>
+                  <a:tcPr/>
+                </a:tc>
+                <a:extLst>
+                  <a:ext uri="{0D108BD9-81ED-4DB2-BD59-A6C34878D82A}">
+                    <a16:rowId xmlns:a16="http://schemas.microsoft.com/office/drawing/2014/main" val="10012"/>
+                  </a:ext>
+                </a:extLst>
+              </a:tr>
+            </a:tbl>
+          </a:graphicData>
+        </a:graphic>
+      </p:graphicFrame>
+      <p:sp>
+        <p:nvSpPr>
+          <p:cNvPr id="5" name="TextBox 4"/>
+          <p:cNvSpPr txBox="1"/>
+          <p:nvPr/>
+        </p:nvSpPr>
+        <p:spPr>
+          <a:xfrm>
+            <a:off x="457200" y="6446520"/>
+            <a:ext cx="3020379" cy="246221"/>
+          </a:xfrm>
+          <a:prstGeom prst="rect">
+            <a:avLst/>
+          </a:prstGeom>
+          <a:noFill/>
+        </p:spPr>
+        <p:txBody>
+          <a:bodyPr wrap="none">
+            <a:spAutoFit/>
+          </a:bodyPr>
+          <a:lstStyle/>
+          <a:p>
+            <a:pPr>
+              <a:defRPr sz="1000" i="1">
+                <a:solidFill>
+                  <a:srgbClr val="707682"/>
+                </a:solidFill>
+              </a:defRPr>
+            </a:pPr>
+            <a:r>
+              <a:rPr dirty="0"/>
+              <a:t>55 </a:t>
+            </a:r>
+            <a:r>
+              <a:rPr dirty="0" err="1"/>
+              <a:t>fichas</a:t>
+            </a:r>
+            <a:r>
+              <a:rPr dirty="0"/>
+              <a:t> (53%) </a:t>
+            </a:r>
+            <a:r>
+              <a:rPr dirty="0" err="1"/>
+              <a:t>são</a:t>
+            </a:r>
+            <a:r>
+              <a:rPr dirty="0"/>
+              <a:t> 2024+, </a:t>
+            </a:r>
+            <a:r>
+              <a:rPr dirty="0" err="1"/>
+              <a:t>incluindo</a:t>
+            </a:r>
+            <a:r>
+              <a:rPr dirty="0"/>
+              <a:t> 5 papers de 2026</a:t>
+            </a:r>
+          </a:p>
+        </p:txBody>
+      </p:sp>
+    </p:spTree>
+  </p:cSld>
+  <p:clrMapOvr>
+    <a:masterClrMapping/>
+  </p:clrMapOvr>
+</p:sld>
+</file>
+
+<file path=ppt/slides/slide5.xml><?xml version="1.0" encoding="utf-8"?>
+<p:sld xmlns:a="http://schemas.openxmlformats.org/drawingml/2006/main" xmlns:r="http://schemas.openxmlformats.org/officeDocument/2006/relationships" xmlns:p="http://schemas.openxmlformats.org/presentationml/2006/main">
+  <p:cSld>
+    <p:spTree>
+      <p:nvGrpSpPr>
+        <p:cNvPr id="1" name=""/>
+        <p:cNvGrpSpPr/>
+        <p:nvPr/>
+      </p:nvGrpSpPr>
+      <p:grpSpPr>
+        <a:xfrm>
+          <a:off x="0" y="0"/>
+          <a:ext cx="0" cy="0"/>
+          <a:chOff x="0" y="0"/>
+          <a:chExt cx="0" cy="0"/>
+        </a:xfrm>
+      </p:grpSpPr>
+      <p:sp>
+        <p:nvSpPr>
+          <p:cNvPr id="2" name="Rectangle 1"/>
+          <p:cNvSpPr/>
+          <p:nvPr/>
+        </p:nvSpPr>
+        <p:spPr>
+          <a:xfrm>
+            <a:off x="0" y="0"/>
+            <a:ext cx="12188952" cy="6858000"/>
+          </a:xfrm>
+          <a:prstGeom prst="rect">
+            <a:avLst/>
+          </a:prstGeom>
+          <a:solidFill>
+            <a:srgbClr val="1F2A4E"/>
+          </a:solidFill>
+          <a:ln>
+            <a:noFill/>
+          </a:ln>
+        </p:spPr>
+        <p:style>
+          <a:lnRef idx="1">
+            <a:schemeClr val="accent1"/>
+          </a:lnRef>
+          <a:fillRef idx="3">
+            <a:schemeClr val="accent1"/>
+          </a:fillRef>
+          <a:effectRef idx="2">
+            <a:schemeClr val="accent1"/>
+          </a:effectRef>
+          <a:fontRef idx="minor">
+            <a:schemeClr val="lt1"/>
+          </a:fontRef>
+        </p:style>
+        <p:txBody>
+          <a:bodyPr rtlCol="0" anchor="ctr"/>
+          <a:lstStyle/>
+          <a:p>
+            <a:pPr algn="ctr"/>
+            <a:endParaRPr/>
+          </a:p>
+        </p:txBody>
+      </p:sp>
+      <p:sp>
+        <p:nvSpPr>
+          <p:cNvPr id="3" name="TextBox 2"/>
+          <p:cNvSpPr txBox="1"/>
+          <p:nvPr/>
+        </p:nvSpPr>
+        <p:spPr>
+          <a:xfrm>
+            <a:off x="731520" y="1371600"/>
+            <a:ext cx="2743200" cy="2743200"/>
+          </a:xfrm>
+          <a:prstGeom prst="rect">
+            <a:avLst/>
+          </a:prstGeom>
+          <a:noFill/>
+        </p:spPr>
+        <p:txBody>
+          <a:bodyPr wrap="none">
+            <a:spAutoFit/>
+          </a:bodyPr>
+          <a:lstStyle/>
+          <a:p>
+            <a:pPr>
+              <a:defRPr sz="14000" b="1">
+                <a:solidFill>
+                  <a:srgbClr val="FFFFFF"/>
+                </a:solidFill>
+              </a:defRPr>
+            </a:pPr>
+            <a:r>
+              <a:t>1</a:t>
+            </a:r>
           </a:p>
         </p:txBody>
       </p:sp>
@@ -6373,8 +8983,8 @@
         </p:nvSpPr>
         <p:spPr>
           <a:xfrm>
-            <a:off x="457200" y="1371600"/>
-            <a:ext cx="11430000" cy="4937760"/>
+            <a:off x="3931920" y="2286000"/>
+            <a:ext cx="7772400" cy="1828800"/>
           </a:xfrm>
           <a:prstGeom prst="rect">
             <a:avLst/>
@@ -6388,198 +8998,26 @@
           <a:lstStyle/>
           <a:p>
             <a:pPr>
-              <a:spcAft>
-                <a:spcPts val="800"/>
-              </a:spcAft>
-            </a:pPr>
-            <a:r>
-              <a:rPr sz="1600" b="1">
-                <a:solidFill>
-                  <a:srgbClr val="1F2A4E"/>
-                </a:solidFill>
-              </a:rPr>
-              <a:t>Problema empírico:  </a:t>
-            </a:r>
-            <a:r>
-              <a:rPr sz="1600">
-                <a:solidFill>
-                  <a:srgbClr val="3D424E"/>
-                </a:solidFill>
-              </a:rPr>
-              <a:t>F1 macro alto mascara disparidade Black ≈ 90 % vs Latinx ≈ 60 % em SOTA sobre FairFace (AlDahoul 2024)</a:t>
-            </a:r>
-          </a:p>
-          <a:p>
-            <a:pPr>
-              <a:spcAft>
-                <a:spcPts val="800"/>
-              </a:spcAft>
-            </a:pPr>
-            <a:r>
-              <a:rPr sz="1600" b="1">
-                <a:solidFill>
-                  <a:srgbClr val="1F2A4E"/>
-                </a:solidFill>
-              </a:rPr>
-              <a:t>Pergunta de pesquisa:  </a:t>
-            </a:r>
-            <a:r>
-              <a:rPr sz="1600">
-                <a:solidFill>
-                  <a:srgbClr val="3D424E"/>
-                </a:solidFill>
-              </a:rPr>
-              <a:t>condicionar arquiteturalmente um classificador racial pelo tom de pele (MST) reduz essa disparidade sem sacrificar acurácia agregada?</a:t>
-            </a:r>
-          </a:p>
-          <a:p>
-            <a:pPr>
-              <a:spcAft>
-                <a:spcPts val="800"/>
-              </a:spcAft>
-            </a:pPr>
-            <a:r>
-              <a:rPr sz="1600" b="1">
-                <a:solidFill>
-                  <a:srgbClr val="1F2A4E"/>
-                </a:solidFill>
-              </a:rPr>
-              <a:t>  </a:t>
-            </a:r>
-            <a:r>
-              <a:rPr sz="1600">
-                <a:solidFill>
-                  <a:srgbClr val="3D424E"/>
-                </a:solidFill>
-              </a:rPr>
-              <a:t/>
-            </a:r>
-          </a:p>
-          <a:p>
-            <a:pPr>
-              <a:spcAft>
-                <a:spcPts val="800"/>
-              </a:spcAft>
-            </a:pPr>
-            <a:r>
-              <a:rPr sz="1600" b="1">
-                <a:solidFill>
-                  <a:srgbClr val="1F2A4E"/>
-                </a:solidFill>
-              </a:rPr>
-              <a:t>Objetivo geral:  </a:t>
-            </a:r>
-            <a:r>
-              <a:rPr sz="1600">
-                <a:solidFill>
-                  <a:srgbClr val="3D424E"/>
-                </a:solidFill>
-              </a:rPr>
-              <a:t>desenvolver e avaliar pipeline de classificação racial que incorpora tom de pele (escala Monk 10 classes) como sinal auxiliar condicionante via mecanismo arquitetural (FiLM)</a:t>
-            </a:r>
-          </a:p>
-          <a:p>
-            <a:pPr>
-              <a:spcAft>
-                <a:spcPts val="800"/>
-              </a:spcAft>
-            </a:pPr>
-            <a:r>
-              <a:rPr sz="1600" b="1">
-                <a:solidFill>
-                  <a:srgbClr val="1F2A4E"/>
-                </a:solidFill>
-              </a:rPr>
-              <a:t>  </a:t>
-            </a:r>
-            <a:r>
-              <a:rPr sz="1600">
-                <a:solidFill>
-                  <a:srgbClr val="3D424E"/>
-                </a:solidFill>
-              </a:rPr>
-              <a:t/>
-            </a:r>
-          </a:p>
-          <a:p>
-            <a:pPr>
-              <a:spcAft>
-                <a:spcPts val="800"/>
-              </a:spcAft>
-            </a:pPr>
-            <a:r>
-              <a:rPr sz="1600" b="1">
-                <a:solidFill>
-                  <a:srgbClr val="1F2A4E"/>
-                </a:solidFill>
-              </a:rPr>
-              <a:t>Contribuição principal:  </a:t>
-            </a:r>
-            <a:r>
-              <a:rPr sz="1600">
-                <a:solidFill>
-                  <a:srgbClr val="3D424E"/>
-                </a:solidFill>
-              </a:rPr>
-              <a:t>primeira instância empírica de tom de pele como contexto arquitetural para race classification multi-classe</a:t>
-            </a:r>
-          </a:p>
-          <a:p>
-            <a:pPr>
-              <a:spcAft>
-                <a:spcPts val="800"/>
-              </a:spcAft>
-            </a:pPr>
-            <a:r>
-              <a:rPr sz="1600" b="1">
-                <a:solidFill>
-                  <a:srgbClr val="1F2A4E"/>
-                </a:solidFill>
-              </a:rPr>
-              <a:t>Diagnóstico central:  </a:t>
-            </a:r>
-            <a:r>
-              <a:rPr sz="1600">
-                <a:solidFill>
-                  <a:srgbClr val="3D424E"/>
-                </a:solidFill>
-              </a:rPr>
-              <a:t>erro Latinx = componente fenotípico irredutível (overlap MST) + componente algorítmico — a decomposição é o diferencial da tese</a:t>
-            </a:r>
-          </a:p>
-        </p:txBody>
-      </p:sp>
-      <p:sp>
-        <p:nvSpPr>
-          <p:cNvPr id="5" name="TextBox 4"/>
-          <p:cNvSpPr txBox="1"/>
-          <p:nvPr/>
-        </p:nvSpPr>
-        <p:spPr>
-          <a:xfrm>
-            <a:off x="457200" y="6446520"/>
-            <a:ext cx="11430000" cy="365760"/>
-          </a:xfrm>
-          <a:prstGeom prst="rect">
-            <a:avLst/>
-          </a:prstGeom>
-          <a:noFill/>
-        </p:spPr>
-        <p:txBody>
-          <a:bodyPr wrap="none">
-            <a:spAutoFit/>
-          </a:bodyPr>
-          <a:lstStyle/>
-          <a:p>
-            <a:pPr>
-              <a:defRPr sz="1000" i="1">
-                <a:solidFill>
-                  <a:srgbClr val="707682"/>
+              <a:defRPr sz="3600" b="1">
+                <a:solidFill>
+                  <a:srgbClr val="FFFFFF"/>
                 </a:solidFill>
               </a:defRPr>
             </a:pPr>
             <a:r>
-              <a:t>MST vs Fitzpatrick: 10 vs 6 classes, projetado para CV vs dermatologia. FiLM vs concatenação: modula vs re-aprende.</a:t>
+              <a:t>Plano até a defesa</a:t>
+            </a:r>
+          </a:p>
+          <a:p>
+            <a:pPr>
+              <a:defRPr sz="1800">
+                <a:solidFill>
+                  <a:srgbClr val="E8EAED"/>
+                </a:solidFill>
+              </a:defRPr>
+            </a:pPr>
+            <a:r>
+              <a:t>Três marcos formais, novo horizonte de outubro</a:t>
             </a:r>
           </a:p>
         </p:txBody>
@@ -6592,8 +9030,8 @@
 </p:sld>
 </file>
 
-<file path=ppt/slides/slide4.xml><?xml version="1.0" encoding="utf-8"?>
-<p:sld xmlns:a="http://schemas.openxmlformats.org/drawingml/2006/main" xmlns:p="http://schemas.openxmlformats.org/presentationml/2006/main" xmlns:r="http://schemas.openxmlformats.org/officeDocument/2006/relationships">
+<file path=ppt/slides/slide6.xml><?xml version="1.0" encoding="utf-8"?>
+<p:sld xmlns:a="http://schemas.openxmlformats.org/drawingml/2006/main" xmlns:r="http://schemas.openxmlformats.org/officeDocument/2006/relationships" xmlns:p="http://schemas.openxmlformats.org/presentationml/2006/main">
   <p:cSld>
     <p:spTree>
       <p:nvGrpSpPr>
@@ -6601,7 +9039,14 @@
         <p:cNvGrpSpPr/>
         <p:nvPr/>
       </p:nvGrpSpPr>
-      <p:grpSpPr/>
+      <p:grpSpPr>
+        <a:xfrm>
+          <a:off x="0" y="0"/>
+          <a:ext cx="0" cy="0"/>
+          <a:chOff x="0" y="0"/>
+          <a:chExt cx="0" cy="0"/>
+        </a:xfrm>
+      </p:grpSpPr>
       <p:sp>
         <p:nvSpPr>
           <p:cNvPr id="2" name="TextBox 1"/>
@@ -6632,7 +9077,7 @@
               </a:defRPr>
             </a:pPr>
             <a:r>
-              <a:t>Corpus consolidado — 104 fichas em 11 linhas de pesquisa</a:t>
+              <a:t>Cronograma consolidado</a:t>
             </a:r>
           </a:p>
         </p:txBody>
@@ -6677,6 +9122,7 @@
           <a:lstStyle/>
           <a:p>
             <a:pPr algn="ctr"/>
+            <a:endParaRPr/>
           </a:p>
         </p:txBody>
       </p:sp>
@@ -6686,7 +9132,13 @@
           <p:cNvGraphicFramePr>
             <a:graphicFrameLocks noGrp="1"/>
           </p:cNvGraphicFramePr>
-          <p:nvPr/>
+          <p:nvPr>
+            <p:extLst>
+              <p:ext uri="{D42A27DB-BD31-4B8C-83A1-F6EECF244321}">
+                <p14:modId xmlns:p14="http://schemas.microsoft.com/office/powerpoint/2010/main" val="798890588"/>
+              </p:ext>
+            </p:extLst>
+          </p:nvPr>
         </p:nvGraphicFramePr>
         <p:xfrm>
           <a:off x="457200" y="1371600"/>
@@ -6699,12 +9151,36 @@
                 <a:tableStyleId>{5C22544A-7EE6-4342-B048-85BDC9FD1C3A}</a:tableStyleId>
               </a:tblPr>
               <a:tblGrid>
-                <a:gridCol w="4389120"/>
-                <a:gridCol w="640080"/>
-                <a:gridCol w="1097280"/>
-                <a:gridCol w="5303520"/>
+                <a:gridCol w="439615">
+                  <a:extLst>
+                    <a:ext uri="{9D8B030D-6E8A-4147-A177-3AD203B41FA5}">
+                      <a16:colId xmlns:a16="http://schemas.microsoft.com/office/drawing/2014/main" val="20000"/>
+                    </a:ext>
+                  </a:extLst>
+                </a:gridCol>
+                <a:gridCol w="4835769">
+                  <a:extLst>
+                    <a:ext uri="{9D8B030D-6E8A-4147-A177-3AD203B41FA5}">
+                      <a16:colId xmlns:a16="http://schemas.microsoft.com/office/drawing/2014/main" val="20001"/>
+                    </a:ext>
+                  </a:extLst>
+                </a:gridCol>
+                <a:gridCol w="1758462">
+                  <a:extLst>
+                    <a:ext uri="{9D8B030D-6E8A-4147-A177-3AD203B41FA5}">
+                      <a16:colId xmlns:a16="http://schemas.microsoft.com/office/drawing/2014/main" val="20002"/>
+                    </a:ext>
+                  </a:extLst>
+                </a:gridCol>
+                <a:gridCol w="4396154">
+                  <a:extLst>
+                    <a:ext uri="{9D8B030D-6E8A-4147-A177-3AD203B41FA5}">
+                      <a16:colId xmlns:a16="http://schemas.microsoft.com/office/drawing/2014/main" val="20003"/>
+                    </a:ext>
+                  </a:extLst>
+                </a:gridCol>
               </a:tblGrid>
-              <a:tr h="365760">
+              <a:tr h="1188720">
                 <a:tc>
                   <a:txBody>
                     <a:bodyPr/>
@@ -6716,7 +9192,7 @@
                             <a:srgbClr val="FFFFFF"/>
                           </a:solidFill>
                         </a:rPr>
-                        <a:t>Linha de pesquisa</a:t>
+                        <a:t>#</a:t>
                       </a:r>
                     </a:p>
                   </a:txBody>
@@ -6737,7 +9213,7 @@
                             <a:srgbClr val="FFFFFF"/>
                           </a:solidFill>
                         </a:rPr>
-                        <a:t>N</a:t>
+                        <a:t>Marco</a:t>
                       </a:r>
                     </a:p>
                   </a:txBody>
@@ -6758,7 +9234,7 @@
                             <a:srgbClr val="FFFFFF"/>
                           </a:solidFill>
                         </a:rPr>
-                        <a:t>% corpus</a:t>
+                        <a:t>Data</a:t>
                       </a:r>
                     </a:p>
                   </a:txBody>
@@ -6779,7 +9255,7 @@
                             <a:srgbClr val="FFFFFF"/>
                           </a:solidFill>
                         </a:rPr>
-                        <a:t>Papers-âncora</a:t>
+                        <a:t>Comentário</a:t>
                       </a:r>
                     </a:p>
                   </a:txBody>
@@ -6789,8 +9265,13 @@
                     </a:solidFill>
                   </a:tcPr>
                 </a:tc>
+                <a:extLst>
+                  <a:ext uri="{0D108BD9-81ED-4DB2-BD59-A6C34878D82A}">
+                    <a16:rowId xmlns:a16="http://schemas.microsoft.com/office/drawing/2014/main" val="10000"/>
+                  </a:ext>
+                </a:extLst>
               </a:tr>
-              <a:tr h="365760">
+              <a:tr h="1188720">
                 <a:tc>
                   <a:txBody>
                     <a:bodyPr/>
@@ -6802,7 +9283,114 @@
                             <a:srgbClr val="3D424E"/>
                           </a:solidFill>
                         </a:rPr>
-                        <a:t>A — Race classification multi-classe</a:t>
+                        <a:t>1</a:t>
+                      </a:r>
+                    </a:p>
+                  </a:txBody>
+                  <a:tcPr>
+                    <a:solidFill>
+                      <a:srgbClr val="E8EAED"/>
+                    </a:solidFill>
+                  </a:tcPr>
+                </a:tc>
+                <a:tc>
+                  <a:txBody>
+                    <a:bodyPr/>
+                    <a:lstStyle/>
+                    <a:p>
+                      <a:r>
+                        <a:rPr sz="1100">
+                          <a:solidFill>
+                            <a:srgbClr val="3D424E"/>
+                          </a:solidFill>
+                        </a:rPr>
+                        <a:t>Primeira revisão da qualificação ao orientador</a:t>
+                      </a:r>
+                    </a:p>
+                  </a:txBody>
+                  <a:tcPr>
+                    <a:solidFill>
+                      <a:srgbClr val="E8EAED"/>
+                    </a:solidFill>
+                  </a:tcPr>
+                </a:tc>
+                <a:tc>
+                  <a:txBody>
+                    <a:bodyPr/>
+                    <a:lstStyle/>
+                    <a:p>
+                      <a:r>
+                        <a:rPr sz="1100" dirty="0">
+                          <a:solidFill>
+                            <a:srgbClr val="3D424E"/>
+                          </a:solidFill>
+                        </a:rPr>
+                        <a:t>15/</a:t>
+                      </a:r>
+                      <a:r>
+                        <a:rPr sz="1100" dirty="0" err="1">
+                          <a:solidFill>
+                            <a:srgbClr val="3D424E"/>
+                          </a:solidFill>
+                        </a:rPr>
+                        <a:t>jul</a:t>
+                      </a:r>
+                      <a:r>
+                        <a:rPr sz="1100" dirty="0">
+                          <a:solidFill>
+                            <a:srgbClr val="3D424E"/>
+                          </a:solidFill>
+                        </a:rPr>
+                        <a:t>/2026</a:t>
+                      </a:r>
+                    </a:p>
+                  </a:txBody>
+                  <a:tcPr>
+                    <a:solidFill>
+                      <a:srgbClr val="E8EAED"/>
+                    </a:solidFill>
+                  </a:tcPr>
+                </a:tc>
+                <a:tc>
+                  <a:txBody>
+                    <a:bodyPr/>
+                    <a:lstStyle/>
+                    <a:p>
+                      <a:r>
+                        <a:rPr sz="1100">
+                          <a:solidFill>
+                            <a:srgbClr val="3D424E"/>
+                          </a:solidFill>
+                        </a:rPr>
+                        <a:t>Overleaf compartilhado hoje; Cap 1, 3, 4, 5 em versão inicial; Cap 2 em revisão ativa</a:t>
+                      </a:r>
+                    </a:p>
+                  </a:txBody>
+                  <a:tcPr>
+                    <a:solidFill>
+                      <a:srgbClr val="E8EAED"/>
+                    </a:solidFill>
+                  </a:tcPr>
+                </a:tc>
+                <a:extLst>
+                  <a:ext uri="{0D108BD9-81ED-4DB2-BD59-A6C34878D82A}">
+                    <a16:rowId xmlns:a16="http://schemas.microsoft.com/office/drawing/2014/main" val="10001"/>
+                  </a:ext>
+                </a:extLst>
+              </a:tr>
+              <a:tr h="1188720">
+                <a:tc>
+                  <a:txBody>
+                    <a:bodyPr/>
+                    <a:lstStyle/>
+                    <a:p>
+                      <a:r>
+                        <a:rPr sz="1100">
+                          <a:solidFill>
+                            <a:srgbClr val="3D424E"/>
+                          </a:solidFill>
+                        </a:rPr>
+                        <a:t>2</a:t>
                       </a:r>
                     </a:p>
                   </a:txBody>
@@ -6819,7 +9407,7 @@
                             <a:srgbClr val="3D424E"/>
                           </a:solidFill>
                         </a:rPr>
-                        <a:t>4</a:t>
+                        <a:t>Pedido formal de qualificação ao PPG-CC / ICT</a:t>
                       </a:r>
                     </a:p>
                   </a:txBody>
@@ -6836,7 +9424,7 @@
                             <a:srgbClr val="3D424E"/>
                           </a:solidFill>
                         </a:rPr>
-                        <a:t>3,8 %</a:t>
+                        <a:t>30/jul/2026</a:t>
                       </a:r>
                     </a:p>
                   </a:txBody>
@@ -6853,14 +9441,19 @@
                             <a:srgbClr val="3D424E"/>
                           </a:solidFill>
                         </a:rPr>
-                        <a:t>Kärkkäinen 2021 (FairFace), AlDahoul 2024</a:t>
+                        <a:t>Prazo regimental do Programa — mantido</a:t>
                       </a:r>
                     </a:p>
                   </a:txBody>
                   <a:tcPr/>
                 </a:tc>
+                <a:extLst>
+                  <a:ext uri="{0D108BD9-81ED-4DB2-BD59-A6C34878D82A}">
+                    <a16:rowId xmlns:a16="http://schemas.microsoft.com/office/drawing/2014/main" val="10002"/>
+                  </a:ext>
+                </a:extLst>
               </a:tr>
-              <a:tr h="365760">
+              <a:tr h="1188720">
                 <a:tc>
                   <a:txBody>
                     <a:bodyPr/>
@@ -6872,11 +9465,15 @@
                             <a:srgbClr val="3D424E"/>
                           </a:solidFill>
                         </a:rPr>
-                        <a:t>B — Face recognition fairness</a:t>
-                      </a:r>
-                    </a:p>
-                  </a:txBody>
-                  <a:tcPr/>
+                        <a:t>3</a:t>
+                      </a:r>
+                    </a:p>
+                  </a:txBody>
+                  <a:tcPr>
+                    <a:solidFill>
+                      <a:srgbClr val="E8EAED"/>
+                    </a:solidFill>
+                  </a:tcPr>
                 </a:tc>
                 <a:tc>
                   <a:txBody>
@@ -6889,11 +9486,15 @@
                             <a:srgbClr val="3D424E"/>
                           </a:solidFill>
                         </a:rPr>
-                        <a:t>16</a:t>
-                      </a:r>
-                    </a:p>
-                  </a:txBody>
-                  <a:tcPr/>
+                        <a:t>Defesa da qualificação</a:t>
+                      </a:r>
+                    </a:p>
+                  </a:txBody>
+                  <a:tcPr>
+                    <a:solidFill>
+                      <a:srgbClr val="E8EAED"/>
+                    </a:solidFill>
+                  </a:tcPr>
                 </a:tc>
                 <a:tc>
                   <a:txBody>
@@ -6906,769 +9507,119 @@
                             <a:srgbClr val="3D424E"/>
                           </a:solidFill>
                         </a:rPr>
-                        <a:t>15,4 %</a:t>
-                      </a:r>
-                    </a:p>
-                  </a:txBody>
-                  <a:tcPr/>
-                </a:tc>
-                <a:tc>
-                  <a:txBody>
-                    <a:bodyPr/>
-                    <a:lstStyle/>
-                    <a:p>
-                      <a:r>
-                        <a:rPr sz="1100">
-                          <a:solidFill>
-                            <a:srgbClr val="3D424E"/>
-                          </a:solidFill>
-                        </a:rPr>
-                        <a:t>Wang RFW 2019, Robinson BFW 2020, Deng ArcFace</a:t>
-                      </a:r>
-                    </a:p>
-                  </a:txBody>
-                  <a:tcPr/>
-                </a:tc>
-              </a:tr>
-              <a:tr h="365760">
-                <a:tc>
-                  <a:txBody>
-                    <a:bodyPr/>
-                    <a:lstStyle/>
-                    <a:p>
-                      <a:r>
-                        <a:rPr sz="1100">
-                          <a:solidFill>
-                            <a:srgbClr val="3D424E"/>
-                          </a:solidFill>
-                        </a:rPr>
-                        <a:t>C — Skin tone alternativo (Fitzpatrick, MST, ITA)</a:t>
-                      </a:r>
-                    </a:p>
-                  </a:txBody>
-                  <a:tcPr/>
-                </a:tc>
-                <a:tc>
-                  <a:txBody>
-                    <a:bodyPr/>
-                    <a:lstStyle/>
-                    <a:p>
-                      <a:r>
-                        <a:rPr sz="1100">
-                          <a:solidFill>
-                            <a:srgbClr val="3D424E"/>
-                          </a:solidFill>
-                        </a:rPr>
-                        <a:t>7</a:t>
-                      </a:r>
-                    </a:p>
-                  </a:txBody>
-                  <a:tcPr/>
-                </a:tc>
-                <a:tc>
-                  <a:txBody>
-                    <a:bodyPr/>
-                    <a:lstStyle/>
-                    <a:p>
-                      <a:r>
-                        <a:rPr sz="1100">
-                          <a:solidFill>
-                            <a:srgbClr val="3D424E"/>
-                          </a:solidFill>
-                        </a:rPr>
-                        <a:t>6,7 %</a:t>
-                      </a:r>
-                    </a:p>
-                  </a:txBody>
-                  <a:tcPr/>
-                </a:tc>
-                <a:tc>
-                  <a:txBody>
-                    <a:bodyPr/>
-                    <a:lstStyle/>
-                    <a:p>
-                      <a:r>
-                        <a:rPr sz="1100">
-                          <a:solidFill>
-                            <a:srgbClr val="3D424E"/>
-                          </a:solidFill>
-                        </a:rPr>
-                        <a:t>Schumann 2023 (MST), Pereira 2026 (SkinToneNet)</a:t>
-                      </a:r>
-                    </a:p>
-                  </a:txBody>
-                  <a:tcPr/>
-                </a:tc>
-              </a:tr>
-              <a:tr h="365760">
-                <a:tc>
-                  <a:txBody>
-                    <a:bodyPr/>
-                    <a:lstStyle/>
-                    <a:p>
-                      <a:r>
-                        <a:rPr sz="1100">
-                          <a:solidFill>
-                            <a:srgbClr val="3D424E"/>
-                          </a:solidFill>
-                        </a:rPr>
-                        <a:t>D — Mitigação algorítmica</a:t>
-                      </a:r>
-                    </a:p>
-                  </a:txBody>
-                  <a:tcPr/>
-                </a:tc>
-                <a:tc>
-                  <a:txBody>
-                    <a:bodyPr/>
-                    <a:lstStyle/>
-                    <a:p>
-                      <a:r>
-                        <a:rPr sz="1100">
-                          <a:solidFill>
-                            <a:srgbClr val="3D424E"/>
-                          </a:solidFill>
-                        </a:rPr>
-                        <a:t>10</a:t>
-                      </a:r>
-                    </a:p>
-                  </a:txBody>
-                  <a:tcPr/>
-                </a:tc>
-                <a:tc>
-                  <a:txBody>
-                    <a:bodyPr/>
-                    <a:lstStyle/>
-                    <a:p>
-                      <a:r>
-                        <a:rPr sz="1100">
-                          <a:solidFill>
-                            <a:srgbClr val="3D424E"/>
-                          </a:solidFill>
-                        </a:rPr>
-                        <a:t>9,6 %</a:t>
-                      </a:r>
-                    </a:p>
-                  </a:txBody>
-                  <a:tcPr/>
-                </a:tc>
-                <a:tc>
-                  <a:txBody>
-                    <a:bodyPr/>
-                    <a:lstStyle/>
-                    <a:p>
-                      <a:r>
-                        <a:rPr sz="1100">
-                          <a:solidFill>
-                            <a:srgbClr val="3D424E"/>
-                          </a:solidFill>
-                        </a:rPr>
-                        <a:t>Madras LAFTR 2018, Sagawa Group DRO 2020</a:t>
-                      </a:r>
-                    </a:p>
-                  </a:txBody>
-                  <a:tcPr/>
-                </a:tc>
-              </a:tr>
-              <a:tr h="365760">
-                <a:tc>
-                  <a:txBody>
-                    <a:bodyPr/>
-                    <a:lstStyle/>
-                    <a:p>
-                      <a:r>
-                        <a:rPr sz="1100">
-                          <a:solidFill>
-                            <a:srgbClr val="3D424E"/>
-                          </a:solidFill>
-                        </a:rPr>
-                        <a:t>E — Auditoria e Surveys</a:t>
-                      </a:r>
-                    </a:p>
-                  </a:txBody>
-                  <a:tcPr/>
-                </a:tc>
-                <a:tc>
-                  <a:txBody>
-                    <a:bodyPr/>
-                    <a:lstStyle/>
-                    <a:p>
-                      <a:r>
-                        <a:rPr sz="1100">
-                          <a:solidFill>
-                            <a:srgbClr val="3D424E"/>
-                          </a:solidFill>
-                        </a:rPr>
-                        <a:t>14</a:t>
-                      </a:r>
-                    </a:p>
-                  </a:txBody>
-                  <a:tcPr/>
-                </a:tc>
-                <a:tc>
-                  <a:txBody>
-                    <a:bodyPr/>
-                    <a:lstStyle/>
-                    <a:p>
-                      <a:r>
-                        <a:rPr sz="1100">
-                          <a:solidFill>
-                            <a:srgbClr val="3D424E"/>
-                          </a:solidFill>
-                        </a:rPr>
-                        <a:t>13,5 %</a:t>
-                      </a:r>
-                    </a:p>
-                  </a:txBody>
-                  <a:tcPr/>
-                </a:tc>
-                <a:tc>
-                  <a:txBody>
-                    <a:bodyPr/>
-                    <a:lstStyle/>
-                    <a:p>
-                      <a:r>
-                        <a:rPr sz="1100">
-                          <a:solidFill>
-                            <a:srgbClr val="3D424E"/>
-                          </a:solidFill>
-                        </a:rPr>
-                        <a:t>Buolamwini 2018, Mehrabi 2021 survey</a:t>
-                      </a:r>
-                    </a:p>
-                  </a:txBody>
-                  <a:tcPr/>
-                </a:tc>
-              </a:tr>
-              <a:tr h="365760">
-                <a:tc>
-                  <a:txBody>
-                    <a:bodyPr/>
-                    <a:lstStyle/>
-                    <a:p>
-                      <a:r>
-                        <a:rPr sz="1100">
-                          <a:solidFill>
-                            <a:srgbClr val="3D424E"/>
-                          </a:solidFill>
-                        </a:rPr>
-                        <a:t>F — Fundamentação científica e ética</a:t>
-                      </a:r>
-                    </a:p>
-                  </a:txBody>
-                  <a:tcPr/>
-                </a:tc>
-                <a:tc>
-                  <a:txBody>
-                    <a:bodyPr/>
-                    <a:lstStyle/>
-                    <a:p>
-                      <a:r>
-                        <a:rPr sz="1100">
-                          <a:solidFill>
-                            <a:srgbClr val="3D424E"/>
-                          </a:solidFill>
-                        </a:rPr>
-                        <a:t>3</a:t>
-                      </a:r>
-                    </a:p>
-                  </a:txBody>
-                  <a:tcPr/>
-                </a:tc>
-                <a:tc>
-                  <a:txBody>
-                    <a:bodyPr/>
-                    <a:lstStyle/>
-                    <a:p>
-                      <a:r>
-                        <a:rPr sz="1100">
-                          <a:solidFill>
-                            <a:srgbClr val="3D424E"/>
-                          </a:solidFill>
-                        </a:rPr>
-                        <a:t>2,9 %</a:t>
-                      </a:r>
-                    </a:p>
-                  </a:txBody>
-                  <a:tcPr/>
-                </a:tc>
-                <a:tc>
-                  <a:txBody>
-                    <a:bodyPr/>
-                    <a:lstStyle/>
-                    <a:p>
-                      <a:r>
-                        <a:rPr sz="1100">
-                          <a:solidFill>
-                            <a:srgbClr val="3D424E"/>
-                          </a:solidFill>
-                        </a:rPr>
-                        <a:t>Fuentes AAPA 2019, Lewontin 1972</a:t>
-                      </a:r>
-                    </a:p>
-                  </a:txBody>
-                  <a:tcPr/>
-                </a:tc>
-              </a:tr>
-              <a:tr h="365760">
-                <a:tc>
-                  <a:txBody>
-                    <a:bodyPr/>
-                    <a:lstStyle/>
-                    <a:p>
-                      <a:r>
-                        <a:rPr sz="1100">
-                          <a:solidFill>
-                            <a:srgbClr val="3D424E"/>
-                          </a:solidFill>
-                        </a:rPr>
-                        <a:t>G — Mecanismos ML paradigmáticos</a:t>
-                      </a:r>
-                    </a:p>
-                  </a:txBody>
-                  <a:tcPr/>
-                </a:tc>
-                <a:tc>
-                  <a:txBody>
-                    <a:bodyPr/>
-                    <a:lstStyle/>
-                    <a:p>
-                      <a:r>
-                        <a:rPr sz="1100">
-                          <a:solidFill>
-                            <a:srgbClr val="3D424E"/>
-                          </a:solidFill>
-                        </a:rPr>
-                        <a:t>9</a:t>
-                      </a:r>
-                    </a:p>
-                  </a:txBody>
-                  <a:tcPr/>
-                </a:tc>
-                <a:tc>
-                  <a:txBody>
-                    <a:bodyPr/>
-                    <a:lstStyle/>
-                    <a:p>
-                      <a:r>
-                        <a:rPr sz="1100">
-                          <a:solidFill>
-                            <a:srgbClr val="3D424E"/>
-                          </a:solidFill>
-                        </a:rPr>
-                        <a:t>8,7 %</a:t>
-                      </a:r>
-                    </a:p>
-                  </a:txBody>
-                  <a:tcPr/>
-                </a:tc>
-                <a:tc>
-                  <a:txBody>
-                    <a:bodyPr/>
-                    <a:lstStyle/>
-                    <a:p>
-                      <a:r>
-                        <a:rPr sz="1100">
-                          <a:solidFill>
-                            <a:srgbClr val="3D424E"/>
-                          </a:solidFill>
-                        </a:rPr>
-                        <a:t>Perez FiLM 2018, Ba LayerNorm, He ResNet</a:t>
-                      </a:r>
-                    </a:p>
-                  </a:txBody>
-                  <a:tcPr/>
-                </a:tc>
-              </a:tr>
-              <a:tr h="365760">
-                <a:tc>
-                  <a:txBody>
-                    <a:bodyPr/>
-                    <a:lstStyle/>
-                    <a:p>
-                      <a:r>
-                        <a:rPr sz="1100">
-                          <a:solidFill>
-                            <a:srgbClr val="3D424E"/>
-                          </a:solidFill>
-                        </a:rPr>
-                        <a:t>I — VLM / CLIP em fairness</a:t>
-                      </a:r>
-                    </a:p>
-                  </a:txBody>
-                  <a:tcPr/>
-                </a:tc>
-                <a:tc>
-                  <a:txBody>
-                    <a:bodyPr/>
-                    <a:lstStyle/>
-                    <a:p>
-                      <a:r>
-                        <a:rPr sz="1100">
-                          <a:solidFill>
-                            <a:srgbClr val="3D424E"/>
-                          </a:solidFill>
-                        </a:rPr>
-                        <a:t>14</a:t>
-                      </a:r>
-                    </a:p>
-                  </a:txBody>
-                  <a:tcPr/>
-                </a:tc>
-                <a:tc>
-                  <a:txBody>
-                    <a:bodyPr/>
-                    <a:lstStyle/>
-                    <a:p>
-                      <a:r>
-                        <a:rPr sz="1100">
-                          <a:solidFill>
-                            <a:srgbClr val="3D424E"/>
-                          </a:solidFill>
-                        </a:rPr>
-                        <a:t>13,5 %</a:t>
-                      </a:r>
-                    </a:p>
-                  </a:txBody>
-                  <a:tcPr/>
-                </a:tc>
-                <a:tc>
-                  <a:txBody>
-                    <a:bodyPr/>
-                    <a:lstStyle/>
-                    <a:p>
-                      <a:r>
-                        <a:rPr sz="1100">
-                          <a:solidFill>
-                            <a:srgbClr val="3D424E"/>
-                          </a:solidFill>
-                        </a:rPr>
-                        <a:t>Radford CLIP 2021, Luo FairCLIP 2024</a:t>
-                      </a:r>
-                    </a:p>
-                  </a:txBody>
-                  <a:tcPr/>
-                </a:tc>
-              </a:tr>
-              <a:tr h="365760">
-                <a:tc>
-                  <a:txBody>
-                    <a:bodyPr/>
-                    <a:lstStyle/>
-                    <a:p>
-                      <a:r>
-                        <a:rPr sz="1100">
-                          <a:solidFill>
-                            <a:srgbClr val="3D424E"/>
-                          </a:solidFill>
-                        </a:rPr>
-                        <a:t>J — Conditioning moderno</a:t>
-                      </a:r>
-                    </a:p>
-                  </a:txBody>
-                  <a:tcPr/>
-                </a:tc>
-                <a:tc>
-                  <a:txBody>
-                    <a:bodyPr/>
-                    <a:lstStyle/>
-                    <a:p>
-                      <a:r>
-                        <a:rPr sz="1100">
-                          <a:solidFill>
-                            <a:srgbClr val="3D424E"/>
-                          </a:solidFill>
-                        </a:rPr>
-                        <a:t>5</a:t>
-                      </a:r>
-                    </a:p>
-                  </a:txBody>
-                  <a:tcPr/>
-                </a:tc>
-                <a:tc>
-                  <a:txBody>
-                    <a:bodyPr/>
-                    <a:lstStyle/>
-                    <a:p>
-                      <a:r>
-                        <a:rPr sz="1100">
-                          <a:solidFill>
-                            <a:srgbClr val="3D424E"/>
-                          </a:solidFill>
-                        </a:rPr>
-                        <a:t>4,8 %</a:t>
-                      </a:r>
-                    </a:p>
-                  </a:txBody>
-                  <a:tcPr/>
-                </a:tc>
-                <a:tc>
-                  <a:txBody>
-                    <a:bodyPr/>
-                    <a:lstStyle/>
-                    <a:p>
-                      <a:r>
-                        <a:rPr sz="1100">
-                          <a:solidFill>
-                            <a:srgbClr val="3D424E"/>
-                          </a:solidFill>
-                        </a:rPr>
-                        <a:t>Liu ConvNeXt 2022, Dhariwal ADM 2021</a:t>
-                      </a:r>
-                    </a:p>
-                  </a:txBody>
-                  <a:tcPr/>
-                </a:tc>
-              </a:tr>
-              <a:tr h="365760">
-                <a:tc>
-                  <a:txBody>
-                    <a:bodyPr/>
-                    <a:lstStyle/>
-                    <a:p>
-                      <a:r>
-                        <a:rPr sz="1100">
-                          <a:solidFill>
-                            <a:srgbClr val="3D424E"/>
-                          </a:solidFill>
-                        </a:rPr>
-                        <a:t>K — Fundadores de FR (DeepFace, ArcFace, CosFace)</a:t>
-                      </a:r>
-                    </a:p>
-                  </a:txBody>
-                  <a:tcPr/>
-                </a:tc>
-                <a:tc>
-                  <a:txBody>
-                    <a:bodyPr/>
-                    <a:lstStyle/>
-                    <a:p>
-                      <a:r>
-                        <a:rPr sz="1100">
-                          <a:solidFill>
-                            <a:srgbClr val="3D424E"/>
-                          </a:solidFill>
-                        </a:rPr>
-                        <a:t>6</a:t>
-                      </a:r>
-                    </a:p>
-                  </a:txBody>
-                  <a:tcPr/>
-                </a:tc>
-                <a:tc>
-                  <a:txBody>
-                    <a:bodyPr/>
-                    <a:lstStyle/>
-                    <a:p>
-                      <a:r>
-                        <a:rPr sz="1100">
-                          <a:solidFill>
-                            <a:srgbClr val="3D424E"/>
-                          </a:solidFill>
-                        </a:rPr>
-                        <a:t>5,8 %</a:t>
-                      </a:r>
-                    </a:p>
-                  </a:txBody>
-                  <a:tcPr/>
-                </a:tc>
-                <a:tc>
-                  <a:txBody>
-                    <a:bodyPr/>
-                    <a:lstStyle/>
-                    <a:p>
-                      <a:r>
-                        <a:rPr sz="1100">
-                          <a:solidFill>
-                            <a:srgbClr val="3D424E"/>
-                          </a:solidFill>
-                        </a:rPr>
-                        <a:t>Taigman DeepFace 2014, Wang CosFace 2018</a:t>
-                      </a:r>
-                    </a:p>
-                  </a:txBody>
-                  <a:tcPr/>
-                </a:tc>
-              </a:tr>
-              <a:tr h="365760">
-                <a:tc>
-                  <a:txBody>
-                    <a:bodyPr/>
-                    <a:lstStyle/>
-                    <a:p>
-                      <a:r>
-                        <a:rPr sz="1100">
-                          <a:solidFill>
-                            <a:srgbClr val="3D424E"/>
-                          </a:solidFill>
-                        </a:rPr>
-                        <a:t>L — Auxiliar / complementar</a:t>
-                      </a:r>
-                    </a:p>
-                  </a:txBody>
-                  <a:tcPr/>
-                </a:tc>
-                <a:tc>
-                  <a:txBody>
-                    <a:bodyPr/>
-                    <a:lstStyle/>
-                    <a:p>
-                      <a:r>
-                        <a:rPr sz="1100">
-                          <a:solidFill>
-                            <a:srgbClr val="3D424E"/>
-                          </a:solidFill>
-                        </a:rPr>
-                        <a:t>13</a:t>
-                      </a:r>
-                    </a:p>
-                  </a:txBody>
-                  <a:tcPr/>
-                </a:tc>
-                <a:tc>
-                  <a:txBody>
-                    <a:bodyPr/>
-                    <a:lstStyle/>
-                    <a:p>
-                      <a:r>
-                        <a:rPr sz="1100">
-                          <a:solidFill>
-                            <a:srgbClr val="3D424E"/>
-                          </a:solidFill>
-                        </a:rPr>
-                        <a:t>12,5 %</a:t>
-                      </a:r>
-                    </a:p>
-                  </a:txBody>
-                  <a:tcPr/>
-                </a:tc>
-                <a:tc>
-                  <a:txBody>
-                    <a:bodyPr/>
-                    <a:lstStyle/>
-                    <a:p>
-                      <a:r>
-                        <a:rPr sz="1100">
-                          <a:solidFill>
-                            <a:srgbClr val="3D424E"/>
-                          </a:solidFill>
-                        </a:rPr>
-                        <a:t>Karkkainen datasets, Hendrycks robustness</a:t>
-                      </a:r>
-                    </a:p>
-                  </a:txBody>
-                  <a:tcPr/>
-                </a:tc>
-              </a:tr>
-              <a:tr h="365760">
-                <a:tc>
-                  <a:txBody>
-                    <a:bodyPr/>
-                    <a:lstStyle/>
-                    <a:p>
-                      <a:r>
-                        <a:rPr sz="1100">
-                          <a:solidFill>
-                            <a:srgbClr val="3D424E"/>
-                          </a:solidFill>
-                        </a:rPr>
-                        <a:t>R8 — Diversidade Latinx (antropo + genética + socio)</a:t>
-                      </a:r>
-                    </a:p>
-                  </a:txBody>
-                  <a:tcPr/>
-                </a:tc>
-                <a:tc>
-                  <a:txBody>
-                    <a:bodyPr/>
-                    <a:lstStyle/>
-                    <a:p>
-                      <a:r>
-                        <a:rPr sz="1100">
-                          <a:solidFill>
-                            <a:srgbClr val="3D424E"/>
-                          </a:solidFill>
-                        </a:rPr>
-                        <a:t>3</a:t>
-                      </a:r>
-                    </a:p>
-                  </a:txBody>
-                  <a:tcPr/>
-                </a:tc>
-                <a:tc>
-                  <a:txBody>
-                    <a:bodyPr/>
-                    <a:lstStyle/>
-                    <a:p>
-                      <a:r>
-                        <a:rPr sz="1100">
-                          <a:solidFill>
-                            <a:srgbClr val="3D424E"/>
-                          </a:solidFill>
-                        </a:rPr>
-                        <a:t>2,9 %</a:t>
-                      </a:r>
-                    </a:p>
-                  </a:txBody>
-                  <a:tcPr/>
-                </a:tc>
-                <a:tc>
-                  <a:txBody>
-                    <a:bodyPr/>
-                    <a:lstStyle/>
-                    <a:p>
-                      <a:r>
-                        <a:rPr sz="1100">
-                          <a:solidFill>
-                            <a:srgbClr val="3D424E"/>
-                          </a:solidFill>
-                        </a:rPr>
-                        <a:t>Telles 2014, Bryc 2015, Pew 2017</a:t>
-                      </a:r>
-                    </a:p>
-                  </a:txBody>
-                  <a:tcPr/>
-                </a:tc>
+                        <a:t>outubro/2026</a:t>
+                      </a:r>
+                    </a:p>
+                  </a:txBody>
+                  <a:tcPr>
+                    <a:solidFill>
+                      <a:srgbClr val="E8EAED"/>
+                    </a:solidFill>
+                  </a:tcPr>
+                </a:tc>
+                <a:tc>
+                  <a:txBody>
+                    <a:bodyPr/>
+                    <a:lstStyle/>
+                    <a:p>
+                      <a:r>
+                        <a:rPr sz="1100" dirty="0" err="1">
+                          <a:solidFill>
+                            <a:srgbClr val="3D424E"/>
+                          </a:solidFill>
+                        </a:rPr>
+                        <a:t>Ajuste</a:t>
+                      </a:r>
+                      <a:r>
+                        <a:rPr sz="1100" dirty="0">
+                          <a:solidFill>
+                            <a:srgbClr val="3D424E"/>
+                          </a:solidFill>
+                        </a:rPr>
+                        <a:t> de </a:t>
+                      </a:r>
+                      <a:r>
+                        <a:rPr sz="1100" dirty="0" err="1">
+                          <a:solidFill>
+                            <a:srgbClr val="3D424E"/>
+                          </a:solidFill>
+                        </a:rPr>
+                        <a:t>agosto</a:t>
+                      </a:r>
+                      <a:r>
+                        <a:rPr sz="1100" dirty="0">
+                          <a:solidFill>
+                            <a:srgbClr val="3D424E"/>
+                          </a:solidFill>
+                        </a:rPr>
+                        <a:t> → </a:t>
+                      </a:r>
+                      <a:r>
+                        <a:rPr sz="1100" dirty="0" err="1">
+                          <a:solidFill>
+                            <a:srgbClr val="3D424E"/>
+                          </a:solidFill>
+                        </a:rPr>
+                        <a:t>outubro</a:t>
+                      </a:r>
+                      <a:r>
+                        <a:rPr sz="1100" dirty="0">
+                          <a:solidFill>
+                            <a:srgbClr val="3D424E"/>
+                          </a:solidFill>
+                        </a:rPr>
+                        <a:t> (</a:t>
+                      </a:r>
+                      <a:r>
+                        <a:rPr sz="1100" dirty="0" err="1">
+                          <a:solidFill>
+                            <a:srgbClr val="3D424E"/>
+                          </a:solidFill>
+                        </a:rPr>
+                        <a:t>extensão</a:t>
+                      </a:r>
+                      <a:r>
+                        <a:rPr sz="1100" dirty="0">
+                          <a:solidFill>
+                            <a:srgbClr val="3D424E"/>
+                          </a:solidFill>
+                        </a:rPr>
+                        <a:t> de 2 meses </a:t>
+                      </a:r>
+                      <a:r>
+                        <a:rPr sz="1100" dirty="0" err="1">
+                          <a:solidFill>
+                            <a:srgbClr val="3D424E"/>
+                          </a:solidFill>
+                        </a:rPr>
+                        <a:t>solicitada</a:t>
+                      </a:r>
+                      <a:r>
+                        <a:rPr sz="1100" dirty="0">
+                          <a:solidFill>
+                            <a:srgbClr val="3D424E"/>
+                          </a:solidFill>
+                        </a:rPr>
+                        <a:t>)</a:t>
+                      </a:r>
+                    </a:p>
+                  </a:txBody>
+                  <a:tcPr>
+                    <a:solidFill>
+                      <a:srgbClr val="E8EAED"/>
+                    </a:solidFill>
+                  </a:tcPr>
+                </a:tc>
+                <a:extLst>
+                  <a:ext uri="{0D108BD9-81ED-4DB2-BD59-A6C34878D82A}">
+                    <a16:rowId xmlns:a16="http://schemas.microsoft.com/office/drawing/2014/main" val="10003"/>
+                  </a:ext>
+                </a:extLst>
               </a:tr>
             </a:tbl>
           </a:graphicData>
         </a:graphic>
       </p:graphicFrame>
-      <p:sp>
-        <p:nvSpPr>
-          <p:cNvPr id="5" name="TextBox 4"/>
-          <p:cNvSpPr txBox="1"/>
-          <p:nvPr/>
-        </p:nvSpPr>
-        <p:spPr>
-          <a:xfrm>
-            <a:off x="457200" y="6446520"/>
-            <a:ext cx="11430000" cy="365760"/>
-          </a:xfrm>
-          <a:prstGeom prst="rect">
-            <a:avLst/>
-          </a:prstGeom>
-          <a:noFill/>
-        </p:spPr>
-        <p:txBody>
-          <a:bodyPr wrap="none">
-            <a:spAutoFit/>
-          </a:bodyPr>
-          <a:lstStyle/>
-          <a:p>
-            <a:pPr>
-              <a:defRPr sz="1000" i="1">
-                <a:solidFill>
-                  <a:srgbClr val="707682"/>
-                </a:solidFill>
-              </a:defRPr>
-            </a:pPr>
-            <a:r>
-              <a:t>Fronteira temporal: 55 fichas (53 %) são 2024+, incluindo 5 papers de 2026 — corpus na fronteira absoluta.</a:t>
-            </a:r>
-          </a:p>
-        </p:txBody>
-      </p:sp>
     </p:spTree>
   </p:cSld>
   <p:clrMapOvr>
@@ -7677,8 +9628,8 @@
 </p:sld>
 </file>
 
-<file path=ppt/slides/slide5.xml><?xml version="1.0" encoding="utf-8"?>
-<p:sld xmlns:a="http://schemas.openxmlformats.org/drawingml/2006/main" xmlns:p="http://schemas.openxmlformats.org/presentationml/2006/main" xmlns:r="http://schemas.openxmlformats.org/officeDocument/2006/relationships">
+<file path=ppt/slides/slide7.xml><?xml version="1.0" encoding="utf-8"?>
+<p:sld xmlns:a="http://schemas.openxmlformats.org/drawingml/2006/main" xmlns:r="http://schemas.openxmlformats.org/officeDocument/2006/relationships" xmlns:p="http://schemas.openxmlformats.org/presentationml/2006/main">
   <p:cSld>
     <p:spTree>
       <p:nvGrpSpPr>
@@ -7686,7 +9637,14 @@
         <p:cNvGrpSpPr/>
         <p:nvPr/>
       </p:nvGrpSpPr>
-      <p:grpSpPr/>
+      <p:grpSpPr>
+        <a:xfrm>
+          <a:off x="0" y="0"/>
+          <a:ext cx="0" cy="0"/>
+          <a:chOff x="0" y="0"/>
+          <a:chExt cx="0" cy="0"/>
+        </a:xfrm>
+      </p:grpSpPr>
       <p:sp>
         <p:nvSpPr>
           <p:cNvPr id="2" name="Rectangle 1"/>
@@ -7727,6 +9685,7 @@
           <a:lstStyle/>
           <a:p>
             <a:pPr algn="ctr"/>
+            <a:endParaRPr/>
           </a:p>
         </p:txBody>
       </p:sp>
@@ -7760,7 +9719,7 @@
               </a:defRPr>
             </a:pPr>
             <a:r>
-              <a:t>1</a:t>
+              <a:t>2</a:t>
             </a:r>
           </a:p>
         </p:txBody>
@@ -7795,7 +9754,7 @@
               </a:defRPr>
             </a:pPr>
             <a:r>
-              <a:t>Plano até a defesa</a:t>
+              <a:t>Estado da escrita</a:t>
             </a:r>
           </a:p>
           <a:p>
@@ -7807,7 +9766,7 @@
               </a:defRPr>
             </a:pPr>
             <a:r>
-              <a:t>Três marcos formais, novo horizonte de outubro</a:t>
+              <a:t>O que já está escrito e como vai virar Overleaf</a:t>
             </a:r>
           </a:p>
         </p:txBody>
@@ -7820,8 +9779,8 @@
 </p:sld>
 </file>
 
-<file path=ppt/slides/slide6.xml><?xml version="1.0" encoding="utf-8"?>
-<p:sld xmlns:a="http://schemas.openxmlformats.org/drawingml/2006/main" xmlns:p="http://schemas.openxmlformats.org/presentationml/2006/main" xmlns:r="http://schemas.openxmlformats.org/officeDocument/2006/relationships">
+<file path=ppt/slides/slide8.xml><?xml version="1.0" encoding="utf-8"?>
+<p:sld xmlns:a="http://schemas.openxmlformats.org/drawingml/2006/main" xmlns:r="http://schemas.openxmlformats.org/officeDocument/2006/relationships" xmlns:p="http://schemas.openxmlformats.org/presentationml/2006/main">
   <p:cSld>
     <p:spTree>
       <p:nvGrpSpPr>
@@ -7829,7 +9788,14 @@
         <p:cNvGrpSpPr/>
         <p:nvPr/>
       </p:nvGrpSpPr>
-      <p:grpSpPr/>
+      <p:grpSpPr>
+        <a:xfrm>
+          <a:off x="0" y="0"/>
+          <a:ext cx="0" cy="0"/>
+          <a:chOff x="0" y="0"/>
+          <a:chExt cx="0" cy="0"/>
+        </a:xfrm>
+      </p:grpSpPr>
       <p:sp>
         <p:nvSpPr>
           <p:cNvPr id="2" name="TextBox 1"/>
@@ -7839,7 +9805,7 @@
         <p:spPr>
           <a:xfrm>
             <a:off x="457200" y="365760"/>
-            <a:ext cx="11430000" cy="822960"/>
+            <a:ext cx="11430000" cy="492443"/>
           </a:xfrm>
           <a:prstGeom prst="rect">
             <a:avLst/>
@@ -7860,7 +9826,28 @@
               </a:defRPr>
             </a:pPr>
             <a:r>
-              <a:t>Cronograma consolidado</a:t>
+              <a:rPr lang="pt-BR" dirty="0"/>
+              <a:t>Status</a:t>
+            </a:r>
+            <a:r>
+              <a:rPr dirty="0"/>
+              <a:t> da </a:t>
+            </a:r>
+            <a:r>
+              <a:rPr dirty="0" err="1"/>
+              <a:t>escrita</a:t>
+            </a:r>
+            <a:r>
+              <a:rPr lang="pt-BR" dirty="0"/>
+              <a:t> </a:t>
+            </a:r>
+            <a:r>
+              <a:rPr dirty="0" err="1"/>
+              <a:t>qualificação</a:t>
+            </a:r>
+            <a:r>
+              <a:rPr dirty="0"/>
+              <a:t> no Overleaf</a:t>
             </a:r>
           </a:p>
         </p:txBody>
@@ -7905,365 +9892,611 @@
           <a:lstStyle/>
           <a:p>
             <a:pPr algn="ctr"/>
+            <a:endParaRPr/>
           </a:p>
         </p:txBody>
       </p:sp>
-      <p:graphicFrame>
-        <p:nvGraphicFramePr>
-          <p:cNvPr id="4" name="Table 3"/>
-          <p:cNvGraphicFramePr>
-            <a:graphicFrameLocks noGrp="1"/>
-          </p:cNvGraphicFramePr>
+      <p:sp>
+        <p:nvSpPr>
+          <p:cNvPr id="4" name="TextBox 3"/>
+          <p:cNvSpPr txBox="1"/>
           <p:nvPr/>
-        </p:nvGraphicFramePr>
-        <p:xfrm>
-          <a:off x="457200" y="1371600"/>
-          <a:ext cx="11887200" cy="4754880"/>
-        </p:xfrm>
-        <a:graphic>
-          <a:graphicData uri="http://schemas.openxmlformats.org/drawingml/2006/table">
-            <a:tbl>
-              <a:tblPr firstRow="1" bandRow="1">
-                <a:tableStyleId>{5C22544A-7EE6-4342-B048-85BDC9FD1C3A}</a:tableStyleId>
-              </a:tblPr>
-              <a:tblGrid>
-                <a:gridCol w="457200"/>
-                <a:gridCol w="5029200"/>
-                <a:gridCol w="1828800"/>
-                <a:gridCol w="4572000"/>
-              </a:tblGrid>
-              <a:tr h="1188720">
-                <a:tc>
-                  <a:txBody>
-                    <a:bodyPr/>
-                    <a:lstStyle/>
-                    <a:p>
-                      <a:r>
-                        <a:rPr sz="1300" b="1">
-                          <a:solidFill>
-                            <a:srgbClr val="FFFFFF"/>
-                          </a:solidFill>
-                        </a:rPr>
-                        <a:t>#</a:t>
-                      </a:r>
-                    </a:p>
-                  </a:txBody>
-                  <a:tcPr>
-                    <a:solidFill>
-                      <a:srgbClr val="1F2A4E"/>
-                    </a:solidFill>
-                  </a:tcPr>
-                </a:tc>
-                <a:tc>
-                  <a:txBody>
-                    <a:bodyPr/>
-                    <a:lstStyle/>
-                    <a:p>
-                      <a:r>
-                        <a:rPr sz="1300" b="1">
-                          <a:solidFill>
-                            <a:srgbClr val="FFFFFF"/>
-                          </a:solidFill>
-                        </a:rPr>
-                        <a:t>Marco</a:t>
-                      </a:r>
-                    </a:p>
-                  </a:txBody>
-                  <a:tcPr>
-                    <a:solidFill>
-                      <a:srgbClr val="1F2A4E"/>
-                    </a:solidFill>
-                  </a:tcPr>
-                </a:tc>
-                <a:tc>
-                  <a:txBody>
-                    <a:bodyPr/>
-                    <a:lstStyle/>
-                    <a:p>
-                      <a:r>
-                        <a:rPr sz="1300" b="1">
-                          <a:solidFill>
-                            <a:srgbClr val="FFFFFF"/>
-                          </a:solidFill>
-                        </a:rPr>
-                        <a:t>Data</a:t>
-                      </a:r>
-                    </a:p>
-                  </a:txBody>
-                  <a:tcPr>
-                    <a:solidFill>
-                      <a:srgbClr val="1F2A4E"/>
-                    </a:solidFill>
-                  </a:tcPr>
-                </a:tc>
-                <a:tc>
-                  <a:txBody>
-                    <a:bodyPr/>
-                    <a:lstStyle/>
-                    <a:p>
-                      <a:r>
-                        <a:rPr sz="1300" b="1">
-                          <a:solidFill>
-                            <a:srgbClr val="FFFFFF"/>
-                          </a:solidFill>
-                        </a:rPr>
-                        <a:t>Comentário</a:t>
-                      </a:r>
-                    </a:p>
-                  </a:txBody>
-                  <a:tcPr>
-                    <a:solidFill>
-                      <a:srgbClr val="1F2A4E"/>
-                    </a:solidFill>
-                  </a:tcPr>
-                </a:tc>
-              </a:tr>
-              <a:tr h="1188720">
-                <a:tc>
-                  <a:txBody>
-                    <a:bodyPr/>
-                    <a:lstStyle/>
-                    <a:p>
-                      <a:r>
-                        <a:rPr sz="1100">
-                          <a:solidFill>
-                            <a:srgbClr val="3D424E"/>
-                          </a:solidFill>
-                        </a:rPr>
-                        <a:t>1</a:t>
-                      </a:r>
-                    </a:p>
-                  </a:txBody>
-                  <a:tcPr>
-                    <a:solidFill>
-                      <a:srgbClr val="E8EAED"/>
-                    </a:solidFill>
-                  </a:tcPr>
-                </a:tc>
-                <a:tc>
-                  <a:txBody>
-                    <a:bodyPr/>
-                    <a:lstStyle/>
-                    <a:p>
-                      <a:r>
-                        <a:rPr sz="1100">
-                          <a:solidFill>
-                            <a:srgbClr val="3D424E"/>
-                          </a:solidFill>
-                        </a:rPr>
-                        <a:t>Primeira revisão da qualificação ao orientador</a:t>
-                      </a:r>
-                    </a:p>
-                  </a:txBody>
-                  <a:tcPr>
-                    <a:solidFill>
-                      <a:srgbClr val="E8EAED"/>
-                    </a:solidFill>
-                  </a:tcPr>
-                </a:tc>
-                <a:tc>
-                  <a:txBody>
-                    <a:bodyPr/>
-                    <a:lstStyle/>
-                    <a:p>
-                      <a:r>
-                        <a:rPr sz="1100">
-                          <a:solidFill>
-                            <a:srgbClr val="3D424E"/>
-                          </a:solidFill>
-                        </a:rPr>
-                        <a:t>15/jul/2026</a:t>
-                      </a:r>
-                    </a:p>
-                  </a:txBody>
-                  <a:tcPr>
-                    <a:solidFill>
-                      <a:srgbClr val="E8EAED"/>
-                    </a:solidFill>
-                  </a:tcPr>
-                </a:tc>
-                <a:tc>
-                  <a:txBody>
-                    <a:bodyPr/>
-                    <a:lstStyle/>
-                    <a:p>
-                      <a:r>
-                        <a:rPr sz="1100">
-                          <a:solidFill>
-                            <a:srgbClr val="3D424E"/>
-                          </a:solidFill>
-                        </a:rPr>
-                        <a:t>Overleaf compartilhado hoje; Cap 1, 3, 4, 5 em versão inicial; Cap 2 em revisão ativa</a:t>
-                      </a:r>
-                    </a:p>
-                  </a:txBody>
-                  <a:tcPr>
-                    <a:solidFill>
-                      <a:srgbClr val="E8EAED"/>
-                    </a:solidFill>
-                  </a:tcPr>
-                </a:tc>
-              </a:tr>
-              <a:tr h="1188720">
-                <a:tc>
-                  <a:txBody>
-                    <a:bodyPr/>
-                    <a:lstStyle/>
-                    <a:p>
-                      <a:r>
-                        <a:rPr sz="1100">
-                          <a:solidFill>
-                            <a:srgbClr val="3D424E"/>
-                          </a:solidFill>
-                        </a:rPr>
-                        <a:t>2</a:t>
-                      </a:r>
-                    </a:p>
-                  </a:txBody>
-                  <a:tcPr/>
-                </a:tc>
-                <a:tc>
-                  <a:txBody>
-                    <a:bodyPr/>
-                    <a:lstStyle/>
-                    <a:p>
-                      <a:r>
-                        <a:rPr sz="1100">
-                          <a:solidFill>
-                            <a:srgbClr val="3D424E"/>
-                          </a:solidFill>
-                        </a:rPr>
-                        <a:t>Pedido formal de qualificação ao PPG-CC / ICT</a:t>
-                      </a:r>
-                    </a:p>
-                  </a:txBody>
-                  <a:tcPr/>
-                </a:tc>
-                <a:tc>
-                  <a:txBody>
-                    <a:bodyPr/>
-                    <a:lstStyle/>
-                    <a:p>
-                      <a:r>
-                        <a:rPr sz="1100">
-                          <a:solidFill>
-                            <a:srgbClr val="3D424E"/>
-                          </a:solidFill>
-                        </a:rPr>
-                        <a:t>30/jul/2026</a:t>
-                      </a:r>
-                    </a:p>
-                  </a:txBody>
-                  <a:tcPr/>
-                </a:tc>
-                <a:tc>
-                  <a:txBody>
-                    <a:bodyPr/>
-                    <a:lstStyle/>
-                    <a:p>
-                      <a:r>
-                        <a:rPr sz="1100">
-                          <a:solidFill>
-                            <a:srgbClr val="3D424E"/>
-                          </a:solidFill>
-                        </a:rPr>
-                        <a:t>Prazo regimental do Programa — mantido</a:t>
-                      </a:r>
-                    </a:p>
-                  </a:txBody>
-                  <a:tcPr/>
-                </a:tc>
-              </a:tr>
-              <a:tr h="1188720">
-                <a:tc>
-                  <a:txBody>
-                    <a:bodyPr/>
-                    <a:lstStyle/>
-                    <a:p>
-                      <a:r>
-                        <a:rPr sz="1100">
-                          <a:solidFill>
-                            <a:srgbClr val="3D424E"/>
-                          </a:solidFill>
-                        </a:rPr>
-                        <a:t>3</a:t>
-                      </a:r>
-                    </a:p>
-                  </a:txBody>
-                  <a:tcPr>
-                    <a:solidFill>
-                      <a:srgbClr val="E8EAED"/>
-                    </a:solidFill>
-                  </a:tcPr>
-                </a:tc>
-                <a:tc>
-                  <a:txBody>
-                    <a:bodyPr/>
-                    <a:lstStyle/>
-                    <a:p>
-                      <a:r>
-                        <a:rPr sz="1100">
-                          <a:solidFill>
-                            <a:srgbClr val="3D424E"/>
-                          </a:solidFill>
-                        </a:rPr>
-                        <a:t>Defesa da qualificação</a:t>
-                      </a:r>
-                    </a:p>
-                  </a:txBody>
-                  <a:tcPr>
-                    <a:solidFill>
-                      <a:srgbClr val="E8EAED"/>
-                    </a:solidFill>
-                  </a:tcPr>
-                </a:tc>
-                <a:tc>
-                  <a:txBody>
-                    <a:bodyPr/>
-                    <a:lstStyle/>
-                    <a:p>
-                      <a:r>
-                        <a:rPr sz="1100">
-                          <a:solidFill>
-                            <a:srgbClr val="3D424E"/>
-                          </a:solidFill>
-                        </a:rPr>
-                        <a:t>outubro/2026</a:t>
-                      </a:r>
-                    </a:p>
-                  </a:txBody>
-                  <a:tcPr>
-                    <a:solidFill>
-                      <a:srgbClr val="E8EAED"/>
-                    </a:solidFill>
-                  </a:tcPr>
-                </a:tc>
-                <a:tc>
-                  <a:txBody>
-                    <a:bodyPr/>
-                    <a:lstStyle/>
-                    <a:p>
-                      <a:r>
-                        <a:rPr sz="1100">
-                          <a:solidFill>
-                            <a:srgbClr val="3D424E"/>
-                          </a:solidFill>
-                        </a:rPr>
-                        <a:t>Ajuste de agosto → outubro (extensão de 2 meses solicitada)</a:t>
-                      </a:r>
-                    </a:p>
-                  </a:txBody>
-                  <a:tcPr>
-                    <a:solidFill>
-                      <a:srgbClr val="E8EAED"/>
-                    </a:solidFill>
-                  </a:tcPr>
-                </a:tc>
-              </a:tr>
-            </a:tbl>
-          </a:graphicData>
-        </a:graphic>
-      </p:graphicFrame>
+        </p:nvSpPr>
+        <p:spPr>
+          <a:xfrm>
+            <a:off x="457200" y="1371600"/>
+            <a:ext cx="11430000" cy="2431435"/>
+          </a:xfrm>
+          <a:prstGeom prst="rect">
+            <a:avLst/>
+          </a:prstGeom>
+          <a:noFill/>
+        </p:spPr>
+        <p:txBody>
+          <a:bodyPr wrap="square">
+            <a:spAutoFit/>
+          </a:bodyPr>
+          <a:lstStyle/>
+          <a:p>
+            <a:pPr>
+              <a:spcAft>
+                <a:spcPts val="800"/>
+              </a:spcAft>
+            </a:pPr>
+            <a:r>
+              <a:rPr sz="1600" b="1" dirty="0">
+                <a:solidFill>
+                  <a:srgbClr val="1F2A4E"/>
+                </a:solidFill>
+              </a:rPr>
+              <a:t>Cap 1 — </a:t>
+            </a:r>
+            <a:r>
+              <a:rPr sz="1600" b="1" dirty="0" err="1">
+                <a:solidFill>
+                  <a:srgbClr val="1F2A4E"/>
+                </a:solidFill>
+              </a:rPr>
+              <a:t>Introdução</a:t>
+            </a:r>
+            <a:r>
+              <a:rPr sz="1600" b="1" dirty="0">
+                <a:solidFill>
+                  <a:srgbClr val="1F2A4E"/>
+                </a:solidFill>
+              </a:rPr>
+              <a:t>:  </a:t>
+            </a:r>
+            <a:r>
+              <a:rPr sz="1600" dirty="0">
+                <a:solidFill>
+                  <a:srgbClr val="3D424E"/>
+                </a:solidFill>
+              </a:rPr>
+              <a:t>no Overleaf, </a:t>
+            </a:r>
+            <a:r>
+              <a:rPr sz="1600" dirty="0" err="1">
+                <a:solidFill>
+                  <a:srgbClr val="3D424E"/>
+                </a:solidFill>
+              </a:rPr>
+              <a:t>versão</a:t>
+            </a:r>
+            <a:r>
+              <a:rPr sz="1600" dirty="0">
+                <a:solidFill>
+                  <a:srgbClr val="3D424E"/>
+                </a:solidFill>
+              </a:rPr>
+              <a:t> </a:t>
+            </a:r>
+            <a:r>
+              <a:rPr sz="1600" dirty="0" err="1">
+                <a:solidFill>
+                  <a:srgbClr val="3D424E"/>
+                </a:solidFill>
+              </a:rPr>
+              <a:t>inicial</a:t>
+            </a:r>
+            <a:r>
+              <a:rPr sz="1600" dirty="0">
+                <a:solidFill>
+                  <a:srgbClr val="3D424E"/>
+                </a:solidFill>
+              </a:rPr>
+              <a:t> completa; </a:t>
+            </a:r>
+            <a:r>
+              <a:rPr sz="1600" dirty="0" err="1">
+                <a:solidFill>
+                  <a:srgbClr val="3D424E"/>
+                </a:solidFill>
+              </a:rPr>
+              <a:t>ancora</a:t>
+            </a:r>
+            <a:r>
+              <a:rPr sz="1600" dirty="0">
+                <a:solidFill>
+                  <a:srgbClr val="3D424E"/>
+                </a:solidFill>
+              </a:rPr>
+              <a:t> a </a:t>
+            </a:r>
+            <a:r>
+              <a:rPr sz="1600" dirty="0" err="1">
+                <a:solidFill>
+                  <a:srgbClr val="3D424E"/>
+                </a:solidFill>
+              </a:rPr>
+              <a:t>disparidade</a:t>
+            </a:r>
+            <a:r>
+              <a:rPr sz="1600" dirty="0">
+                <a:solidFill>
+                  <a:srgbClr val="3D424E"/>
+                </a:solidFill>
+              </a:rPr>
+              <a:t> Black 90% × Latinx 60%</a:t>
+            </a:r>
+          </a:p>
+          <a:p>
+            <a:pPr>
+              <a:spcAft>
+                <a:spcPts val="800"/>
+              </a:spcAft>
+            </a:pPr>
+            <a:r>
+              <a:rPr sz="1600" b="1" dirty="0">
+                <a:solidFill>
+                  <a:srgbClr val="1F2A4E"/>
+                </a:solidFill>
+              </a:rPr>
+              <a:t>Cap 2 — </a:t>
+            </a:r>
+            <a:r>
+              <a:rPr sz="1600" b="1" dirty="0" err="1">
+                <a:solidFill>
+                  <a:srgbClr val="1F2A4E"/>
+                </a:solidFill>
+              </a:rPr>
+              <a:t>Revisão</a:t>
+            </a:r>
+            <a:r>
+              <a:rPr sz="1600" b="1" dirty="0">
+                <a:solidFill>
+                  <a:srgbClr val="1F2A4E"/>
+                </a:solidFill>
+              </a:rPr>
+              <a:t>:  </a:t>
+            </a:r>
+            <a:r>
+              <a:rPr sz="1600" dirty="0" err="1">
+                <a:solidFill>
+                  <a:srgbClr val="3D424E"/>
+                </a:solidFill>
+              </a:rPr>
+              <a:t>em</a:t>
+            </a:r>
+            <a:r>
+              <a:rPr sz="1600" dirty="0">
+                <a:solidFill>
+                  <a:srgbClr val="3D424E"/>
+                </a:solidFill>
+              </a:rPr>
+              <a:t> </a:t>
+            </a:r>
+            <a:r>
+              <a:rPr sz="1600" dirty="0" err="1">
+                <a:solidFill>
+                  <a:srgbClr val="3D424E"/>
+                </a:solidFill>
+              </a:rPr>
+              <a:t>escrita</a:t>
+            </a:r>
+            <a:r>
+              <a:rPr sz="1600" dirty="0">
+                <a:solidFill>
+                  <a:srgbClr val="3D424E"/>
+                </a:solidFill>
+              </a:rPr>
+              <a:t> e </a:t>
+            </a:r>
+            <a:r>
+              <a:rPr sz="1600" dirty="0" err="1">
+                <a:solidFill>
+                  <a:srgbClr val="3D424E"/>
+                </a:solidFill>
+              </a:rPr>
+              <a:t>revisão</a:t>
+            </a:r>
+            <a:r>
+              <a:rPr sz="1600" dirty="0">
+                <a:solidFill>
+                  <a:srgbClr val="3D424E"/>
+                </a:solidFill>
+              </a:rPr>
+              <a:t> </a:t>
+            </a:r>
+            <a:r>
+              <a:rPr sz="1600" dirty="0" err="1">
+                <a:solidFill>
+                  <a:srgbClr val="3D424E"/>
+                </a:solidFill>
+              </a:rPr>
+              <a:t>ativa</a:t>
+            </a:r>
+            <a:r>
+              <a:rPr sz="1600" dirty="0">
+                <a:solidFill>
+                  <a:srgbClr val="3D424E"/>
+                </a:solidFill>
+              </a:rPr>
+              <a:t>; </a:t>
+            </a:r>
+            <a:r>
+              <a:rPr sz="1600" dirty="0" err="1">
+                <a:solidFill>
+                  <a:srgbClr val="3D424E"/>
+                </a:solidFill>
+              </a:rPr>
+              <a:t>corpo</a:t>
+            </a:r>
+            <a:r>
+              <a:rPr sz="1600" dirty="0">
+                <a:solidFill>
+                  <a:srgbClr val="3D424E"/>
+                </a:solidFill>
+              </a:rPr>
+              <a:t> </a:t>
+            </a:r>
+            <a:r>
+              <a:rPr sz="1600" dirty="0" err="1">
+                <a:solidFill>
+                  <a:srgbClr val="3D424E"/>
+                </a:solidFill>
+              </a:rPr>
+              <a:t>bibliográfico</a:t>
+            </a:r>
+            <a:r>
+              <a:rPr sz="1600" dirty="0">
+                <a:solidFill>
+                  <a:srgbClr val="3D424E"/>
+                </a:solidFill>
+              </a:rPr>
+              <a:t> </a:t>
+            </a:r>
+            <a:r>
+              <a:rPr sz="1600" dirty="0" err="1">
+                <a:solidFill>
+                  <a:srgbClr val="3D424E"/>
+                </a:solidFill>
+              </a:rPr>
+              <a:t>está</a:t>
+            </a:r>
+            <a:r>
+              <a:rPr sz="1600" dirty="0">
+                <a:solidFill>
+                  <a:srgbClr val="3D424E"/>
+                </a:solidFill>
+              </a:rPr>
+              <a:t> </a:t>
+            </a:r>
+            <a:r>
+              <a:rPr sz="1600" dirty="0" err="1">
+                <a:solidFill>
+                  <a:srgbClr val="3D424E"/>
+                </a:solidFill>
+              </a:rPr>
+              <a:t>sendo</a:t>
+            </a:r>
+            <a:r>
+              <a:rPr sz="1600" dirty="0">
+                <a:solidFill>
+                  <a:srgbClr val="3D424E"/>
+                </a:solidFill>
+              </a:rPr>
+              <a:t> </a:t>
+            </a:r>
+            <a:r>
+              <a:rPr sz="1600" dirty="0" err="1">
+                <a:solidFill>
+                  <a:srgbClr val="3D424E"/>
+                </a:solidFill>
+              </a:rPr>
+              <a:t>densificado</a:t>
+            </a:r>
+            <a:r>
+              <a:rPr sz="1600" dirty="0">
+                <a:solidFill>
+                  <a:srgbClr val="3D424E"/>
+                </a:solidFill>
+              </a:rPr>
+              <a:t> com 104 </a:t>
+            </a:r>
+            <a:r>
+              <a:rPr sz="1600" dirty="0" err="1">
+                <a:solidFill>
+                  <a:srgbClr val="3D424E"/>
+                </a:solidFill>
+              </a:rPr>
+              <a:t>referências</a:t>
+            </a:r>
+            <a:r>
+              <a:rPr sz="1600" dirty="0">
+                <a:solidFill>
+                  <a:srgbClr val="3D424E"/>
+                </a:solidFill>
+              </a:rPr>
+              <a:t> </a:t>
+            </a:r>
+            <a:r>
+              <a:rPr sz="1600" dirty="0" err="1">
+                <a:solidFill>
+                  <a:srgbClr val="3D424E"/>
+                </a:solidFill>
+              </a:rPr>
+              <a:t>mapeadas</a:t>
+            </a:r>
+            <a:endParaRPr sz="1600" dirty="0">
+              <a:solidFill>
+                <a:srgbClr val="3D424E"/>
+              </a:solidFill>
+            </a:endParaRPr>
+          </a:p>
+          <a:p>
+            <a:pPr>
+              <a:spcAft>
+                <a:spcPts val="800"/>
+              </a:spcAft>
+            </a:pPr>
+            <a:r>
+              <a:rPr sz="1600" b="1" dirty="0">
+                <a:solidFill>
+                  <a:srgbClr val="1F2A4E"/>
+                </a:solidFill>
+              </a:rPr>
+              <a:t>Cap 3 — </a:t>
+            </a:r>
+            <a:r>
+              <a:rPr sz="1600" b="1" dirty="0" err="1">
+                <a:solidFill>
+                  <a:srgbClr val="1F2A4E"/>
+                </a:solidFill>
+              </a:rPr>
+              <a:t>Objetivos</a:t>
+            </a:r>
+            <a:r>
+              <a:rPr sz="1600" b="1" dirty="0">
+                <a:solidFill>
+                  <a:srgbClr val="1F2A4E"/>
+                </a:solidFill>
+              </a:rPr>
+              <a:t>:  </a:t>
+            </a:r>
+            <a:r>
+              <a:rPr lang="pt-BR" sz="1600" dirty="0">
+                <a:solidFill>
+                  <a:srgbClr val="3D424E"/>
+                </a:solidFill>
+              </a:rPr>
+              <a:t>requer escrita e revisão</a:t>
+            </a:r>
+            <a:endParaRPr sz="1600" dirty="0">
+              <a:solidFill>
+                <a:srgbClr val="3D424E"/>
+              </a:solidFill>
+            </a:endParaRPr>
+          </a:p>
+          <a:p>
+            <a:pPr>
+              <a:spcAft>
+                <a:spcPts val="800"/>
+              </a:spcAft>
+            </a:pPr>
+            <a:r>
+              <a:rPr sz="1600" b="1" dirty="0">
+                <a:solidFill>
+                  <a:srgbClr val="1F2A4E"/>
+                </a:solidFill>
+              </a:rPr>
+              <a:t>Cap 4 — </a:t>
+            </a:r>
+            <a:r>
+              <a:rPr sz="1600" b="1" dirty="0" err="1">
+                <a:solidFill>
+                  <a:srgbClr val="1F2A4E"/>
+                </a:solidFill>
+              </a:rPr>
+              <a:t>Metodologia</a:t>
+            </a:r>
+            <a:r>
+              <a:rPr sz="1600" b="1" dirty="0">
+                <a:solidFill>
+                  <a:srgbClr val="1F2A4E"/>
+                </a:solidFill>
+              </a:rPr>
+              <a:t>: </a:t>
+            </a:r>
+            <a:r>
+              <a:rPr lang="pt-BR" sz="1600" dirty="0">
+                <a:solidFill>
+                  <a:srgbClr val="3D424E"/>
+                </a:solidFill>
+              </a:rPr>
+              <a:t>requer escrita e revisão</a:t>
+            </a:r>
+            <a:endParaRPr sz="1600" dirty="0">
+              <a:solidFill>
+                <a:srgbClr val="3D424E"/>
+              </a:solidFill>
+            </a:endParaRPr>
+          </a:p>
+          <a:p>
+            <a:pPr>
+              <a:spcAft>
+                <a:spcPts val="800"/>
+              </a:spcAft>
+            </a:pPr>
+            <a:r>
+              <a:rPr sz="1600" b="1" dirty="0">
+                <a:solidFill>
+                  <a:srgbClr val="1F2A4E"/>
+                </a:solidFill>
+              </a:rPr>
+              <a:t>Cap 5 — </a:t>
+            </a:r>
+            <a:r>
+              <a:rPr sz="1600" b="1" dirty="0" err="1">
+                <a:solidFill>
+                  <a:srgbClr val="1F2A4E"/>
+                </a:solidFill>
+              </a:rPr>
+              <a:t>Cronograma</a:t>
+            </a:r>
+            <a:r>
+              <a:rPr lang="pt-BR" sz="1600" dirty="0">
+                <a:solidFill>
+                  <a:srgbClr val="3D424E"/>
+                </a:solidFill>
+              </a:rPr>
+              <a:t> requer escrita e revisão</a:t>
+            </a:r>
+            <a:endParaRPr sz="1600" dirty="0">
+              <a:solidFill>
+                <a:srgbClr val="3D424E"/>
+              </a:solidFill>
+            </a:endParaRPr>
+          </a:p>
+          <a:p>
+            <a:pPr>
+              <a:spcAft>
+                <a:spcPts val="800"/>
+              </a:spcAft>
+            </a:pPr>
+            <a:r>
+              <a:rPr sz="1600" b="1" dirty="0">
+                <a:solidFill>
+                  <a:srgbClr val="1F2A4E"/>
+                </a:solidFill>
+              </a:rPr>
+              <a:t>  </a:t>
+            </a:r>
+          </a:p>
+          <a:p>
+            <a:pPr>
+              <a:spcAft>
+                <a:spcPts val="800"/>
+              </a:spcAft>
+            </a:pPr>
+            <a:r>
+              <a:rPr sz="1600" b="1" dirty="0" err="1">
+                <a:solidFill>
+                  <a:srgbClr val="1F2A4E"/>
+                </a:solidFill>
+              </a:rPr>
+              <a:t>Transposição</a:t>
+            </a:r>
+            <a:r>
+              <a:rPr sz="1600" b="1" dirty="0">
+                <a:solidFill>
+                  <a:srgbClr val="1F2A4E"/>
+                </a:solidFill>
+              </a:rPr>
+              <a:t>:  </a:t>
+            </a:r>
+            <a:r>
+              <a:rPr sz="1600" dirty="0" err="1">
+                <a:solidFill>
+                  <a:srgbClr val="3D424E"/>
+                </a:solidFill>
+              </a:rPr>
+              <a:t>esqueleto</a:t>
+            </a:r>
+            <a:r>
+              <a:rPr sz="1600" dirty="0">
+                <a:solidFill>
+                  <a:srgbClr val="3D424E"/>
+                </a:solidFill>
+              </a:rPr>
+              <a:t> no Overleaf; </a:t>
+            </a:r>
+            <a:r>
+              <a:rPr sz="1600" dirty="0" err="1">
+                <a:solidFill>
+                  <a:srgbClr val="3D424E"/>
+                </a:solidFill>
+              </a:rPr>
+              <a:t>bibliografia</a:t>
+            </a:r>
+            <a:r>
+              <a:rPr sz="1600" dirty="0">
+                <a:solidFill>
+                  <a:srgbClr val="3D424E"/>
+                </a:solidFill>
+              </a:rPr>
+              <a:t> .bib com 104 entradas </a:t>
+            </a:r>
+            <a:r>
+              <a:rPr sz="1600" dirty="0" err="1">
+                <a:solidFill>
+                  <a:srgbClr val="3D424E"/>
+                </a:solidFill>
+              </a:rPr>
+              <a:t>importada</a:t>
+            </a:r>
+            <a:r>
+              <a:rPr sz="1600" dirty="0">
+                <a:solidFill>
+                  <a:srgbClr val="3D424E"/>
+                </a:solidFill>
+              </a:rPr>
+              <a:t>; </a:t>
+            </a:r>
+            <a:r>
+              <a:rPr sz="1600" dirty="0" err="1">
+                <a:solidFill>
+                  <a:srgbClr val="3D424E"/>
+                </a:solidFill>
+              </a:rPr>
+              <a:t>referências</a:t>
+            </a:r>
+            <a:r>
+              <a:rPr sz="1600" dirty="0">
+                <a:solidFill>
+                  <a:srgbClr val="3D424E"/>
+                </a:solidFill>
+              </a:rPr>
+              <a:t> </a:t>
+            </a:r>
+            <a:r>
+              <a:rPr sz="1600" dirty="0" err="1">
+                <a:solidFill>
+                  <a:srgbClr val="3D424E"/>
+                </a:solidFill>
+              </a:rPr>
+              <a:t>cruzadas</a:t>
+            </a:r>
+            <a:r>
+              <a:rPr sz="1600" dirty="0">
+                <a:solidFill>
+                  <a:srgbClr val="3D424E"/>
+                </a:solidFill>
+              </a:rPr>
+              <a:t> </a:t>
+            </a:r>
+            <a:r>
+              <a:rPr sz="1600" dirty="0" err="1">
+                <a:solidFill>
+                  <a:srgbClr val="3D424E"/>
+                </a:solidFill>
+              </a:rPr>
+              <a:t>testadas</a:t>
+            </a:r>
+            <a:r>
+              <a:rPr lang="pt-BR" sz="1600" dirty="0">
+                <a:solidFill>
+                  <a:srgbClr val="3D424E"/>
+                </a:solidFill>
+              </a:rPr>
+              <a:t> no </a:t>
+            </a:r>
+            <a:r>
+              <a:rPr lang="pt-BR" sz="1600" dirty="0" err="1">
+                <a:solidFill>
+                  <a:srgbClr val="3D424E"/>
+                </a:solidFill>
+              </a:rPr>
+              <a:t>NotebookLLM</a:t>
+            </a:r>
+            <a:endParaRPr sz="1600" dirty="0">
+              <a:solidFill>
+                <a:srgbClr val="3D424E"/>
+              </a:solidFill>
+            </a:endParaRPr>
+          </a:p>
+        </p:txBody>
+      </p:sp>
       <p:sp>
         <p:nvSpPr>
           <p:cNvPr id="5" name="TextBox 4"/>
@@ -8294,7 +10527,7 @@
               </a:defRPr>
             </a:pPr>
             <a:r>
-              <a:t>Marco 1 antecipado em dois dias. Marcos 2 e 3 conforme planejado.</a:t>
+              <a:t>Cap 2 é o capítulo mais denso e onde ainda concentro esforço técnico esta semana.</a:t>
             </a:r>
           </a:p>
         </p:txBody>
@@ -8307,8 +10540,8 @@
 </p:sld>
 </file>
 
-<file path=ppt/slides/slide7.xml><?xml version="1.0" encoding="utf-8"?>
-<p:sld xmlns:a="http://schemas.openxmlformats.org/drawingml/2006/main" xmlns:p="http://schemas.openxmlformats.org/presentationml/2006/main" xmlns:r="http://schemas.openxmlformats.org/officeDocument/2006/relationships">
+<file path=ppt/slides/slide9.xml><?xml version="1.0" encoding="utf-8"?>
+<p:sld xmlns:a="http://schemas.openxmlformats.org/drawingml/2006/main" xmlns:r="http://schemas.openxmlformats.org/officeDocument/2006/relationships" xmlns:p="http://schemas.openxmlformats.org/presentationml/2006/main">
   <p:cSld>
     <p:spTree>
       <p:nvGrpSpPr>
@@ -8316,150 +10549,14 @@
         <p:cNvGrpSpPr/>
         <p:nvPr/>
       </p:nvGrpSpPr>
-      <p:grpSpPr/>
-      <p:sp>
-        <p:nvSpPr>
-          <p:cNvPr id="2" name="Rectangle 1"/>
-          <p:cNvSpPr/>
-          <p:nvPr/>
-        </p:nvSpPr>
-        <p:spPr>
-          <a:xfrm>
-            <a:off x="0" y="0"/>
-            <a:ext cx="12188952" cy="6858000"/>
-          </a:xfrm>
-          <a:prstGeom prst="rect">
-            <a:avLst/>
-          </a:prstGeom>
-          <a:solidFill>
-            <a:srgbClr val="1F2A4E"/>
-          </a:solidFill>
-          <a:ln>
-            <a:noFill/>
-          </a:ln>
-        </p:spPr>
-        <p:style>
-          <a:lnRef idx="1">
-            <a:schemeClr val="accent1"/>
-          </a:lnRef>
-          <a:fillRef idx="3">
-            <a:schemeClr val="accent1"/>
-          </a:fillRef>
-          <a:effectRef idx="2">
-            <a:schemeClr val="accent1"/>
-          </a:effectRef>
-          <a:fontRef idx="minor">
-            <a:schemeClr val="lt1"/>
-          </a:fontRef>
-        </p:style>
-        <p:txBody>
-          <a:bodyPr rtlCol="0" anchor="ctr"/>
-          <a:lstStyle/>
-          <a:p>
-            <a:pPr algn="ctr"/>
-          </a:p>
-        </p:txBody>
-      </p:sp>
-      <p:sp>
-        <p:nvSpPr>
-          <p:cNvPr id="3" name="TextBox 2"/>
-          <p:cNvSpPr txBox="1"/>
-          <p:nvPr/>
-        </p:nvSpPr>
-        <p:spPr>
-          <a:xfrm>
-            <a:off x="731520" y="1371600"/>
-            <a:ext cx="2743200" cy="2743200"/>
-          </a:xfrm>
-          <a:prstGeom prst="rect">
-            <a:avLst/>
-          </a:prstGeom>
-          <a:noFill/>
-        </p:spPr>
-        <p:txBody>
-          <a:bodyPr wrap="none">
-            <a:spAutoFit/>
-          </a:bodyPr>
-          <a:lstStyle/>
-          <a:p>
-            <a:pPr>
-              <a:defRPr sz="14000" b="1">
-                <a:solidFill>
-                  <a:srgbClr val="FFFFFF"/>
-                </a:solidFill>
-              </a:defRPr>
-            </a:pPr>
-            <a:r>
-              <a:t>2</a:t>
-            </a:r>
-          </a:p>
-        </p:txBody>
-      </p:sp>
-      <p:sp>
-        <p:nvSpPr>
-          <p:cNvPr id="4" name="TextBox 3"/>
-          <p:cNvSpPr txBox="1"/>
-          <p:nvPr/>
-        </p:nvSpPr>
-        <p:spPr>
-          <a:xfrm>
-            <a:off x="3931920" y="2286000"/>
-            <a:ext cx="7772400" cy="1828800"/>
-          </a:xfrm>
-          <a:prstGeom prst="rect">
-            <a:avLst/>
-          </a:prstGeom>
-          <a:noFill/>
-        </p:spPr>
-        <p:txBody>
-          <a:bodyPr wrap="square">
-            <a:spAutoFit/>
-          </a:bodyPr>
-          <a:lstStyle/>
-          <a:p>
-            <a:pPr>
-              <a:defRPr sz="3600" b="1">
-                <a:solidFill>
-                  <a:srgbClr val="FFFFFF"/>
-                </a:solidFill>
-              </a:defRPr>
-            </a:pPr>
-            <a:r>
-              <a:t>Estado da escrita</a:t>
-            </a:r>
-          </a:p>
-          <a:p>
-            <a:pPr>
-              <a:defRPr sz="1800">
-                <a:solidFill>
-                  <a:srgbClr val="E8EAED"/>
-                </a:solidFill>
-              </a:defRPr>
-            </a:pPr>
-            <a:r>
-              <a:t>O que já está escrito e como vai virar Overleaf</a:t>
-            </a:r>
-          </a:p>
-        </p:txBody>
-      </p:sp>
-    </p:spTree>
-  </p:cSld>
-  <p:clrMapOvr>
-    <a:masterClrMapping/>
-  </p:clrMapOvr>
-</p:sld>
-</file>
-
-<file path=ppt/slides/slide8.xml><?xml version="1.0" encoding="utf-8"?>
-<p:sld xmlns:a="http://schemas.openxmlformats.org/drawingml/2006/main" xmlns:p="http://schemas.openxmlformats.org/presentationml/2006/main" xmlns:r="http://schemas.openxmlformats.org/officeDocument/2006/relationships">
-  <p:cSld>
-    <p:spTree>
-      <p:nvGrpSpPr>
-        <p:cNvPr id="1" name=""/>
-        <p:cNvGrpSpPr/>
-        <p:nvPr/>
-      </p:nvGrpSpPr>
-      <p:grpSpPr/>
+      <p:grpSpPr>
+        <a:xfrm>
+          <a:off x="0" y="0"/>
+          <a:ext cx="0" cy="0"/>
+          <a:chOff x="0" y="0"/>
+          <a:chExt cx="0" cy="0"/>
+        </a:xfrm>
+      </p:grpSpPr>
       <p:sp>
         <p:nvSpPr>
           <p:cNvPr id="2" name="TextBox 1"/>
@@ -8490,7 +10587,7 @@
               </a:defRPr>
             </a:pPr>
             <a:r>
-              <a:t>Estado real da escrita — qualificação no Overleaf</a:t>
+              <a:t>Pipeline proposto — seis etapas encadeadas</a:t>
             </a:r>
           </a:p>
         </p:txBody>
@@ -8535,344 +10632,7 @@
           <a:lstStyle/>
           <a:p>
             <a:pPr algn="ctr"/>
-          </a:p>
-        </p:txBody>
-      </p:sp>
-      <p:sp>
-        <p:nvSpPr>
-          <p:cNvPr id="4" name="TextBox 3"/>
-          <p:cNvSpPr txBox="1"/>
-          <p:nvPr/>
-        </p:nvSpPr>
-        <p:spPr>
-          <a:xfrm>
-            <a:off x="457200" y="1371600"/>
-            <a:ext cx="11430000" cy="4937760"/>
-          </a:xfrm>
-          <a:prstGeom prst="rect">
-            <a:avLst/>
-          </a:prstGeom>
-          <a:noFill/>
-        </p:spPr>
-        <p:txBody>
-          <a:bodyPr wrap="square">
-            <a:spAutoFit/>
-          </a:bodyPr>
-          <a:lstStyle/>
-          <a:p>
-            <a:pPr>
-              <a:spcAft>
-                <a:spcPts val="800"/>
-              </a:spcAft>
-            </a:pPr>
-            <a:r>
-              <a:rPr sz="1600" b="1">
-                <a:solidFill>
-                  <a:srgbClr val="1F2A4E"/>
-                </a:solidFill>
-              </a:rPr>
-              <a:t>Cap 1 — Introdução:  </a:t>
-            </a:r>
-            <a:r>
-              <a:rPr sz="1600">
-                <a:solidFill>
-                  <a:srgbClr val="3D424E"/>
-                </a:solidFill>
-              </a:rPr>
-              <a:t>no Overleaf, versão inicial completa; ancora a disparidade Black 90 % × Latinx 60 %</a:t>
-            </a:r>
-          </a:p>
-          <a:p>
-            <a:pPr>
-              <a:spcAft>
-                <a:spcPts val="800"/>
-              </a:spcAft>
-            </a:pPr>
-            <a:r>
-              <a:rPr sz="1600" b="1">
-                <a:solidFill>
-                  <a:srgbClr val="1F2A4E"/>
-                </a:solidFill>
-              </a:rPr>
-              <a:t>Cap 2 — Revisão:  </a:t>
-            </a:r>
-            <a:r>
-              <a:rPr sz="1600">
-                <a:solidFill>
-                  <a:srgbClr val="3D424E"/>
-                </a:solidFill>
-              </a:rPr>
-              <a:t>em escrita e revisão ativa; corpo bibliográfico está sendo densificado com 104 referências mapeadas</a:t>
-            </a:r>
-          </a:p>
-          <a:p>
-            <a:pPr>
-              <a:spcAft>
-                <a:spcPts val="800"/>
-              </a:spcAft>
-            </a:pPr>
-            <a:r>
-              <a:rPr sz="1600" b="1">
-                <a:solidFill>
-                  <a:srgbClr val="1F2A4E"/>
-                </a:solidFill>
-              </a:rPr>
-              <a:t>Cap 3 — Objetivos:  </a:t>
-            </a:r>
-            <a:r>
-              <a:rPr sz="1600">
-                <a:solidFill>
-                  <a:srgbClr val="3D424E"/>
-                </a:solidFill>
-              </a:rPr>
-              <a:t>no Overleaf; OG + 6 OE + 6 hipóteses + 7 contribuições</a:t>
-            </a:r>
-          </a:p>
-          <a:p>
-            <a:pPr>
-              <a:spcAft>
-                <a:spcPts val="800"/>
-              </a:spcAft>
-            </a:pPr>
-            <a:r>
-              <a:rPr sz="1600" b="1">
-                <a:solidFill>
-                  <a:srgbClr val="1F2A4E"/>
-                </a:solidFill>
-              </a:rPr>
-              <a:t>Cap 4 — Metodologia:  </a:t>
-            </a:r>
-            <a:r>
-              <a:rPr sz="1600">
-                <a:solidFill>
-                  <a:srgbClr val="3D424E"/>
-                </a:solidFill>
-              </a:rPr>
-              <a:t>no Overleaf; pipeline 6 etapas + 4 configurações + adequação ética CEP formalizada</a:t>
-            </a:r>
-          </a:p>
-          <a:p>
-            <a:pPr>
-              <a:spcAft>
-                <a:spcPts val="800"/>
-              </a:spcAft>
-            </a:pPr>
-            <a:r>
-              <a:rPr sz="1600" b="1">
-                <a:solidFill>
-                  <a:srgbClr val="1F2A4E"/>
-                </a:solidFill>
-              </a:rPr>
-              <a:t>Cap 5 — Cronograma:  </a:t>
-            </a:r>
-            <a:r>
-              <a:rPr sz="1600">
-                <a:solidFill>
-                  <a:srgbClr val="3D424E"/>
-                </a:solidFill>
-              </a:rPr>
-              <a:t>no Overleaf; marcos ajustados conforme plano consolidado</a:t>
-            </a:r>
-          </a:p>
-          <a:p>
-            <a:pPr>
-              <a:spcAft>
-                <a:spcPts val="800"/>
-              </a:spcAft>
-            </a:pPr>
-            <a:r>
-              <a:rPr sz="1600" b="1">
-                <a:solidFill>
-                  <a:srgbClr val="1F2A4E"/>
-                </a:solidFill>
-              </a:rPr>
-              <a:t>  </a:t>
-            </a:r>
-            <a:r>
-              <a:rPr sz="1600">
-                <a:solidFill>
-                  <a:srgbClr val="3D424E"/>
-                </a:solidFill>
-              </a:rPr>
-              <a:t/>
-            </a:r>
-          </a:p>
-          <a:p>
-            <a:pPr>
-              <a:spcAft>
-                <a:spcPts val="800"/>
-              </a:spcAft>
-            </a:pPr>
-            <a:r>
-              <a:rPr sz="1600" b="1">
-                <a:solidFill>
-                  <a:srgbClr val="1F2A4E"/>
-                </a:solidFill>
-              </a:rPr>
-              <a:t>Transposição:  </a:t>
-            </a:r>
-            <a:r>
-              <a:rPr sz="1600">
-                <a:solidFill>
-                  <a:srgbClr val="3D424E"/>
-                </a:solidFill>
-              </a:rPr>
-              <a:t>esqueleto no Overleaf; bibliografia .bib com 104 entradas importada; referências cruzadas testadas</a:t>
-            </a:r>
-          </a:p>
-          <a:p>
-            <a:pPr>
-              <a:spcAft>
-                <a:spcPts val="800"/>
-              </a:spcAft>
-            </a:pPr>
-            <a:r>
-              <a:rPr sz="1600" b="1">
-                <a:solidFill>
-                  <a:srgbClr val="1F2A4E"/>
-                </a:solidFill>
-              </a:rPr>
-              <a:t>Compartilhamento:  </a:t>
-            </a:r>
-            <a:r>
-              <a:rPr sz="1600">
-                <a:solidFill>
-                  <a:srgbClr val="3D424E"/>
-                </a:solidFill>
-              </a:rPr>
-              <a:t>convite do Overleaf enviado ao senhor a partir desta reunião — foco maior de revisão pedido no Cap 2</a:t>
-            </a:r>
-          </a:p>
-        </p:txBody>
-      </p:sp>
-      <p:sp>
-        <p:nvSpPr>
-          <p:cNvPr id="5" name="TextBox 4"/>
-          <p:cNvSpPr txBox="1"/>
-          <p:nvPr/>
-        </p:nvSpPr>
-        <p:spPr>
-          <a:xfrm>
-            <a:off x="457200" y="6446520"/>
-            <a:ext cx="11430000" cy="365760"/>
-          </a:xfrm>
-          <a:prstGeom prst="rect">
-            <a:avLst/>
-          </a:prstGeom>
-          <a:noFill/>
-        </p:spPr>
-        <p:txBody>
-          <a:bodyPr wrap="none">
-            <a:spAutoFit/>
-          </a:bodyPr>
-          <a:lstStyle/>
-          <a:p>
-            <a:pPr>
-              <a:defRPr sz="1000" i="1">
-                <a:solidFill>
-                  <a:srgbClr val="707682"/>
-                </a:solidFill>
-              </a:defRPr>
-            </a:pPr>
-            <a:r>
-              <a:t>Cap 2 é o capítulo mais denso e onde ainda concentro esforço técnico esta semana.</a:t>
-            </a:r>
-          </a:p>
-        </p:txBody>
-      </p:sp>
-    </p:spTree>
-  </p:cSld>
-  <p:clrMapOvr>
-    <a:masterClrMapping/>
-  </p:clrMapOvr>
-</p:sld>
-</file>
-
-<file path=ppt/slides/slide9.xml><?xml version="1.0" encoding="utf-8"?>
-<p:sld xmlns:a="http://schemas.openxmlformats.org/drawingml/2006/main" xmlns:p="http://schemas.openxmlformats.org/presentationml/2006/main" xmlns:r="http://schemas.openxmlformats.org/officeDocument/2006/relationships">
-  <p:cSld>
-    <p:spTree>
-      <p:nvGrpSpPr>
-        <p:cNvPr id="1" name=""/>
-        <p:cNvGrpSpPr/>
-        <p:nvPr/>
-      </p:nvGrpSpPr>
-      <p:grpSpPr/>
-      <p:sp>
-        <p:nvSpPr>
-          <p:cNvPr id="2" name="TextBox 1"/>
-          <p:cNvSpPr txBox="1"/>
-          <p:nvPr/>
-        </p:nvSpPr>
-        <p:spPr>
-          <a:xfrm>
-            <a:off x="457200" y="365760"/>
-            <a:ext cx="11430000" cy="822960"/>
-          </a:xfrm>
-          <a:prstGeom prst="rect">
-            <a:avLst/>
-          </a:prstGeom>
-          <a:noFill/>
-        </p:spPr>
-        <p:txBody>
-          <a:bodyPr wrap="square">
-            <a:spAutoFit/>
-          </a:bodyPr>
-          <a:lstStyle/>
-          <a:p>
-            <a:pPr>
-              <a:defRPr sz="2600" b="1">
-                <a:solidFill>
-                  <a:srgbClr val="1F2A4E"/>
-                </a:solidFill>
-              </a:defRPr>
-            </a:pPr>
-            <a:r>
-              <a:t>Pipeline proposto — seis etapas encadeadas</a:t>
-            </a:r>
-          </a:p>
-        </p:txBody>
-      </p:sp>
-      <p:sp>
-        <p:nvSpPr>
-          <p:cNvPr id="3" name="Rectangle 2"/>
-          <p:cNvSpPr/>
-          <p:nvPr/>
-        </p:nvSpPr>
-        <p:spPr>
-          <a:xfrm>
-            <a:off x="457200" y="1143000"/>
-            <a:ext cx="11430000" cy="36576"/>
-          </a:xfrm>
-          <a:prstGeom prst="rect">
-            <a:avLst/>
-          </a:prstGeom>
-          <a:solidFill>
-            <a:srgbClr val="1F2A4E"/>
-          </a:solidFill>
-          <a:ln>
-            <a:noFill/>
-          </a:ln>
-        </p:spPr>
-        <p:style>
-          <a:lnRef idx="1">
-            <a:schemeClr val="accent1"/>
-          </a:lnRef>
-          <a:fillRef idx="3">
-            <a:schemeClr val="accent1"/>
-          </a:fillRef>
-          <a:effectRef idx="2">
-            <a:schemeClr val="accent1"/>
-          </a:effectRef>
-          <a:fontRef idx="minor">
-            <a:schemeClr val="lt1"/>
-          </a:fontRef>
-        </p:style>
-        <p:txBody>
-          <a:bodyPr rtlCol="0" anchor="ctr"/>
-          <a:lstStyle/>
-          <a:p>
-            <a:pPr algn="ctr"/>
+            <a:endParaRPr/>
           </a:p>
         </p:txBody>
       </p:sp>
@@ -8882,7 +10642,13 @@
           <p:cNvGraphicFramePr>
             <a:graphicFrameLocks noGrp="1"/>
           </p:cNvGraphicFramePr>
-          <p:nvPr/>
+          <p:nvPr>
+            <p:extLst>
+              <p:ext uri="{D42A27DB-BD31-4B8C-83A1-F6EECF244321}">
+                <p14:modId xmlns:p14="http://schemas.microsoft.com/office/powerpoint/2010/main" val="2449496593"/>
+              </p:ext>
+            </p:extLst>
+          </p:nvPr>
         </p:nvGraphicFramePr>
         <p:xfrm>
           <a:off x="457200" y="1371600"/>
@@ -8895,9 +10661,27 @@
                 <a:tableStyleId>{5C22544A-7EE6-4342-B048-85BDC9FD1C3A}</a:tableStyleId>
               </a:tblPr>
               <a:tblGrid>
-                <a:gridCol w="2560320"/>
-                <a:gridCol w="5029200"/>
-                <a:gridCol w="3840480"/>
+                <a:gridCol w="2560320">
+                  <a:extLst>
+                    <a:ext uri="{9D8B030D-6E8A-4147-A177-3AD203B41FA5}">
+                      <a16:colId xmlns:a16="http://schemas.microsoft.com/office/drawing/2014/main" val="20000"/>
+                    </a:ext>
+                  </a:extLst>
+                </a:gridCol>
+                <a:gridCol w="5029200">
+                  <a:extLst>
+                    <a:ext uri="{9D8B030D-6E8A-4147-A177-3AD203B41FA5}">
+                      <a16:colId xmlns:a16="http://schemas.microsoft.com/office/drawing/2014/main" val="20001"/>
+                    </a:ext>
+                  </a:extLst>
+                </a:gridCol>
+                <a:gridCol w="3840480">
+                  <a:extLst>
+                    <a:ext uri="{9D8B030D-6E8A-4147-A177-3AD203B41FA5}">
+                      <a16:colId xmlns:a16="http://schemas.microsoft.com/office/drawing/2014/main" val="20002"/>
+                    </a:ext>
+                  </a:extLst>
+                </a:gridCol>
               </a:tblGrid>
               <a:tr h="679268">
                 <a:tc>
@@ -8963,6 +10747,11 @@
                     </a:solidFill>
                   </a:tcPr>
                 </a:tc>
+                <a:extLst>
+                  <a:ext uri="{0D108BD9-81ED-4DB2-BD59-A6C34878D82A}">
+                    <a16:rowId xmlns:a16="http://schemas.microsoft.com/office/drawing/2014/main" val="10000"/>
+                  </a:ext>
+                </a:extLst>
               </a:tr>
               <a:tr h="679268">
                 <a:tc>
@@ -9005,17 +10794,30 @@
                     <a:lstStyle/>
                     <a:p>
                       <a:r>
-                        <a:rPr sz="1100">
-                          <a:solidFill>
-                            <a:srgbClr val="3D424E"/>
-                          </a:solidFill>
-                        </a:rPr>
-                        <a:t>Insumo do pipeline (não é contribuição)</a:t>
+                        <a:rPr sz="1100" dirty="0" err="1">
+                          <a:solidFill>
+                            <a:srgbClr val="3D424E"/>
+                          </a:solidFill>
+                        </a:rPr>
+                        <a:t>Insumo</a:t>
+                      </a:r>
+                      <a:r>
+                        <a:rPr sz="1100" dirty="0">
+                          <a:solidFill>
+                            <a:srgbClr val="3D424E"/>
+                          </a:solidFill>
+                        </a:rPr>
+                        <a:t> do pipeline</a:t>
                       </a:r>
                     </a:p>
                   </a:txBody>
                   <a:tcPr/>
                 </a:tc>
+                <a:extLst>
+                  <a:ext uri="{0D108BD9-81ED-4DB2-BD59-A6C34878D82A}">
+                    <a16:rowId xmlns:a16="http://schemas.microsoft.com/office/drawing/2014/main" val="10001"/>
+                  </a:ext>
+                </a:extLst>
               </a:tr>
               <a:tr h="679268">
                 <a:tc>
@@ -9058,17 +10860,46 @@
                     <a:lstStyle/>
                     <a:p>
                       <a:r>
-                        <a:rPr sz="1100">
-                          <a:solidFill>
-                            <a:srgbClr val="3D424E"/>
-                          </a:solidFill>
-                        </a:rPr>
-                        <a:t>Matriz pública MST × race classes — Contribuição C2</a:t>
+                        <a:rPr sz="1100" dirty="0" err="1">
+                          <a:solidFill>
+                            <a:srgbClr val="3D424E"/>
+                          </a:solidFill>
+                        </a:rPr>
+                        <a:t>Matriz</a:t>
+                      </a:r>
+                      <a:r>
+                        <a:rPr sz="1100" dirty="0">
+                          <a:solidFill>
+                            <a:srgbClr val="3D424E"/>
+                          </a:solidFill>
+                        </a:rPr>
+                        <a:t> </a:t>
+                      </a:r>
+                      <a:r>
+                        <a:rPr sz="1100" dirty="0" err="1">
+                          <a:solidFill>
+                            <a:srgbClr val="3D424E"/>
+                          </a:solidFill>
+                        </a:rPr>
+                        <a:t>pública</a:t>
+                      </a:r>
+                      <a:r>
+                        <a:rPr sz="1100" dirty="0">
+                          <a:solidFill>
+                            <a:srgbClr val="3D424E"/>
+                          </a:solidFill>
+                        </a:rPr>
+                        <a:t> MST × race classes</a:t>
                       </a:r>
                     </a:p>
                   </a:txBody>
                   <a:tcPr/>
                 </a:tc>
+                <a:extLst>
+                  <a:ext uri="{0D108BD9-81ED-4DB2-BD59-A6C34878D82A}">
+                    <a16:rowId xmlns:a16="http://schemas.microsoft.com/office/drawing/2014/main" val="10002"/>
+                  </a:ext>
+                </a:extLst>
               </a:tr>
               <a:tr h="679268">
                 <a:tc>
@@ -9119,12 +10950,20 @@
                     <a:lstStyle/>
                     <a:p>
                       <a:r>
-                        <a:rPr sz="1100">
-                          <a:solidFill>
-                            <a:srgbClr val="3D424E"/>
-                          </a:solidFill>
-                        </a:rPr>
-                        <a:t>Configurações A/B/C/D — Contribuição C3</a:t>
+                        <a:rPr sz="1100" dirty="0" err="1">
+                          <a:solidFill>
+                            <a:srgbClr val="3D424E"/>
+                          </a:solidFill>
+                        </a:rPr>
+                        <a:t>Configurações</a:t>
+                      </a:r>
+                      <a:r>
+                        <a:rPr sz="1100" dirty="0">
+                          <a:solidFill>
+                            <a:srgbClr val="3D424E"/>
+                          </a:solidFill>
+                        </a:rPr>
+                        <a:t> A/B/C/D</a:t>
                       </a:r>
                     </a:p>
                   </a:txBody>
@@ -9134,6 +10973,11 @@
                     </a:solidFill>
                   </a:tcPr>
                 </a:tc>
+                <a:extLst>
+                  <a:ext uri="{0D108BD9-81ED-4DB2-BD59-A6C34878D82A}">
+                    <a16:rowId xmlns:a16="http://schemas.microsoft.com/office/drawing/2014/main" val="10003"/>
+                  </a:ext>
+                </a:extLst>
               </a:tr>
               <a:tr h="679268">
                 <a:tc>
@@ -9176,17 +11020,43 @@
                     <a:lstStyle/>
                     <a:p>
                       <a:r>
-                        <a:rPr sz="1100">
-                          <a:solidFill>
-                            <a:srgbClr val="3D424E"/>
-                          </a:solidFill>
-                        </a:rPr>
-                        <a:t>Triangulação DR + worst-class F1 + EO_h — Contribuição C4</a:t>
-                      </a:r>
+                        <a:rPr sz="1100" dirty="0" err="1">
+                          <a:solidFill>
+                            <a:srgbClr val="3D424E"/>
+                          </a:solidFill>
+                        </a:rPr>
+                        <a:t>Triangulação</a:t>
+                      </a:r>
+                      <a:r>
+                        <a:rPr sz="1100" dirty="0">
+                          <a:solidFill>
+                            <a:srgbClr val="3D424E"/>
+                          </a:solidFill>
+                        </a:rPr>
+                        <a:t> DR + worst-class F1 + </a:t>
+                      </a:r>
+                      <a:r>
+                        <a:rPr sz="1100" dirty="0" err="1">
+                          <a:solidFill>
+                            <a:srgbClr val="3D424E"/>
+                          </a:solidFill>
+                        </a:rPr>
+                        <a:t>EO_h</a:t>
+                      </a:r>
+                      <a:endParaRPr sz="1100" dirty="0">
+                        <a:solidFill>
+                          <a:srgbClr val="3D424E"/>
+                        </a:solidFill>
+                      </a:endParaRPr>
                     </a:p>
                   </a:txBody>
                   <a:tcPr/>
                 </a:tc>
+                <a:extLst>
+                  <a:ext uri="{0D108BD9-81ED-4DB2-BD59-A6C34878D82A}">
+                    <a16:rowId xmlns:a16="http://schemas.microsoft.com/office/drawing/2014/main" val="10004"/>
+                  </a:ext>
+                </a:extLst>
               </a:tr>
               <a:tr h="679268">
                 <a:tc>
@@ -9229,17 +11099,30 @@
                     <a:lstStyle/>
                     <a:p>
                       <a:r>
-                        <a:rPr sz="1100">
-                          <a:solidFill>
-                            <a:srgbClr val="3D424E"/>
-                          </a:solidFill>
-                        </a:rPr>
-                        <a:t>Demonstração de fair transfer — Contribuição C5</a:t>
+                        <a:rPr sz="1100" dirty="0" err="1">
+                          <a:solidFill>
+                            <a:srgbClr val="3D424E"/>
+                          </a:solidFill>
+                        </a:rPr>
+                        <a:t>Demonstração</a:t>
+                      </a:r>
+                      <a:r>
+                        <a:rPr sz="1100" dirty="0">
+                          <a:solidFill>
+                            <a:srgbClr val="3D424E"/>
+                          </a:solidFill>
+                        </a:rPr>
+                        <a:t> de fair transfer</a:t>
                       </a:r>
                     </a:p>
                   </a:txBody>
                   <a:tcPr/>
                 </a:tc>
+                <a:extLst>
+                  <a:ext uri="{0D108BD9-81ED-4DB2-BD59-A6C34878D82A}">
+                    <a16:rowId xmlns:a16="http://schemas.microsoft.com/office/drawing/2014/main" val="10005"/>
+                  </a:ext>
+                </a:extLst>
               </a:tr>
               <a:tr h="679272">
                 <a:tc>
@@ -9290,12 +11173,20 @@
                     <a:lstStyle/>
                     <a:p>
                       <a:r>
-                        <a:rPr sz="1100">
-                          <a:solidFill>
-                            <a:srgbClr val="3D424E"/>
-                          </a:solidFill>
-                        </a:rPr>
-                        <a:t>Decomposição pixel info × skin tone — Contribuição C6/OE-6</a:t>
+                        <a:rPr sz="1100" dirty="0" err="1">
+                          <a:solidFill>
+                            <a:srgbClr val="3D424E"/>
+                          </a:solidFill>
+                        </a:rPr>
+                        <a:t>Decomposição</a:t>
+                      </a:r>
+                      <a:r>
+                        <a:rPr sz="1100" dirty="0">
+                          <a:solidFill>
+                            <a:srgbClr val="3D424E"/>
+                          </a:solidFill>
+                        </a:rPr>
+                        <a:t> pixel info × skin tone</a:t>
                       </a:r>
                     </a:p>
                   </a:txBody>
@@ -9305,6 +11196,11 @@
                     </a:solidFill>
                   </a:tcPr>
                 </a:tc>
+                <a:extLst>
+                  <a:ext uri="{0D108BD9-81ED-4DB2-BD59-A6C34878D82A}">
+                    <a16:rowId xmlns:a16="http://schemas.microsoft.com/office/drawing/2014/main" val="10006"/>
+                  </a:ext>
+                </a:extLst>
               </a:tr>
             </a:tbl>
           </a:graphicData>
